--- a/Experiment_timeline.pptx
+++ b/Experiment_timeline.pptx
@@ -54,7 +54,7 @@
       </p:grpSpPr>
       <p:sp>
         <p:nvSpPr>
-          <p:cNvPr id="26" name="PlaceHolder 1"/>
+          <p:cNvPr id="23" name="PlaceHolder 1"/>
           <p:cNvSpPr>
             <a:spLocks noGrp="1"/>
           </p:cNvSpPr>
@@ -65,7 +65,7 @@
         <p:spPr>
           <a:xfrm>
             <a:off x="504000" y="226080"/>
-            <a:ext cx="9071640" cy="946440"/>
+            <a:ext cx="9071280" cy="946080"/>
           </a:xfrm>
           <a:prstGeom prst="rect">
             <a:avLst/>
@@ -85,7 +85,7 @@
       </p:sp>
       <p:sp>
         <p:nvSpPr>
-          <p:cNvPr id="27" name="PlaceHolder 2"/>
+          <p:cNvPr id="24" name="PlaceHolder 2"/>
           <p:cNvSpPr>
             <a:spLocks noGrp="1"/>
           </p:cNvSpPr>
@@ -96,7 +96,7 @@
         <p:spPr>
           <a:xfrm>
             <a:off x="504000" y="1326600"/>
-            <a:ext cx="9071640" cy="1568160"/>
+            <a:ext cx="9072000" cy="1568520"/>
           </a:xfrm>
           <a:prstGeom prst="rect">
             <a:avLst/>
@@ -115,7 +115,7 @@
       </p:sp>
       <p:sp>
         <p:nvSpPr>
-          <p:cNvPr id="28" name="PlaceHolder 3"/>
+          <p:cNvPr id="25" name="PlaceHolder 3"/>
           <p:cNvSpPr>
             <a:spLocks noGrp="1"/>
           </p:cNvSpPr>
@@ -125,8 +125,8 @@
         </p:nvSpPr>
         <p:spPr>
           <a:xfrm>
-            <a:off x="504000" y="3044160"/>
-            <a:ext cx="9071640" cy="1568160"/>
+            <a:off x="504000" y="3044520"/>
+            <a:ext cx="9072000" cy="1568520"/>
           </a:xfrm>
           <a:prstGeom prst="rect">
             <a:avLst/>
@@ -167,7 +167,7 @@
       </p:grpSpPr>
       <p:sp>
         <p:nvSpPr>
-          <p:cNvPr id="29" name="PlaceHolder 1"/>
+          <p:cNvPr id="26" name="PlaceHolder 1"/>
           <p:cNvSpPr>
             <a:spLocks noGrp="1"/>
           </p:cNvSpPr>
@@ -178,7 +178,7 @@
         <p:spPr>
           <a:xfrm>
             <a:off x="504000" y="226080"/>
-            <a:ext cx="9071640" cy="946440"/>
+            <a:ext cx="9071280" cy="946080"/>
           </a:xfrm>
           <a:prstGeom prst="rect">
             <a:avLst/>
@@ -198,7 +198,7 @@
       </p:sp>
       <p:sp>
         <p:nvSpPr>
-          <p:cNvPr id="30" name="PlaceHolder 2"/>
+          <p:cNvPr id="27" name="PlaceHolder 2"/>
           <p:cNvSpPr>
             <a:spLocks noGrp="1"/>
           </p:cNvSpPr>
@@ -209,7 +209,7 @@
         <p:spPr>
           <a:xfrm>
             <a:off x="504000" y="1326600"/>
-            <a:ext cx="4426920" cy="1568160"/>
+            <a:ext cx="4426920" cy="1568520"/>
           </a:xfrm>
           <a:prstGeom prst="rect">
             <a:avLst/>
@@ -228,7 +228,7 @@
       </p:sp>
       <p:sp>
         <p:nvSpPr>
-          <p:cNvPr id="31" name="PlaceHolder 3"/>
+          <p:cNvPr id="28" name="PlaceHolder 3"/>
           <p:cNvSpPr>
             <a:spLocks noGrp="1"/>
           </p:cNvSpPr>
@@ -239,7 +239,7 @@
         <p:spPr>
           <a:xfrm>
             <a:off x="5152680" y="1326600"/>
-            <a:ext cx="4426920" cy="1568160"/>
+            <a:ext cx="4426920" cy="1568520"/>
           </a:xfrm>
           <a:prstGeom prst="rect">
             <a:avLst/>
@@ -258,7 +258,7 @@
       </p:sp>
       <p:sp>
         <p:nvSpPr>
-          <p:cNvPr id="32" name="PlaceHolder 4"/>
+          <p:cNvPr id="29" name="PlaceHolder 4"/>
           <p:cNvSpPr>
             <a:spLocks noGrp="1"/>
           </p:cNvSpPr>
@@ -268,8 +268,8 @@
         </p:nvSpPr>
         <p:spPr>
           <a:xfrm>
-            <a:off x="504000" y="3044160"/>
-            <a:ext cx="4426920" cy="1568160"/>
+            <a:off x="504000" y="3044520"/>
+            <a:ext cx="4426920" cy="1568520"/>
           </a:xfrm>
           <a:prstGeom prst="rect">
             <a:avLst/>
@@ -288,7 +288,7 @@
       </p:sp>
       <p:sp>
         <p:nvSpPr>
-          <p:cNvPr id="33" name="PlaceHolder 5"/>
+          <p:cNvPr id="30" name="PlaceHolder 5"/>
           <p:cNvSpPr>
             <a:spLocks noGrp="1"/>
           </p:cNvSpPr>
@@ -298,8 +298,8 @@
         </p:nvSpPr>
         <p:spPr>
           <a:xfrm>
-            <a:off x="5152680" y="3044160"/>
-            <a:ext cx="4426920" cy="1568160"/>
+            <a:off x="5152680" y="3044520"/>
+            <a:ext cx="4426920" cy="1568520"/>
           </a:xfrm>
           <a:prstGeom prst="rect">
             <a:avLst/>
@@ -340,7 +340,7 @@
       </p:grpSpPr>
       <p:sp>
         <p:nvSpPr>
-          <p:cNvPr id="34" name="PlaceHolder 1"/>
+          <p:cNvPr id="31" name="PlaceHolder 1"/>
           <p:cNvSpPr>
             <a:spLocks noGrp="1"/>
           </p:cNvSpPr>
@@ -351,7 +351,7 @@
         <p:spPr>
           <a:xfrm>
             <a:off x="504000" y="226080"/>
-            <a:ext cx="9071640" cy="946440"/>
+            <a:ext cx="9071280" cy="946080"/>
           </a:xfrm>
           <a:prstGeom prst="rect">
             <a:avLst/>
@@ -371,7 +371,7 @@
       </p:sp>
       <p:sp>
         <p:nvSpPr>
-          <p:cNvPr id="35" name="PlaceHolder 2"/>
+          <p:cNvPr id="32" name="PlaceHolder 2"/>
           <p:cNvSpPr>
             <a:spLocks noGrp="1"/>
           </p:cNvSpPr>
@@ -382,7 +382,7 @@
         <p:spPr>
           <a:xfrm>
             <a:off x="504000" y="1326600"/>
-            <a:ext cx="2920680" cy="1568160"/>
+            <a:ext cx="2921040" cy="1568520"/>
           </a:xfrm>
           <a:prstGeom prst="rect">
             <a:avLst/>
@@ -401,7 +401,7 @@
       </p:sp>
       <p:sp>
         <p:nvSpPr>
-          <p:cNvPr id="36" name="PlaceHolder 3"/>
+          <p:cNvPr id="33" name="PlaceHolder 3"/>
           <p:cNvSpPr>
             <a:spLocks noGrp="1"/>
           </p:cNvSpPr>
@@ -411,8 +411,8 @@
         </p:nvSpPr>
         <p:spPr>
           <a:xfrm>
-            <a:off x="3571200" y="1326600"/>
-            <a:ext cx="2920680" cy="1568160"/>
+            <a:off x="3571560" y="1326600"/>
+            <a:ext cx="2921040" cy="1568520"/>
           </a:xfrm>
           <a:prstGeom prst="rect">
             <a:avLst/>
@@ -431,7 +431,7 @@
       </p:sp>
       <p:sp>
         <p:nvSpPr>
-          <p:cNvPr id="37" name="PlaceHolder 4"/>
+          <p:cNvPr id="34" name="PlaceHolder 4"/>
           <p:cNvSpPr>
             <a:spLocks noGrp="1"/>
           </p:cNvSpPr>
@@ -441,8 +441,8 @@
         </p:nvSpPr>
         <p:spPr>
           <a:xfrm>
-            <a:off x="6638040" y="1326600"/>
-            <a:ext cx="2920680" cy="1568160"/>
+            <a:off x="6639120" y="1326600"/>
+            <a:ext cx="2921040" cy="1568520"/>
           </a:xfrm>
           <a:prstGeom prst="rect">
             <a:avLst/>
@@ -461,7 +461,7 @@
       </p:sp>
       <p:sp>
         <p:nvSpPr>
-          <p:cNvPr id="38" name="PlaceHolder 5"/>
+          <p:cNvPr id="35" name="PlaceHolder 5"/>
           <p:cNvSpPr>
             <a:spLocks noGrp="1"/>
           </p:cNvSpPr>
@@ -471,8 +471,8 @@
         </p:nvSpPr>
         <p:spPr>
           <a:xfrm>
-            <a:off x="504000" y="3044160"/>
-            <a:ext cx="2920680" cy="1568160"/>
+            <a:off x="504000" y="3044520"/>
+            <a:ext cx="2921040" cy="1568520"/>
           </a:xfrm>
           <a:prstGeom prst="rect">
             <a:avLst/>
@@ -491,7 +491,7 @@
       </p:sp>
       <p:sp>
         <p:nvSpPr>
-          <p:cNvPr id="39" name="PlaceHolder 6"/>
+          <p:cNvPr id="36" name="PlaceHolder 6"/>
           <p:cNvSpPr>
             <a:spLocks noGrp="1"/>
           </p:cNvSpPr>
@@ -501,8 +501,8 @@
         </p:nvSpPr>
         <p:spPr>
           <a:xfrm>
-            <a:off x="3571200" y="3044160"/>
-            <a:ext cx="2920680" cy="1568160"/>
+            <a:off x="3571560" y="3044520"/>
+            <a:ext cx="2921040" cy="1568520"/>
           </a:xfrm>
           <a:prstGeom prst="rect">
             <a:avLst/>
@@ -521,7 +521,7 @@
       </p:sp>
       <p:sp>
         <p:nvSpPr>
-          <p:cNvPr id="40" name="PlaceHolder 7"/>
+          <p:cNvPr id="37" name="PlaceHolder 7"/>
           <p:cNvSpPr>
             <a:spLocks noGrp="1"/>
           </p:cNvSpPr>
@@ -531,8 +531,8 @@
         </p:nvSpPr>
         <p:spPr>
           <a:xfrm>
-            <a:off x="6638040" y="3044160"/>
-            <a:ext cx="2920680" cy="1568160"/>
+            <a:off x="6639120" y="3044520"/>
+            <a:ext cx="2921040" cy="1568520"/>
           </a:xfrm>
           <a:prstGeom prst="rect">
             <a:avLst/>
@@ -573,7 +573,7 @@
       </p:grpSpPr>
       <p:sp>
         <p:nvSpPr>
-          <p:cNvPr id="5" name="PlaceHolder 1"/>
+          <p:cNvPr id="2" name="PlaceHolder 1"/>
           <p:cNvSpPr>
             <a:spLocks noGrp="1"/>
           </p:cNvSpPr>
@@ -584,7 +584,7 @@
         <p:spPr>
           <a:xfrm>
             <a:off x="504000" y="226080"/>
-            <a:ext cx="9071640" cy="946440"/>
+            <a:ext cx="9071280" cy="946080"/>
           </a:xfrm>
           <a:prstGeom prst="rect">
             <a:avLst/>
@@ -604,7 +604,7 @@
       </p:sp>
       <p:sp>
         <p:nvSpPr>
-          <p:cNvPr id="6" name="PlaceHolder 2"/>
+          <p:cNvPr id="3" name="PlaceHolder 2"/>
           <p:cNvSpPr>
             <a:spLocks noGrp="1"/>
           </p:cNvSpPr>
@@ -615,7 +615,7 @@
         <p:spPr>
           <a:xfrm>
             <a:off x="504000" y="1326600"/>
-            <a:ext cx="9071640" cy="3288240"/>
+            <a:ext cx="9072000" cy="3288600"/>
           </a:xfrm>
           <a:prstGeom prst="rect">
             <a:avLst/>
@@ -657,7 +657,7 @@
       </p:grpSpPr>
       <p:sp>
         <p:nvSpPr>
-          <p:cNvPr id="7" name="PlaceHolder 1"/>
+          <p:cNvPr id="4" name="PlaceHolder 1"/>
           <p:cNvSpPr>
             <a:spLocks noGrp="1"/>
           </p:cNvSpPr>
@@ -668,7 +668,7 @@
         <p:spPr>
           <a:xfrm>
             <a:off x="504000" y="226080"/>
-            <a:ext cx="9071640" cy="946440"/>
+            <a:ext cx="9071280" cy="946080"/>
           </a:xfrm>
           <a:prstGeom prst="rect">
             <a:avLst/>
@@ -688,7 +688,7 @@
       </p:sp>
       <p:sp>
         <p:nvSpPr>
-          <p:cNvPr id="8" name="PlaceHolder 2"/>
+          <p:cNvPr id="5" name="PlaceHolder 2"/>
           <p:cNvSpPr>
             <a:spLocks noGrp="1"/>
           </p:cNvSpPr>
@@ -699,7 +699,7 @@
         <p:spPr>
           <a:xfrm>
             <a:off x="504000" y="1326600"/>
-            <a:ext cx="9071640" cy="3288240"/>
+            <a:ext cx="9072000" cy="3288600"/>
           </a:xfrm>
           <a:prstGeom prst="rect">
             <a:avLst/>
@@ -740,7 +740,7 @@
       </p:grpSpPr>
       <p:sp>
         <p:nvSpPr>
-          <p:cNvPr id="9" name="PlaceHolder 1"/>
+          <p:cNvPr id="6" name="PlaceHolder 1"/>
           <p:cNvSpPr>
             <a:spLocks noGrp="1"/>
           </p:cNvSpPr>
@@ -751,7 +751,7 @@
         <p:spPr>
           <a:xfrm>
             <a:off x="504000" y="226080"/>
-            <a:ext cx="9071640" cy="946440"/>
+            <a:ext cx="9071280" cy="946080"/>
           </a:xfrm>
           <a:prstGeom prst="rect">
             <a:avLst/>
@@ -771,7 +771,7 @@
       </p:sp>
       <p:sp>
         <p:nvSpPr>
-          <p:cNvPr id="10" name="PlaceHolder 2"/>
+          <p:cNvPr id="7" name="PlaceHolder 2"/>
           <p:cNvSpPr>
             <a:spLocks noGrp="1"/>
           </p:cNvSpPr>
@@ -782,7 +782,7 @@
         <p:spPr>
           <a:xfrm>
             <a:off x="504000" y="1326600"/>
-            <a:ext cx="4426920" cy="3288240"/>
+            <a:ext cx="4426920" cy="3288600"/>
           </a:xfrm>
           <a:prstGeom prst="rect">
             <a:avLst/>
@@ -801,7 +801,7 @@
       </p:sp>
       <p:sp>
         <p:nvSpPr>
-          <p:cNvPr id="11" name="PlaceHolder 3"/>
+          <p:cNvPr id="8" name="PlaceHolder 3"/>
           <p:cNvSpPr>
             <a:spLocks noGrp="1"/>
           </p:cNvSpPr>
@@ -812,7 +812,7 @@
         <p:spPr>
           <a:xfrm>
             <a:off x="5152680" y="1326600"/>
-            <a:ext cx="4426920" cy="3288240"/>
+            <a:ext cx="4426920" cy="3288600"/>
           </a:xfrm>
           <a:prstGeom prst="rect">
             <a:avLst/>
@@ -853,7 +853,7 @@
       </p:grpSpPr>
       <p:sp>
         <p:nvSpPr>
-          <p:cNvPr id="12" name="PlaceHolder 1"/>
+          <p:cNvPr id="9" name="PlaceHolder 1"/>
           <p:cNvSpPr>
             <a:spLocks noGrp="1"/>
           </p:cNvSpPr>
@@ -864,7 +864,7 @@
         <p:spPr>
           <a:xfrm>
             <a:off x="504000" y="226080"/>
-            <a:ext cx="9071640" cy="946440"/>
+            <a:ext cx="9071280" cy="946080"/>
           </a:xfrm>
           <a:prstGeom prst="rect">
             <a:avLst/>
@@ -906,7 +906,7 @@
       </p:grpSpPr>
       <p:sp>
         <p:nvSpPr>
-          <p:cNvPr id="13" name="PlaceHolder 1"/>
+          <p:cNvPr id="10" name="PlaceHolder 1"/>
           <p:cNvSpPr>
             <a:spLocks noGrp="1"/>
           </p:cNvSpPr>
@@ -917,7 +917,7 @@
         <p:spPr>
           <a:xfrm>
             <a:off x="504000" y="226080"/>
-            <a:ext cx="9071640" cy="4388400"/>
+            <a:ext cx="9071280" cy="4386600"/>
           </a:xfrm>
           <a:prstGeom prst="rect">
             <a:avLst/>
@@ -959,7 +959,7 @@
       </p:grpSpPr>
       <p:sp>
         <p:nvSpPr>
-          <p:cNvPr id="14" name="PlaceHolder 1"/>
+          <p:cNvPr id="11" name="PlaceHolder 1"/>
           <p:cNvSpPr>
             <a:spLocks noGrp="1"/>
           </p:cNvSpPr>
@@ -970,7 +970,7 @@
         <p:spPr>
           <a:xfrm>
             <a:off x="504000" y="226080"/>
-            <a:ext cx="9071640" cy="946440"/>
+            <a:ext cx="9071280" cy="946080"/>
           </a:xfrm>
           <a:prstGeom prst="rect">
             <a:avLst/>
@@ -990,7 +990,7 @@
       </p:sp>
       <p:sp>
         <p:nvSpPr>
-          <p:cNvPr id="15" name="PlaceHolder 2"/>
+          <p:cNvPr id="12" name="PlaceHolder 2"/>
           <p:cNvSpPr>
             <a:spLocks noGrp="1"/>
           </p:cNvSpPr>
@@ -1001,7 +1001,7 @@
         <p:spPr>
           <a:xfrm>
             <a:off x="504000" y="1326600"/>
-            <a:ext cx="4426920" cy="1568160"/>
+            <a:ext cx="4426920" cy="1568520"/>
           </a:xfrm>
           <a:prstGeom prst="rect">
             <a:avLst/>
@@ -1020,7 +1020,7 @@
       </p:sp>
       <p:sp>
         <p:nvSpPr>
-          <p:cNvPr id="16" name="PlaceHolder 3"/>
+          <p:cNvPr id="13" name="PlaceHolder 3"/>
           <p:cNvSpPr>
             <a:spLocks noGrp="1"/>
           </p:cNvSpPr>
@@ -1031,7 +1031,7 @@
         <p:spPr>
           <a:xfrm>
             <a:off x="5152680" y="1326600"/>
-            <a:ext cx="4426920" cy="3288240"/>
+            <a:ext cx="4426920" cy="3288600"/>
           </a:xfrm>
           <a:prstGeom prst="rect">
             <a:avLst/>
@@ -1050,7 +1050,7 @@
       </p:sp>
       <p:sp>
         <p:nvSpPr>
-          <p:cNvPr id="17" name="PlaceHolder 4"/>
+          <p:cNvPr id="14" name="PlaceHolder 4"/>
           <p:cNvSpPr>
             <a:spLocks noGrp="1"/>
           </p:cNvSpPr>
@@ -1060,8 +1060,8 @@
         </p:nvSpPr>
         <p:spPr>
           <a:xfrm>
-            <a:off x="504000" y="3044160"/>
-            <a:ext cx="4426920" cy="1568160"/>
+            <a:off x="504000" y="3044520"/>
+            <a:ext cx="4426920" cy="1568520"/>
           </a:xfrm>
           <a:prstGeom prst="rect">
             <a:avLst/>
@@ -1102,7 +1102,7 @@
       </p:grpSpPr>
       <p:sp>
         <p:nvSpPr>
-          <p:cNvPr id="18" name="PlaceHolder 1"/>
+          <p:cNvPr id="15" name="PlaceHolder 1"/>
           <p:cNvSpPr>
             <a:spLocks noGrp="1"/>
           </p:cNvSpPr>
@@ -1113,7 +1113,7 @@
         <p:spPr>
           <a:xfrm>
             <a:off x="504000" y="226080"/>
-            <a:ext cx="9071640" cy="946440"/>
+            <a:ext cx="9071280" cy="946080"/>
           </a:xfrm>
           <a:prstGeom prst="rect">
             <a:avLst/>
@@ -1133,7 +1133,7 @@
       </p:sp>
       <p:sp>
         <p:nvSpPr>
-          <p:cNvPr id="19" name="PlaceHolder 2"/>
+          <p:cNvPr id="16" name="PlaceHolder 2"/>
           <p:cNvSpPr>
             <a:spLocks noGrp="1"/>
           </p:cNvSpPr>
@@ -1144,7 +1144,7 @@
         <p:spPr>
           <a:xfrm>
             <a:off x="504000" y="1326600"/>
-            <a:ext cx="4426920" cy="3288240"/>
+            <a:ext cx="4426920" cy="3288600"/>
           </a:xfrm>
           <a:prstGeom prst="rect">
             <a:avLst/>
@@ -1163,7 +1163,7 @@
       </p:sp>
       <p:sp>
         <p:nvSpPr>
-          <p:cNvPr id="20" name="PlaceHolder 3"/>
+          <p:cNvPr id="17" name="PlaceHolder 3"/>
           <p:cNvSpPr>
             <a:spLocks noGrp="1"/>
           </p:cNvSpPr>
@@ -1174,7 +1174,7 @@
         <p:spPr>
           <a:xfrm>
             <a:off x="5152680" y="1326600"/>
-            <a:ext cx="4426920" cy="1568160"/>
+            <a:ext cx="4426920" cy="1568520"/>
           </a:xfrm>
           <a:prstGeom prst="rect">
             <a:avLst/>
@@ -1193,7 +1193,7 @@
       </p:sp>
       <p:sp>
         <p:nvSpPr>
-          <p:cNvPr id="21" name="PlaceHolder 4"/>
+          <p:cNvPr id="18" name="PlaceHolder 4"/>
           <p:cNvSpPr>
             <a:spLocks noGrp="1"/>
           </p:cNvSpPr>
@@ -1203,8 +1203,8 @@
         </p:nvSpPr>
         <p:spPr>
           <a:xfrm>
-            <a:off x="5152680" y="3044160"/>
-            <a:ext cx="4426920" cy="1568160"/>
+            <a:off x="5152680" y="3044520"/>
+            <a:ext cx="4426920" cy="1568520"/>
           </a:xfrm>
           <a:prstGeom prst="rect">
             <a:avLst/>
@@ -1245,7 +1245,7 @@
       </p:grpSpPr>
       <p:sp>
         <p:nvSpPr>
-          <p:cNvPr id="22" name="PlaceHolder 1"/>
+          <p:cNvPr id="19" name="PlaceHolder 1"/>
           <p:cNvSpPr>
             <a:spLocks noGrp="1"/>
           </p:cNvSpPr>
@@ -1256,7 +1256,7 @@
         <p:spPr>
           <a:xfrm>
             <a:off x="504000" y="226080"/>
-            <a:ext cx="9071640" cy="946440"/>
+            <a:ext cx="9071280" cy="946080"/>
           </a:xfrm>
           <a:prstGeom prst="rect">
             <a:avLst/>
@@ -1276,7 +1276,7 @@
       </p:sp>
       <p:sp>
         <p:nvSpPr>
-          <p:cNvPr id="23" name="PlaceHolder 2"/>
+          <p:cNvPr id="20" name="PlaceHolder 2"/>
           <p:cNvSpPr>
             <a:spLocks noGrp="1"/>
           </p:cNvSpPr>
@@ -1287,7 +1287,7 @@
         <p:spPr>
           <a:xfrm>
             <a:off x="504000" y="1326600"/>
-            <a:ext cx="4426920" cy="1568160"/>
+            <a:ext cx="4426920" cy="1568520"/>
           </a:xfrm>
           <a:prstGeom prst="rect">
             <a:avLst/>
@@ -1306,7 +1306,7 @@
       </p:sp>
       <p:sp>
         <p:nvSpPr>
-          <p:cNvPr id="24" name="PlaceHolder 3"/>
+          <p:cNvPr id="21" name="PlaceHolder 3"/>
           <p:cNvSpPr>
             <a:spLocks noGrp="1"/>
           </p:cNvSpPr>
@@ -1317,7 +1317,7 @@
         <p:spPr>
           <a:xfrm>
             <a:off x="5152680" y="1326600"/>
-            <a:ext cx="4426920" cy="1568160"/>
+            <a:ext cx="4426920" cy="1568520"/>
           </a:xfrm>
           <a:prstGeom prst="rect">
             <a:avLst/>
@@ -1336,7 +1336,7 @@
       </p:sp>
       <p:sp>
         <p:nvSpPr>
-          <p:cNvPr id="25" name="PlaceHolder 4"/>
+          <p:cNvPr id="22" name="PlaceHolder 4"/>
           <p:cNvSpPr>
             <a:spLocks noGrp="1"/>
           </p:cNvSpPr>
@@ -1346,8 +1346,8 @@
         </p:nvSpPr>
         <p:spPr>
           <a:xfrm>
-            <a:off x="504000" y="3044160"/>
-            <a:ext cx="9071640" cy="1568160"/>
+            <a:off x="504000" y="3044520"/>
+            <a:ext cx="9072000" cy="1568520"/>
           </a:xfrm>
           <a:prstGeom prst="rect">
             <a:avLst/>
@@ -1399,7 +1399,7 @@
         <p:spPr>
           <a:xfrm>
             <a:off x="504000" y="226080"/>
-            <a:ext cx="9071640" cy="946440"/>
+            <a:ext cx="9071280" cy="946080"/>
           </a:xfrm>
           <a:prstGeom prst="rect">
             <a:avLst/>
@@ -1410,14 +1410,13 @@
             <a:noAutofit/>
           </a:bodyPr>
           <a:p>
-            <a:pPr algn="ctr"/>
-            <a:r>
-              <a:rPr b="0" lang="en-US" sz="4400" spc="-1" strike="noStrike">
+            <a:r>
+              <a:rPr b="0" lang="en-US" sz="1800" spc="-1" strike="noStrike">
                 <a:latin typeface="Arial"/>
               </a:rPr>
               <a:t>Click to edit the title text format</a:t>
             </a:r>
-            <a:endParaRPr b="0" lang="en-US" sz="4400" spc="-1" strike="noStrike">
+            <a:endParaRPr b="0" lang="en-US" sz="1800" spc="-1" strike="noStrike">
               <a:latin typeface="Arial"/>
             </a:endParaRPr>
           </a:p>
@@ -1436,7 +1435,7 @@
         <p:spPr>
           <a:xfrm>
             <a:off x="504000" y="1326600"/>
-            <a:ext cx="9071640" cy="3288240"/>
+            <a:ext cx="9072000" cy="3288600"/>
           </a:xfrm>
           <a:prstGeom prst="rect">
             <a:avLst/>
@@ -1598,116 +1597,6 @@
             </a:r>
             <a:endParaRPr b="0" lang="en-US" sz="2000" spc="-1" strike="noStrike">
               <a:latin typeface="Arial"/>
-            </a:endParaRPr>
-          </a:p>
-        </p:txBody>
-      </p:sp>
-      <p:sp>
-        <p:nvSpPr>
-          <p:cNvPr id="2" name="PlaceHolder 3"/>
-          <p:cNvSpPr>
-            <a:spLocks noGrp="1"/>
-          </p:cNvSpPr>
-          <p:nvPr>
-            <p:ph type="dt"/>
-          </p:nvPr>
-        </p:nvSpPr>
-        <p:spPr>
-          <a:xfrm>
-            <a:off x="504000" y="5165280"/>
-            <a:ext cx="2348280" cy="390600"/>
-          </a:xfrm>
-          <a:prstGeom prst="rect">
-            <a:avLst/>
-          </a:prstGeom>
-        </p:spPr>
-        <p:txBody>
-          <a:bodyPr lIns="0" rIns="0" tIns="0" bIns="0">
-            <a:noAutofit/>
-          </a:bodyPr>
-          <a:p>
-            <a:r>
-              <a:rPr b="0" lang="en-US" sz="1400" spc="-1" strike="noStrike">
-                <a:latin typeface="Times New Roman"/>
-              </a:rPr>
-              <a:t>&lt;date/time&gt;</a:t>
-            </a:r>
-            <a:endParaRPr b="0" lang="en-US" sz="1400" spc="-1" strike="noStrike">
-              <a:latin typeface="Times New Roman"/>
-            </a:endParaRPr>
-          </a:p>
-        </p:txBody>
-      </p:sp>
-      <p:sp>
-        <p:nvSpPr>
-          <p:cNvPr id="3" name="PlaceHolder 4"/>
-          <p:cNvSpPr>
-            <a:spLocks noGrp="1"/>
-          </p:cNvSpPr>
-          <p:nvPr>
-            <p:ph type="ftr"/>
-          </p:nvPr>
-        </p:nvSpPr>
-        <p:spPr>
-          <a:xfrm>
-            <a:off x="3447360" y="5165280"/>
-            <a:ext cx="3195000" cy="390600"/>
-          </a:xfrm>
-          <a:prstGeom prst="rect">
-            <a:avLst/>
-          </a:prstGeom>
-        </p:spPr>
-        <p:txBody>
-          <a:bodyPr lIns="0" rIns="0" tIns="0" bIns="0">
-            <a:noAutofit/>
-          </a:bodyPr>
-          <a:p>
-            <a:pPr algn="ctr"/>
-            <a:r>
-              <a:rPr b="0" lang="en-US" sz="1400" spc="-1" strike="noStrike">
-                <a:latin typeface="Times New Roman"/>
-              </a:rPr>
-              <a:t>&lt;footer&gt;</a:t>
-            </a:r>
-            <a:endParaRPr b="0" lang="en-US" sz="1400" spc="-1" strike="noStrike">
-              <a:latin typeface="Times New Roman"/>
-            </a:endParaRPr>
-          </a:p>
-        </p:txBody>
-      </p:sp>
-      <p:sp>
-        <p:nvSpPr>
-          <p:cNvPr id="4" name="PlaceHolder 5"/>
-          <p:cNvSpPr>
-            <a:spLocks noGrp="1"/>
-          </p:cNvSpPr>
-          <p:nvPr>
-            <p:ph type="sldNum"/>
-          </p:nvPr>
-        </p:nvSpPr>
-        <p:spPr>
-          <a:xfrm>
-            <a:off x="7227360" y="5165280"/>
-            <a:ext cx="2348280" cy="390600"/>
-          </a:xfrm>
-          <a:prstGeom prst="rect">
-            <a:avLst/>
-          </a:prstGeom>
-        </p:spPr>
-        <p:txBody>
-          <a:bodyPr lIns="0" rIns="0" tIns="0" bIns="0">
-            <a:noAutofit/>
-          </a:bodyPr>
-          <a:p>
-            <a:pPr algn="r"/>
-            <a:fld id="{51682B4C-C00A-4646-892B-3163A4F05CF5}" type="slidenum">
-              <a:rPr b="0" lang="en-US" sz="1400" spc="-1" strike="noStrike">
-                <a:latin typeface="Times New Roman"/>
-              </a:rPr>
-              <a:t>&lt;number&gt;</a:t>
-            </a:fld>
-            <a:endParaRPr b="0" lang="en-US" sz="1400" spc="-1" strike="noStrike">
-              <a:latin typeface="Times New Roman"/>
             </a:endParaRPr>
           </a:p>
         </p:txBody>
@@ -1751,14 +1640,14 @@
       </p:grpSpPr>
       <p:sp>
         <p:nvSpPr>
-          <p:cNvPr id="41" name=""/>
+          <p:cNvPr id="38" name=""/>
           <p:cNvSpPr/>
           <p:nvPr/>
         </p:nvSpPr>
         <p:spPr>
           <a:xfrm>
             <a:off x="5184000" y="914400"/>
-            <a:ext cx="0" cy="3429000"/>
+            <a:ext cx="360" cy="3429000"/>
           </a:xfrm>
           <a:prstGeom prst="line">
             <a:avLst/>
@@ -1778,14 +1667,14 @@
       </p:sp>
       <p:sp>
         <p:nvSpPr>
-          <p:cNvPr id="42" name=""/>
+          <p:cNvPr id="39" name=""/>
           <p:cNvSpPr/>
           <p:nvPr/>
         </p:nvSpPr>
         <p:spPr>
           <a:xfrm>
             <a:off x="4269600" y="914400"/>
-            <a:ext cx="0" cy="3429000"/>
+            <a:ext cx="360" cy="3429000"/>
           </a:xfrm>
           <a:prstGeom prst="line">
             <a:avLst/>
@@ -1805,14 +1694,14 @@
       </p:sp>
       <p:sp>
         <p:nvSpPr>
-          <p:cNvPr id="43" name=""/>
+          <p:cNvPr id="40" name=""/>
           <p:cNvSpPr/>
           <p:nvPr/>
         </p:nvSpPr>
         <p:spPr>
           <a:xfrm>
             <a:off x="3355200" y="914400"/>
-            <a:ext cx="0" cy="3429000"/>
+            <a:ext cx="360" cy="3429000"/>
           </a:xfrm>
           <a:prstGeom prst="line">
             <a:avLst/>
@@ -1832,14 +1721,14 @@
       </p:sp>
       <p:sp>
         <p:nvSpPr>
-          <p:cNvPr id="44" name=""/>
+          <p:cNvPr id="41" name=""/>
           <p:cNvSpPr/>
           <p:nvPr/>
         </p:nvSpPr>
         <p:spPr>
           <a:xfrm>
             <a:off x="2440800" y="914400"/>
-            <a:ext cx="0" cy="3429000"/>
+            <a:ext cx="360" cy="3429000"/>
           </a:xfrm>
           <a:prstGeom prst="line">
             <a:avLst/>
@@ -1859,14 +1748,14 @@
       </p:sp>
       <p:sp>
         <p:nvSpPr>
-          <p:cNvPr id="45" name=""/>
+          <p:cNvPr id="42" name=""/>
           <p:cNvSpPr/>
           <p:nvPr/>
         </p:nvSpPr>
         <p:spPr>
           <a:xfrm>
             <a:off x="6098400" y="914400"/>
-            <a:ext cx="0" cy="3429000"/>
+            <a:ext cx="360" cy="3429000"/>
           </a:xfrm>
           <a:prstGeom prst="line">
             <a:avLst/>
@@ -1886,14 +1775,14 @@
       </p:sp>
       <p:sp>
         <p:nvSpPr>
-          <p:cNvPr id="46" name=""/>
+          <p:cNvPr id="43" name=""/>
           <p:cNvSpPr/>
           <p:nvPr/>
         </p:nvSpPr>
         <p:spPr>
           <a:xfrm>
             <a:off x="7012800" y="914400"/>
-            <a:ext cx="0" cy="3429000"/>
+            <a:ext cx="360" cy="3429000"/>
           </a:xfrm>
           <a:prstGeom prst="line">
             <a:avLst/>
@@ -1913,14 +1802,14 @@
       </p:sp>
       <p:sp>
         <p:nvSpPr>
-          <p:cNvPr id="47" name=""/>
+          <p:cNvPr id="44" name=""/>
           <p:cNvSpPr/>
           <p:nvPr/>
         </p:nvSpPr>
         <p:spPr>
           <a:xfrm>
             <a:off x="7927200" y="914400"/>
-            <a:ext cx="0" cy="3429000"/>
+            <a:ext cx="360" cy="3429000"/>
           </a:xfrm>
           <a:prstGeom prst="line">
             <a:avLst/>
@@ -1940,14 +1829,14 @@
       </p:sp>
       <p:sp>
         <p:nvSpPr>
-          <p:cNvPr id="48" name=""/>
+          <p:cNvPr id="45" name=""/>
           <p:cNvSpPr/>
           <p:nvPr/>
         </p:nvSpPr>
         <p:spPr>
           <a:xfrm>
             <a:off x="8841600" y="914400"/>
-            <a:ext cx="0" cy="3429000"/>
+            <a:ext cx="360" cy="3429000"/>
           </a:xfrm>
           <a:prstGeom prst="line">
             <a:avLst/>
@@ -1967,14 +1856,14 @@
       </p:sp>
       <p:sp>
         <p:nvSpPr>
-          <p:cNvPr id="49" name=""/>
+          <p:cNvPr id="46" name=""/>
           <p:cNvSpPr/>
           <p:nvPr/>
         </p:nvSpPr>
         <p:spPr>
           <a:xfrm>
             <a:off x="9756000" y="914400"/>
-            <a:ext cx="0" cy="3429000"/>
+            <a:ext cx="360" cy="3429000"/>
           </a:xfrm>
           <a:prstGeom prst="line">
             <a:avLst/>
@@ -1994,14 +1883,14 @@
       </p:sp>
       <p:sp>
         <p:nvSpPr>
-          <p:cNvPr id="50" name=""/>
-          <p:cNvSpPr txBox="1"/>
+          <p:cNvPr id="47" name=""/>
+          <p:cNvSpPr/>
           <p:nvPr/>
         </p:nvSpPr>
         <p:spPr>
           <a:xfrm>
             <a:off x="2290320" y="4682880"/>
-            <a:ext cx="484200" cy="346320"/>
+            <a:ext cx="483840" cy="345960"/>
           </a:xfrm>
           <a:prstGeom prst="rect">
             <a:avLst/>
@@ -2011,11 +1900,22 @@
             <a:noFill/>
           </a:ln>
         </p:spPr>
+        <p:style>
+          <a:lnRef idx="0"/>
+          <a:fillRef idx="0"/>
+          <a:effectRef idx="0"/>
+          <a:fontRef idx="minor"/>
+        </p:style>
         <p:txBody>
           <a:bodyPr lIns="90000" rIns="90000" tIns="45000" bIns="45000">
             <a:noAutofit/>
           </a:bodyPr>
           <a:p>
+            <a:pPr>
+              <a:lnSpc>
+                <a:spcPct val="100000"/>
+              </a:lnSpc>
+            </a:pPr>
             <a:r>
               <a:rPr b="0" lang="en-US" sz="1800" spc="-1" strike="noStrike">
                 <a:latin typeface="Arial"/>
@@ -2036,14 +1936,14 @@
       </p:sp>
       <p:sp>
         <p:nvSpPr>
-          <p:cNvPr id="51" name=""/>
-          <p:cNvSpPr txBox="1"/>
+          <p:cNvPr id="48" name=""/>
+          <p:cNvSpPr/>
           <p:nvPr/>
         </p:nvSpPr>
         <p:spPr>
           <a:xfrm>
             <a:off x="3132720" y="4682880"/>
-            <a:ext cx="484200" cy="346320"/>
+            <a:ext cx="483840" cy="345960"/>
           </a:xfrm>
           <a:prstGeom prst="rect">
             <a:avLst/>
@@ -2053,11 +1953,22 @@
             <a:noFill/>
           </a:ln>
         </p:spPr>
+        <p:style>
+          <a:lnRef idx="0"/>
+          <a:fillRef idx="0"/>
+          <a:effectRef idx="0"/>
+          <a:fontRef idx="minor"/>
+        </p:style>
         <p:txBody>
           <a:bodyPr lIns="90000" rIns="90000" tIns="45000" bIns="45000">
             <a:noAutofit/>
           </a:bodyPr>
           <a:p>
+            <a:pPr>
+              <a:lnSpc>
+                <a:spcPct val="100000"/>
+              </a:lnSpc>
+            </a:pPr>
             <a:r>
               <a:rPr b="0" lang="en-US" sz="1800" spc="-1" strike="noStrike">
                 <a:latin typeface="Arial"/>
@@ -2078,14 +1989,14 @@
       </p:sp>
       <p:sp>
         <p:nvSpPr>
-          <p:cNvPr id="52" name=""/>
-          <p:cNvSpPr txBox="1"/>
+          <p:cNvPr id="49" name=""/>
+          <p:cNvSpPr/>
           <p:nvPr/>
         </p:nvSpPr>
         <p:spPr>
           <a:xfrm>
             <a:off x="4047120" y="4682880"/>
-            <a:ext cx="484200" cy="346320"/>
+            <a:ext cx="483840" cy="345960"/>
           </a:xfrm>
           <a:prstGeom prst="rect">
             <a:avLst/>
@@ -2095,11 +2006,22 @@
             <a:noFill/>
           </a:ln>
         </p:spPr>
+        <p:style>
+          <a:lnRef idx="0"/>
+          <a:fillRef idx="0"/>
+          <a:effectRef idx="0"/>
+          <a:fontRef idx="minor"/>
+        </p:style>
         <p:txBody>
           <a:bodyPr lIns="90000" rIns="90000" tIns="45000" bIns="45000">
             <a:noAutofit/>
           </a:bodyPr>
           <a:p>
+            <a:pPr>
+              <a:lnSpc>
+                <a:spcPct val="100000"/>
+              </a:lnSpc>
+            </a:pPr>
             <a:r>
               <a:rPr b="0" lang="en-US" sz="1800" spc="-1" strike="noStrike">
                 <a:latin typeface="Arial"/>
@@ -2120,14 +2042,14 @@
       </p:sp>
       <p:sp>
         <p:nvSpPr>
-          <p:cNvPr id="53" name=""/>
-          <p:cNvSpPr txBox="1"/>
+          <p:cNvPr id="50" name=""/>
+          <p:cNvSpPr/>
           <p:nvPr/>
         </p:nvSpPr>
         <p:spPr>
           <a:xfrm>
             <a:off x="4961520" y="4682880"/>
-            <a:ext cx="484200" cy="346320"/>
+            <a:ext cx="483840" cy="345960"/>
           </a:xfrm>
           <a:prstGeom prst="rect">
             <a:avLst/>
@@ -2137,11 +2059,22 @@
             <a:noFill/>
           </a:ln>
         </p:spPr>
+        <p:style>
+          <a:lnRef idx="0"/>
+          <a:fillRef idx="0"/>
+          <a:effectRef idx="0"/>
+          <a:fontRef idx="minor"/>
+        </p:style>
         <p:txBody>
           <a:bodyPr lIns="90000" rIns="90000" tIns="45000" bIns="45000">
             <a:noAutofit/>
           </a:bodyPr>
           <a:p>
+            <a:pPr>
+              <a:lnSpc>
+                <a:spcPct val="100000"/>
+              </a:lnSpc>
+            </a:pPr>
             <a:r>
               <a:rPr b="0" lang="en-US" sz="1800" spc="-1" strike="noStrike">
                 <a:latin typeface="Arial"/>
@@ -2162,14 +2095,14 @@
       </p:sp>
       <p:sp>
         <p:nvSpPr>
-          <p:cNvPr id="54" name=""/>
-          <p:cNvSpPr txBox="1"/>
+          <p:cNvPr id="51" name=""/>
+          <p:cNvSpPr/>
           <p:nvPr/>
         </p:nvSpPr>
         <p:spPr>
           <a:xfrm>
             <a:off x="5715000" y="4682880"/>
-            <a:ext cx="686520" cy="346320"/>
+            <a:ext cx="686160" cy="345960"/>
           </a:xfrm>
           <a:prstGeom prst="rect">
             <a:avLst/>
@@ -2179,11 +2112,22 @@
             <a:noFill/>
           </a:ln>
         </p:spPr>
+        <p:style>
+          <a:lnRef idx="0"/>
+          <a:fillRef idx="0"/>
+          <a:effectRef idx="0"/>
+          <a:fontRef idx="minor"/>
+        </p:style>
         <p:txBody>
           <a:bodyPr lIns="90000" rIns="90000" tIns="45000" bIns="45000">
             <a:noAutofit/>
           </a:bodyPr>
           <a:p>
+            <a:pPr>
+              <a:lnSpc>
+                <a:spcPct val="100000"/>
+              </a:lnSpc>
+            </a:pPr>
             <a:r>
               <a:rPr b="0" lang="en-US" sz="1800" spc="-1" strike="noStrike">
                 <a:latin typeface="Arial"/>
@@ -2198,14 +2142,14 @@
       </p:sp>
       <p:sp>
         <p:nvSpPr>
-          <p:cNvPr id="55" name=""/>
-          <p:cNvSpPr txBox="1"/>
+          <p:cNvPr id="52" name=""/>
+          <p:cNvSpPr/>
           <p:nvPr/>
         </p:nvSpPr>
         <p:spPr>
           <a:xfrm>
             <a:off x="6790320" y="4682880"/>
-            <a:ext cx="484200" cy="346320"/>
+            <a:ext cx="483840" cy="345960"/>
           </a:xfrm>
           <a:prstGeom prst="rect">
             <a:avLst/>
@@ -2215,11 +2159,22 @@
             <a:noFill/>
           </a:ln>
         </p:spPr>
+        <p:style>
+          <a:lnRef idx="0"/>
+          <a:fillRef idx="0"/>
+          <a:effectRef idx="0"/>
+          <a:fontRef idx="minor"/>
+        </p:style>
         <p:txBody>
           <a:bodyPr lIns="90000" rIns="90000" tIns="45000" bIns="45000">
             <a:noAutofit/>
           </a:bodyPr>
           <a:p>
+            <a:pPr>
+              <a:lnSpc>
+                <a:spcPct val="100000"/>
+              </a:lnSpc>
+            </a:pPr>
             <a:r>
               <a:rPr b="0" lang="en-US" sz="1800" spc="-1" strike="noStrike">
                 <a:latin typeface="Arial"/>
@@ -2240,14 +2195,14 @@
       </p:sp>
       <p:sp>
         <p:nvSpPr>
-          <p:cNvPr id="56" name=""/>
-          <p:cNvSpPr txBox="1"/>
+          <p:cNvPr id="53" name=""/>
+          <p:cNvSpPr/>
           <p:nvPr/>
         </p:nvSpPr>
         <p:spPr>
           <a:xfrm>
             <a:off x="7698600" y="4682880"/>
-            <a:ext cx="531000" cy="346320"/>
+            <a:ext cx="530640" cy="345960"/>
           </a:xfrm>
           <a:prstGeom prst="rect">
             <a:avLst/>
@@ -2257,11 +2212,22 @@
             <a:noFill/>
           </a:ln>
         </p:spPr>
+        <p:style>
+          <a:lnRef idx="0"/>
+          <a:fillRef idx="0"/>
+          <a:effectRef idx="0"/>
+          <a:fontRef idx="minor"/>
+        </p:style>
         <p:txBody>
           <a:bodyPr lIns="90000" rIns="90000" tIns="45000" bIns="45000">
             <a:noAutofit/>
           </a:bodyPr>
           <a:p>
+            <a:pPr>
+              <a:lnSpc>
+                <a:spcPct val="100000"/>
+              </a:lnSpc>
+            </a:pPr>
             <a:r>
               <a:rPr b="0" lang="en-US" sz="1800" spc="-1" strike="noStrike">
                 <a:latin typeface="Arial"/>
@@ -2282,14 +2248,14 @@
       </p:sp>
       <p:sp>
         <p:nvSpPr>
-          <p:cNvPr id="57" name=""/>
-          <p:cNvSpPr txBox="1"/>
+          <p:cNvPr id="54" name=""/>
+          <p:cNvSpPr/>
           <p:nvPr/>
         </p:nvSpPr>
         <p:spPr>
           <a:xfrm>
             <a:off x="8619120" y="4682880"/>
-            <a:ext cx="484200" cy="346320"/>
+            <a:ext cx="483840" cy="345960"/>
           </a:xfrm>
           <a:prstGeom prst="rect">
             <a:avLst/>
@@ -2299,11 +2265,22 @@
             <a:noFill/>
           </a:ln>
         </p:spPr>
+        <p:style>
+          <a:lnRef idx="0"/>
+          <a:fillRef idx="0"/>
+          <a:effectRef idx="0"/>
+          <a:fontRef idx="minor"/>
+        </p:style>
         <p:txBody>
           <a:bodyPr lIns="90000" rIns="90000" tIns="45000" bIns="45000">
             <a:noAutofit/>
           </a:bodyPr>
           <a:p>
+            <a:pPr>
+              <a:lnSpc>
+                <a:spcPct val="100000"/>
+              </a:lnSpc>
+            </a:pPr>
             <a:r>
               <a:rPr b="0" lang="en-US" sz="1800" spc="-1" strike="noStrike">
                 <a:latin typeface="Arial"/>
@@ -2324,14 +2301,14 @@
       </p:sp>
       <p:sp>
         <p:nvSpPr>
-          <p:cNvPr id="58" name=""/>
-          <p:cNvSpPr txBox="1"/>
+          <p:cNvPr id="55" name=""/>
+          <p:cNvSpPr/>
           <p:nvPr/>
         </p:nvSpPr>
         <p:spPr>
           <a:xfrm>
             <a:off x="9533520" y="4682880"/>
-            <a:ext cx="484200" cy="346320"/>
+            <a:ext cx="483840" cy="345960"/>
           </a:xfrm>
           <a:prstGeom prst="rect">
             <a:avLst/>
@@ -2341,11 +2318,22 @@
             <a:noFill/>
           </a:ln>
         </p:spPr>
+        <p:style>
+          <a:lnRef idx="0"/>
+          <a:fillRef idx="0"/>
+          <a:effectRef idx="0"/>
+          <a:fontRef idx="minor"/>
+        </p:style>
         <p:txBody>
           <a:bodyPr lIns="90000" rIns="90000" tIns="45000" bIns="45000">
             <a:noAutofit/>
           </a:bodyPr>
           <a:p>
+            <a:pPr>
+              <a:lnSpc>
+                <a:spcPct val="100000"/>
+              </a:lnSpc>
+            </a:pPr>
             <a:r>
               <a:rPr b="0" lang="en-US" sz="1800" spc="-1" strike="noStrike">
                 <a:latin typeface="Arial"/>
@@ -2366,14 +2354,14 @@
       </p:sp>
       <p:sp>
         <p:nvSpPr>
-          <p:cNvPr id="59" name=""/>
-          <p:cNvSpPr txBox="1"/>
+          <p:cNvPr id="56" name=""/>
+          <p:cNvSpPr/>
           <p:nvPr/>
         </p:nvSpPr>
         <p:spPr>
           <a:xfrm>
             <a:off x="1405800" y="4682880"/>
-            <a:ext cx="686520" cy="346320"/>
+            <a:ext cx="686160" cy="345960"/>
           </a:xfrm>
           <a:prstGeom prst="rect">
             <a:avLst/>
@@ -2383,11 +2371,22 @@
             <a:noFill/>
           </a:ln>
         </p:spPr>
+        <p:style>
+          <a:lnRef idx="0"/>
+          <a:fillRef idx="0"/>
+          <a:effectRef idx="0"/>
+          <a:fontRef idx="minor"/>
+        </p:style>
         <p:txBody>
           <a:bodyPr lIns="90000" rIns="90000" tIns="45000" bIns="45000">
             <a:noAutofit/>
           </a:bodyPr>
           <a:p>
+            <a:pPr>
+              <a:lnSpc>
+                <a:spcPct val="100000"/>
+              </a:lnSpc>
+            </a:pPr>
             <a:r>
               <a:rPr b="0" lang="en-US" sz="1800" spc="-1" strike="noStrike">
                 <a:latin typeface="Arial"/>
@@ -2402,14 +2401,14 @@
       </p:sp>
       <p:sp>
         <p:nvSpPr>
-          <p:cNvPr id="60" name=""/>
-          <p:cNvSpPr txBox="1"/>
+          <p:cNvPr id="57" name=""/>
+          <p:cNvSpPr/>
           <p:nvPr/>
         </p:nvSpPr>
         <p:spPr>
           <a:xfrm>
             <a:off x="4919400" y="5140080"/>
-            <a:ext cx="795600" cy="346320"/>
+            <a:ext cx="795240" cy="345960"/>
           </a:xfrm>
           <a:prstGeom prst="rect">
             <a:avLst/>
@@ -2419,11 +2418,22 @@
             <a:noFill/>
           </a:ln>
         </p:spPr>
+        <p:style>
+          <a:lnRef idx="0"/>
+          <a:fillRef idx="0"/>
+          <a:effectRef idx="0"/>
+          <a:fontRef idx="minor"/>
+        </p:style>
         <p:txBody>
           <a:bodyPr lIns="90000" rIns="90000" tIns="45000" bIns="45000">
             <a:noAutofit/>
           </a:bodyPr>
           <a:p>
+            <a:pPr>
+              <a:lnSpc>
+                <a:spcPct val="100000"/>
+              </a:lnSpc>
+            </a:pPr>
             <a:r>
               <a:rPr b="0" lang="en-US" sz="1800" spc="-1" strike="noStrike">
                 <a:latin typeface="Arial"/>
@@ -2438,14 +2448,14 @@
       </p:sp>
       <p:sp>
         <p:nvSpPr>
-          <p:cNvPr id="61" name=""/>
-          <p:cNvSpPr txBox="1"/>
-          <p:nvPr/>
-        </p:nvSpPr>
-        <p:spPr>
-          <a:xfrm>
-            <a:off x="658800" y="950400"/>
-            <a:ext cx="1024200" cy="346320"/>
+          <p:cNvPr id="58" name=""/>
+          <p:cNvSpPr/>
+          <p:nvPr/>
+        </p:nvSpPr>
+        <p:spPr>
+          <a:xfrm>
+            <a:off x="457200" y="950400"/>
+            <a:ext cx="1225440" cy="345960"/>
           </a:xfrm>
           <a:prstGeom prst="rect">
             <a:avLst/>
@@ -2455,16 +2465,27 @@
             <a:noFill/>
           </a:ln>
         </p:spPr>
+        <p:style>
+          <a:lnRef idx="0"/>
+          <a:fillRef idx="0"/>
+          <a:effectRef idx="0"/>
+          <a:fontRef idx="minor"/>
+        </p:style>
         <p:txBody>
           <a:bodyPr lIns="90000" rIns="90000" tIns="45000" bIns="45000">
             <a:noAutofit/>
           </a:bodyPr>
           <a:p>
+            <a:pPr>
+              <a:lnSpc>
+                <a:spcPct val="100000"/>
+              </a:lnSpc>
+            </a:pPr>
             <a:r>
               <a:rPr b="0" lang="en-US" sz="1800" spc="-1" strike="noStrike">
                 <a:latin typeface="Arial"/>
               </a:rPr>
-              <a:t>RA 20</a:t>
+              <a:t>(D) RA 20</a:t>
             </a:r>
             <a:endParaRPr b="0" lang="en-US" sz="1800" spc="-1" strike="noStrike">
               <a:latin typeface="Arial"/>
@@ -2474,14 +2495,14 @@
       </p:sp>
       <p:sp>
         <p:nvSpPr>
-          <p:cNvPr id="62" name=""/>
-          <p:cNvSpPr txBox="1"/>
-          <p:nvPr/>
-        </p:nvSpPr>
-        <p:spPr>
-          <a:xfrm>
-            <a:off x="586800" y="1636200"/>
-            <a:ext cx="1024200" cy="346320"/>
+          <p:cNvPr id="59" name=""/>
+          <p:cNvSpPr/>
+          <p:nvPr/>
+        </p:nvSpPr>
+        <p:spPr>
+          <a:xfrm>
+            <a:off x="408600" y="1636200"/>
+            <a:ext cx="1382040" cy="345960"/>
           </a:xfrm>
           <a:prstGeom prst="rect">
             <a:avLst/>
@@ -2491,16 +2512,27 @@
             <a:noFill/>
           </a:ln>
         </p:spPr>
+        <p:style>
+          <a:lnRef idx="0"/>
+          <a:fillRef idx="0"/>
+          <a:effectRef idx="0"/>
+          <a:fontRef idx="minor"/>
+        </p:style>
         <p:txBody>
           <a:bodyPr lIns="90000" rIns="90000" tIns="45000" bIns="45000">
             <a:noAutofit/>
           </a:bodyPr>
           <a:p>
+            <a:pPr>
+              <a:lnSpc>
+                <a:spcPct val="100000"/>
+              </a:lnSpc>
+            </a:pPr>
             <a:r>
               <a:rPr b="0" lang="en-US" sz="1800" spc="-1" strike="noStrike">
                 <a:latin typeface="Arial"/>
               </a:rPr>
-              <a:t>CW 20</a:t>
+              <a:t>(E) CW 20</a:t>
             </a:r>
             <a:endParaRPr b="0" lang="en-US" sz="1800" spc="-1" strike="noStrike">
               <a:latin typeface="Arial"/>
@@ -2510,14 +2542,14 @@
       </p:sp>
       <p:sp>
         <p:nvSpPr>
-          <p:cNvPr id="63" name=""/>
-          <p:cNvSpPr txBox="1"/>
-          <p:nvPr/>
-        </p:nvSpPr>
-        <p:spPr>
-          <a:xfrm>
-            <a:off x="658800" y="2345400"/>
-            <a:ext cx="1024200" cy="346320"/>
+          <p:cNvPr id="60" name=""/>
+          <p:cNvSpPr/>
+          <p:nvPr/>
+        </p:nvSpPr>
+        <p:spPr>
+          <a:xfrm>
+            <a:off x="465120" y="2345400"/>
+            <a:ext cx="1181520" cy="345960"/>
           </a:xfrm>
           <a:prstGeom prst="rect">
             <a:avLst/>
@@ -2527,16 +2559,27 @@
             <a:noFill/>
           </a:ln>
         </p:spPr>
+        <p:style>
+          <a:lnRef idx="0"/>
+          <a:fillRef idx="0"/>
+          <a:effectRef idx="0"/>
+          <a:fontRef idx="minor"/>
+        </p:style>
         <p:txBody>
           <a:bodyPr lIns="90000" rIns="90000" tIns="45000" bIns="45000">
             <a:noAutofit/>
           </a:bodyPr>
           <a:p>
+            <a:pPr>
+              <a:lnSpc>
+                <a:spcPct val="100000"/>
+              </a:lnSpc>
+            </a:pPr>
             <a:r>
               <a:rPr b="0" lang="en-US" sz="1800" spc="-1" strike="noStrike">
                 <a:latin typeface="Arial"/>
               </a:rPr>
-              <a:t>RA 10</a:t>
+              <a:t>(A) RA 10</a:t>
             </a:r>
             <a:endParaRPr b="0" lang="en-US" sz="1800" spc="-1" strike="noStrike">
               <a:latin typeface="Arial"/>
@@ -2546,14 +2589,14 @@
       </p:sp>
       <p:sp>
         <p:nvSpPr>
-          <p:cNvPr id="64" name=""/>
-          <p:cNvSpPr txBox="1"/>
-          <p:nvPr/>
-        </p:nvSpPr>
-        <p:spPr>
-          <a:xfrm>
-            <a:off x="550800" y="3021480"/>
-            <a:ext cx="1024200" cy="346320"/>
+          <p:cNvPr id="61" name=""/>
+          <p:cNvSpPr/>
+          <p:nvPr/>
+        </p:nvSpPr>
+        <p:spPr>
+          <a:xfrm>
+            <a:off x="408600" y="3021480"/>
+            <a:ext cx="1346040" cy="345960"/>
           </a:xfrm>
           <a:prstGeom prst="rect">
             <a:avLst/>
@@ -2563,16 +2606,27 @@
             <a:noFill/>
           </a:ln>
         </p:spPr>
+        <p:style>
+          <a:lnRef idx="0"/>
+          <a:fillRef idx="0"/>
+          <a:effectRef idx="0"/>
+          <a:fontRef idx="minor"/>
+        </p:style>
         <p:txBody>
           <a:bodyPr lIns="90000" rIns="90000" tIns="45000" bIns="45000">
             <a:noAutofit/>
           </a:bodyPr>
           <a:p>
+            <a:pPr>
+              <a:lnSpc>
+                <a:spcPct val="100000"/>
+              </a:lnSpc>
+            </a:pPr>
             <a:r>
               <a:rPr b="0" lang="en-US" sz="1800" spc="-1" strike="noStrike">
                 <a:latin typeface="Arial"/>
               </a:rPr>
-              <a:t>CW 10</a:t>
+              <a:t>(B) CW 10</a:t>
             </a:r>
             <a:endParaRPr b="0" lang="en-US" sz="1800" spc="-1" strike="noStrike">
               <a:latin typeface="Arial"/>
@@ -2582,14 +2636,14 @@
       </p:sp>
       <p:sp>
         <p:nvSpPr>
-          <p:cNvPr id="65" name=""/>
-          <p:cNvSpPr txBox="1"/>
-          <p:nvPr/>
-        </p:nvSpPr>
-        <p:spPr>
-          <a:xfrm>
-            <a:off x="766800" y="3704400"/>
-            <a:ext cx="1024200" cy="346320"/>
+          <p:cNvPr id="62" name=""/>
+          <p:cNvSpPr/>
+          <p:nvPr/>
+        </p:nvSpPr>
+        <p:spPr>
+          <a:xfrm>
+            <a:off x="541800" y="3704400"/>
+            <a:ext cx="1104840" cy="345960"/>
           </a:xfrm>
           <a:prstGeom prst="rect">
             <a:avLst/>
@@ -2599,16 +2653,27 @@
             <a:noFill/>
           </a:ln>
         </p:spPr>
+        <p:style>
+          <a:lnRef idx="0"/>
+          <a:fillRef idx="0"/>
+          <a:effectRef idx="0"/>
+          <a:fontRef idx="minor"/>
+        </p:style>
         <p:txBody>
           <a:bodyPr lIns="90000" rIns="90000" tIns="45000" bIns="45000">
             <a:noAutofit/>
           </a:bodyPr>
           <a:p>
+            <a:pPr>
+              <a:lnSpc>
+                <a:spcPct val="100000"/>
+              </a:lnSpc>
+            </a:pPr>
             <a:r>
               <a:rPr b="0" lang="en-US" sz="1800" spc="-1" strike="noStrike">
                 <a:latin typeface="Arial"/>
               </a:rPr>
-              <a:t>DF 0</a:t>
+              <a:t>(C) DF 0</a:t>
             </a:r>
             <a:endParaRPr b="0" lang="en-US" sz="1800" spc="-1" strike="noStrike">
               <a:latin typeface="Arial"/>
@@ -2618,14 +2683,14 @@
       </p:sp>
       <p:sp>
         <p:nvSpPr>
-          <p:cNvPr id="66" name=""/>
+          <p:cNvPr id="63" name=""/>
           <p:cNvSpPr/>
           <p:nvPr/>
         </p:nvSpPr>
         <p:spPr>
           <a:xfrm>
             <a:off x="1576800" y="914760"/>
-            <a:ext cx="0" cy="3429000"/>
+            <a:ext cx="360" cy="3429000"/>
           </a:xfrm>
           <a:prstGeom prst="line">
             <a:avLst/>
@@ -2645,14 +2710,14 @@
       </p:sp>
       <p:sp>
         <p:nvSpPr>
-          <p:cNvPr id="67" name=""/>
+          <p:cNvPr id="64" name=""/>
           <p:cNvSpPr/>
           <p:nvPr/>
         </p:nvSpPr>
         <p:spPr>
           <a:xfrm>
             <a:off x="1576800" y="3657600"/>
-            <a:ext cx="8179200" cy="456840"/>
+            <a:ext cx="8178840" cy="456480"/>
           </a:xfrm>
           <a:prstGeom prst="rect">
             <a:avLst/>
@@ -2675,14 +2740,14 @@
       </p:sp>
       <p:sp>
         <p:nvSpPr>
-          <p:cNvPr id="68" name=""/>
-          <p:cNvSpPr txBox="1"/>
+          <p:cNvPr id="65" name=""/>
+          <p:cNvSpPr/>
           <p:nvPr/>
         </p:nvSpPr>
         <p:spPr>
           <a:xfrm>
             <a:off x="9516600" y="3692160"/>
-            <a:ext cx="473400" cy="386280"/>
+            <a:ext cx="473040" cy="385920"/>
           </a:xfrm>
           <a:prstGeom prst="rect">
             <a:avLst/>
@@ -2698,12 +2763,22 @@
             </a:solidFill>
           </a:ln>
         </p:spPr>
+        <p:style>
+          <a:lnRef idx="0"/>
+          <a:fillRef idx="0"/>
+          <a:effectRef idx="0"/>
+          <a:fontRef idx="minor"/>
+        </p:style>
         <p:txBody>
           <a:bodyPr lIns="90000" rIns="90000" tIns="45000" bIns="45000">
             <a:noAutofit/>
           </a:bodyPr>
           <a:p>
-            <a:pPr algn="ctr"/>
+            <a:pPr algn="ctr">
+              <a:lnSpc>
+                <a:spcPct val="100000"/>
+              </a:lnSpc>
+            </a:pPr>
             <a:r>
               <a:rPr b="0" lang="en-US" sz="1050" spc="-1" strike="noStrike">
                 <a:latin typeface="Arial"/>
@@ -2715,7 +2790,11 @@
             </a:endParaRPr>
           </a:p>
           <a:p>
-            <a:pPr algn="ctr"/>
+            <a:pPr algn="ctr">
+              <a:lnSpc>
+                <a:spcPct val="100000"/>
+              </a:lnSpc>
+            </a:pPr>
             <a:r>
               <a:rPr b="0" lang="en-US" sz="1050" spc="-1" strike="noStrike">
                 <a:latin typeface="Arial"/>
@@ -2730,14 +2809,14 @@
       </p:sp>
       <p:sp>
         <p:nvSpPr>
-          <p:cNvPr id="69" name=""/>
-          <p:cNvSpPr txBox="1"/>
+          <p:cNvPr id="66" name=""/>
+          <p:cNvSpPr/>
           <p:nvPr/>
         </p:nvSpPr>
         <p:spPr>
           <a:xfrm>
             <a:off x="7855200" y="3692160"/>
-            <a:ext cx="464040" cy="386280"/>
+            <a:ext cx="463680" cy="385920"/>
           </a:xfrm>
           <a:prstGeom prst="rect">
             <a:avLst/>
@@ -2753,12 +2832,22 @@
             </a:solidFill>
           </a:ln>
         </p:spPr>
+        <p:style>
+          <a:lnRef idx="0"/>
+          <a:fillRef idx="0"/>
+          <a:effectRef idx="0"/>
+          <a:fontRef idx="minor"/>
+        </p:style>
         <p:txBody>
           <a:bodyPr lIns="90000" rIns="90000" tIns="45000" bIns="45000">
             <a:noAutofit/>
           </a:bodyPr>
           <a:p>
-            <a:pPr algn="ctr"/>
+            <a:pPr algn="ctr">
+              <a:lnSpc>
+                <a:spcPct val="100000"/>
+              </a:lnSpc>
+            </a:pPr>
             <a:r>
               <a:rPr b="0" lang="en-US" sz="1050" spc="-1" strike="noStrike">
                 <a:latin typeface="Arial"/>
@@ -2770,7 +2859,11 @@
             </a:endParaRPr>
           </a:p>
           <a:p>
-            <a:pPr algn="ctr"/>
+            <a:pPr algn="ctr">
+              <a:lnSpc>
+                <a:spcPct val="100000"/>
+              </a:lnSpc>
+            </a:pPr>
             <a:r>
               <a:rPr b="0" lang="en-US" sz="1050" spc="-1" strike="noStrike">
                 <a:latin typeface="Arial"/>
@@ -2785,14 +2878,14 @@
       </p:sp>
       <p:sp>
         <p:nvSpPr>
-          <p:cNvPr id="70" name=""/>
-          <p:cNvSpPr txBox="1"/>
+          <p:cNvPr id="67" name=""/>
+          <p:cNvSpPr/>
           <p:nvPr/>
         </p:nvSpPr>
         <p:spPr>
           <a:xfrm>
             <a:off x="9516960" y="3692520"/>
-            <a:ext cx="473400" cy="386280"/>
+            <a:ext cx="473040" cy="385920"/>
           </a:xfrm>
           <a:prstGeom prst="rect">
             <a:avLst/>
@@ -2808,12 +2901,22 @@
             </a:solidFill>
           </a:ln>
         </p:spPr>
+        <p:style>
+          <a:lnRef idx="0"/>
+          <a:fillRef idx="0"/>
+          <a:effectRef idx="0"/>
+          <a:fontRef idx="minor"/>
+        </p:style>
         <p:txBody>
           <a:bodyPr lIns="90000" rIns="90000" tIns="45000" bIns="45000">
             <a:noAutofit/>
           </a:bodyPr>
           <a:p>
-            <a:pPr algn="ctr"/>
+            <a:pPr algn="ctr">
+              <a:lnSpc>
+                <a:spcPct val="100000"/>
+              </a:lnSpc>
+            </a:pPr>
             <a:r>
               <a:rPr b="0" lang="en-US" sz="1050" spc="-1" strike="noStrike">
                 <a:latin typeface="Arial"/>
@@ -2825,7 +2928,11 @@
             </a:endParaRPr>
           </a:p>
           <a:p>
-            <a:pPr algn="ctr"/>
+            <a:pPr algn="ctr">
+              <a:lnSpc>
+                <a:spcPct val="100000"/>
+              </a:lnSpc>
+            </a:pPr>
             <a:r>
               <a:rPr b="0" lang="en-US" sz="1050" spc="-1" strike="noStrike">
                 <a:latin typeface="Arial"/>
@@ -2840,14 +2947,14 @@
       </p:sp>
       <p:sp>
         <p:nvSpPr>
-          <p:cNvPr id="71" name=""/>
-          <p:cNvSpPr txBox="1"/>
+          <p:cNvPr id="68" name=""/>
+          <p:cNvSpPr/>
           <p:nvPr/>
         </p:nvSpPr>
         <p:spPr>
           <a:xfrm>
             <a:off x="3463200" y="3685320"/>
-            <a:ext cx="473400" cy="386280"/>
+            <a:ext cx="473040" cy="385920"/>
           </a:xfrm>
           <a:prstGeom prst="rect">
             <a:avLst/>
@@ -2863,12 +2970,22 @@
             </a:solidFill>
           </a:ln>
         </p:spPr>
+        <p:style>
+          <a:lnRef idx="0"/>
+          <a:fillRef idx="0"/>
+          <a:effectRef idx="0"/>
+          <a:fontRef idx="minor"/>
+        </p:style>
         <p:txBody>
           <a:bodyPr lIns="90000" rIns="90000" tIns="45000" bIns="45000">
             <a:noAutofit/>
           </a:bodyPr>
           <a:p>
-            <a:pPr algn="ctr"/>
+            <a:pPr algn="ctr">
+              <a:lnSpc>
+                <a:spcPct val="100000"/>
+              </a:lnSpc>
+            </a:pPr>
             <a:r>
               <a:rPr b="0" lang="en-US" sz="1050" spc="-1" strike="noStrike">
                 <a:latin typeface="Arial"/>
@@ -2880,7 +2997,11 @@
             </a:endParaRPr>
           </a:p>
           <a:p>
-            <a:pPr algn="ctr"/>
+            <a:pPr algn="ctr">
+              <a:lnSpc>
+                <a:spcPct val="100000"/>
+              </a:lnSpc>
+            </a:pPr>
             <a:r>
               <a:rPr b="0" lang="en-US" sz="1050" spc="-1" strike="noStrike">
                 <a:latin typeface="Arial"/>
@@ -2895,28 +3016,28 @@
       </p:sp>
       <p:grpSp>
         <p:nvGrpSpPr>
-          <p:cNvPr id="72" name=""/>
+          <p:cNvPr id="69" name=""/>
           <p:cNvGrpSpPr/>
           <p:nvPr/>
         </p:nvGrpSpPr>
         <p:grpSpPr>
           <a:xfrm>
             <a:off x="1575000" y="914400"/>
-            <a:ext cx="8398800" cy="2514240"/>
+            <a:ext cx="8398440" cy="2513880"/>
             <a:chOff x="1575000" y="914400"/>
-            <a:chExt cx="8398800" cy="2514240"/>
+            <a:chExt cx="8398440" cy="2513880"/>
           </a:xfrm>
         </p:grpSpPr>
         <p:sp>
           <p:nvSpPr>
-            <p:cNvPr id="73" name=""/>
+            <p:cNvPr id="70" name=""/>
             <p:cNvSpPr/>
             <p:nvPr/>
           </p:nvSpPr>
           <p:spPr>
             <a:xfrm>
               <a:off x="5184000" y="914400"/>
-              <a:ext cx="4559400" cy="456840"/>
+              <a:ext cx="4559040" cy="456480"/>
             </a:xfrm>
             <a:prstGeom prst="rect">
               <a:avLst/>
@@ -2939,14 +3060,14 @@
         </p:sp>
         <p:sp>
           <p:nvSpPr>
-            <p:cNvPr id="74" name=""/>
+            <p:cNvPr id="71" name=""/>
             <p:cNvSpPr/>
             <p:nvPr/>
           </p:nvSpPr>
           <p:spPr>
             <a:xfrm>
               <a:off x="5184000" y="1599840"/>
-              <a:ext cx="4559400" cy="456840"/>
+              <a:ext cx="4559040" cy="456480"/>
             </a:xfrm>
             <a:prstGeom prst="rect">
               <a:avLst/>
@@ -2969,14 +3090,14 @@
         </p:sp>
         <p:sp>
           <p:nvSpPr>
-            <p:cNvPr id="75" name=""/>
-            <p:cNvSpPr txBox="1"/>
+            <p:cNvPr id="72" name=""/>
+            <p:cNvSpPr/>
             <p:nvPr/>
           </p:nvSpPr>
           <p:spPr>
             <a:xfrm>
               <a:off x="9500400" y="1634760"/>
-              <a:ext cx="473400" cy="386280"/>
+              <a:ext cx="473040" cy="385920"/>
             </a:xfrm>
             <a:prstGeom prst="rect">
               <a:avLst/>
@@ -2992,12 +3113,22 @@
               </a:solidFill>
             </a:ln>
           </p:spPr>
+          <p:style>
+            <a:lnRef idx="0"/>
+            <a:fillRef idx="0"/>
+            <a:effectRef idx="0"/>
+            <a:fontRef idx="minor"/>
+          </p:style>
           <p:txBody>
             <a:bodyPr lIns="90000" rIns="90000" tIns="45000" bIns="45000">
               <a:noAutofit/>
             </a:bodyPr>
             <a:p>
-              <a:pPr algn="ctr"/>
+              <a:pPr algn="ctr">
+                <a:lnSpc>
+                  <a:spcPct val="100000"/>
+                </a:lnSpc>
+              </a:pPr>
               <a:r>
                 <a:rPr b="0" lang="en-US" sz="1050" spc="-1" strike="noStrike">
                   <a:latin typeface="Arial"/>
@@ -3009,7 +3140,11 @@
               </a:endParaRPr>
             </a:p>
             <a:p>
-              <a:pPr algn="ctr"/>
+              <a:pPr algn="ctr">
+                <a:lnSpc>
+                  <a:spcPct val="100000"/>
+                </a:lnSpc>
+              </a:pPr>
               <a:r>
                 <a:rPr b="0" lang="en-US" sz="1050" spc="-1" strike="noStrike">
                   <a:latin typeface="Arial"/>
@@ -3024,14 +3159,14 @@
         </p:sp>
         <p:sp>
           <p:nvSpPr>
-            <p:cNvPr id="76" name=""/>
-            <p:cNvSpPr txBox="1"/>
+            <p:cNvPr id="73" name=""/>
+            <p:cNvSpPr/>
             <p:nvPr/>
           </p:nvSpPr>
           <p:spPr>
             <a:xfrm>
               <a:off x="9500400" y="948960"/>
-              <a:ext cx="473400" cy="386280"/>
+              <a:ext cx="473040" cy="385920"/>
             </a:xfrm>
             <a:prstGeom prst="rect">
               <a:avLst/>
@@ -3047,12 +3182,22 @@
               </a:solidFill>
             </a:ln>
           </p:spPr>
+          <p:style>
+            <a:lnRef idx="0"/>
+            <a:fillRef idx="0"/>
+            <a:effectRef idx="0"/>
+            <a:fontRef idx="minor"/>
+          </p:style>
           <p:txBody>
             <a:bodyPr lIns="90000" rIns="90000" tIns="45000" bIns="45000">
               <a:noAutofit/>
             </a:bodyPr>
             <a:p>
-              <a:pPr algn="ctr"/>
+              <a:pPr algn="ctr">
+                <a:lnSpc>
+                  <a:spcPct val="100000"/>
+                </a:lnSpc>
+              </a:pPr>
               <a:r>
                 <a:rPr b="0" lang="en-US" sz="1050" spc="-1" strike="noStrike">
                   <a:latin typeface="Arial"/>
@@ -3064,7 +3209,11 @@
               </a:endParaRPr>
             </a:p>
             <a:p>
-              <a:pPr algn="ctr"/>
+              <a:pPr algn="ctr">
+                <a:lnSpc>
+                  <a:spcPct val="100000"/>
+                </a:lnSpc>
+              </a:pPr>
               <a:r>
                 <a:rPr b="0" lang="en-US" sz="1050" spc="-1" strike="noStrike">
                   <a:latin typeface="Arial"/>
@@ -3079,14 +3228,14 @@
         </p:sp>
         <p:sp>
           <p:nvSpPr>
-            <p:cNvPr id="77" name=""/>
-            <p:cNvSpPr txBox="1"/>
+            <p:cNvPr id="74" name=""/>
+            <p:cNvSpPr/>
             <p:nvPr/>
           </p:nvSpPr>
           <p:spPr>
             <a:xfrm>
               <a:off x="7867800" y="948960"/>
-              <a:ext cx="464040" cy="386280"/>
+              <a:ext cx="463680" cy="385920"/>
             </a:xfrm>
             <a:prstGeom prst="rect">
               <a:avLst/>
@@ -3102,12 +3251,22 @@
               </a:solidFill>
             </a:ln>
           </p:spPr>
+          <p:style>
+            <a:lnRef idx="0"/>
+            <a:fillRef idx="0"/>
+            <a:effectRef idx="0"/>
+            <a:fontRef idx="minor"/>
+          </p:style>
           <p:txBody>
             <a:bodyPr lIns="90000" rIns="90000" tIns="45000" bIns="45000">
               <a:noAutofit/>
             </a:bodyPr>
             <a:p>
-              <a:pPr algn="ctr"/>
+              <a:pPr algn="ctr">
+                <a:lnSpc>
+                  <a:spcPct val="100000"/>
+                </a:lnSpc>
+              </a:pPr>
               <a:r>
                 <a:rPr b="0" lang="en-US" sz="1050" spc="-1" strike="noStrike">
                   <a:latin typeface="Arial"/>
@@ -3119,7 +3278,11 @@
               </a:endParaRPr>
             </a:p>
             <a:p>
-              <a:pPr algn="ctr"/>
+              <a:pPr algn="ctr">
+                <a:lnSpc>
+                  <a:spcPct val="100000"/>
+                </a:lnSpc>
+              </a:pPr>
               <a:r>
                 <a:rPr b="0" lang="en-US" sz="1050" spc="-1" strike="noStrike">
                   <a:latin typeface="Arial"/>
@@ -3134,14 +3297,14 @@
         </p:sp>
         <p:sp>
           <p:nvSpPr>
-            <p:cNvPr id="78" name=""/>
-            <p:cNvSpPr txBox="1"/>
+            <p:cNvPr id="75" name=""/>
+            <p:cNvSpPr/>
             <p:nvPr/>
           </p:nvSpPr>
           <p:spPr>
             <a:xfrm>
               <a:off x="7860960" y="1635840"/>
-              <a:ext cx="464040" cy="386280"/>
+              <a:ext cx="463680" cy="385920"/>
             </a:xfrm>
             <a:prstGeom prst="rect">
               <a:avLst/>
@@ -3157,12 +3320,22 @@
               </a:solidFill>
             </a:ln>
           </p:spPr>
+          <p:style>
+            <a:lnRef idx="0"/>
+            <a:fillRef idx="0"/>
+            <a:effectRef idx="0"/>
+            <a:fontRef idx="minor"/>
+          </p:style>
           <p:txBody>
             <a:bodyPr lIns="90000" rIns="90000" tIns="45000" bIns="45000">
               <a:noAutofit/>
             </a:bodyPr>
             <a:p>
-              <a:pPr algn="ctr"/>
+              <a:pPr algn="ctr">
+                <a:lnSpc>
+                  <a:spcPct val="100000"/>
+                </a:lnSpc>
+              </a:pPr>
               <a:r>
                 <a:rPr b="0" lang="en-US" sz="1050" spc="-1" strike="noStrike">
                   <a:latin typeface="Arial"/>
@@ -3174,7 +3347,11 @@
               </a:endParaRPr>
             </a:p>
             <a:p>
-              <a:pPr algn="ctr"/>
+              <a:pPr algn="ctr">
+                <a:lnSpc>
+                  <a:spcPct val="100000"/>
+                </a:lnSpc>
+              </a:pPr>
               <a:r>
                 <a:rPr b="0" lang="en-US" sz="1050" spc="-1" strike="noStrike">
                   <a:latin typeface="Arial"/>
@@ -3189,14 +3366,14 @@
         </p:sp>
         <p:sp>
           <p:nvSpPr>
-            <p:cNvPr id="79" name=""/>
+            <p:cNvPr id="76" name=""/>
             <p:cNvSpPr/>
             <p:nvPr/>
           </p:nvSpPr>
           <p:spPr>
             <a:xfrm>
               <a:off x="1576800" y="914400"/>
-              <a:ext cx="3607200" cy="456840"/>
+              <a:ext cx="3606840" cy="456480"/>
             </a:xfrm>
             <a:prstGeom prst="rect">
               <a:avLst/>
@@ -3219,14 +3396,14 @@
         </p:sp>
         <p:sp>
           <p:nvSpPr>
-            <p:cNvPr id="80" name=""/>
+            <p:cNvPr id="77" name=""/>
             <p:cNvSpPr/>
             <p:nvPr/>
           </p:nvSpPr>
           <p:spPr>
             <a:xfrm>
               <a:off x="1576800" y="2286360"/>
-              <a:ext cx="1778400" cy="456840"/>
+              <a:ext cx="1778040" cy="456480"/>
             </a:xfrm>
             <a:prstGeom prst="rect">
               <a:avLst/>
@@ -3249,14 +3426,14 @@
         </p:sp>
         <p:sp>
           <p:nvSpPr>
-            <p:cNvPr id="81" name=""/>
+            <p:cNvPr id="78" name=""/>
             <p:cNvSpPr/>
             <p:nvPr/>
           </p:nvSpPr>
           <p:spPr>
             <a:xfrm>
               <a:off x="1576800" y="1600560"/>
-              <a:ext cx="3607200" cy="456840"/>
+              <a:ext cx="3606840" cy="456480"/>
             </a:xfrm>
             <a:prstGeom prst="rect">
               <a:avLst/>
@@ -3279,14 +3456,14 @@
         </p:sp>
         <p:sp>
           <p:nvSpPr>
-            <p:cNvPr id="82" name=""/>
+            <p:cNvPr id="79" name=""/>
             <p:cNvSpPr/>
             <p:nvPr/>
           </p:nvSpPr>
           <p:spPr>
             <a:xfrm>
               <a:off x="1575000" y="2971800"/>
-              <a:ext cx="1780200" cy="456840"/>
+              <a:ext cx="1779840" cy="456480"/>
             </a:xfrm>
             <a:prstGeom prst="rect">
               <a:avLst/>
@@ -3310,28 +3487,28 @@
       </p:grpSp>
       <p:grpSp>
         <p:nvGrpSpPr>
-          <p:cNvPr id="83" name=""/>
+          <p:cNvPr id="80" name=""/>
           <p:cNvGrpSpPr/>
           <p:nvPr/>
         </p:nvGrpSpPr>
         <p:grpSpPr>
           <a:xfrm>
             <a:off x="3355200" y="2286360"/>
-            <a:ext cx="6638400" cy="1142280"/>
+            <a:ext cx="6638040" cy="1141920"/>
             <a:chOff x="3355200" y="2286360"/>
-            <a:chExt cx="6638400" cy="1142280"/>
+            <a:chExt cx="6638040" cy="1141920"/>
           </a:xfrm>
         </p:grpSpPr>
         <p:sp>
           <p:nvSpPr>
-            <p:cNvPr id="84" name=""/>
+            <p:cNvPr id="81" name=""/>
             <p:cNvSpPr/>
             <p:nvPr/>
           </p:nvSpPr>
           <p:spPr>
             <a:xfrm>
               <a:off x="3355200" y="2286360"/>
-              <a:ext cx="6408000" cy="456840"/>
+              <a:ext cx="6407640" cy="456480"/>
             </a:xfrm>
             <a:prstGeom prst="rect">
               <a:avLst/>
@@ -3354,14 +3531,14 @@
         </p:sp>
         <p:sp>
           <p:nvSpPr>
-            <p:cNvPr id="85" name=""/>
+            <p:cNvPr id="82" name=""/>
             <p:cNvSpPr/>
             <p:nvPr/>
           </p:nvSpPr>
           <p:spPr>
             <a:xfrm>
               <a:off x="3355200" y="2971800"/>
-              <a:ext cx="6408000" cy="456840"/>
+              <a:ext cx="6407640" cy="456480"/>
             </a:xfrm>
             <a:prstGeom prst="rect">
               <a:avLst/>
@@ -3384,14 +3561,14 @@
         </p:sp>
         <p:sp>
           <p:nvSpPr>
-            <p:cNvPr id="86" name=""/>
-            <p:cNvSpPr txBox="1"/>
+            <p:cNvPr id="83" name=""/>
+            <p:cNvSpPr/>
             <p:nvPr/>
           </p:nvSpPr>
           <p:spPr>
             <a:xfrm>
               <a:off x="9520200" y="3007800"/>
-              <a:ext cx="473400" cy="386280"/>
+              <a:ext cx="473040" cy="385920"/>
             </a:xfrm>
             <a:prstGeom prst="rect">
               <a:avLst/>
@@ -3407,12 +3584,22 @@
               </a:solidFill>
             </a:ln>
           </p:spPr>
+          <p:style>
+            <a:lnRef idx="0"/>
+            <a:fillRef idx="0"/>
+            <a:effectRef idx="0"/>
+            <a:fontRef idx="minor"/>
+          </p:style>
           <p:txBody>
             <a:bodyPr lIns="90000" rIns="90000" tIns="45000" bIns="45000">
               <a:noAutofit/>
             </a:bodyPr>
             <a:p>
-              <a:pPr algn="ctr"/>
+              <a:pPr algn="ctr">
+                <a:lnSpc>
+                  <a:spcPct val="100000"/>
+                </a:lnSpc>
+              </a:pPr>
               <a:r>
                 <a:rPr b="0" lang="en-US" sz="1050" spc="-1" strike="noStrike">
                   <a:latin typeface="Arial"/>
@@ -3424,7 +3611,11 @@
               </a:endParaRPr>
             </a:p>
             <a:p>
-              <a:pPr algn="ctr"/>
+              <a:pPr algn="ctr">
+                <a:lnSpc>
+                  <a:spcPct val="100000"/>
+                </a:lnSpc>
+              </a:pPr>
               <a:r>
                 <a:rPr b="0" lang="en-US" sz="1050" spc="-1" strike="noStrike">
                   <a:latin typeface="Arial"/>
@@ -3439,14 +3630,14 @@
         </p:sp>
         <p:sp>
           <p:nvSpPr>
-            <p:cNvPr id="87" name=""/>
-            <p:cNvSpPr txBox="1"/>
+            <p:cNvPr id="84" name=""/>
+            <p:cNvSpPr/>
             <p:nvPr/>
           </p:nvSpPr>
           <p:spPr>
             <a:xfrm>
               <a:off x="9520200" y="2322360"/>
-              <a:ext cx="473400" cy="386280"/>
+              <a:ext cx="473040" cy="385920"/>
             </a:xfrm>
             <a:prstGeom prst="rect">
               <a:avLst/>
@@ -3462,12 +3653,22 @@
               </a:solidFill>
             </a:ln>
           </p:spPr>
+          <p:style>
+            <a:lnRef idx="0"/>
+            <a:fillRef idx="0"/>
+            <a:effectRef idx="0"/>
+            <a:fontRef idx="minor"/>
+          </p:style>
           <p:txBody>
             <a:bodyPr lIns="90000" rIns="90000" tIns="45000" bIns="45000">
               <a:noAutofit/>
             </a:bodyPr>
             <a:p>
-              <a:pPr algn="ctr"/>
+              <a:pPr algn="ctr">
+                <a:lnSpc>
+                  <a:spcPct val="100000"/>
+                </a:lnSpc>
+              </a:pPr>
               <a:r>
                 <a:rPr b="0" lang="en-US" sz="1050" spc="-1" strike="noStrike">
                   <a:latin typeface="Arial"/>
@@ -3479,7 +3680,11 @@
               </a:endParaRPr>
             </a:p>
             <a:p>
-              <a:pPr algn="ctr"/>
+              <a:pPr algn="ctr">
+                <a:lnSpc>
+                  <a:spcPct val="100000"/>
+                </a:lnSpc>
+              </a:pPr>
               <a:r>
                 <a:rPr b="0" lang="en-US" sz="1050" spc="-1" strike="noStrike">
                   <a:latin typeface="Arial"/>
@@ -3494,14 +3699,14 @@
         </p:sp>
         <p:sp>
           <p:nvSpPr>
-            <p:cNvPr id="88" name=""/>
-            <p:cNvSpPr txBox="1"/>
+            <p:cNvPr id="85" name=""/>
+            <p:cNvSpPr/>
             <p:nvPr/>
           </p:nvSpPr>
           <p:spPr>
             <a:xfrm>
               <a:off x="7851600" y="3007800"/>
-              <a:ext cx="464040" cy="386280"/>
+              <a:ext cx="463680" cy="385920"/>
             </a:xfrm>
             <a:prstGeom prst="rect">
               <a:avLst/>
@@ -3517,12 +3722,22 @@
               </a:solidFill>
             </a:ln>
           </p:spPr>
+          <p:style>
+            <a:lnRef idx="0"/>
+            <a:fillRef idx="0"/>
+            <a:effectRef idx="0"/>
+            <a:fontRef idx="minor"/>
+          </p:style>
           <p:txBody>
             <a:bodyPr lIns="90000" rIns="90000" tIns="45000" bIns="45000">
               <a:noAutofit/>
             </a:bodyPr>
             <a:p>
-              <a:pPr algn="ctr"/>
+              <a:pPr algn="ctr">
+                <a:lnSpc>
+                  <a:spcPct val="100000"/>
+                </a:lnSpc>
+              </a:pPr>
               <a:r>
                 <a:rPr b="0" lang="en-US" sz="1050" spc="-1" strike="noStrike">
                   <a:latin typeface="Arial"/>
@@ -3534,7 +3749,11 @@
               </a:endParaRPr>
             </a:p>
             <a:p>
-              <a:pPr algn="ctr"/>
+              <a:pPr algn="ctr">
+                <a:lnSpc>
+                  <a:spcPct val="100000"/>
+                </a:lnSpc>
+              </a:pPr>
               <a:r>
                 <a:rPr b="0" lang="en-US" sz="1050" spc="-1" strike="noStrike">
                   <a:latin typeface="Arial"/>
@@ -3549,14 +3768,14 @@
         </p:sp>
         <p:sp>
           <p:nvSpPr>
-            <p:cNvPr id="89" name=""/>
-            <p:cNvSpPr txBox="1"/>
+            <p:cNvPr id="86" name=""/>
+            <p:cNvSpPr/>
             <p:nvPr/>
           </p:nvSpPr>
           <p:spPr>
             <a:xfrm>
               <a:off x="7857360" y="2320920"/>
-              <a:ext cx="464040" cy="386280"/>
+              <a:ext cx="463680" cy="385920"/>
             </a:xfrm>
             <a:prstGeom prst="rect">
               <a:avLst/>
@@ -3572,12 +3791,22 @@
               </a:solidFill>
             </a:ln>
           </p:spPr>
+          <p:style>
+            <a:lnRef idx="0"/>
+            <a:fillRef idx="0"/>
+            <a:effectRef idx="0"/>
+            <a:fontRef idx="minor"/>
+          </p:style>
           <p:txBody>
             <a:bodyPr lIns="90000" rIns="90000" tIns="45000" bIns="45000">
               <a:noAutofit/>
             </a:bodyPr>
             <a:p>
-              <a:pPr algn="ctr"/>
+              <a:pPr algn="ctr">
+                <a:lnSpc>
+                  <a:spcPct val="100000"/>
+                </a:lnSpc>
+              </a:pPr>
               <a:r>
                 <a:rPr b="0" lang="en-US" sz="1050" spc="-1" strike="noStrike">
                   <a:latin typeface="Arial"/>
@@ -3589,7 +3818,11 @@
               </a:endParaRPr>
             </a:p>
             <a:p>
-              <a:pPr algn="ctr"/>
+              <a:pPr algn="ctr">
+                <a:lnSpc>
+                  <a:spcPct val="100000"/>
+                </a:lnSpc>
+              </a:pPr>
               <a:r>
                 <a:rPr b="0" lang="en-US" sz="1050" spc="-1" strike="noStrike">
                   <a:latin typeface="Arial"/>
@@ -3604,14 +3837,14 @@
         </p:sp>
         <p:sp>
           <p:nvSpPr>
-            <p:cNvPr id="90" name=""/>
-            <p:cNvSpPr txBox="1"/>
+            <p:cNvPr id="87" name=""/>
+            <p:cNvSpPr/>
             <p:nvPr/>
           </p:nvSpPr>
           <p:spPr>
             <a:xfrm>
               <a:off x="4964400" y="2320920"/>
-              <a:ext cx="473400" cy="386280"/>
+              <a:ext cx="473040" cy="385920"/>
             </a:xfrm>
             <a:prstGeom prst="rect">
               <a:avLst/>
@@ -3627,12 +3860,22 @@
               </a:solidFill>
             </a:ln>
           </p:spPr>
+          <p:style>
+            <a:lnRef idx="0"/>
+            <a:fillRef idx="0"/>
+            <a:effectRef idx="0"/>
+            <a:fontRef idx="minor"/>
+          </p:style>
           <p:txBody>
             <a:bodyPr lIns="90000" rIns="90000" tIns="45000" bIns="45000">
               <a:noAutofit/>
             </a:bodyPr>
             <a:p>
-              <a:pPr algn="ctr"/>
+              <a:pPr algn="ctr">
+                <a:lnSpc>
+                  <a:spcPct val="100000"/>
+                </a:lnSpc>
+              </a:pPr>
               <a:r>
                 <a:rPr b="0" lang="en-US" sz="1050" spc="-1" strike="noStrike">
                   <a:latin typeface="Arial"/>
@@ -3644,7 +3887,11 @@
               </a:endParaRPr>
             </a:p>
             <a:p>
-              <a:pPr algn="ctr"/>
+              <a:pPr algn="ctr">
+                <a:lnSpc>
+                  <a:spcPct val="100000"/>
+                </a:lnSpc>
+              </a:pPr>
               <a:r>
                 <a:rPr b="0" lang="en-US" sz="1050" spc="-1" strike="noStrike">
                   <a:latin typeface="Arial"/>
@@ -3659,14 +3906,14 @@
         </p:sp>
         <p:sp>
           <p:nvSpPr>
-            <p:cNvPr id="91" name=""/>
-            <p:cNvSpPr txBox="1"/>
+            <p:cNvPr id="88" name=""/>
+            <p:cNvSpPr/>
             <p:nvPr/>
           </p:nvSpPr>
           <p:spPr>
             <a:xfrm>
               <a:off x="4948200" y="3007800"/>
-              <a:ext cx="473400" cy="386280"/>
+              <a:ext cx="473040" cy="385920"/>
             </a:xfrm>
             <a:prstGeom prst="rect">
               <a:avLst/>
@@ -3682,12 +3929,22 @@
               </a:solidFill>
             </a:ln>
           </p:spPr>
+          <p:style>
+            <a:lnRef idx="0"/>
+            <a:fillRef idx="0"/>
+            <a:effectRef idx="0"/>
+            <a:fontRef idx="minor"/>
+          </p:style>
           <p:txBody>
             <a:bodyPr lIns="90000" rIns="90000" tIns="45000" bIns="45000">
               <a:noAutofit/>
             </a:bodyPr>
             <a:p>
-              <a:pPr algn="ctr"/>
+              <a:pPr algn="ctr">
+                <a:lnSpc>
+                  <a:spcPct val="100000"/>
+                </a:lnSpc>
+              </a:pPr>
               <a:r>
                 <a:rPr b="0" lang="en-US" sz="1050" spc="-1" strike="noStrike">
                   <a:latin typeface="Arial"/>
@@ -3699,7 +3956,11 @@
               </a:endParaRPr>
             </a:p>
             <a:p>
-              <a:pPr algn="ctr"/>
+              <a:pPr algn="ctr">
+                <a:lnSpc>
+                  <a:spcPct val="100000"/>
+                </a:lnSpc>
+              </a:pPr>
               <a:r>
                 <a:rPr b="0" lang="en-US" sz="1050" spc="-1" strike="noStrike">
                   <a:latin typeface="Arial"/>
@@ -3715,14 +3976,14 @@
       </p:grpSp>
       <p:sp>
         <p:nvSpPr>
-          <p:cNvPr id="92" name=""/>
-          <p:cNvSpPr txBox="1"/>
+          <p:cNvPr id="89" name=""/>
+          <p:cNvSpPr/>
           <p:nvPr/>
         </p:nvSpPr>
         <p:spPr>
           <a:xfrm rot="16180800">
             <a:off x="-392040" y="2382840"/>
-            <a:ext cx="1405800" cy="373680"/>
+            <a:ext cx="1405440" cy="373320"/>
           </a:xfrm>
           <a:prstGeom prst="rect">
             <a:avLst/>
@@ -3732,11 +3993,22 @@
             <a:noFill/>
           </a:ln>
         </p:spPr>
+        <p:style>
+          <a:lnRef idx="0"/>
+          <a:fillRef idx="0"/>
+          <a:effectRef idx="0"/>
+          <a:fontRef idx="minor"/>
+        </p:style>
         <p:txBody>
           <a:bodyPr lIns="90000" rIns="90000" tIns="45000" bIns="45000">
             <a:noAutofit/>
           </a:bodyPr>
           <a:p>
+            <a:pPr>
+              <a:lnSpc>
+                <a:spcPct val="100000"/>
+              </a:lnSpc>
+            </a:pPr>
             <a:r>
               <a:rPr b="0" lang="en-US" sz="2000" spc="-1" strike="noStrike">
                 <a:latin typeface="Arial"/>
@@ -3751,28 +4023,28 @@
       </p:sp>
       <p:grpSp>
         <p:nvGrpSpPr>
-          <p:cNvPr id="93" name=""/>
+          <p:cNvPr id="90" name=""/>
           <p:cNvGrpSpPr/>
           <p:nvPr/>
         </p:nvGrpSpPr>
         <p:grpSpPr>
           <a:xfrm>
             <a:off x="7592400" y="228600"/>
-            <a:ext cx="2008800" cy="386280"/>
+            <a:ext cx="2008440" cy="385920"/>
             <a:chOff x="7592400" y="228600"/>
-            <a:chExt cx="2008800" cy="386280"/>
+            <a:chExt cx="2008440" cy="385920"/>
           </a:xfrm>
         </p:grpSpPr>
         <p:sp>
           <p:nvSpPr>
-            <p:cNvPr id="94" name=""/>
+            <p:cNvPr id="91" name=""/>
             <p:cNvSpPr/>
             <p:nvPr/>
           </p:nvSpPr>
           <p:spPr>
             <a:xfrm>
               <a:off x="7772400" y="268560"/>
-              <a:ext cx="1828800" cy="346320"/>
+              <a:ext cx="1828440" cy="345960"/>
             </a:xfrm>
             <a:prstGeom prst="rect">
               <a:avLst/>
@@ -3793,28 +4065,28 @@
         </p:sp>
         <p:grpSp>
           <p:nvGrpSpPr>
-            <p:cNvPr id="95" name=""/>
+            <p:cNvPr id="92" name=""/>
             <p:cNvGrpSpPr/>
             <p:nvPr/>
           </p:nvGrpSpPr>
           <p:grpSpPr>
             <a:xfrm>
               <a:off x="7592400" y="228600"/>
-              <a:ext cx="1987920" cy="386280"/>
+              <a:ext cx="1987560" cy="385920"/>
               <a:chOff x="7592400" y="228600"/>
-              <a:chExt cx="1987920" cy="386280"/>
+              <a:chExt cx="1987560" cy="385920"/>
             </a:xfrm>
           </p:grpSpPr>
           <p:sp>
             <p:nvSpPr>
-              <p:cNvPr id="96" name=""/>
-              <p:cNvSpPr txBox="1"/>
+              <p:cNvPr id="93" name=""/>
+              <p:cNvSpPr/>
               <p:nvPr/>
             </p:nvSpPr>
             <p:spPr>
               <a:xfrm>
                 <a:off x="7592400" y="228600"/>
-                <a:ext cx="613440" cy="386280"/>
+                <a:ext cx="613080" cy="385920"/>
               </a:xfrm>
               <a:prstGeom prst="rect">
                 <a:avLst/>
@@ -3830,12 +4102,22 @@
                 </a:solidFill>
               </a:ln>
             </p:spPr>
+            <p:style>
+              <a:lnRef idx="0"/>
+              <a:fillRef idx="0"/>
+              <a:effectRef idx="0"/>
+              <a:fontRef idx="minor"/>
+            </p:style>
             <p:txBody>
               <a:bodyPr lIns="90000" rIns="90000" tIns="45000" bIns="45000">
                 <a:noAutofit/>
               </a:bodyPr>
               <a:p>
-                <a:pPr algn="ctr"/>
+                <a:pPr algn="ctr">
+                  <a:lnSpc>
+                    <a:spcPct val="100000"/>
+                  </a:lnSpc>
+                </a:pPr>
                 <a:r>
                   <a:rPr b="0" lang="en-US" sz="1050" spc="-1" strike="noStrike">
                     <a:latin typeface="Arial"/>
@@ -3847,7 +4129,11 @@
                 </a:endParaRPr>
               </a:p>
               <a:p>
-                <a:pPr algn="ctr"/>
+                <a:pPr algn="ctr">
+                  <a:lnSpc>
+                    <a:spcPct val="100000"/>
+                  </a:lnSpc>
+                </a:pPr>
                 <a:r>
                   <a:rPr b="0" lang="en-US" sz="1050" spc="-1" strike="noStrike">
                     <a:latin typeface="Arial"/>
@@ -3862,14 +4148,14 @@
           </p:sp>
           <p:sp>
             <p:nvSpPr>
-              <p:cNvPr id="97" name=""/>
-              <p:cNvSpPr txBox="1"/>
+              <p:cNvPr id="94" name=""/>
+              <p:cNvSpPr/>
               <p:nvPr/>
             </p:nvSpPr>
             <p:spPr>
               <a:xfrm>
                 <a:off x="8174520" y="268560"/>
-                <a:ext cx="1405800" cy="346320"/>
+                <a:ext cx="1405440" cy="345960"/>
               </a:xfrm>
               <a:prstGeom prst="rect">
                 <a:avLst/>
@@ -3879,11 +4165,22 @@
                 <a:noFill/>
               </a:ln>
             </p:spPr>
+            <p:style>
+              <a:lnRef idx="0"/>
+              <a:fillRef idx="0"/>
+              <a:effectRef idx="0"/>
+              <a:fontRef idx="minor"/>
+            </p:style>
             <p:txBody>
               <a:bodyPr lIns="90000" rIns="90000" tIns="45000" bIns="45000">
                 <a:noAutofit/>
               </a:bodyPr>
               <a:p>
+                <a:pPr>
+                  <a:lnSpc>
+                    <a:spcPct val="100000"/>
+                  </a:lnSpc>
+                </a:pPr>
                 <a:r>
                   <a:rPr b="0" lang="en-US" sz="1400" spc="-1" strike="noStrike">
                     <a:latin typeface="Arial"/>
@@ -3930,14 +4227,14 @@
       </p:grpSpPr>
       <p:sp>
         <p:nvSpPr>
-          <p:cNvPr id="98" name=""/>
+          <p:cNvPr id="95" name=""/>
           <p:cNvSpPr/>
           <p:nvPr/>
         </p:nvSpPr>
         <p:spPr>
           <a:xfrm>
             <a:off x="5184000" y="914400"/>
-            <a:ext cx="0" cy="3429000"/>
+            <a:ext cx="360" cy="3429000"/>
           </a:xfrm>
           <a:prstGeom prst="line">
             <a:avLst/>
@@ -3957,14 +4254,14 @@
       </p:sp>
       <p:sp>
         <p:nvSpPr>
-          <p:cNvPr id="99" name=""/>
+          <p:cNvPr id="96" name=""/>
           <p:cNvSpPr/>
           <p:nvPr/>
         </p:nvSpPr>
         <p:spPr>
           <a:xfrm>
             <a:off x="4269600" y="914400"/>
-            <a:ext cx="0" cy="3429000"/>
+            <a:ext cx="360" cy="3429000"/>
           </a:xfrm>
           <a:prstGeom prst="line">
             <a:avLst/>
@@ -3984,14 +4281,14 @@
       </p:sp>
       <p:sp>
         <p:nvSpPr>
-          <p:cNvPr id="100" name=""/>
+          <p:cNvPr id="97" name=""/>
           <p:cNvSpPr/>
           <p:nvPr/>
         </p:nvSpPr>
         <p:spPr>
           <a:xfrm>
             <a:off x="3355200" y="914400"/>
-            <a:ext cx="0" cy="3429000"/>
+            <a:ext cx="360" cy="3429000"/>
           </a:xfrm>
           <a:prstGeom prst="line">
             <a:avLst/>
@@ -4011,14 +4308,14 @@
       </p:sp>
       <p:sp>
         <p:nvSpPr>
-          <p:cNvPr id="101" name=""/>
+          <p:cNvPr id="98" name=""/>
           <p:cNvSpPr/>
           <p:nvPr/>
         </p:nvSpPr>
         <p:spPr>
           <a:xfrm>
             <a:off x="2440800" y="914400"/>
-            <a:ext cx="0" cy="3429000"/>
+            <a:ext cx="360" cy="3429000"/>
           </a:xfrm>
           <a:prstGeom prst="line">
             <a:avLst/>
@@ -4038,14 +4335,14 @@
       </p:sp>
       <p:sp>
         <p:nvSpPr>
-          <p:cNvPr id="102" name=""/>
+          <p:cNvPr id="99" name=""/>
           <p:cNvSpPr/>
           <p:nvPr/>
         </p:nvSpPr>
         <p:spPr>
           <a:xfrm>
             <a:off x="6098400" y="914400"/>
-            <a:ext cx="0" cy="3429000"/>
+            <a:ext cx="360" cy="3429000"/>
           </a:xfrm>
           <a:prstGeom prst="line">
             <a:avLst/>
@@ -4065,14 +4362,14 @@
       </p:sp>
       <p:sp>
         <p:nvSpPr>
-          <p:cNvPr id="103" name=""/>
+          <p:cNvPr id="100" name=""/>
           <p:cNvSpPr/>
           <p:nvPr/>
         </p:nvSpPr>
         <p:spPr>
           <a:xfrm>
             <a:off x="7012800" y="914400"/>
-            <a:ext cx="0" cy="3429000"/>
+            <a:ext cx="360" cy="3429000"/>
           </a:xfrm>
           <a:prstGeom prst="line">
             <a:avLst/>
@@ -4092,14 +4389,14 @@
       </p:sp>
       <p:sp>
         <p:nvSpPr>
-          <p:cNvPr id="104" name=""/>
+          <p:cNvPr id="101" name=""/>
           <p:cNvSpPr/>
           <p:nvPr/>
         </p:nvSpPr>
         <p:spPr>
           <a:xfrm>
             <a:off x="7927200" y="914400"/>
-            <a:ext cx="0" cy="3429000"/>
+            <a:ext cx="360" cy="3429000"/>
           </a:xfrm>
           <a:prstGeom prst="line">
             <a:avLst/>
@@ -4119,14 +4416,14 @@
       </p:sp>
       <p:sp>
         <p:nvSpPr>
-          <p:cNvPr id="105" name=""/>
+          <p:cNvPr id="102" name=""/>
           <p:cNvSpPr/>
           <p:nvPr/>
         </p:nvSpPr>
         <p:spPr>
           <a:xfrm>
             <a:off x="8841600" y="914400"/>
-            <a:ext cx="0" cy="3429000"/>
+            <a:ext cx="360" cy="3429000"/>
           </a:xfrm>
           <a:prstGeom prst="line">
             <a:avLst/>
@@ -4146,14 +4443,14 @@
       </p:sp>
       <p:sp>
         <p:nvSpPr>
-          <p:cNvPr id="106" name=""/>
+          <p:cNvPr id="103" name=""/>
           <p:cNvSpPr/>
           <p:nvPr/>
         </p:nvSpPr>
         <p:spPr>
           <a:xfrm>
             <a:off x="9756000" y="914400"/>
-            <a:ext cx="0" cy="3429000"/>
+            <a:ext cx="360" cy="3429000"/>
           </a:xfrm>
           <a:prstGeom prst="line">
             <a:avLst/>
@@ -4173,14 +4470,14 @@
       </p:sp>
       <p:sp>
         <p:nvSpPr>
-          <p:cNvPr id="107" name=""/>
-          <p:cNvSpPr txBox="1"/>
+          <p:cNvPr id="104" name=""/>
+          <p:cNvSpPr/>
           <p:nvPr/>
         </p:nvSpPr>
         <p:spPr>
           <a:xfrm>
             <a:off x="2290320" y="4682880"/>
-            <a:ext cx="307080" cy="346320"/>
+            <a:ext cx="306720" cy="345960"/>
           </a:xfrm>
           <a:prstGeom prst="rect">
             <a:avLst/>
@@ -4190,11 +4487,22 @@
             <a:noFill/>
           </a:ln>
         </p:spPr>
+        <p:style>
+          <a:lnRef idx="0"/>
+          <a:fillRef idx="0"/>
+          <a:effectRef idx="0"/>
+          <a:fontRef idx="minor"/>
+        </p:style>
         <p:txBody>
           <a:bodyPr lIns="90000" rIns="90000" tIns="45000" bIns="45000">
             <a:noAutofit/>
           </a:bodyPr>
           <a:p>
+            <a:pPr>
+              <a:lnSpc>
+                <a:spcPct val="100000"/>
+              </a:lnSpc>
+            </a:pPr>
             <a:r>
               <a:rPr b="0" lang="en-US" sz="1800" spc="-1" strike="noStrike">
                 <a:latin typeface="Arial"/>
@@ -4209,14 +4517,14 @@
       </p:sp>
       <p:sp>
         <p:nvSpPr>
-          <p:cNvPr id="108" name=""/>
-          <p:cNvSpPr txBox="1"/>
+          <p:cNvPr id="105" name=""/>
+          <p:cNvSpPr/>
           <p:nvPr/>
         </p:nvSpPr>
         <p:spPr>
           <a:xfrm>
             <a:off x="3132720" y="4682880"/>
-            <a:ext cx="433800" cy="346320"/>
+            <a:ext cx="433440" cy="345960"/>
           </a:xfrm>
           <a:prstGeom prst="rect">
             <a:avLst/>
@@ -4226,11 +4534,22 @@
             <a:noFill/>
           </a:ln>
         </p:spPr>
+        <p:style>
+          <a:lnRef idx="0"/>
+          <a:fillRef idx="0"/>
+          <a:effectRef idx="0"/>
+          <a:fontRef idx="minor"/>
+        </p:style>
         <p:txBody>
           <a:bodyPr lIns="90000" rIns="90000" tIns="45000" bIns="45000">
             <a:noAutofit/>
           </a:bodyPr>
           <a:p>
+            <a:pPr>
+              <a:lnSpc>
+                <a:spcPct val="100000"/>
+              </a:lnSpc>
+            </a:pPr>
             <a:r>
               <a:rPr b="0" lang="en-US" sz="1800" spc="-1" strike="noStrike">
                 <a:latin typeface="Arial"/>
@@ -4245,14 +4564,14 @@
       </p:sp>
       <p:sp>
         <p:nvSpPr>
-          <p:cNvPr id="109" name=""/>
-          <p:cNvSpPr txBox="1"/>
+          <p:cNvPr id="106" name=""/>
+          <p:cNvSpPr/>
           <p:nvPr/>
         </p:nvSpPr>
         <p:spPr>
           <a:xfrm>
             <a:off x="4047120" y="4682880"/>
-            <a:ext cx="433800" cy="346320"/>
+            <a:ext cx="433440" cy="345960"/>
           </a:xfrm>
           <a:prstGeom prst="rect">
             <a:avLst/>
@@ -4262,11 +4581,22 @@
             <a:noFill/>
           </a:ln>
         </p:spPr>
+        <p:style>
+          <a:lnRef idx="0"/>
+          <a:fillRef idx="0"/>
+          <a:effectRef idx="0"/>
+          <a:fontRef idx="minor"/>
+        </p:style>
         <p:txBody>
           <a:bodyPr lIns="90000" rIns="90000" tIns="45000" bIns="45000">
             <a:noAutofit/>
           </a:bodyPr>
           <a:p>
+            <a:pPr>
+              <a:lnSpc>
+                <a:spcPct val="100000"/>
+              </a:lnSpc>
+            </a:pPr>
             <a:r>
               <a:rPr b="0" lang="en-US" sz="1800" spc="-1" strike="noStrike">
                 <a:latin typeface="Arial"/>
@@ -4281,14 +4611,14 @@
       </p:sp>
       <p:sp>
         <p:nvSpPr>
-          <p:cNvPr id="110" name=""/>
-          <p:cNvSpPr txBox="1"/>
+          <p:cNvPr id="107" name=""/>
+          <p:cNvSpPr/>
           <p:nvPr/>
         </p:nvSpPr>
         <p:spPr>
           <a:xfrm>
             <a:off x="4961520" y="4682880"/>
-            <a:ext cx="433800" cy="346320"/>
+            <a:ext cx="433440" cy="345960"/>
           </a:xfrm>
           <a:prstGeom prst="rect">
             <a:avLst/>
@@ -4298,11 +4628,22 @@
             <a:noFill/>
           </a:ln>
         </p:spPr>
+        <p:style>
+          <a:lnRef idx="0"/>
+          <a:fillRef idx="0"/>
+          <a:effectRef idx="0"/>
+          <a:fontRef idx="minor"/>
+        </p:style>
         <p:txBody>
           <a:bodyPr lIns="90000" rIns="90000" tIns="45000" bIns="45000">
             <a:noAutofit/>
           </a:bodyPr>
           <a:p>
+            <a:pPr>
+              <a:lnSpc>
+                <a:spcPct val="100000"/>
+              </a:lnSpc>
+            </a:pPr>
             <a:r>
               <a:rPr b="0" lang="en-US" sz="1800" spc="-1" strike="noStrike">
                 <a:latin typeface="Arial"/>
@@ -4317,14 +4658,14 @@
       </p:sp>
       <p:sp>
         <p:nvSpPr>
-          <p:cNvPr id="111" name=""/>
-          <p:cNvSpPr txBox="1"/>
+          <p:cNvPr id="108" name=""/>
+          <p:cNvSpPr/>
           <p:nvPr/>
         </p:nvSpPr>
         <p:spPr>
           <a:xfrm>
             <a:off x="5875920" y="4682880"/>
-            <a:ext cx="433800" cy="346320"/>
+            <a:ext cx="433440" cy="345960"/>
           </a:xfrm>
           <a:prstGeom prst="rect">
             <a:avLst/>
@@ -4334,11 +4675,22 @@
             <a:noFill/>
           </a:ln>
         </p:spPr>
+        <p:style>
+          <a:lnRef idx="0"/>
+          <a:fillRef idx="0"/>
+          <a:effectRef idx="0"/>
+          <a:fontRef idx="minor"/>
+        </p:style>
         <p:txBody>
           <a:bodyPr lIns="90000" rIns="90000" tIns="45000" bIns="45000">
             <a:noAutofit/>
           </a:bodyPr>
           <a:p>
+            <a:pPr>
+              <a:lnSpc>
+                <a:spcPct val="100000"/>
+              </a:lnSpc>
+            </a:pPr>
             <a:r>
               <a:rPr b="0" lang="en-US" sz="1800" spc="-1" strike="noStrike">
                 <a:latin typeface="Arial"/>
@@ -4353,14 +4705,14 @@
       </p:sp>
       <p:sp>
         <p:nvSpPr>
-          <p:cNvPr id="112" name=""/>
-          <p:cNvSpPr txBox="1"/>
+          <p:cNvPr id="109" name=""/>
+          <p:cNvSpPr/>
           <p:nvPr/>
         </p:nvSpPr>
         <p:spPr>
           <a:xfrm>
             <a:off x="6790320" y="4682880"/>
-            <a:ext cx="433800" cy="346320"/>
+            <a:ext cx="433440" cy="345960"/>
           </a:xfrm>
           <a:prstGeom prst="rect">
             <a:avLst/>
@@ -4370,11 +4722,22 @@
             <a:noFill/>
           </a:ln>
         </p:spPr>
+        <p:style>
+          <a:lnRef idx="0"/>
+          <a:fillRef idx="0"/>
+          <a:effectRef idx="0"/>
+          <a:fontRef idx="minor"/>
+        </p:style>
         <p:txBody>
           <a:bodyPr lIns="90000" rIns="90000" tIns="45000" bIns="45000">
             <a:noAutofit/>
           </a:bodyPr>
           <a:p>
+            <a:pPr>
+              <a:lnSpc>
+                <a:spcPct val="100000"/>
+              </a:lnSpc>
+            </a:pPr>
             <a:r>
               <a:rPr b="0" lang="en-US" sz="1800" spc="-1" strike="noStrike">
                 <a:latin typeface="Arial"/>
@@ -4389,14 +4752,14 @@
       </p:sp>
       <p:sp>
         <p:nvSpPr>
-          <p:cNvPr id="113" name=""/>
-          <p:cNvSpPr txBox="1"/>
+          <p:cNvPr id="110" name=""/>
+          <p:cNvSpPr/>
           <p:nvPr/>
         </p:nvSpPr>
         <p:spPr>
           <a:xfrm>
             <a:off x="7698600" y="4682880"/>
-            <a:ext cx="457200" cy="346320"/>
+            <a:ext cx="456840" cy="345960"/>
           </a:xfrm>
           <a:prstGeom prst="rect">
             <a:avLst/>
@@ -4406,11 +4769,22 @@
             <a:noFill/>
           </a:ln>
         </p:spPr>
+        <p:style>
+          <a:lnRef idx="0"/>
+          <a:fillRef idx="0"/>
+          <a:effectRef idx="0"/>
+          <a:fontRef idx="minor"/>
+        </p:style>
         <p:txBody>
           <a:bodyPr lIns="90000" rIns="90000" tIns="45000" bIns="45000">
             <a:noAutofit/>
           </a:bodyPr>
           <a:p>
+            <a:pPr>
+              <a:lnSpc>
+                <a:spcPct val="100000"/>
+              </a:lnSpc>
+            </a:pPr>
             <a:r>
               <a:rPr b="0" lang="en-US" sz="1800" spc="-1" strike="noStrike">
                 <a:latin typeface="Arial"/>
@@ -4425,14 +4799,14 @@
       </p:sp>
       <p:sp>
         <p:nvSpPr>
-          <p:cNvPr id="114" name=""/>
-          <p:cNvSpPr txBox="1"/>
+          <p:cNvPr id="111" name=""/>
+          <p:cNvSpPr/>
           <p:nvPr/>
         </p:nvSpPr>
         <p:spPr>
           <a:xfrm>
             <a:off x="8619120" y="4682880"/>
-            <a:ext cx="433800" cy="346320"/>
+            <a:ext cx="433440" cy="345960"/>
           </a:xfrm>
           <a:prstGeom prst="rect">
             <a:avLst/>
@@ -4442,11 +4816,22 @@
             <a:noFill/>
           </a:ln>
         </p:spPr>
+        <p:style>
+          <a:lnRef idx="0"/>
+          <a:fillRef idx="0"/>
+          <a:effectRef idx="0"/>
+          <a:fontRef idx="minor"/>
+        </p:style>
         <p:txBody>
           <a:bodyPr lIns="90000" rIns="90000" tIns="45000" bIns="45000">
             <a:noAutofit/>
           </a:bodyPr>
           <a:p>
+            <a:pPr>
+              <a:lnSpc>
+                <a:spcPct val="100000"/>
+              </a:lnSpc>
+            </a:pPr>
             <a:r>
               <a:rPr b="0" lang="en-US" sz="1800" spc="-1" strike="noStrike">
                 <a:latin typeface="Arial"/>
@@ -4461,14 +4846,14 @@
       </p:sp>
       <p:sp>
         <p:nvSpPr>
-          <p:cNvPr id="115" name=""/>
-          <p:cNvSpPr txBox="1"/>
+          <p:cNvPr id="112" name=""/>
+          <p:cNvSpPr/>
           <p:nvPr/>
         </p:nvSpPr>
         <p:spPr>
           <a:xfrm>
             <a:off x="9533520" y="4682880"/>
-            <a:ext cx="433800" cy="346320"/>
+            <a:ext cx="433440" cy="345960"/>
           </a:xfrm>
           <a:prstGeom prst="rect">
             <a:avLst/>
@@ -4478,11 +4863,22 @@
             <a:noFill/>
           </a:ln>
         </p:spPr>
+        <p:style>
+          <a:lnRef idx="0"/>
+          <a:fillRef idx="0"/>
+          <a:effectRef idx="0"/>
+          <a:fontRef idx="minor"/>
+        </p:style>
         <p:txBody>
           <a:bodyPr lIns="90000" rIns="90000" tIns="45000" bIns="45000">
             <a:noAutofit/>
           </a:bodyPr>
           <a:p>
+            <a:pPr>
+              <a:lnSpc>
+                <a:spcPct val="100000"/>
+              </a:lnSpc>
+            </a:pPr>
             <a:r>
               <a:rPr b="0" lang="en-US" sz="1800" spc="-1" strike="noStrike">
                 <a:latin typeface="Arial"/>
@@ -4497,14 +4893,14 @@
       </p:sp>
       <p:sp>
         <p:nvSpPr>
-          <p:cNvPr id="116" name=""/>
-          <p:cNvSpPr txBox="1"/>
+          <p:cNvPr id="113" name=""/>
+          <p:cNvSpPr/>
           <p:nvPr/>
         </p:nvSpPr>
         <p:spPr>
           <a:xfrm>
             <a:off x="1405800" y="4682880"/>
-            <a:ext cx="307080" cy="346320"/>
+            <a:ext cx="306720" cy="345960"/>
           </a:xfrm>
           <a:prstGeom prst="rect">
             <a:avLst/>
@@ -4514,11 +4910,22 @@
             <a:noFill/>
           </a:ln>
         </p:spPr>
+        <p:style>
+          <a:lnRef idx="0"/>
+          <a:fillRef idx="0"/>
+          <a:effectRef idx="0"/>
+          <a:fontRef idx="minor"/>
+        </p:style>
         <p:txBody>
           <a:bodyPr lIns="90000" rIns="90000" tIns="45000" bIns="45000">
             <a:noAutofit/>
           </a:bodyPr>
           <a:p>
+            <a:pPr>
+              <a:lnSpc>
+                <a:spcPct val="100000"/>
+              </a:lnSpc>
+            </a:pPr>
             <a:r>
               <a:rPr b="0" lang="en-US" sz="1800" spc="-1" strike="noStrike">
                 <a:latin typeface="Arial"/>
@@ -4533,14 +4940,14 @@
       </p:sp>
       <p:sp>
         <p:nvSpPr>
-          <p:cNvPr id="117" name=""/>
-          <p:cNvSpPr txBox="1"/>
+          <p:cNvPr id="114" name=""/>
+          <p:cNvSpPr/>
           <p:nvPr/>
         </p:nvSpPr>
         <p:spPr>
           <a:xfrm>
             <a:off x="4233600" y="5140080"/>
-            <a:ext cx="3236400" cy="346320"/>
+            <a:ext cx="3236040" cy="345960"/>
           </a:xfrm>
           <a:prstGeom prst="rect">
             <a:avLst/>
@@ -4550,11 +4957,22 @@
             <a:noFill/>
           </a:ln>
         </p:spPr>
+        <p:style>
+          <a:lnRef idx="0"/>
+          <a:fillRef idx="0"/>
+          <a:effectRef idx="0"/>
+          <a:fontRef idx="minor"/>
+        </p:style>
         <p:txBody>
           <a:bodyPr lIns="90000" rIns="90000" tIns="45000" bIns="45000">
             <a:noAutofit/>
           </a:bodyPr>
           <a:p>
+            <a:pPr>
+              <a:lnSpc>
+                <a:spcPct val="100000"/>
+              </a:lnSpc>
+            </a:pPr>
             <a:r>
               <a:rPr b="0" lang="en-US" sz="1800" spc="-1" strike="noStrike">
                 <a:latin typeface="Arial"/>
@@ -4569,14 +4987,14 @@
       </p:sp>
       <p:sp>
         <p:nvSpPr>
-          <p:cNvPr id="118" name=""/>
-          <p:cNvSpPr txBox="1"/>
+          <p:cNvPr id="115" name=""/>
+          <p:cNvSpPr/>
           <p:nvPr/>
         </p:nvSpPr>
         <p:spPr>
           <a:xfrm>
             <a:off x="658800" y="950400"/>
-            <a:ext cx="1024200" cy="346320"/>
+            <a:ext cx="1023840" cy="345960"/>
           </a:xfrm>
           <a:prstGeom prst="rect">
             <a:avLst/>
@@ -4586,11 +5004,22 @@
             <a:noFill/>
           </a:ln>
         </p:spPr>
+        <p:style>
+          <a:lnRef idx="0"/>
+          <a:fillRef idx="0"/>
+          <a:effectRef idx="0"/>
+          <a:fontRef idx="minor"/>
+        </p:style>
         <p:txBody>
           <a:bodyPr lIns="90000" rIns="90000" tIns="45000" bIns="45000">
             <a:noAutofit/>
           </a:bodyPr>
           <a:p>
+            <a:pPr>
+              <a:lnSpc>
+                <a:spcPct val="100000"/>
+              </a:lnSpc>
+            </a:pPr>
             <a:r>
               <a:rPr b="0" lang="en-US" sz="1800" spc="-1" strike="noStrike">
                 <a:latin typeface="Arial"/>
@@ -4605,14 +5034,14 @@
       </p:sp>
       <p:sp>
         <p:nvSpPr>
-          <p:cNvPr id="119" name=""/>
-          <p:cNvSpPr txBox="1"/>
+          <p:cNvPr id="116" name=""/>
+          <p:cNvSpPr/>
           <p:nvPr/>
         </p:nvSpPr>
         <p:spPr>
           <a:xfrm>
             <a:off x="586800" y="1636200"/>
-            <a:ext cx="1024200" cy="346320"/>
+            <a:ext cx="1023840" cy="345960"/>
           </a:xfrm>
           <a:prstGeom prst="rect">
             <a:avLst/>
@@ -4622,11 +5051,22 @@
             <a:noFill/>
           </a:ln>
         </p:spPr>
+        <p:style>
+          <a:lnRef idx="0"/>
+          <a:fillRef idx="0"/>
+          <a:effectRef idx="0"/>
+          <a:fontRef idx="minor"/>
+        </p:style>
         <p:txBody>
           <a:bodyPr lIns="90000" rIns="90000" tIns="45000" bIns="45000">
             <a:noAutofit/>
           </a:bodyPr>
           <a:p>
+            <a:pPr>
+              <a:lnSpc>
+                <a:spcPct val="100000"/>
+              </a:lnSpc>
+            </a:pPr>
             <a:r>
               <a:rPr b="0" lang="en-US" sz="1800" spc="-1" strike="noStrike">
                 <a:latin typeface="Arial"/>
@@ -4641,14 +5081,14 @@
       </p:sp>
       <p:sp>
         <p:nvSpPr>
-          <p:cNvPr id="120" name=""/>
-          <p:cNvSpPr txBox="1"/>
+          <p:cNvPr id="117" name=""/>
+          <p:cNvSpPr/>
           <p:nvPr/>
         </p:nvSpPr>
         <p:spPr>
           <a:xfrm>
             <a:off x="658800" y="2345400"/>
-            <a:ext cx="1024200" cy="346320"/>
+            <a:ext cx="1023840" cy="345960"/>
           </a:xfrm>
           <a:prstGeom prst="rect">
             <a:avLst/>
@@ -4658,11 +5098,22 @@
             <a:noFill/>
           </a:ln>
         </p:spPr>
+        <p:style>
+          <a:lnRef idx="0"/>
+          <a:fillRef idx="0"/>
+          <a:effectRef idx="0"/>
+          <a:fontRef idx="minor"/>
+        </p:style>
         <p:txBody>
           <a:bodyPr lIns="90000" rIns="90000" tIns="45000" bIns="45000">
             <a:noAutofit/>
           </a:bodyPr>
           <a:p>
+            <a:pPr>
+              <a:lnSpc>
+                <a:spcPct val="100000"/>
+              </a:lnSpc>
+            </a:pPr>
             <a:r>
               <a:rPr b="0" lang="en-US" sz="1800" spc="-1" strike="noStrike">
                 <a:latin typeface="Arial"/>
@@ -4677,14 +5128,14 @@
       </p:sp>
       <p:sp>
         <p:nvSpPr>
-          <p:cNvPr id="121" name=""/>
-          <p:cNvSpPr txBox="1"/>
+          <p:cNvPr id="118" name=""/>
+          <p:cNvSpPr/>
           <p:nvPr/>
         </p:nvSpPr>
         <p:spPr>
           <a:xfrm>
             <a:off x="550800" y="3021480"/>
-            <a:ext cx="1024200" cy="346320"/>
+            <a:ext cx="1023840" cy="345960"/>
           </a:xfrm>
           <a:prstGeom prst="rect">
             <a:avLst/>
@@ -4694,11 +5145,22 @@
             <a:noFill/>
           </a:ln>
         </p:spPr>
+        <p:style>
+          <a:lnRef idx="0"/>
+          <a:fillRef idx="0"/>
+          <a:effectRef idx="0"/>
+          <a:fontRef idx="minor"/>
+        </p:style>
         <p:txBody>
           <a:bodyPr lIns="90000" rIns="90000" tIns="45000" bIns="45000">
             <a:noAutofit/>
           </a:bodyPr>
           <a:p>
+            <a:pPr>
+              <a:lnSpc>
+                <a:spcPct val="100000"/>
+              </a:lnSpc>
+            </a:pPr>
             <a:r>
               <a:rPr b="0" lang="en-US" sz="1800" spc="-1" strike="noStrike">
                 <a:latin typeface="Arial"/>
@@ -4713,14 +5175,14 @@
       </p:sp>
       <p:sp>
         <p:nvSpPr>
-          <p:cNvPr id="122" name=""/>
-          <p:cNvSpPr txBox="1"/>
+          <p:cNvPr id="119" name=""/>
+          <p:cNvSpPr/>
           <p:nvPr/>
         </p:nvSpPr>
         <p:spPr>
           <a:xfrm>
             <a:off x="766800" y="3704400"/>
-            <a:ext cx="1024200" cy="346320"/>
+            <a:ext cx="1023840" cy="345960"/>
           </a:xfrm>
           <a:prstGeom prst="rect">
             <a:avLst/>
@@ -4730,11 +5192,22 @@
             <a:noFill/>
           </a:ln>
         </p:spPr>
+        <p:style>
+          <a:lnRef idx="0"/>
+          <a:fillRef idx="0"/>
+          <a:effectRef idx="0"/>
+          <a:fontRef idx="minor"/>
+        </p:style>
         <p:txBody>
           <a:bodyPr lIns="90000" rIns="90000" tIns="45000" bIns="45000">
             <a:noAutofit/>
           </a:bodyPr>
           <a:p>
+            <a:pPr>
+              <a:lnSpc>
+                <a:spcPct val="100000"/>
+              </a:lnSpc>
+            </a:pPr>
             <a:r>
               <a:rPr b="0" lang="en-US" sz="1800" spc="-1" strike="noStrike">
                 <a:latin typeface="Arial"/>
@@ -4749,14 +5222,14 @@
       </p:sp>
       <p:sp>
         <p:nvSpPr>
-          <p:cNvPr id="123" name=""/>
+          <p:cNvPr id="120" name=""/>
           <p:cNvSpPr/>
           <p:nvPr/>
         </p:nvSpPr>
         <p:spPr>
           <a:xfrm>
             <a:off x="1576800" y="914760"/>
-            <a:ext cx="0" cy="3429000"/>
+            <a:ext cx="360" cy="3429000"/>
           </a:xfrm>
           <a:prstGeom prst="line">
             <a:avLst/>
@@ -4776,14 +5249,14 @@
       </p:sp>
       <p:sp>
         <p:nvSpPr>
-          <p:cNvPr id="124" name=""/>
+          <p:cNvPr id="121" name=""/>
           <p:cNvSpPr/>
           <p:nvPr/>
         </p:nvSpPr>
         <p:spPr>
           <a:xfrm>
             <a:off x="1576800" y="914760"/>
-            <a:ext cx="4521600" cy="456840"/>
+            <a:ext cx="4521240" cy="456480"/>
           </a:xfrm>
           <a:prstGeom prst="rect">
             <a:avLst/>
@@ -4806,14 +5279,14 @@
       </p:sp>
       <p:sp>
         <p:nvSpPr>
-          <p:cNvPr id="125" name=""/>
+          <p:cNvPr id="122" name=""/>
           <p:cNvSpPr/>
           <p:nvPr/>
         </p:nvSpPr>
         <p:spPr>
           <a:xfrm>
             <a:off x="1576800" y="1600200"/>
-            <a:ext cx="4521600" cy="456840"/>
+            <a:ext cx="4521240" cy="456480"/>
           </a:xfrm>
           <a:prstGeom prst="rect">
             <a:avLst/>
@@ -4836,14 +5309,14 @@
       </p:sp>
       <p:sp>
         <p:nvSpPr>
-          <p:cNvPr id="126" name=""/>
+          <p:cNvPr id="123" name=""/>
           <p:cNvSpPr/>
           <p:nvPr/>
         </p:nvSpPr>
         <p:spPr>
           <a:xfrm>
             <a:off x="1576800" y="2286360"/>
-            <a:ext cx="6350400" cy="456840"/>
+            <a:ext cx="6350040" cy="456480"/>
           </a:xfrm>
           <a:prstGeom prst="rect">
             <a:avLst/>
@@ -4866,14 +5339,14 @@
       </p:sp>
       <p:sp>
         <p:nvSpPr>
-          <p:cNvPr id="127" name=""/>
+          <p:cNvPr id="124" name=""/>
           <p:cNvSpPr/>
           <p:nvPr/>
         </p:nvSpPr>
         <p:spPr>
           <a:xfrm>
             <a:off x="1576800" y="2971800"/>
-            <a:ext cx="6350400" cy="456840"/>
+            <a:ext cx="6350040" cy="456480"/>
           </a:xfrm>
           <a:prstGeom prst="rect">
             <a:avLst/>
@@ -4896,14 +5369,14 @@
       </p:sp>
       <p:sp>
         <p:nvSpPr>
-          <p:cNvPr id="128" name=""/>
+          <p:cNvPr id="125" name=""/>
           <p:cNvSpPr/>
           <p:nvPr/>
         </p:nvSpPr>
         <p:spPr>
           <a:xfrm>
             <a:off x="1576800" y="3657600"/>
-            <a:ext cx="8179200" cy="456840"/>
+            <a:ext cx="8178840" cy="456480"/>
           </a:xfrm>
           <a:prstGeom prst="rect">
             <a:avLst/>
@@ -4926,14 +5399,14 @@
       </p:sp>
       <p:sp>
         <p:nvSpPr>
-          <p:cNvPr id="129" name=""/>
-          <p:cNvSpPr txBox="1"/>
+          <p:cNvPr id="126" name=""/>
+          <p:cNvSpPr/>
           <p:nvPr/>
         </p:nvSpPr>
         <p:spPr>
           <a:xfrm>
             <a:off x="9516600" y="3692160"/>
-            <a:ext cx="473400" cy="386280"/>
+            <a:ext cx="473040" cy="385920"/>
           </a:xfrm>
           <a:prstGeom prst="rect">
             <a:avLst/>
@@ -4949,12 +5422,22 @@
             </a:solidFill>
           </a:ln>
         </p:spPr>
+        <p:style>
+          <a:lnRef idx="0"/>
+          <a:fillRef idx="0"/>
+          <a:effectRef idx="0"/>
+          <a:fontRef idx="minor"/>
+        </p:style>
         <p:txBody>
           <a:bodyPr lIns="90000" rIns="90000" tIns="45000" bIns="45000">
             <a:noAutofit/>
           </a:bodyPr>
           <a:p>
-            <a:pPr algn="ctr"/>
+            <a:pPr algn="ctr">
+              <a:lnSpc>
+                <a:spcPct val="100000"/>
+              </a:lnSpc>
+            </a:pPr>
             <a:r>
               <a:rPr b="0" lang="en-US" sz="1050" spc="-1" strike="noStrike">
                 <a:latin typeface="Arial"/>
@@ -4966,7 +5449,11 @@
             </a:endParaRPr>
           </a:p>
           <a:p>
-            <a:pPr algn="ctr"/>
+            <a:pPr algn="ctr">
+              <a:lnSpc>
+                <a:spcPct val="100000"/>
+              </a:lnSpc>
+            </a:pPr>
             <a:r>
               <a:rPr b="0" lang="en-US" sz="1050" spc="-1" strike="noStrike">
                 <a:latin typeface="Arial"/>
@@ -4981,14 +5468,14 @@
       </p:sp>
       <p:sp>
         <p:nvSpPr>
-          <p:cNvPr id="130" name=""/>
-          <p:cNvSpPr txBox="1"/>
+          <p:cNvPr id="127" name=""/>
+          <p:cNvSpPr/>
           <p:nvPr/>
         </p:nvSpPr>
         <p:spPr>
           <a:xfrm>
             <a:off x="7684200" y="3007800"/>
-            <a:ext cx="473400" cy="386280"/>
+            <a:ext cx="473040" cy="385920"/>
           </a:xfrm>
           <a:prstGeom prst="rect">
             <a:avLst/>
@@ -5004,12 +5491,22 @@
             </a:solidFill>
           </a:ln>
         </p:spPr>
+        <p:style>
+          <a:lnRef idx="0"/>
+          <a:fillRef idx="0"/>
+          <a:effectRef idx="0"/>
+          <a:fontRef idx="minor"/>
+        </p:style>
         <p:txBody>
           <a:bodyPr lIns="90000" rIns="90000" tIns="45000" bIns="45000">
             <a:noAutofit/>
           </a:bodyPr>
           <a:p>
-            <a:pPr algn="ctr"/>
+            <a:pPr algn="ctr">
+              <a:lnSpc>
+                <a:spcPct val="100000"/>
+              </a:lnSpc>
+            </a:pPr>
             <a:r>
               <a:rPr b="0" lang="en-US" sz="1050" spc="-1" strike="noStrike">
                 <a:latin typeface="Arial"/>
@@ -5021,7 +5518,11 @@
             </a:endParaRPr>
           </a:p>
           <a:p>
-            <a:pPr algn="ctr"/>
+            <a:pPr algn="ctr">
+              <a:lnSpc>
+                <a:spcPct val="100000"/>
+              </a:lnSpc>
+            </a:pPr>
             <a:r>
               <a:rPr b="0" lang="en-US" sz="1050" spc="-1" strike="noStrike">
                 <a:latin typeface="Arial"/>
@@ -5036,14 +5537,14 @@
       </p:sp>
       <p:sp>
         <p:nvSpPr>
-          <p:cNvPr id="131" name=""/>
-          <p:cNvSpPr txBox="1"/>
+          <p:cNvPr id="128" name=""/>
+          <p:cNvSpPr/>
           <p:nvPr/>
         </p:nvSpPr>
         <p:spPr>
           <a:xfrm>
             <a:off x="7684200" y="2322360"/>
-            <a:ext cx="473400" cy="386280"/>
+            <a:ext cx="473040" cy="385920"/>
           </a:xfrm>
           <a:prstGeom prst="rect">
             <a:avLst/>
@@ -5059,12 +5560,22 @@
             </a:solidFill>
           </a:ln>
         </p:spPr>
+        <p:style>
+          <a:lnRef idx="0"/>
+          <a:fillRef idx="0"/>
+          <a:effectRef idx="0"/>
+          <a:fontRef idx="minor"/>
+        </p:style>
         <p:txBody>
           <a:bodyPr lIns="90000" rIns="90000" tIns="45000" bIns="45000">
             <a:noAutofit/>
           </a:bodyPr>
           <a:p>
-            <a:pPr algn="ctr"/>
+            <a:pPr algn="ctr">
+              <a:lnSpc>
+                <a:spcPct val="100000"/>
+              </a:lnSpc>
+            </a:pPr>
             <a:r>
               <a:rPr b="0" lang="en-US" sz="1050" spc="-1" strike="noStrike">
                 <a:latin typeface="Arial"/>
@@ -5076,7 +5587,11 @@
             </a:endParaRPr>
           </a:p>
           <a:p>
-            <a:pPr algn="ctr"/>
+            <a:pPr algn="ctr">
+              <a:lnSpc>
+                <a:spcPct val="100000"/>
+              </a:lnSpc>
+            </a:pPr>
             <a:r>
               <a:rPr b="0" lang="en-US" sz="1050" spc="-1" strike="noStrike">
                 <a:latin typeface="Arial"/>
@@ -5091,14 +5606,14 @@
       </p:sp>
       <p:sp>
         <p:nvSpPr>
-          <p:cNvPr id="132" name=""/>
-          <p:cNvSpPr txBox="1"/>
+          <p:cNvPr id="129" name=""/>
+          <p:cNvSpPr/>
           <p:nvPr/>
         </p:nvSpPr>
         <p:spPr>
           <a:xfrm>
             <a:off x="5855400" y="1635120"/>
-            <a:ext cx="473400" cy="386280"/>
+            <a:ext cx="473040" cy="385920"/>
           </a:xfrm>
           <a:prstGeom prst="rect">
             <a:avLst/>
@@ -5114,12 +5629,22 @@
             </a:solidFill>
           </a:ln>
         </p:spPr>
+        <p:style>
+          <a:lnRef idx="0"/>
+          <a:fillRef idx="0"/>
+          <a:effectRef idx="0"/>
+          <a:fontRef idx="minor"/>
+        </p:style>
         <p:txBody>
           <a:bodyPr lIns="90000" rIns="90000" tIns="45000" bIns="45000">
             <a:noAutofit/>
           </a:bodyPr>
           <a:p>
-            <a:pPr algn="ctr"/>
+            <a:pPr algn="ctr">
+              <a:lnSpc>
+                <a:spcPct val="100000"/>
+              </a:lnSpc>
+            </a:pPr>
             <a:r>
               <a:rPr b="0" lang="en-US" sz="1050" spc="-1" strike="noStrike">
                 <a:latin typeface="Arial"/>
@@ -5131,7 +5656,11 @@
             </a:endParaRPr>
           </a:p>
           <a:p>
-            <a:pPr algn="ctr"/>
+            <a:pPr algn="ctr">
+              <a:lnSpc>
+                <a:spcPct val="100000"/>
+              </a:lnSpc>
+            </a:pPr>
             <a:r>
               <a:rPr b="0" lang="en-US" sz="1050" spc="-1" strike="noStrike">
                 <a:latin typeface="Arial"/>
@@ -5146,14 +5675,14 @@
       </p:sp>
       <p:sp>
         <p:nvSpPr>
-          <p:cNvPr id="133" name=""/>
-          <p:cNvSpPr txBox="1"/>
+          <p:cNvPr id="130" name=""/>
+          <p:cNvSpPr/>
           <p:nvPr/>
         </p:nvSpPr>
         <p:spPr>
           <a:xfrm>
             <a:off x="5855400" y="949320"/>
-            <a:ext cx="473400" cy="386280"/>
+            <a:ext cx="473040" cy="385920"/>
           </a:xfrm>
           <a:prstGeom prst="rect">
             <a:avLst/>
@@ -5169,12 +5698,22 @@
             </a:solidFill>
           </a:ln>
         </p:spPr>
+        <p:style>
+          <a:lnRef idx="0"/>
+          <a:fillRef idx="0"/>
+          <a:effectRef idx="0"/>
+          <a:fontRef idx="minor"/>
+        </p:style>
         <p:txBody>
           <a:bodyPr lIns="90000" rIns="90000" tIns="45000" bIns="45000">
             <a:noAutofit/>
           </a:bodyPr>
           <a:p>
-            <a:pPr algn="ctr"/>
+            <a:pPr algn="ctr">
+              <a:lnSpc>
+                <a:spcPct val="100000"/>
+              </a:lnSpc>
+            </a:pPr>
             <a:r>
               <a:rPr b="0" lang="en-US" sz="1050" spc="-1" strike="noStrike">
                 <a:latin typeface="Arial"/>
@@ -5186,7 +5725,11 @@
             </a:endParaRPr>
           </a:p>
           <a:p>
-            <a:pPr algn="ctr"/>
+            <a:pPr algn="ctr">
+              <a:lnSpc>
+                <a:spcPct val="100000"/>
+              </a:lnSpc>
+            </a:pPr>
             <a:r>
               <a:rPr b="0" lang="en-US" sz="1050" spc="-1" strike="noStrike">
                 <a:latin typeface="Arial"/>
@@ -5201,14 +5744,14 @@
       </p:sp>
       <p:sp>
         <p:nvSpPr>
-          <p:cNvPr id="134" name=""/>
-          <p:cNvSpPr txBox="1"/>
+          <p:cNvPr id="131" name=""/>
+          <p:cNvSpPr/>
           <p:nvPr/>
         </p:nvSpPr>
         <p:spPr>
           <a:xfrm>
             <a:off x="7819200" y="3692160"/>
-            <a:ext cx="464040" cy="386280"/>
+            <a:ext cx="463680" cy="385920"/>
           </a:xfrm>
           <a:prstGeom prst="rect">
             <a:avLst/>
@@ -5224,12 +5767,22 @@
             </a:solidFill>
           </a:ln>
         </p:spPr>
+        <p:style>
+          <a:lnRef idx="0"/>
+          <a:fillRef idx="0"/>
+          <a:effectRef idx="0"/>
+          <a:fontRef idx="minor"/>
+        </p:style>
         <p:txBody>
           <a:bodyPr lIns="90000" rIns="90000" tIns="45000" bIns="45000">
             <a:noAutofit/>
           </a:bodyPr>
           <a:p>
-            <a:pPr algn="ctr"/>
+            <a:pPr algn="ctr">
+              <a:lnSpc>
+                <a:spcPct val="100000"/>
+              </a:lnSpc>
+            </a:pPr>
             <a:r>
               <a:rPr b="0" lang="en-US" sz="1050" spc="-1" strike="noStrike">
                 <a:latin typeface="Arial"/>
@@ -5241,7 +5794,11 @@
             </a:endParaRPr>
           </a:p>
           <a:p>
-            <a:pPr algn="ctr"/>
+            <a:pPr algn="ctr">
+              <a:lnSpc>
+                <a:spcPct val="100000"/>
+              </a:lnSpc>
+            </a:pPr>
             <a:r>
               <a:rPr b="0" lang="en-US" sz="1050" spc="-1" strike="noStrike">
                 <a:latin typeface="Arial"/>
@@ -5256,14 +5813,14 @@
       </p:sp>
       <p:sp>
         <p:nvSpPr>
-          <p:cNvPr id="135" name=""/>
-          <p:cNvSpPr txBox="1"/>
+          <p:cNvPr id="132" name=""/>
+          <p:cNvSpPr/>
           <p:nvPr/>
         </p:nvSpPr>
         <p:spPr>
           <a:xfrm>
             <a:off x="9516960" y="3692520"/>
-            <a:ext cx="473400" cy="386280"/>
+            <a:ext cx="473040" cy="385920"/>
           </a:xfrm>
           <a:prstGeom prst="rect">
             <a:avLst/>
@@ -5279,12 +5836,22 @@
             </a:solidFill>
           </a:ln>
         </p:spPr>
+        <p:style>
+          <a:lnRef idx="0"/>
+          <a:fillRef idx="0"/>
+          <a:effectRef idx="0"/>
+          <a:fontRef idx="minor"/>
+        </p:style>
         <p:txBody>
           <a:bodyPr lIns="90000" rIns="90000" tIns="45000" bIns="45000">
             <a:noAutofit/>
           </a:bodyPr>
           <a:p>
-            <a:pPr algn="ctr"/>
+            <a:pPr algn="ctr">
+              <a:lnSpc>
+                <a:spcPct val="100000"/>
+              </a:lnSpc>
+            </a:pPr>
             <a:r>
               <a:rPr b="0" lang="en-US" sz="1050" spc="-1" strike="noStrike">
                 <a:latin typeface="Arial"/>
@@ -5296,7 +5863,11 @@
             </a:endParaRPr>
           </a:p>
           <a:p>
-            <a:pPr algn="ctr"/>
+            <a:pPr algn="ctr">
+              <a:lnSpc>
+                <a:spcPct val="100000"/>
+              </a:lnSpc>
+            </a:pPr>
             <a:r>
               <a:rPr b="0" lang="en-US" sz="1050" spc="-1" strike="noStrike">
                 <a:latin typeface="Arial"/>
@@ -5311,14 +5882,14 @@
       </p:sp>
       <p:sp>
         <p:nvSpPr>
-          <p:cNvPr id="136" name=""/>
-          <p:cNvSpPr txBox="1"/>
+          <p:cNvPr id="133" name=""/>
+          <p:cNvSpPr/>
           <p:nvPr/>
         </p:nvSpPr>
         <p:spPr>
           <a:xfrm>
             <a:off x="3463200" y="3685320"/>
-            <a:ext cx="473400" cy="386280"/>
+            <a:ext cx="473040" cy="385920"/>
           </a:xfrm>
           <a:prstGeom prst="rect">
             <a:avLst/>
@@ -5334,12 +5905,22 @@
             </a:solidFill>
           </a:ln>
         </p:spPr>
+        <p:style>
+          <a:lnRef idx="0"/>
+          <a:fillRef idx="0"/>
+          <a:effectRef idx="0"/>
+          <a:fontRef idx="minor"/>
+        </p:style>
         <p:txBody>
           <a:bodyPr lIns="90000" rIns="90000" tIns="45000" bIns="45000">
             <a:noAutofit/>
           </a:bodyPr>
           <a:p>
-            <a:pPr algn="ctr"/>
+            <a:pPr algn="ctr">
+              <a:lnSpc>
+                <a:spcPct val="100000"/>
+              </a:lnSpc>
+            </a:pPr>
             <a:r>
               <a:rPr b="0" lang="en-US" sz="1050" spc="-1" strike="noStrike">
                 <a:latin typeface="Arial"/>
@@ -5351,7 +5932,11 @@
             </a:endParaRPr>
           </a:p>
           <a:p>
-            <a:pPr algn="ctr"/>
+            <a:pPr algn="ctr">
+              <a:lnSpc>
+                <a:spcPct val="100000"/>
+              </a:lnSpc>
+            </a:pPr>
             <a:r>
               <a:rPr b="0" lang="en-US" sz="1050" spc="-1" strike="noStrike">
                 <a:latin typeface="Arial"/>
@@ -5366,14 +5951,14 @@
       </p:sp>
       <p:sp>
         <p:nvSpPr>
-          <p:cNvPr id="137" name=""/>
-          <p:cNvSpPr txBox="1"/>
+          <p:cNvPr id="134" name=""/>
+          <p:cNvSpPr/>
           <p:nvPr/>
         </p:nvSpPr>
         <p:spPr>
           <a:xfrm>
             <a:off x="6051600" y="3007800"/>
-            <a:ext cx="464040" cy="386280"/>
+            <a:ext cx="463680" cy="385920"/>
           </a:xfrm>
           <a:prstGeom prst="rect">
             <a:avLst/>
@@ -5389,12 +5974,22 @@
             </a:solidFill>
           </a:ln>
         </p:spPr>
+        <p:style>
+          <a:lnRef idx="0"/>
+          <a:fillRef idx="0"/>
+          <a:effectRef idx="0"/>
+          <a:fontRef idx="minor"/>
+        </p:style>
         <p:txBody>
           <a:bodyPr lIns="90000" rIns="90000" tIns="45000" bIns="45000">
             <a:noAutofit/>
           </a:bodyPr>
           <a:p>
-            <a:pPr algn="ctr"/>
+            <a:pPr algn="ctr">
+              <a:lnSpc>
+                <a:spcPct val="100000"/>
+              </a:lnSpc>
+            </a:pPr>
             <a:r>
               <a:rPr b="0" lang="en-US" sz="1050" spc="-1" strike="noStrike">
                 <a:latin typeface="Arial"/>
@@ -5406,7 +6001,11 @@
             </a:endParaRPr>
           </a:p>
           <a:p>
-            <a:pPr algn="ctr"/>
+            <a:pPr algn="ctr">
+              <a:lnSpc>
+                <a:spcPct val="100000"/>
+              </a:lnSpc>
+            </a:pPr>
             <a:r>
               <a:rPr b="0" lang="en-US" sz="1050" spc="-1" strike="noStrike">
                 <a:latin typeface="Arial"/>
@@ -5421,14 +6020,14 @@
       </p:sp>
       <p:sp>
         <p:nvSpPr>
-          <p:cNvPr id="138" name=""/>
-          <p:cNvSpPr txBox="1"/>
+          <p:cNvPr id="135" name=""/>
+          <p:cNvSpPr/>
           <p:nvPr/>
         </p:nvSpPr>
         <p:spPr>
           <a:xfrm>
             <a:off x="6057360" y="2320920"/>
-            <a:ext cx="464040" cy="386280"/>
+            <a:ext cx="463680" cy="385920"/>
           </a:xfrm>
           <a:prstGeom prst="rect">
             <a:avLst/>
@@ -5444,12 +6043,22 @@
             </a:solidFill>
           </a:ln>
         </p:spPr>
+        <p:style>
+          <a:lnRef idx="0"/>
+          <a:fillRef idx="0"/>
+          <a:effectRef idx="0"/>
+          <a:fontRef idx="minor"/>
+        </p:style>
         <p:txBody>
           <a:bodyPr lIns="90000" rIns="90000" tIns="45000" bIns="45000">
             <a:noAutofit/>
           </a:bodyPr>
           <a:p>
-            <a:pPr algn="ctr"/>
+            <a:pPr algn="ctr">
+              <a:lnSpc>
+                <a:spcPct val="100000"/>
+              </a:lnSpc>
+            </a:pPr>
             <a:r>
               <a:rPr b="0" lang="en-US" sz="1050" spc="-1" strike="noStrike">
                 <a:latin typeface="Arial"/>
@@ -5461,7 +6070,11 @@
             </a:endParaRPr>
           </a:p>
           <a:p>
-            <a:pPr algn="ctr"/>
+            <a:pPr algn="ctr">
+              <a:lnSpc>
+                <a:spcPct val="100000"/>
+              </a:lnSpc>
+            </a:pPr>
             <a:r>
               <a:rPr b="0" lang="en-US" sz="1050" spc="-1" strike="noStrike">
                 <a:latin typeface="Arial"/>
@@ -5476,14 +6089,14 @@
       </p:sp>
       <p:sp>
         <p:nvSpPr>
-          <p:cNvPr id="139" name=""/>
-          <p:cNvSpPr txBox="1"/>
+          <p:cNvPr id="136" name=""/>
+          <p:cNvSpPr/>
           <p:nvPr/>
         </p:nvSpPr>
         <p:spPr>
           <a:xfrm>
             <a:off x="4222800" y="949320"/>
-            <a:ext cx="464040" cy="386280"/>
+            <a:ext cx="463680" cy="385920"/>
           </a:xfrm>
           <a:prstGeom prst="rect">
             <a:avLst/>
@@ -5499,12 +6112,22 @@
             </a:solidFill>
           </a:ln>
         </p:spPr>
+        <p:style>
+          <a:lnRef idx="0"/>
+          <a:fillRef idx="0"/>
+          <a:effectRef idx="0"/>
+          <a:fontRef idx="minor"/>
+        </p:style>
         <p:txBody>
           <a:bodyPr lIns="90000" rIns="90000" tIns="45000" bIns="45000">
             <a:noAutofit/>
           </a:bodyPr>
           <a:p>
-            <a:pPr algn="ctr"/>
+            <a:pPr algn="ctr">
+              <a:lnSpc>
+                <a:spcPct val="100000"/>
+              </a:lnSpc>
+            </a:pPr>
             <a:r>
               <a:rPr b="0" lang="en-US" sz="1050" spc="-1" strike="noStrike">
                 <a:latin typeface="Arial"/>
@@ -5516,7 +6139,11 @@
             </a:endParaRPr>
           </a:p>
           <a:p>
-            <a:pPr algn="ctr"/>
+            <a:pPr algn="ctr">
+              <a:lnSpc>
+                <a:spcPct val="100000"/>
+              </a:lnSpc>
+            </a:pPr>
             <a:r>
               <a:rPr b="0" lang="en-US" sz="1050" spc="-1" strike="noStrike">
                 <a:latin typeface="Arial"/>
@@ -5531,14 +6158,14 @@
       </p:sp>
       <p:sp>
         <p:nvSpPr>
-          <p:cNvPr id="140" name=""/>
-          <p:cNvSpPr txBox="1"/>
+          <p:cNvPr id="137" name=""/>
+          <p:cNvSpPr/>
           <p:nvPr/>
         </p:nvSpPr>
         <p:spPr>
           <a:xfrm>
             <a:off x="4215960" y="1636200"/>
-            <a:ext cx="464040" cy="386280"/>
+            <a:ext cx="463680" cy="385920"/>
           </a:xfrm>
           <a:prstGeom prst="rect">
             <a:avLst/>
@@ -5554,12 +6181,22 @@
             </a:solidFill>
           </a:ln>
         </p:spPr>
+        <p:style>
+          <a:lnRef idx="0"/>
+          <a:fillRef idx="0"/>
+          <a:effectRef idx="0"/>
+          <a:fontRef idx="minor"/>
+        </p:style>
         <p:txBody>
           <a:bodyPr lIns="90000" rIns="90000" tIns="45000" bIns="45000">
             <a:noAutofit/>
           </a:bodyPr>
           <a:p>
-            <a:pPr algn="ctr"/>
+            <a:pPr algn="ctr">
+              <a:lnSpc>
+                <a:spcPct val="100000"/>
+              </a:lnSpc>
+            </a:pPr>
             <a:r>
               <a:rPr b="0" lang="en-US" sz="1050" spc="-1" strike="noStrike">
                 <a:latin typeface="Arial"/>
@@ -5571,7 +6208,11 @@
             </a:endParaRPr>
           </a:p>
           <a:p>
-            <a:pPr algn="ctr"/>
+            <a:pPr algn="ctr">
+              <a:lnSpc>
+                <a:spcPct val="100000"/>
+              </a:lnSpc>
+            </a:pPr>
             <a:r>
               <a:rPr b="0" lang="en-US" sz="1050" spc="-1" strike="noStrike">
                 <a:latin typeface="Arial"/>
@@ -5586,14 +6227,14 @@
       </p:sp>
       <p:sp>
         <p:nvSpPr>
-          <p:cNvPr id="141" name=""/>
-          <p:cNvSpPr txBox="1"/>
+          <p:cNvPr id="138" name=""/>
+          <p:cNvSpPr/>
           <p:nvPr/>
         </p:nvSpPr>
         <p:spPr>
           <a:xfrm>
             <a:off x="3128400" y="2320920"/>
-            <a:ext cx="473400" cy="386280"/>
+            <a:ext cx="473040" cy="385920"/>
           </a:xfrm>
           <a:prstGeom prst="rect">
             <a:avLst/>
@@ -5609,12 +6250,22 @@
             </a:solidFill>
           </a:ln>
         </p:spPr>
+        <p:style>
+          <a:lnRef idx="0"/>
+          <a:fillRef idx="0"/>
+          <a:effectRef idx="0"/>
+          <a:fontRef idx="minor"/>
+        </p:style>
         <p:txBody>
           <a:bodyPr lIns="90000" rIns="90000" tIns="45000" bIns="45000">
             <a:noAutofit/>
           </a:bodyPr>
           <a:p>
-            <a:pPr algn="ctr"/>
+            <a:pPr algn="ctr">
+              <a:lnSpc>
+                <a:spcPct val="100000"/>
+              </a:lnSpc>
+            </a:pPr>
             <a:r>
               <a:rPr b="0" lang="en-US" sz="1050" spc="-1" strike="noStrike">
                 <a:latin typeface="Arial"/>
@@ -5626,7 +6277,11 @@
             </a:endParaRPr>
           </a:p>
           <a:p>
-            <a:pPr algn="ctr"/>
+            <a:pPr algn="ctr">
+              <a:lnSpc>
+                <a:spcPct val="100000"/>
+              </a:lnSpc>
+            </a:pPr>
             <a:r>
               <a:rPr b="0" lang="en-US" sz="1050" spc="-1" strike="noStrike">
                 <a:latin typeface="Arial"/>
@@ -5641,14 +6296,14 @@
       </p:sp>
       <p:sp>
         <p:nvSpPr>
-          <p:cNvPr id="142" name=""/>
-          <p:cNvSpPr txBox="1"/>
+          <p:cNvPr id="139" name=""/>
+          <p:cNvSpPr/>
           <p:nvPr/>
         </p:nvSpPr>
         <p:spPr>
           <a:xfrm>
             <a:off x="3112200" y="3007800"/>
-            <a:ext cx="473400" cy="386280"/>
+            <a:ext cx="473040" cy="385920"/>
           </a:xfrm>
           <a:prstGeom prst="rect">
             <a:avLst/>
@@ -5664,12 +6319,22 @@
             </a:solidFill>
           </a:ln>
         </p:spPr>
+        <p:style>
+          <a:lnRef idx="0"/>
+          <a:fillRef idx="0"/>
+          <a:effectRef idx="0"/>
+          <a:fontRef idx="minor"/>
+        </p:style>
         <p:txBody>
           <a:bodyPr lIns="90000" rIns="90000" tIns="45000" bIns="45000">
             <a:noAutofit/>
           </a:bodyPr>
           <a:p>
-            <a:pPr algn="ctr"/>
+            <a:pPr algn="ctr">
+              <a:lnSpc>
+                <a:spcPct val="100000"/>
+              </a:lnSpc>
+            </a:pPr>
             <a:r>
               <a:rPr b="0" lang="en-US" sz="1050" spc="-1" strike="noStrike">
                 <a:latin typeface="Arial"/>
@@ -5681,7 +6346,11 @@
             </a:endParaRPr>
           </a:p>
           <a:p>
-            <a:pPr algn="ctr"/>
+            <a:pPr algn="ctr">
+              <a:lnSpc>
+                <a:spcPct val="100000"/>
+              </a:lnSpc>
+            </a:pPr>
             <a:r>
               <a:rPr b="0" lang="en-US" sz="1050" spc="-1" strike="noStrike">
                 <a:latin typeface="Arial"/>
@@ -5696,14 +6365,14 @@
       </p:sp>
       <p:sp>
         <p:nvSpPr>
-          <p:cNvPr id="143" name=""/>
-          <p:cNvSpPr txBox="1"/>
+          <p:cNvPr id="140" name=""/>
+          <p:cNvSpPr/>
           <p:nvPr/>
         </p:nvSpPr>
         <p:spPr>
           <a:xfrm rot="16180800">
             <a:off x="-392040" y="2382840"/>
-            <a:ext cx="1405800" cy="373680"/>
+            <a:ext cx="1405440" cy="373320"/>
           </a:xfrm>
           <a:prstGeom prst="rect">
             <a:avLst/>
@@ -5713,11 +6382,22 @@
             <a:noFill/>
           </a:ln>
         </p:spPr>
+        <p:style>
+          <a:lnRef idx="0"/>
+          <a:fillRef idx="0"/>
+          <a:effectRef idx="0"/>
+          <a:fontRef idx="minor"/>
+        </p:style>
         <p:txBody>
           <a:bodyPr lIns="90000" rIns="90000" tIns="45000" bIns="45000">
             <a:noAutofit/>
           </a:bodyPr>
           <a:p>
+            <a:pPr>
+              <a:lnSpc>
+                <a:spcPct val="100000"/>
+              </a:lnSpc>
+            </a:pPr>
             <a:r>
               <a:rPr b="0" lang="en-US" sz="2000" spc="-1" strike="noStrike">
                 <a:latin typeface="Arial"/>
@@ -5732,28 +6412,28 @@
       </p:sp>
       <p:grpSp>
         <p:nvGrpSpPr>
-          <p:cNvPr id="144" name=""/>
+          <p:cNvPr id="141" name=""/>
           <p:cNvGrpSpPr/>
           <p:nvPr/>
         </p:nvGrpSpPr>
         <p:grpSpPr>
           <a:xfrm>
             <a:off x="7664400" y="299520"/>
-            <a:ext cx="2023920" cy="386280"/>
+            <a:ext cx="2023560" cy="385920"/>
             <a:chOff x="7664400" y="299520"/>
-            <a:chExt cx="2023920" cy="386280"/>
+            <a:chExt cx="2023560" cy="385920"/>
           </a:xfrm>
         </p:grpSpPr>
         <p:sp>
           <p:nvSpPr>
-            <p:cNvPr id="145" name=""/>
+            <p:cNvPr id="142" name=""/>
             <p:cNvSpPr/>
             <p:nvPr/>
           </p:nvSpPr>
           <p:spPr>
             <a:xfrm>
               <a:off x="7772400" y="339480"/>
-              <a:ext cx="1828800" cy="346320"/>
+              <a:ext cx="1828440" cy="345960"/>
             </a:xfrm>
             <a:prstGeom prst="rect">
               <a:avLst/>
@@ -5774,28 +6454,28 @@
         </p:sp>
         <p:grpSp>
           <p:nvGrpSpPr>
-            <p:cNvPr id="146" name=""/>
+            <p:cNvPr id="143" name=""/>
             <p:cNvGrpSpPr/>
             <p:nvPr/>
           </p:nvGrpSpPr>
           <p:grpSpPr>
             <a:xfrm>
               <a:off x="7664400" y="299520"/>
-              <a:ext cx="2023920" cy="386280"/>
+              <a:ext cx="2023560" cy="385920"/>
               <a:chOff x="7664400" y="299520"/>
-              <a:chExt cx="2023920" cy="386280"/>
+              <a:chExt cx="2023560" cy="385920"/>
             </a:xfrm>
           </p:grpSpPr>
           <p:sp>
             <p:nvSpPr>
-              <p:cNvPr id="147" name=""/>
-              <p:cNvSpPr txBox="1"/>
+              <p:cNvPr id="144" name=""/>
+              <p:cNvSpPr/>
               <p:nvPr/>
             </p:nvSpPr>
             <p:spPr>
               <a:xfrm>
                 <a:off x="7664400" y="299520"/>
-                <a:ext cx="650160" cy="386280"/>
+                <a:ext cx="649800" cy="385920"/>
               </a:xfrm>
               <a:prstGeom prst="rect">
                 <a:avLst/>
@@ -5811,12 +6491,22 @@
                 </a:solidFill>
               </a:ln>
             </p:spPr>
+            <p:style>
+              <a:lnRef idx="0"/>
+              <a:fillRef idx="0"/>
+              <a:effectRef idx="0"/>
+              <a:fontRef idx="minor"/>
+            </p:style>
             <p:txBody>
               <a:bodyPr lIns="90000" rIns="90000" tIns="45000" bIns="45000">
                 <a:noAutofit/>
               </a:bodyPr>
               <a:p>
-                <a:pPr algn="ctr"/>
+                <a:pPr algn="ctr">
+                  <a:lnSpc>
+                    <a:spcPct val="100000"/>
+                  </a:lnSpc>
+                </a:pPr>
                 <a:r>
                   <a:rPr b="0" lang="en-US" sz="1050" spc="-1" strike="noStrike">
                     <a:latin typeface="Arial"/>
@@ -5834,7 +6524,11 @@
                 </a:endParaRPr>
               </a:p>
               <a:p>
-                <a:pPr algn="ctr"/>
+                <a:pPr algn="ctr">
+                  <a:lnSpc>
+                    <a:spcPct val="100000"/>
+                  </a:lnSpc>
+                </a:pPr>
                 <a:r>
                   <a:rPr b="0" lang="en-US" sz="1050" spc="-1" strike="noStrike">
                     <a:latin typeface="Arial"/>
@@ -5849,14 +6543,14 @@
           </p:sp>
           <p:sp>
             <p:nvSpPr>
-              <p:cNvPr id="148" name=""/>
-              <p:cNvSpPr txBox="1"/>
+              <p:cNvPr id="145" name=""/>
+              <p:cNvSpPr/>
               <p:nvPr/>
             </p:nvSpPr>
             <p:spPr>
               <a:xfrm>
                 <a:off x="8282520" y="339480"/>
-                <a:ext cx="1405800" cy="346320"/>
+                <a:ext cx="1405440" cy="345960"/>
               </a:xfrm>
               <a:prstGeom prst="rect">
                 <a:avLst/>
@@ -5866,11 +6560,22 @@
                 <a:noFill/>
               </a:ln>
             </p:spPr>
+            <p:style>
+              <a:lnRef idx="0"/>
+              <a:fillRef idx="0"/>
+              <a:effectRef idx="0"/>
+              <a:fontRef idx="minor"/>
+            </p:style>
             <p:txBody>
               <a:bodyPr lIns="90000" rIns="90000" tIns="45000" bIns="45000">
                 <a:noAutofit/>
               </a:bodyPr>
               <a:p>
+                <a:pPr>
+                  <a:lnSpc>
+                    <a:spcPct val="100000"/>
+                  </a:lnSpc>
+                </a:pPr>
                 <a:r>
                   <a:rPr b="0" lang="en-US" sz="1400" spc="-1" strike="noStrike">
                     <a:latin typeface="Arial"/>

--- a/Experiment_timeline.pptx
+++ b/Experiment_timeline.pptx
@@ -65,7 +65,7 @@
         <p:spPr>
           <a:xfrm>
             <a:off x="504000" y="226080"/>
-            <a:ext cx="9071280" cy="946080"/>
+            <a:ext cx="9070920" cy="945720"/>
           </a:xfrm>
           <a:prstGeom prst="rect">
             <a:avLst/>
@@ -96,7 +96,7 @@
         <p:spPr>
           <a:xfrm>
             <a:off x="504000" y="1326600"/>
-            <a:ext cx="9072000" cy="1568520"/>
+            <a:ext cx="9071640" cy="1568160"/>
           </a:xfrm>
           <a:prstGeom prst="rect">
             <a:avLst/>
@@ -125,8 +125,8 @@
         </p:nvSpPr>
         <p:spPr>
           <a:xfrm>
-            <a:off x="504000" y="3044520"/>
-            <a:ext cx="9072000" cy="1568520"/>
+            <a:off x="504000" y="3044160"/>
+            <a:ext cx="9071640" cy="1568160"/>
           </a:xfrm>
           <a:prstGeom prst="rect">
             <a:avLst/>
@@ -178,7 +178,7 @@
         <p:spPr>
           <a:xfrm>
             <a:off x="504000" y="226080"/>
-            <a:ext cx="9071280" cy="946080"/>
+            <a:ext cx="9070920" cy="945720"/>
           </a:xfrm>
           <a:prstGeom prst="rect">
             <a:avLst/>
@@ -209,7 +209,7 @@
         <p:spPr>
           <a:xfrm>
             <a:off x="504000" y="1326600"/>
-            <a:ext cx="4426920" cy="1568520"/>
+            <a:ext cx="4426920" cy="1568160"/>
           </a:xfrm>
           <a:prstGeom prst="rect">
             <a:avLst/>
@@ -239,7 +239,7 @@
         <p:spPr>
           <a:xfrm>
             <a:off x="5152680" y="1326600"/>
-            <a:ext cx="4426920" cy="1568520"/>
+            <a:ext cx="4426920" cy="1568160"/>
           </a:xfrm>
           <a:prstGeom prst="rect">
             <a:avLst/>
@@ -268,8 +268,8 @@
         </p:nvSpPr>
         <p:spPr>
           <a:xfrm>
-            <a:off x="504000" y="3044520"/>
-            <a:ext cx="4426920" cy="1568520"/>
+            <a:off x="504000" y="3044160"/>
+            <a:ext cx="4426920" cy="1568160"/>
           </a:xfrm>
           <a:prstGeom prst="rect">
             <a:avLst/>
@@ -298,8 +298,8 @@
         </p:nvSpPr>
         <p:spPr>
           <a:xfrm>
-            <a:off x="5152680" y="3044520"/>
-            <a:ext cx="4426920" cy="1568520"/>
+            <a:off x="5152680" y="3044160"/>
+            <a:ext cx="4426920" cy="1568160"/>
           </a:xfrm>
           <a:prstGeom prst="rect">
             <a:avLst/>
@@ -351,7 +351,7 @@
         <p:spPr>
           <a:xfrm>
             <a:off x="504000" y="226080"/>
-            <a:ext cx="9071280" cy="946080"/>
+            <a:ext cx="9070920" cy="945720"/>
           </a:xfrm>
           <a:prstGeom prst="rect">
             <a:avLst/>
@@ -382,7 +382,7 @@
         <p:spPr>
           <a:xfrm>
             <a:off x="504000" y="1326600"/>
-            <a:ext cx="2921040" cy="1568520"/>
+            <a:ext cx="2920680" cy="1568160"/>
           </a:xfrm>
           <a:prstGeom prst="rect">
             <a:avLst/>
@@ -411,8 +411,8 @@
         </p:nvSpPr>
         <p:spPr>
           <a:xfrm>
-            <a:off x="3571560" y="1326600"/>
-            <a:ext cx="2921040" cy="1568520"/>
+            <a:off x="3571200" y="1326600"/>
+            <a:ext cx="2920680" cy="1568160"/>
           </a:xfrm>
           <a:prstGeom prst="rect">
             <a:avLst/>
@@ -441,8 +441,8 @@
         </p:nvSpPr>
         <p:spPr>
           <a:xfrm>
-            <a:off x="6639120" y="1326600"/>
-            <a:ext cx="2921040" cy="1568520"/>
+            <a:off x="6638040" y="1326600"/>
+            <a:ext cx="2920680" cy="1568160"/>
           </a:xfrm>
           <a:prstGeom prst="rect">
             <a:avLst/>
@@ -471,8 +471,8 @@
         </p:nvSpPr>
         <p:spPr>
           <a:xfrm>
-            <a:off x="504000" y="3044520"/>
-            <a:ext cx="2921040" cy="1568520"/>
+            <a:off x="504000" y="3044160"/>
+            <a:ext cx="2920680" cy="1568160"/>
           </a:xfrm>
           <a:prstGeom prst="rect">
             <a:avLst/>
@@ -501,8 +501,8 @@
         </p:nvSpPr>
         <p:spPr>
           <a:xfrm>
-            <a:off x="3571560" y="3044520"/>
-            <a:ext cx="2921040" cy="1568520"/>
+            <a:off x="3571200" y="3044160"/>
+            <a:ext cx="2920680" cy="1568160"/>
           </a:xfrm>
           <a:prstGeom prst="rect">
             <a:avLst/>
@@ -531,8 +531,8 @@
         </p:nvSpPr>
         <p:spPr>
           <a:xfrm>
-            <a:off x="6639120" y="3044520"/>
-            <a:ext cx="2921040" cy="1568520"/>
+            <a:off x="6638040" y="3044160"/>
+            <a:ext cx="2920680" cy="1568160"/>
           </a:xfrm>
           <a:prstGeom prst="rect">
             <a:avLst/>
@@ -584,7 +584,7 @@
         <p:spPr>
           <a:xfrm>
             <a:off x="504000" y="226080"/>
-            <a:ext cx="9071280" cy="946080"/>
+            <a:ext cx="9070920" cy="945720"/>
           </a:xfrm>
           <a:prstGeom prst="rect">
             <a:avLst/>
@@ -615,7 +615,7 @@
         <p:spPr>
           <a:xfrm>
             <a:off x="504000" y="1326600"/>
-            <a:ext cx="9072000" cy="3288600"/>
+            <a:ext cx="9071640" cy="3288240"/>
           </a:xfrm>
           <a:prstGeom prst="rect">
             <a:avLst/>
@@ -668,7 +668,7 @@
         <p:spPr>
           <a:xfrm>
             <a:off x="504000" y="226080"/>
-            <a:ext cx="9071280" cy="946080"/>
+            <a:ext cx="9070920" cy="945720"/>
           </a:xfrm>
           <a:prstGeom prst="rect">
             <a:avLst/>
@@ -699,7 +699,7 @@
         <p:spPr>
           <a:xfrm>
             <a:off x="504000" y="1326600"/>
-            <a:ext cx="9072000" cy="3288600"/>
+            <a:ext cx="9071640" cy="3288240"/>
           </a:xfrm>
           <a:prstGeom prst="rect">
             <a:avLst/>
@@ -751,7 +751,7 @@
         <p:spPr>
           <a:xfrm>
             <a:off x="504000" y="226080"/>
-            <a:ext cx="9071280" cy="946080"/>
+            <a:ext cx="9070920" cy="945720"/>
           </a:xfrm>
           <a:prstGeom prst="rect">
             <a:avLst/>
@@ -782,7 +782,7 @@
         <p:spPr>
           <a:xfrm>
             <a:off x="504000" y="1326600"/>
-            <a:ext cx="4426920" cy="3288600"/>
+            <a:ext cx="4426920" cy="3288240"/>
           </a:xfrm>
           <a:prstGeom prst="rect">
             <a:avLst/>
@@ -812,7 +812,7 @@
         <p:spPr>
           <a:xfrm>
             <a:off x="5152680" y="1326600"/>
-            <a:ext cx="4426920" cy="3288600"/>
+            <a:ext cx="4426920" cy="3288240"/>
           </a:xfrm>
           <a:prstGeom prst="rect">
             <a:avLst/>
@@ -864,7 +864,7 @@
         <p:spPr>
           <a:xfrm>
             <a:off x="504000" y="226080"/>
-            <a:ext cx="9071280" cy="946080"/>
+            <a:ext cx="9070920" cy="945720"/>
           </a:xfrm>
           <a:prstGeom prst="rect">
             <a:avLst/>
@@ -917,7 +917,7 @@
         <p:spPr>
           <a:xfrm>
             <a:off x="504000" y="226080"/>
-            <a:ext cx="9071280" cy="4386600"/>
+            <a:ext cx="9070920" cy="4385160"/>
           </a:xfrm>
           <a:prstGeom prst="rect">
             <a:avLst/>
@@ -970,7 +970,7 @@
         <p:spPr>
           <a:xfrm>
             <a:off x="504000" y="226080"/>
-            <a:ext cx="9071280" cy="946080"/>
+            <a:ext cx="9070920" cy="945720"/>
           </a:xfrm>
           <a:prstGeom prst="rect">
             <a:avLst/>
@@ -1001,7 +1001,7 @@
         <p:spPr>
           <a:xfrm>
             <a:off x="504000" y="1326600"/>
-            <a:ext cx="4426920" cy="1568520"/>
+            <a:ext cx="4426920" cy="1568160"/>
           </a:xfrm>
           <a:prstGeom prst="rect">
             <a:avLst/>
@@ -1031,7 +1031,7 @@
         <p:spPr>
           <a:xfrm>
             <a:off x="5152680" y="1326600"/>
-            <a:ext cx="4426920" cy="3288600"/>
+            <a:ext cx="4426920" cy="3288240"/>
           </a:xfrm>
           <a:prstGeom prst="rect">
             <a:avLst/>
@@ -1060,8 +1060,8 @@
         </p:nvSpPr>
         <p:spPr>
           <a:xfrm>
-            <a:off x="504000" y="3044520"/>
-            <a:ext cx="4426920" cy="1568520"/>
+            <a:off x="504000" y="3044160"/>
+            <a:ext cx="4426920" cy="1568160"/>
           </a:xfrm>
           <a:prstGeom prst="rect">
             <a:avLst/>
@@ -1113,7 +1113,7 @@
         <p:spPr>
           <a:xfrm>
             <a:off x="504000" y="226080"/>
-            <a:ext cx="9071280" cy="946080"/>
+            <a:ext cx="9070920" cy="945720"/>
           </a:xfrm>
           <a:prstGeom prst="rect">
             <a:avLst/>
@@ -1144,7 +1144,7 @@
         <p:spPr>
           <a:xfrm>
             <a:off x="504000" y="1326600"/>
-            <a:ext cx="4426920" cy="3288600"/>
+            <a:ext cx="4426920" cy="3288240"/>
           </a:xfrm>
           <a:prstGeom prst="rect">
             <a:avLst/>
@@ -1174,7 +1174,7 @@
         <p:spPr>
           <a:xfrm>
             <a:off x="5152680" y="1326600"/>
-            <a:ext cx="4426920" cy="1568520"/>
+            <a:ext cx="4426920" cy="1568160"/>
           </a:xfrm>
           <a:prstGeom prst="rect">
             <a:avLst/>
@@ -1203,8 +1203,8 @@
         </p:nvSpPr>
         <p:spPr>
           <a:xfrm>
-            <a:off x="5152680" y="3044520"/>
-            <a:ext cx="4426920" cy="1568520"/>
+            <a:off x="5152680" y="3044160"/>
+            <a:ext cx="4426920" cy="1568160"/>
           </a:xfrm>
           <a:prstGeom prst="rect">
             <a:avLst/>
@@ -1256,7 +1256,7 @@
         <p:spPr>
           <a:xfrm>
             <a:off x="504000" y="226080"/>
-            <a:ext cx="9071280" cy="946080"/>
+            <a:ext cx="9070920" cy="945720"/>
           </a:xfrm>
           <a:prstGeom prst="rect">
             <a:avLst/>
@@ -1287,7 +1287,7 @@
         <p:spPr>
           <a:xfrm>
             <a:off x="504000" y="1326600"/>
-            <a:ext cx="4426920" cy="1568520"/>
+            <a:ext cx="4426920" cy="1568160"/>
           </a:xfrm>
           <a:prstGeom prst="rect">
             <a:avLst/>
@@ -1317,7 +1317,7 @@
         <p:spPr>
           <a:xfrm>
             <a:off x="5152680" y="1326600"/>
-            <a:ext cx="4426920" cy="1568520"/>
+            <a:ext cx="4426920" cy="1568160"/>
           </a:xfrm>
           <a:prstGeom prst="rect">
             <a:avLst/>
@@ -1346,8 +1346,8 @@
         </p:nvSpPr>
         <p:spPr>
           <a:xfrm>
-            <a:off x="504000" y="3044520"/>
-            <a:ext cx="9072000" cy="1568520"/>
+            <a:off x="504000" y="3044160"/>
+            <a:ext cx="9071640" cy="1568160"/>
           </a:xfrm>
           <a:prstGeom prst="rect">
             <a:avLst/>
@@ -1399,7 +1399,7 @@
         <p:spPr>
           <a:xfrm>
             <a:off x="504000" y="226080"/>
-            <a:ext cx="9071280" cy="946080"/>
+            <a:ext cx="9070920" cy="945720"/>
           </a:xfrm>
           <a:prstGeom prst="rect">
             <a:avLst/>
@@ -1435,7 +1435,7 @@
         <p:spPr>
           <a:xfrm>
             <a:off x="504000" y="1326600"/>
-            <a:ext cx="9072000" cy="3288600"/>
+            <a:ext cx="9071640" cy="3288240"/>
           </a:xfrm>
           <a:prstGeom prst="rect">
             <a:avLst/>
@@ -1458,12 +1458,12 @@
               <a:buChar char=""/>
             </a:pPr>
             <a:r>
-              <a:rPr b="0" lang="en-US" sz="3200" spc="-1" strike="noStrike">
+              <a:rPr b="0" lang="en-US" sz="1800" spc="-1" strike="noStrike">
                 <a:latin typeface="Arial"/>
               </a:rPr>
               <a:t>Click to edit the outline text format</a:t>
             </a:r>
-            <a:endParaRPr b="0" lang="en-US" sz="3200" spc="-1" strike="noStrike">
+            <a:endParaRPr b="0" lang="en-US" sz="1800" spc="-1" strike="noStrike">
               <a:latin typeface="Arial"/>
             </a:endParaRPr>
           </a:p>
@@ -1480,12 +1480,12 @@
               <a:buChar char=""/>
             </a:pPr>
             <a:r>
-              <a:rPr b="0" lang="en-US" sz="2800" spc="-1" strike="noStrike">
+              <a:rPr b="0" lang="en-US" sz="1800" spc="-1" strike="noStrike">
                 <a:latin typeface="Arial"/>
               </a:rPr>
               <a:t>Second Outline Level</a:t>
             </a:r>
-            <a:endParaRPr b="0" lang="en-US" sz="2800" spc="-1" strike="noStrike">
+            <a:endParaRPr b="0" lang="en-US" sz="1800" spc="-1" strike="noStrike">
               <a:latin typeface="Arial"/>
             </a:endParaRPr>
           </a:p>
@@ -1502,12 +1502,12 @@
               <a:buChar char=""/>
             </a:pPr>
             <a:r>
-              <a:rPr b="0" lang="en-US" sz="2400" spc="-1" strike="noStrike">
+              <a:rPr b="0" lang="en-US" sz="1800" spc="-1" strike="noStrike">
                 <a:latin typeface="Arial"/>
               </a:rPr>
               <a:t>Third Outline Level</a:t>
             </a:r>
-            <a:endParaRPr b="0" lang="en-US" sz="2400" spc="-1" strike="noStrike">
+            <a:endParaRPr b="0" lang="en-US" sz="1800" spc="-1" strike="noStrike">
               <a:latin typeface="Arial"/>
             </a:endParaRPr>
           </a:p>
@@ -1524,12 +1524,12 @@
               <a:buChar char=""/>
             </a:pPr>
             <a:r>
-              <a:rPr b="0" lang="en-US" sz="2000" spc="-1" strike="noStrike">
+              <a:rPr b="0" lang="en-US" sz="1800" spc="-1" strike="noStrike">
                 <a:latin typeface="Arial"/>
               </a:rPr>
               <a:t>Fourth Outline Level</a:t>
             </a:r>
-            <a:endParaRPr b="0" lang="en-US" sz="2000" spc="-1" strike="noStrike">
+            <a:endParaRPr b="0" lang="en-US" sz="1800" spc="-1" strike="noStrike">
               <a:latin typeface="Arial"/>
             </a:endParaRPr>
           </a:p>
@@ -1546,12 +1546,12 @@
               <a:buChar char=""/>
             </a:pPr>
             <a:r>
-              <a:rPr b="0" lang="en-US" sz="2000" spc="-1" strike="noStrike">
+              <a:rPr b="0" lang="en-US" sz="1800" spc="-1" strike="noStrike">
                 <a:latin typeface="Arial"/>
               </a:rPr>
               <a:t>Fifth Outline Level</a:t>
             </a:r>
-            <a:endParaRPr b="0" lang="en-US" sz="2000" spc="-1" strike="noStrike">
+            <a:endParaRPr b="0" lang="en-US" sz="1800" spc="-1" strike="noStrike">
               <a:latin typeface="Arial"/>
             </a:endParaRPr>
           </a:p>
@@ -1568,12 +1568,12 @@
               <a:buChar char=""/>
             </a:pPr>
             <a:r>
-              <a:rPr b="0" lang="en-US" sz="2000" spc="-1" strike="noStrike">
+              <a:rPr b="0" lang="en-US" sz="1800" spc="-1" strike="noStrike">
                 <a:latin typeface="Arial"/>
               </a:rPr>
               <a:t>Sixth Outline Level</a:t>
             </a:r>
-            <a:endParaRPr b="0" lang="en-US" sz="2000" spc="-1" strike="noStrike">
+            <a:endParaRPr b="0" lang="en-US" sz="1800" spc="-1" strike="noStrike">
               <a:latin typeface="Arial"/>
             </a:endParaRPr>
           </a:p>
@@ -1590,12 +1590,12 @@
               <a:buChar char=""/>
             </a:pPr>
             <a:r>
-              <a:rPr b="0" lang="en-US" sz="2000" spc="-1" strike="noStrike">
+              <a:rPr b="0" lang="en-US" sz="1800" spc="-1" strike="noStrike">
                 <a:latin typeface="Arial"/>
               </a:rPr>
               <a:t>Seventh Outline Level</a:t>
             </a:r>
-            <a:endParaRPr b="0" lang="en-US" sz="2000" spc="-1" strike="noStrike">
+            <a:endParaRPr b="0" lang="en-US" sz="1800" spc="-1" strike="noStrike">
               <a:latin typeface="Arial"/>
             </a:endParaRPr>
           </a:p>
@@ -1890,7 +1890,7 @@
         <p:spPr>
           <a:xfrm>
             <a:off x="2290320" y="4682880"/>
-            <a:ext cx="483840" cy="345960"/>
+            <a:ext cx="483480" cy="345600"/>
           </a:xfrm>
           <a:prstGeom prst="rect">
             <a:avLst/>
@@ -1918,13 +1918,21 @@
             </a:pPr>
             <a:r>
               <a:rPr b="0" lang="en-US" sz="1800" spc="-1" strike="noStrike">
-                <a:latin typeface="Arial"/>
+                <a:solidFill>
+                  <a:srgbClr val="000000"/>
+                </a:solidFill>
+                <a:latin typeface="Arial"/>
+                <a:ea typeface="DejaVu Sans"/>
               </a:rPr>
               <a:t>‘</a:t>
             </a:r>
             <a:r>
               <a:rPr b="0" lang="en-US" sz="1800" spc="-1" strike="noStrike">
-                <a:latin typeface="Arial"/>
+                <a:solidFill>
+                  <a:srgbClr val="000000"/>
+                </a:solidFill>
+                <a:latin typeface="Arial"/>
+                <a:ea typeface="DejaVu Sans"/>
               </a:rPr>
               <a:t>80</a:t>
             </a:r>
@@ -1943,7 +1951,7 @@
         <p:spPr>
           <a:xfrm>
             <a:off x="3132720" y="4682880"/>
-            <a:ext cx="483840" cy="345960"/>
+            <a:ext cx="483480" cy="345600"/>
           </a:xfrm>
           <a:prstGeom prst="rect">
             <a:avLst/>
@@ -1971,13 +1979,21 @@
             </a:pPr>
             <a:r>
               <a:rPr b="0" lang="en-US" sz="1800" spc="-1" strike="noStrike">
-                <a:latin typeface="Arial"/>
+                <a:solidFill>
+                  <a:srgbClr val="000000"/>
+                </a:solidFill>
+                <a:latin typeface="Arial"/>
+                <a:ea typeface="DejaVu Sans"/>
               </a:rPr>
               <a:t>‘</a:t>
             </a:r>
             <a:r>
               <a:rPr b="0" lang="en-US" sz="1800" spc="-1" strike="noStrike">
-                <a:latin typeface="Arial"/>
+                <a:solidFill>
+                  <a:srgbClr val="000000"/>
+                </a:solidFill>
+                <a:latin typeface="Arial"/>
+                <a:ea typeface="DejaVu Sans"/>
               </a:rPr>
               <a:t>85</a:t>
             </a:r>
@@ -1996,7 +2012,7 @@
         <p:spPr>
           <a:xfrm>
             <a:off x="4047120" y="4682880"/>
-            <a:ext cx="483840" cy="345960"/>
+            <a:ext cx="483480" cy="345600"/>
           </a:xfrm>
           <a:prstGeom prst="rect">
             <a:avLst/>
@@ -2024,13 +2040,21 @@
             </a:pPr>
             <a:r>
               <a:rPr b="0" lang="en-US" sz="1800" spc="-1" strike="noStrike">
-                <a:latin typeface="Arial"/>
+                <a:solidFill>
+                  <a:srgbClr val="000000"/>
+                </a:solidFill>
+                <a:latin typeface="Arial"/>
+                <a:ea typeface="DejaVu Sans"/>
               </a:rPr>
               <a:t>‘</a:t>
             </a:r>
             <a:r>
               <a:rPr b="0" lang="en-US" sz="1800" spc="-1" strike="noStrike">
-                <a:latin typeface="Arial"/>
+                <a:solidFill>
+                  <a:srgbClr val="000000"/>
+                </a:solidFill>
+                <a:latin typeface="Arial"/>
+                <a:ea typeface="DejaVu Sans"/>
               </a:rPr>
               <a:t>90</a:t>
             </a:r>
@@ -2049,7 +2073,7 @@
         <p:spPr>
           <a:xfrm>
             <a:off x="4961520" y="4682880"/>
-            <a:ext cx="483840" cy="345960"/>
+            <a:ext cx="483480" cy="345600"/>
           </a:xfrm>
           <a:prstGeom prst="rect">
             <a:avLst/>
@@ -2077,13 +2101,21 @@
             </a:pPr>
             <a:r>
               <a:rPr b="0" lang="en-US" sz="1800" spc="-1" strike="noStrike">
-                <a:latin typeface="Arial"/>
+                <a:solidFill>
+                  <a:srgbClr val="000000"/>
+                </a:solidFill>
+                <a:latin typeface="Arial"/>
+                <a:ea typeface="DejaVu Sans"/>
               </a:rPr>
               <a:t>‘</a:t>
             </a:r>
             <a:r>
               <a:rPr b="0" lang="en-US" sz="1800" spc="-1" strike="noStrike">
-                <a:latin typeface="Arial"/>
+                <a:solidFill>
+                  <a:srgbClr val="000000"/>
+                </a:solidFill>
+                <a:latin typeface="Arial"/>
+                <a:ea typeface="DejaVu Sans"/>
               </a:rPr>
               <a:t>95</a:t>
             </a:r>
@@ -2102,7 +2134,7 @@
         <p:spPr>
           <a:xfrm>
             <a:off x="5715000" y="4682880"/>
-            <a:ext cx="686160" cy="345960"/>
+            <a:ext cx="685800" cy="345600"/>
           </a:xfrm>
           <a:prstGeom prst="rect">
             <a:avLst/>
@@ -2130,7 +2162,11 @@
             </a:pPr>
             <a:r>
               <a:rPr b="0" lang="en-US" sz="1800" spc="-1" strike="noStrike">
-                <a:latin typeface="Arial"/>
+                <a:solidFill>
+                  <a:srgbClr val="000000"/>
+                </a:solidFill>
+                <a:latin typeface="Arial"/>
+                <a:ea typeface="DejaVu Sans"/>
               </a:rPr>
               <a:t>2000</a:t>
             </a:r>
@@ -2149,7 +2185,7 @@
         <p:spPr>
           <a:xfrm>
             <a:off x="6790320" y="4682880"/>
-            <a:ext cx="483840" cy="345960"/>
+            <a:ext cx="483480" cy="345600"/>
           </a:xfrm>
           <a:prstGeom prst="rect">
             <a:avLst/>
@@ -2177,13 +2213,21 @@
             </a:pPr>
             <a:r>
               <a:rPr b="0" lang="en-US" sz="1800" spc="-1" strike="noStrike">
-                <a:latin typeface="Arial"/>
+                <a:solidFill>
+                  <a:srgbClr val="000000"/>
+                </a:solidFill>
+                <a:latin typeface="Arial"/>
+                <a:ea typeface="DejaVu Sans"/>
               </a:rPr>
               <a:t>‘</a:t>
             </a:r>
             <a:r>
               <a:rPr b="0" lang="en-US" sz="1800" spc="-1" strike="noStrike">
-                <a:latin typeface="Arial"/>
+                <a:solidFill>
+                  <a:srgbClr val="000000"/>
+                </a:solidFill>
+                <a:latin typeface="Arial"/>
+                <a:ea typeface="DejaVu Sans"/>
               </a:rPr>
               <a:t>05</a:t>
             </a:r>
@@ -2202,7 +2246,7 @@
         <p:spPr>
           <a:xfrm>
             <a:off x="7698600" y="4682880"/>
-            <a:ext cx="530640" cy="345960"/>
+            <a:ext cx="530280" cy="345600"/>
           </a:xfrm>
           <a:prstGeom prst="rect">
             <a:avLst/>
@@ -2230,13 +2274,21 @@
             </a:pPr>
             <a:r>
               <a:rPr b="0" lang="en-US" sz="1800" spc="-1" strike="noStrike">
-                <a:latin typeface="Arial"/>
+                <a:solidFill>
+                  <a:srgbClr val="000000"/>
+                </a:solidFill>
+                <a:latin typeface="Arial"/>
+                <a:ea typeface="DejaVu Sans"/>
               </a:rPr>
               <a:t>‘</a:t>
             </a:r>
             <a:r>
               <a:rPr b="0" lang="en-US" sz="1800" spc="-1" strike="noStrike">
-                <a:latin typeface="Arial"/>
+                <a:solidFill>
+                  <a:srgbClr val="000000"/>
+                </a:solidFill>
+                <a:latin typeface="Arial"/>
+                <a:ea typeface="DejaVu Sans"/>
               </a:rPr>
               <a:t>10</a:t>
             </a:r>
@@ -2255,7 +2307,7 @@
         <p:spPr>
           <a:xfrm>
             <a:off x="8619120" y="4682880"/>
-            <a:ext cx="483840" cy="345960"/>
+            <a:ext cx="483480" cy="345600"/>
           </a:xfrm>
           <a:prstGeom prst="rect">
             <a:avLst/>
@@ -2283,13 +2335,21 @@
             </a:pPr>
             <a:r>
               <a:rPr b="0" lang="en-US" sz="1800" spc="-1" strike="noStrike">
-                <a:latin typeface="Arial"/>
+                <a:solidFill>
+                  <a:srgbClr val="000000"/>
+                </a:solidFill>
+                <a:latin typeface="Arial"/>
+                <a:ea typeface="DejaVu Sans"/>
               </a:rPr>
               <a:t>‘</a:t>
             </a:r>
             <a:r>
               <a:rPr b="0" lang="en-US" sz="1800" spc="-1" strike="noStrike">
-                <a:latin typeface="Arial"/>
+                <a:solidFill>
+                  <a:srgbClr val="000000"/>
+                </a:solidFill>
+                <a:latin typeface="Arial"/>
+                <a:ea typeface="DejaVu Sans"/>
               </a:rPr>
               <a:t>15</a:t>
             </a:r>
@@ -2308,7 +2368,7 @@
         <p:spPr>
           <a:xfrm>
             <a:off x="9533520" y="4682880"/>
-            <a:ext cx="483840" cy="345960"/>
+            <a:ext cx="483480" cy="345600"/>
           </a:xfrm>
           <a:prstGeom prst="rect">
             <a:avLst/>
@@ -2336,13 +2396,21 @@
             </a:pPr>
             <a:r>
               <a:rPr b="0" lang="en-US" sz="1800" spc="-1" strike="noStrike">
-                <a:latin typeface="Arial"/>
+                <a:solidFill>
+                  <a:srgbClr val="000000"/>
+                </a:solidFill>
+                <a:latin typeface="Arial"/>
+                <a:ea typeface="DejaVu Sans"/>
               </a:rPr>
               <a:t>‘</a:t>
             </a:r>
             <a:r>
               <a:rPr b="0" lang="en-US" sz="1800" spc="-1" strike="noStrike">
-                <a:latin typeface="Arial"/>
+                <a:solidFill>
+                  <a:srgbClr val="000000"/>
+                </a:solidFill>
+                <a:latin typeface="Arial"/>
+                <a:ea typeface="DejaVu Sans"/>
               </a:rPr>
               <a:t>20</a:t>
             </a:r>
@@ -2361,7 +2429,7 @@
         <p:spPr>
           <a:xfrm>
             <a:off x="1405800" y="4682880"/>
-            <a:ext cx="686160" cy="345960"/>
+            <a:ext cx="685800" cy="345600"/>
           </a:xfrm>
           <a:prstGeom prst="rect">
             <a:avLst/>
@@ -2389,7 +2457,11 @@
             </a:pPr>
             <a:r>
               <a:rPr b="0" lang="en-US" sz="1800" spc="-1" strike="noStrike">
-                <a:latin typeface="Arial"/>
+                <a:solidFill>
+                  <a:srgbClr val="000000"/>
+                </a:solidFill>
+                <a:latin typeface="Arial"/>
+                <a:ea typeface="DejaVu Sans"/>
               </a:rPr>
               <a:t>1975</a:t>
             </a:r>
@@ -2408,7 +2480,7 @@
         <p:spPr>
           <a:xfrm>
             <a:off x="4919400" y="5140080"/>
-            <a:ext cx="795240" cy="345960"/>
+            <a:ext cx="794880" cy="345600"/>
           </a:xfrm>
           <a:prstGeom prst="rect">
             <a:avLst/>
@@ -2436,7 +2508,11 @@
             </a:pPr>
             <a:r>
               <a:rPr b="0" lang="en-US" sz="1800" spc="-1" strike="noStrike">
-                <a:latin typeface="Arial"/>
+                <a:solidFill>
+                  <a:srgbClr val="000000"/>
+                </a:solidFill>
+                <a:latin typeface="Arial"/>
+                <a:ea typeface="DejaVu Sans"/>
               </a:rPr>
               <a:t>Year</a:t>
             </a:r>
@@ -2455,7 +2531,7 @@
         <p:spPr>
           <a:xfrm>
             <a:off x="457200" y="950400"/>
-            <a:ext cx="1225440" cy="345960"/>
+            <a:ext cx="1225080" cy="345600"/>
           </a:xfrm>
           <a:prstGeom prst="rect">
             <a:avLst/>
@@ -2483,7 +2559,11 @@
             </a:pPr>
             <a:r>
               <a:rPr b="0" lang="en-US" sz="1800" spc="-1" strike="noStrike">
-                <a:latin typeface="Arial"/>
+                <a:solidFill>
+                  <a:srgbClr val="000000"/>
+                </a:solidFill>
+                <a:latin typeface="Arial"/>
+                <a:ea typeface="DejaVu Sans"/>
               </a:rPr>
               <a:t>(D) RA 20</a:t>
             </a:r>
@@ -2502,7 +2582,7 @@
         <p:spPr>
           <a:xfrm>
             <a:off x="408600" y="1636200"/>
-            <a:ext cx="1382040" cy="345960"/>
+            <a:ext cx="1381680" cy="345600"/>
           </a:xfrm>
           <a:prstGeom prst="rect">
             <a:avLst/>
@@ -2530,7 +2610,11 @@
             </a:pPr>
             <a:r>
               <a:rPr b="0" lang="en-US" sz="1800" spc="-1" strike="noStrike">
-                <a:latin typeface="Arial"/>
+                <a:solidFill>
+                  <a:srgbClr val="000000"/>
+                </a:solidFill>
+                <a:latin typeface="Arial"/>
+                <a:ea typeface="DejaVu Sans"/>
               </a:rPr>
               <a:t>(E) CW 20</a:t>
             </a:r>
@@ -2549,7 +2633,7 @@
         <p:spPr>
           <a:xfrm>
             <a:off x="465120" y="2345400"/>
-            <a:ext cx="1181520" cy="345960"/>
+            <a:ext cx="1181160" cy="345600"/>
           </a:xfrm>
           <a:prstGeom prst="rect">
             <a:avLst/>
@@ -2577,7 +2661,11 @@
             </a:pPr>
             <a:r>
               <a:rPr b="0" lang="en-US" sz="1800" spc="-1" strike="noStrike">
-                <a:latin typeface="Arial"/>
+                <a:solidFill>
+                  <a:srgbClr val="000000"/>
+                </a:solidFill>
+                <a:latin typeface="Arial"/>
+                <a:ea typeface="DejaVu Sans"/>
               </a:rPr>
               <a:t>(A) RA 10</a:t>
             </a:r>
@@ -2596,7 +2684,7 @@
         <p:spPr>
           <a:xfrm>
             <a:off x="408600" y="3021480"/>
-            <a:ext cx="1346040" cy="345960"/>
+            <a:ext cx="1345680" cy="345600"/>
           </a:xfrm>
           <a:prstGeom prst="rect">
             <a:avLst/>
@@ -2624,7 +2712,11 @@
             </a:pPr>
             <a:r>
               <a:rPr b="0" lang="en-US" sz="1800" spc="-1" strike="noStrike">
-                <a:latin typeface="Arial"/>
+                <a:solidFill>
+                  <a:srgbClr val="000000"/>
+                </a:solidFill>
+                <a:latin typeface="Arial"/>
+                <a:ea typeface="DejaVu Sans"/>
               </a:rPr>
               <a:t>(B) CW 10</a:t>
             </a:r>
@@ -2643,7 +2735,7 @@
         <p:spPr>
           <a:xfrm>
             <a:off x="541800" y="3704400"/>
-            <a:ext cx="1104840" cy="345960"/>
+            <a:ext cx="1104480" cy="345600"/>
           </a:xfrm>
           <a:prstGeom prst="rect">
             <a:avLst/>
@@ -2671,7 +2763,11 @@
             </a:pPr>
             <a:r>
               <a:rPr b="0" lang="en-US" sz="1800" spc="-1" strike="noStrike">
-                <a:latin typeface="Arial"/>
+                <a:solidFill>
+                  <a:srgbClr val="000000"/>
+                </a:solidFill>
+                <a:latin typeface="Arial"/>
+                <a:ea typeface="DejaVu Sans"/>
               </a:rPr>
               <a:t>(C) DF 0</a:t>
             </a:r>
@@ -2717,7 +2813,7 @@
         <p:spPr>
           <a:xfrm>
             <a:off x="1576800" y="3657600"/>
-            <a:ext cx="8178840" cy="456480"/>
+            <a:ext cx="8178480" cy="456120"/>
           </a:xfrm>
           <a:prstGeom prst="rect">
             <a:avLst/>
@@ -2747,7 +2843,7 @@
         <p:spPr>
           <a:xfrm>
             <a:off x="9516600" y="3692160"/>
-            <a:ext cx="473040" cy="385920"/>
+            <a:ext cx="472680" cy="385560"/>
           </a:xfrm>
           <a:prstGeom prst="rect">
             <a:avLst/>
@@ -2781,7 +2877,11 @@
             </a:pPr>
             <a:r>
               <a:rPr b="0" lang="en-US" sz="1050" spc="-1" strike="noStrike">
-                <a:latin typeface="Arial"/>
+                <a:solidFill>
+                  <a:srgbClr val="000000"/>
+                </a:solidFill>
+                <a:latin typeface="Arial"/>
+                <a:ea typeface="DejaVu Sans"/>
               </a:rPr>
               <a:t>45</a:t>
             </a:r>
@@ -2797,7 +2897,11 @@
             </a:pPr>
             <a:r>
               <a:rPr b="0" lang="en-US" sz="1050" spc="-1" strike="noStrike">
-                <a:latin typeface="Arial"/>
+                <a:solidFill>
+                  <a:srgbClr val="000000"/>
+                </a:solidFill>
+                <a:latin typeface="Arial"/>
+                <a:ea typeface="DejaVu Sans"/>
               </a:rPr>
               <a:t>2020</a:t>
             </a:r>
@@ -2816,7 +2920,7 @@
         <p:spPr>
           <a:xfrm>
             <a:off x="7855200" y="3692160"/>
-            <a:ext cx="463680" cy="385920"/>
+            <a:ext cx="463320" cy="385560"/>
           </a:xfrm>
           <a:prstGeom prst="rect">
             <a:avLst/>
@@ -2850,7 +2954,11 @@
             </a:pPr>
             <a:r>
               <a:rPr b="0" lang="en-US" sz="1050" spc="-1" strike="noStrike">
-                <a:latin typeface="Arial"/>
+                <a:solidFill>
+                  <a:srgbClr val="000000"/>
+                </a:solidFill>
+                <a:latin typeface="Arial"/>
+                <a:ea typeface="DejaVu Sans"/>
               </a:rPr>
               <a:t>36</a:t>
             </a:r>
@@ -2866,7 +2974,11 @@
             </a:pPr>
             <a:r>
               <a:rPr b="0" lang="en-US" sz="1050" spc="-1" strike="noStrike">
-                <a:latin typeface="Arial"/>
+                <a:solidFill>
+                  <a:srgbClr val="000000"/>
+                </a:solidFill>
+                <a:latin typeface="Arial"/>
+                <a:ea typeface="DejaVu Sans"/>
               </a:rPr>
               <a:t>2011</a:t>
             </a:r>
@@ -2885,7 +2997,7 @@
         <p:spPr>
           <a:xfrm>
             <a:off x="9516960" y="3692520"/>
-            <a:ext cx="473040" cy="385920"/>
+            <a:ext cx="472680" cy="385560"/>
           </a:xfrm>
           <a:prstGeom prst="rect">
             <a:avLst/>
@@ -2919,7 +3031,11 @@
             </a:pPr>
             <a:r>
               <a:rPr b="0" lang="en-US" sz="1050" spc="-1" strike="noStrike">
-                <a:latin typeface="Arial"/>
+                <a:solidFill>
+                  <a:srgbClr val="000000"/>
+                </a:solidFill>
+                <a:latin typeface="Arial"/>
+                <a:ea typeface="DejaVu Sans"/>
               </a:rPr>
               <a:t>45</a:t>
             </a:r>
@@ -2935,7 +3051,11 @@
             </a:pPr>
             <a:r>
               <a:rPr b="0" lang="en-US" sz="1050" spc="-1" strike="noStrike">
-                <a:latin typeface="Arial"/>
+                <a:solidFill>
+                  <a:srgbClr val="000000"/>
+                </a:solidFill>
+                <a:latin typeface="Arial"/>
+                <a:ea typeface="DejaVu Sans"/>
               </a:rPr>
               <a:t>2020</a:t>
             </a:r>
@@ -2954,7 +3074,7 @@
         <p:spPr>
           <a:xfrm>
             <a:off x="3463200" y="3685320"/>
-            <a:ext cx="473040" cy="385920"/>
+            <a:ext cx="472680" cy="385560"/>
           </a:xfrm>
           <a:prstGeom prst="rect">
             <a:avLst/>
@@ -2988,7 +3108,11 @@
             </a:pPr>
             <a:r>
               <a:rPr b="0" lang="en-US" sz="1050" spc="-1" strike="noStrike">
-                <a:latin typeface="Arial"/>
+                <a:solidFill>
+                  <a:srgbClr val="000000"/>
+                </a:solidFill>
+                <a:latin typeface="Arial"/>
+                <a:ea typeface="DejaVu Sans"/>
               </a:rPr>
               <a:t>12</a:t>
             </a:r>
@@ -3004,7 +3128,11 @@
             </a:pPr>
             <a:r>
               <a:rPr b="0" lang="en-US" sz="1050" spc="-1" strike="noStrike">
-                <a:latin typeface="Arial"/>
+                <a:solidFill>
+                  <a:srgbClr val="000000"/>
+                </a:solidFill>
+                <a:latin typeface="Arial"/>
+                <a:ea typeface="DejaVu Sans"/>
               </a:rPr>
               <a:t>1987</a:t>
             </a:r>
@@ -3023,9 +3151,9 @@
         <p:grpSpPr>
           <a:xfrm>
             <a:off x="1575000" y="914400"/>
-            <a:ext cx="8398440" cy="2513880"/>
+            <a:ext cx="8398080" cy="2513520"/>
             <a:chOff x="1575000" y="914400"/>
-            <a:chExt cx="8398440" cy="2513880"/>
+            <a:chExt cx="8398080" cy="2513520"/>
           </a:xfrm>
         </p:grpSpPr>
         <p:sp>
@@ -3037,7 +3165,7 @@
           <p:spPr>
             <a:xfrm>
               <a:off x="5184000" y="914400"/>
-              <a:ext cx="4559040" cy="456480"/>
+              <a:ext cx="4558680" cy="456120"/>
             </a:xfrm>
             <a:prstGeom prst="rect">
               <a:avLst/>
@@ -3067,7 +3195,7 @@
           <p:spPr>
             <a:xfrm>
               <a:off x="5184000" y="1599840"/>
-              <a:ext cx="4559040" cy="456480"/>
+              <a:ext cx="4558680" cy="456120"/>
             </a:xfrm>
             <a:prstGeom prst="rect">
               <a:avLst/>
@@ -3097,7 +3225,7 @@
           <p:spPr>
             <a:xfrm>
               <a:off x="9500400" y="1634760"/>
-              <a:ext cx="473040" cy="385920"/>
+              <a:ext cx="472680" cy="385560"/>
             </a:xfrm>
             <a:prstGeom prst="rect">
               <a:avLst/>
@@ -3131,7 +3259,11 @@
               </a:pPr>
               <a:r>
                 <a:rPr b="0" lang="en-US" sz="1050" spc="-1" strike="noStrike">
+                  <a:solidFill>
+                    <a:srgbClr val="000000"/>
+                  </a:solidFill>
                   <a:latin typeface="Arial"/>
+                  <a:ea typeface="DejaVu Sans"/>
                 </a:rPr>
                 <a:t>25</a:t>
               </a:r>
@@ -3147,7 +3279,11 @@
               </a:pPr>
               <a:r>
                 <a:rPr b="0" lang="en-US" sz="1050" spc="-1" strike="noStrike">
+                  <a:solidFill>
+                    <a:srgbClr val="000000"/>
+                  </a:solidFill>
                   <a:latin typeface="Arial"/>
+                  <a:ea typeface="DejaVu Sans"/>
                 </a:rPr>
                 <a:t>2020</a:t>
               </a:r>
@@ -3166,7 +3302,7 @@
           <p:spPr>
             <a:xfrm>
               <a:off x="9500400" y="948960"/>
-              <a:ext cx="473040" cy="385920"/>
+              <a:ext cx="472680" cy="385560"/>
             </a:xfrm>
             <a:prstGeom prst="rect">
               <a:avLst/>
@@ -3200,7 +3336,11 @@
               </a:pPr>
               <a:r>
                 <a:rPr b="0" lang="en-US" sz="1050" spc="-1" strike="noStrike">
+                  <a:solidFill>
+                    <a:srgbClr val="000000"/>
+                  </a:solidFill>
                   <a:latin typeface="Arial"/>
+                  <a:ea typeface="DejaVu Sans"/>
                 </a:rPr>
                 <a:t>25</a:t>
               </a:r>
@@ -3216,7 +3356,11 @@
               </a:pPr>
               <a:r>
                 <a:rPr b="0" lang="en-US" sz="1050" spc="-1" strike="noStrike">
+                  <a:solidFill>
+                    <a:srgbClr val="000000"/>
+                  </a:solidFill>
                   <a:latin typeface="Arial"/>
+                  <a:ea typeface="DejaVu Sans"/>
                 </a:rPr>
                 <a:t>2020</a:t>
               </a:r>
@@ -3235,7 +3379,7 @@
           <p:spPr>
             <a:xfrm>
               <a:off x="7867800" y="948960"/>
-              <a:ext cx="463680" cy="385920"/>
+              <a:ext cx="463320" cy="385560"/>
             </a:xfrm>
             <a:prstGeom prst="rect">
               <a:avLst/>
@@ -3269,7 +3413,11 @@
               </a:pPr>
               <a:r>
                 <a:rPr b="0" lang="en-US" sz="1050" spc="-1" strike="noStrike">
+                  <a:solidFill>
+                    <a:srgbClr val="000000"/>
+                  </a:solidFill>
                   <a:latin typeface="Arial"/>
+                  <a:ea typeface="DejaVu Sans"/>
                 </a:rPr>
                 <a:t>16</a:t>
               </a:r>
@@ -3285,7 +3433,11 @@
               </a:pPr>
               <a:r>
                 <a:rPr b="0" lang="en-US" sz="1050" spc="-1" strike="noStrike">
+                  <a:solidFill>
+                    <a:srgbClr val="000000"/>
+                  </a:solidFill>
                   <a:latin typeface="Arial"/>
+                  <a:ea typeface="DejaVu Sans"/>
                 </a:rPr>
                 <a:t>2011</a:t>
               </a:r>
@@ -3304,7 +3456,7 @@
           <p:spPr>
             <a:xfrm>
               <a:off x="7860960" y="1635840"/>
-              <a:ext cx="463680" cy="385920"/>
+              <a:ext cx="463320" cy="385560"/>
             </a:xfrm>
             <a:prstGeom prst="rect">
               <a:avLst/>
@@ -3338,7 +3490,11 @@
               </a:pPr>
               <a:r>
                 <a:rPr b="0" lang="en-US" sz="1050" spc="-1" strike="noStrike">
+                  <a:solidFill>
+                    <a:srgbClr val="000000"/>
+                  </a:solidFill>
                   <a:latin typeface="Arial"/>
+                  <a:ea typeface="DejaVu Sans"/>
                 </a:rPr>
                 <a:t>16</a:t>
               </a:r>
@@ -3354,7 +3510,11 @@
               </a:pPr>
               <a:r>
                 <a:rPr b="0" lang="en-US" sz="1050" spc="-1" strike="noStrike">
+                  <a:solidFill>
+                    <a:srgbClr val="000000"/>
+                  </a:solidFill>
                   <a:latin typeface="Arial"/>
+                  <a:ea typeface="DejaVu Sans"/>
                 </a:rPr>
                 <a:t>2011</a:t>
               </a:r>
@@ -3373,7 +3533,7 @@
           <p:spPr>
             <a:xfrm>
               <a:off x="1576800" y="914400"/>
-              <a:ext cx="3606840" cy="456480"/>
+              <a:ext cx="3606480" cy="456120"/>
             </a:xfrm>
             <a:prstGeom prst="rect">
               <a:avLst/>
@@ -3403,7 +3563,7 @@
           <p:spPr>
             <a:xfrm>
               <a:off x="1576800" y="2286360"/>
-              <a:ext cx="1778040" cy="456480"/>
+              <a:ext cx="1777680" cy="456120"/>
             </a:xfrm>
             <a:prstGeom prst="rect">
               <a:avLst/>
@@ -3433,7 +3593,7 @@
           <p:spPr>
             <a:xfrm>
               <a:off x="1576800" y="1600560"/>
-              <a:ext cx="3606840" cy="456480"/>
+              <a:ext cx="3606480" cy="456120"/>
             </a:xfrm>
             <a:prstGeom prst="rect">
               <a:avLst/>
@@ -3463,7 +3623,7 @@
           <p:spPr>
             <a:xfrm>
               <a:off x="1575000" y="2971800"/>
-              <a:ext cx="1779840" cy="456480"/>
+              <a:ext cx="1779480" cy="456120"/>
             </a:xfrm>
             <a:prstGeom prst="rect">
               <a:avLst/>
@@ -3494,9 +3654,9 @@
         <p:grpSpPr>
           <a:xfrm>
             <a:off x="3355200" y="2286360"/>
-            <a:ext cx="6638040" cy="1141920"/>
+            <a:ext cx="6637680" cy="1141560"/>
             <a:chOff x="3355200" y="2286360"/>
-            <a:chExt cx="6638040" cy="1141920"/>
+            <a:chExt cx="6637680" cy="1141560"/>
           </a:xfrm>
         </p:grpSpPr>
         <p:sp>
@@ -3508,7 +3668,7 @@
           <p:spPr>
             <a:xfrm>
               <a:off x="3355200" y="2286360"/>
-              <a:ext cx="6407640" cy="456480"/>
+              <a:ext cx="6407280" cy="456120"/>
             </a:xfrm>
             <a:prstGeom prst="rect">
               <a:avLst/>
@@ -3538,7 +3698,7 @@
           <p:spPr>
             <a:xfrm>
               <a:off x="3355200" y="2971800"/>
-              <a:ext cx="6407640" cy="456480"/>
+              <a:ext cx="6407280" cy="456120"/>
             </a:xfrm>
             <a:prstGeom prst="rect">
               <a:avLst/>
@@ -3568,7 +3728,7 @@
           <p:spPr>
             <a:xfrm>
               <a:off x="9520200" y="3007800"/>
-              <a:ext cx="473040" cy="385920"/>
+              <a:ext cx="472680" cy="385560"/>
             </a:xfrm>
             <a:prstGeom prst="rect">
               <a:avLst/>
@@ -3602,7 +3762,11 @@
               </a:pPr>
               <a:r>
                 <a:rPr b="0" lang="en-US" sz="1050" spc="-1" strike="noStrike">
+                  <a:solidFill>
+                    <a:srgbClr val="000000"/>
+                  </a:solidFill>
                   <a:latin typeface="Arial"/>
+                  <a:ea typeface="DejaVu Sans"/>
                 </a:rPr>
                 <a:t>35</a:t>
               </a:r>
@@ -3618,7 +3782,11 @@
               </a:pPr>
               <a:r>
                 <a:rPr b="0" lang="en-US" sz="1050" spc="-1" strike="noStrike">
+                  <a:solidFill>
+                    <a:srgbClr val="000000"/>
+                  </a:solidFill>
                   <a:latin typeface="Arial"/>
+                  <a:ea typeface="DejaVu Sans"/>
                 </a:rPr>
                 <a:t>2020</a:t>
               </a:r>
@@ -3637,7 +3805,7 @@
           <p:spPr>
             <a:xfrm>
               <a:off x="9520200" y="2322360"/>
-              <a:ext cx="473040" cy="385920"/>
+              <a:ext cx="472680" cy="385560"/>
             </a:xfrm>
             <a:prstGeom prst="rect">
               <a:avLst/>
@@ -3671,7 +3839,11 @@
               </a:pPr>
               <a:r>
                 <a:rPr b="0" lang="en-US" sz="1050" spc="-1" strike="noStrike">
+                  <a:solidFill>
+                    <a:srgbClr val="000000"/>
+                  </a:solidFill>
                   <a:latin typeface="Arial"/>
+                  <a:ea typeface="DejaVu Sans"/>
                 </a:rPr>
                 <a:t>35</a:t>
               </a:r>
@@ -3687,7 +3859,11 @@
               </a:pPr>
               <a:r>
                 <a:rPr b="0" lang="en-US" sz="1050" spc="-1" strike="noStrike">
+                  <a:solidFill>
+                    <a:srgbClr val="000000"/>
+                  </a:solidFill>
                   <a:latin typeface="Arial"/>
+                  <a:ea typeface="DejaVu Sans"/>
                 </a:rPr>
                 <a:t>2020</a:t>
               </a:r>
@@ -3706,7 +3882,7 @@
           <p:spPr>
             <a:xfrm>
               <a:off x="7851600" y="3007800"/>
-              <a:ext cx="463680" cy="385920"/>
+              <a:ext cx="463320" cy="385560"/>
             </a:xfrm>
             <a:prstGeom prst="rect">
               <a:avLst/>
@@ -3740,7 +3916,11 @@
               </a:pPr>
               <a:r>
                 <a:rPr b="0" lang="en-US" sz="1050" spc="-1" strike="noStrike">
+                  <a:solidFill>
+                    <a:srgbClr val="000000"/>
+                  </a:solidFill>
                   <a:latin typeface="Arial"/>
+                  <a:ea typeface="DejaVu Sans"/>
                 </a:rPr>
                 <a:t>26</a:t>
               </a:r>
@@ -3756,7 +3936,11 @@
               </a:pPr>
               <a:r>
                 <a:rPr b="0" lang="en-US" sz="1050" spc="-1" strike="noStrike">
+                  <a:solidFill>
+                    <a:srgbClr val="000000"/>
+                  </a:solidFill>
                   <a:latin typeface="Arial"/>
+                  <a:ea typeface="DejaVu Sans"/>
                 </a:rPr>
                 <a:t>2011</a:t>
               </a:r>
@@ -3775,7 +3959,7 @@
           <p:spPr>
             <a:xfrm>
               <a:off x="7857360" y="2320920"/>
-              <a:ext cx="463680" cy="385920"/>
+              <a:ext cx="463320" cy="385560"/>
             </a:xfrm>
             <a:prstGeom prst="rect">
               <a:avLst/>
@@ -3809,7 +3993,11 @@
               </a:pPr>
               <a:r>
                 <a:rPr b="0" lang="en-US" sz="1050" spc="-1" strike="noStrike">
+                  <a:solidFill>
+                    <a:srgbClr val="000000"/>
+                  </a:solidFill>
                   <a:latin typeface="Arial"/>
+                  <a:ea typeface="DejaVu Sans"/>
                 </a:rPr>
                 <a:t>26</a:t>
               </a:r>
@@ -3825,7 +4013,11 @@
               </a:pPr>
               <a:r>
                 <a:rPr b="0" lang="en-US" sz="1050" spc="-1" strike="noStrike">
+                  <a:solidFill>
+                    <a:srgbClr val="000000"/>
+                  </a:solidFill>
                   <a:latin typeface="Arial"/>
+                  <a:ea typeface="DejaVu Sans"/>
                 </a:rPr>
                 <a:t>2011</a:t>
               </a:r>
@@ -3844,7 +4036,84 @@
           <p:spPr>
             <a:xfrm>
               <a:off x="4964400" y="2320920"/>
-              <a:ext cx="473040" cy="385920"/>
+              <a:ext cx="472680" cy="385560"/>
+            </a:xfrm>
+            <a:prstGeom prst="rect">
+              <a:avLst/>
+            </a:prstGeom>
+            <a:solidFill>
+              <a:srgbClr val="ffffa6">
+                <a:alpha val="53000"/>
+              </a:srgbClr>
+            </a:solidFill>
+            <a:ln w="0">
+              <a:solidFill>
+                <a:srgbClr val="000000"/>
+              </a:solidFill>
+            </a:ln>
+          </p:spPr>
+          <p:style>
+            <a:lnRef idx="0"/>
+            <a:fillRef idx="0"/>
+            <a:effectRef idx="0"/>
+            <a:fontRef idx="minor"/>
+          </p:style>
+          <p:txBody>
+            <a:bodyPr lIns="90000" rIns="90000" tIns="45000" bIns="45000">
+              <a:noAutofit/>
+            </a:bodyPr>
+            <a:p>
+              <a:pPr algn="ctr">
+                <a:lnSpc>
+                  <a:spcPct val="100000"/>
+                </a:lnSpc>
+              </a:pPr>
+              <a:r>
+                <a:rPr b="0" lang="en-US" sz="1050" spc="-1" strike="noStrike">
+                  <a:solidFill>
+                    <a:srgbClr val="000000"/>
+                  </a:solidFill>
+                  <a:latin typeface="Arial"/>
+                  <a:ea typeface="DejaVu Sans"/>
+                </a:rPr>
+                <a:t>10</a:t>
+              </a:r>
+              <a:endParaRPr b="0" lang="en-US" sz="1050" spc="-1" strike="noStrike">
+                <a:latin typeface="Arial"/>
+              </a:endParaRPr>
+            </a:p>
+            <a:p>
+              <a:pPr algn="ctr">
+                <a:lnSpc>
+                  <a:spcPct val="100000"/>
+                </a:lnSpc>
+              </a:pPr>
+              <a:r>
+                <a:rPr b="0" lang="en-US" sz="1050" spc="-1" strike="noStrike">
+                  <a:solidFill>
+                    <a:srgbClr val="000000"/>
+                  </a:solidFill>
+                  <a:latin typeface="Arial"/>
+                  <a:ea typeface="DejaVu Sans"/>
+                </a:rPr>
+                <a:t>1995</a:t>
+              </a:r>
+              <a:endParaRPr b="0" lang="en-US" sz="1050" spc="-1" strike="noStrike">
+                <a:latin typeface="Arial"/>
+              </a:endParaRPr>
+            </a:p>
+          </p:txBody>
+        </p:sp>
+        <p:sp>
+          <p:nvSpPr>
+            <p:cNvPr id="88" name=""/>
+            <p:cNvSpPr/>
+            <p:nvPr/>
+          </p:nvSpPr>
+          <p:spPr>
+            <a:xfrm>
+              <a:off x="4948200" y="3007800"/>
+              <a:ext cx="472680" cy="385560"/>
             </a:xfrm>
             <a:prstGeom prst="rect">
               <a:avLst/>
@@ -3878,7 +4147,11 @@
               </a:pPr>
               <a:r>
                 <a:rPr b="0" lang="en-US" sz="1050" spc="-1" strike="noStrike">
+                  <a:solidFill>
+                    <a:srgbClr val="000000"/>
+                  </a:solidFill>
                   <a:latin typeface="Arial"/>
+                  <a:ea typeface="DejaVu Sans"/>
                 </a:rPr>
                 <a:t>10</a:t>
               </a:r>
@@ -3894,76 +4167,11 @@
               </a:pPr>
               <a:r>
                 <a:rPr b="0" lang="en-US" sz="1050" spc="-1" strike="noStrike">
+                  <a:solidFill>
+                    <a:srgbClr val="000000"/>
+                  </a:solidFill>
                   <a:latin typeface="Arial"/>
-                </a:rPr>
-                <a:t>1995</a:t>
-              </a:r>
-              <a:endParaRPr b="0" lang="en-US" sz="1050" spc="-1" strike="noStrike">
-                <a:latin typeface="Arial"/>
-              </a:endParaRPr>
-            </a:p>
-          </p:txBody>
-        </p:sp>
-        <p:sp>
-          <p:nvSpPr>
-            <p:cNvPr id="88" name=""/>
-            <p:cNvSpPr/>
-            <p:nvPr/>
-          </p:nvSpPr>
-          <p:spPr>
-            <a:xfrm>
-              <a:off x="4948200" y="3007800"/>
-              <a:ext cx="473040" cy="385920"/>
-            </a:xfrm>
-            <a:prstGeom prst="rect">
-              <a:avLst/>
-            </a:prstGeom>
-            <a:solidFill>
-              <a:srgbClr val="ffffff">
-                <a:alpha val="53000"/>
-              </a:srgbClr>
-            </a:solidFill>
-            <a:ln w="0">
-              <a:solidFill>
-                <a:srgbClr val="000000"/>
-              </a:solidFill>
-            </a:ln>
-          </p:spPr>
-          <p:style>
-            <a:lnRef idx="0"/>
-            <a:fillRef idx="0"/>
-            <a:effectRef idx="0"/>
-            <a:fontRef idx="minor"/>
-          </p:style>
-          <p:txBody>
-            <a:bodyPr lIns="90000" rIns="90000" tIns="45000" bIns="45000">
-              <a:noAutofit/>
-            </a:bodyPr>
-            <a:p>
-              <a:pPr algn="ctr">
-                <a:lnSpc>
-                  <a:spcPct val="100000"/>
-                </a:lnSpc>
-              </a:pPr>
-              <a:r>
-                <a:rPr b="0" lang="en-US" sz="1050" spc="-1" strike="noStrike">
-                  <a:latin typeface="Arial"/>
-                </a:rPr>
-                <a:t>10</a:t>
-              </a:r>
-              <a:endParaRPr b="0" lang="en-US" sz="1050" spc="-1" strike="noStrike">
-                <a:latin typeface="Arial"/>
-              </a:endParaRPr>
-            </a:p>
-            <a:p>
-              <a:pPr algn="ctr">
-                <a:lnSpc>
-                  <a:spcPct val="100000"/>
-                </a:lnSpc>
-              </a:pPr>
-              <a:r>
-                <a:rPr b="0" lang="en-US" sz="1050" spc="-1" strike="noStrike">
-                  <a:latin typeface="Arial"/>
+                  <a:ea typeface="DejaVu Sans"/>
                 </a:rPr>
                 <a:t>1995</a:t>
               </a:r>
@@ -3983,7 +4191,7 @@
         <p:spPr>
           <a:xfrm rot="16180800">
             <a:off x="-392040" y="2382840"/>
-            <a:ext cx="1405440" cy="373320"/>
+            <a:ext cx="1405080" cy="372960"/>
           </a:xfrm>
           <a:prstGeom prst="rect">
             <a:avLst/>
@@ -4011,7 +4219,11 @@
             </a:pPr>
             <a:r>
               <a:rPr b="0" lang="en-US" sz="2000" spc="-1" strike="noStrike">
-                <a:latin typeface="Arial"/>
+                <a:solidFill>
+                  <a:srgbClr val="000000"/>
+                </a:solidFill>
+                <a:latin typeface="Arial"/>
+                <a:ea typeface="DejaVu Sans"/>
               </a:rPr>
               <a:t>Treatment</a:t>
             </a:r>
@@ -4030,9 +4242,9 @@
         <p:grpSpPr>
           <a:xfrm>
             <a:off x="7592400" y="228600"/>
-            <a:ext cx="2008440" cy="385920"/>
+            <a:ext cx="2008080" cy="385560"/>
             <a:chOff x="7592400" y="228600"/>
-            <a:chExt cx="2008440" cy="385920"/>
+            <a:chExt cx="2008080" cy="385560"/>
           </a:xfrm>
         </p:grpSpPr>
         <p:sp>
@@ -4044,7 +4256,7 @@
           <p:spPr>
             <a:xfrm>
               <a:off x="7772400" y="268560"/>
-              <a:ext cx="1828440" cy="345960"/>
+              <a:ext cx="1828080" cy="345600"/>
             </a:xfrm>
             <a:prstGeom prst="rect">
               <a:avLst/>
@@ -4072,9 +4284,9 @@
           <p:grpSpPr>
             <a:xfrm>
               <a:off x="7592400" y="228600"/>
-              <a:ext cx="1987560" cy="385920"/>
+              <a:ext cx="1987200" cy="385560"/>
               <a:chOff x="7592400" y="228600"/>
-              <a:chExt cx="1987560" cy="385920"/>
+              <a:chExt cx="1987200" cy="385560"/>
             </a:xfrm>
           </p:grpSpPr>
           <p:sp>
@@ -4086,7 +4298,7 @@
             <p:spPr>
               <a:xfrm>
                 <a:off x="7592400" y="228600"/>
-                <a:ext cx="613080" cy="385920"/>
+                <a:ext cx="612720" cy="385560"/>
               </a:xfrm>
               <a:prstGeom prst="rect">
                 <a:avLst/>
@@ -4120,7 +4332,11 @@
                 </a:pPr>
                 <a:r>
                   <a:rPr b="0" lang="en-US" sz="1050" spc="-1" strike="noStrike">
+                    <a:solidFill>
+                      <a:srgbClr val="000000"/>
+                    </a:solidFill>
                     <a:latin typeface="Arial"/>
+                    <a:ea typeface="DejaVu Sans"/>
                   </a:rPr>
                   <a:t>DF age</a:t>
                 </a:r>
@@ -4136,7 +4352,11 @@
                 </a:pPr>
                 <a:r>
                   <a:rPr b="0" lang="en-US" sz="1050" spc="-1" strike="noStrike">
+                    <a:solidFill>
+                      <a:srgbClr val="000000"/>
+                    </a:solidFill>
                     <a:latin typeface="Arial"/>
+                    <a:ea typeface="DejaVu Sans"/>
                   </a:rPr>
                   <a:t>year</a:t>
                 </a:r>
@@ -4155,7 +4375,7 @@
             <p:spPr>
               <a:xfrm>
                 <a:off x="8174520" y="268560"/>
-                <a:ext cx="1405440" cy="345960"/>
+                <a:ext cx="1405080" cy="345600"/>
               </a:xfrm>
               <a:prstGeom prst="rect">
                 <a:avLst/>
@@ -4183,7 +4403,11 @@
                 </a:pPr>
                 <a:r>
                   <a:rPr b="0" lang="en-US" sz="1400" spc="-1" strike="noStrike">
+                    <a:solidFill>
+                      <a:srgbClr val="000000"/>
+                    </a:solidFill>
                     <a:latin typeface="Arial"/>
+                    <a:ea typeface="DejaVu Sans"/>
                   </a:rPr>
                   <a:t>Measurement</a:t>
                 </a:r>
@@ -4477,7 +4701,7 @@
         <p:spPr>
           <a:xfrm>
             <a:off x="2290320" y="4682880"/>
-            <a:ext cx="306720" cy="345960"/>
+            <a:ext cx="306360" cy="345600"/>
           </a:xfrm>
           <a:prstGeom prst="rect">
             <a:avLst/>
@@ -4505,7 +4729,11 @@
             </a:pPr>
             <a:r>
               <a:rPr b="0" lang="en-US" sz="1800" spc="-1" strike="noStrike">
-                <a:latin typeface="Arial"/>
+                <a:solidFill>
+                  <a:srgbClr val="000000"/>
+                </a:solidFill>
+                <a:latin typeface="Arial"/>
+                <a:ea typeface="DejaVu Sans"/>
               </a:rPr>
               <a:t>5</a:t>
             </a:r>
@@ -4524,7 +4752,7 @@
         <p:spPr>
           <a:xfrm>
             <a:off x="3132720" y="4682880"/>
-            <a:ext cx="433440" cy="345960"/>
+            <a:ext cx="433080" cy="345600"/>
           </a:xfrm>
           <a:prstGeom prst="rect">
             <a:avLst/>
@@ -4552,7 +4780,11 @@
             </a:pPr>
             <a:r>
               <a:rPr b="0" lang="en-US" sz="1800" spc="-1" strike="noStrike">
-                <a:latin typeface="Arial"/>
+                <a:solidFill>
+                  <a:srgbClr val="000000"/>
+                </a:solidFill>
+                <a:latin typeface="Arial"/>
+                <a:ea typeface="DejaVu Sans"/>
               </a:rPr>
               <a:t>10</a:t>
             </a:r>
@@ -4571,7 +4803,7 @@
         <p:spPr>
           <a:xfrm>
             <a:off x="4047120" y="4682880"/>
-            <a:ext cx="433440" cy="345960"/>
+            <a:ext cx="433080" cy="345600"/>
           </a:xfrm>
           <a:prstGeom prst="rect">
             <a:avLst/>
@@ -4599,7 +4831,11 @@
             </a:pPr>
             <a:r>
               <a:rPr b="0" lang="en-US" sz="1800" spc="-1" strike="noStrike">
-                <a:latin typeface="Arial"/>
+                <a:solidFill>
+                  <a:srgbClr val="000000"/>
+                </a:solidFill>
+                <a:latin typeface="Arial"/>
+                <a:ea typeface="DejaVu Sans"/>
               </a:rPr>
               <a:t>15</a:t>
             </a:r>
@@ -4618,7 +4854,7 @@
         <p:spPr>
           <a:xfrm>
             <a:off x="4961520" y="4682880"/>
-            <a:ext cx="433440" cy="345960"/>
+            <a:ext cx="433080" cy="345600"/>
           </a:xfrm>
           <a:prstGeom prst="rect">
             <a:avLst/>
@@ -4646,7 +4882,11 @@
             </a:pPr>
             <a:r>
               <a:rPr b="0" lang="en-US" sz="1800" spc="-1" strike="noStrike">
-                <a:latin typeface="Arial"/>
+                <a:solidFill>
+                  <a:srgbClr val="000000"/>
+                </a:solidFill>
+                <a:latin typeface="Arial"/>
+                <a:ea typeface="DejaVu Sans"/>
               </a:rPr>
               <a:t>20</a:t>
             </a:r>
@@ -4665,7 +4905,7 @@
         <p:spPr>
           <a:xfrm>
             <a:off x="5875920" y="4682880"/>
-            <a:ext cx="433440" cy="345960"/>
+            <a:ext cx="433080" cy="345600"/>
           </a:xfrm>
           <a:prstGeom prst="rect">
             <a:avLst/>
@@ -4693,7 +4933,11 @@
             </a:pPr>
             <a:r>
               <a:rPr b="0" lang="en-US" sz="1800" spc="-1" strike="noStrike">
-                <a:latin typeface="Arial"/>
+                <a:solidFill>
+                  <a:srgbClr val="000000"/>
+                </a:solidFill>
+                <a:latin typeface="Arial"/>
+                <a:ea typeface="DejaVu Sans"/>
               </a:rPr>
               <a:t>25</a:t>
             </a:r>
@@ -4712,7 +4956,7 @@
         <p:spPr>
           <a:xfrm>
             <a:off x="6790320" y="4682880"/>
-            <a:ext cx="433440" cy="345960"/>
+            <a:ext cx="433080" cy="345600"/>
           </a:xfrm>
           <a:prstGeom prst="rect">
             <a:avLst/>
@@ -4740,7 +4984,11 @@
             </a:pPr>
             <a:r>
               <a:rPr b="0" lang="en-US" sz="1800" spc="-1" strike="noStrike">
-                <a:latin typeface="Arial"/>
+                <a:solidFill>
+                  <a:srgbClr val="000000"/>
+                </a:solidFill>
+                <a:latin typeface="Arial"/>
+                <a:ea typeface="DejaVu Sans"/>
               </a:rPr>
               <a:t>30</a:t>
             </a:r>
@@ -4759,7 +5007,7 @@
         <p:spPr>
           <a:xfrm>
             <a:off x="7698600" y="4682880"/>
-            <a:ext cx="456840" cy="345960"/>
+            <a:ext cx="456480" cy="345600"/>
           </a:xfrm>
           <a:prstGeom prst="rect">
             <a:avLst/>
@@ -4787,7 +5035,11 @@
             </a:pPr>
             <a:r>
               <a:rPr b="0" lang="en-US" sz="1800" spc="-1" strike="noStrike">
-                <a:latin typeface="Arial"/>
+                <a:solidFill>
+                  <a:srgbClr val="000000"/>
+                </a:solidFill>
+                <a:latin typeface="Arial"/>
+                <a:ea typeface="DejaVu Sans"/>
               </a:rPr>
               <a:t>35</a:t>
             </a:r>
@@ -4806,7 +5058,7 @@
         <p:spPr>
           <a:xfrm>
             <a:off x="8619120" y="4682880"/>
-            <a:ext cx="433440" cy="345960"/>
+            <a:ext cx="433080" cy="345600"/>
           </a:xfrm>
           <a:prstGeom prst="rect">
             <a:avLst/>
@@ -4834,7 +5086,11 @@
             </a:pPr>
             <a:r>
               <a:rPr b="0" lang="en-US" sz="1800" spc="-1" strike="noStrike">
-                <a:latin typeface="Arial"/>
+                <a:solidFill>
+                  <a:srgbClr val="000000"/>
+                </a:solidFill>
+                <a:latin typeface="Arial"/>
+                <a:ea typeface="DejaVu Sans"/>
               </a:rPr>
               <a:t>40</a:t>
             </a:r>
@@ -4853,7 +5109,7 @@
         <p:spPr>
           <a:xfrm>
             <a:off x="9533520" y="4682880"/>
-            <a:ext cx="433440" cy="345960"/>
+            <a:ext cx="433080" cy="345600"/>
           </a:xfrm>
           <a:prstGeom prst="rect">
             <a:avLst/>
@@ -4881,7 +5137,11 @@
             </a:pPr>
             <a:r>
               <a:rPr b="0" lang="en-US" sz="1800" spc="-1" strike="noStrike">
-                <a:latin typeface="Arial"/>
+                <a:solidFill>
+                  <a:srgbClr val="000000"/>
+                </a:solidFill>
+                <a:latin typeface="Arial"/>
+                <a:ea typeface="DejaVu Sans"/>
               </a:rPr>
               <a:t>45</a:t>
             </a:r>
@@ -4900,7 +5160,7 @@
         <p:spPr>
           <a:xfrm>
             <a:off x="1405800" y="4682880"/>
-            <a:ext cx="306720" cy="345960"/>
+            <a:ext cx="306360" cy="345600"/>
           </a:xfrm>
           <a:prstGeom prst="rect">
             <a:avLst/>
@@ -4928,7 +5188,11 @@
             </a:pPr>
             <a:r>
               <a:rPr b="0" lang="en-US" sz="1800" spc="-1" strike="noStrike">
-                <a:latin typeface="Arial"/>
+                <a:solidFill>
+                  <a:srgbClr val="000000"/>
+                </a:solidFill>
+                <a:latin typeface="Arial"/>
+                <a:ea typeface="DejaVu Sans"/>
               </a:rPr>
               <a:t>0</a:t>
             </a:r>
@@ -4947,7 +5211,7 @@
         <p:spPr>
           <a:xfrm>
             <a:off x="4233600" y="5140080"/>
-            <a:ext cx="3236040" cy="345960"/>
+            <a:ext cx="3235680" cy="345600"/>
           </a:xfrm>
           <a:prstGeom prst="rect">
             <a:avLst/>
@@ -4975,7 +5239,11 @@
             </a:pPr>
             <a:r>
               <a:rPr b="0" lang="en-US" sz="1800" spc="-1" strike="noStrike">
-                <a:latin typeface="Arial"/>
+                <a:solidFill>
+                  <a:srgbClr val="000000"/>
+                </a:solidFill>
+                <a:latin typeface="Arial"/>
+                <a:ea typeface="DejaVu Sans"/>
               </a:rPr>
               <a:t>Douglas Fir Stand Age (years)</a:t>
             </a:r>
@@ -4994,7 +5262,7 @@
         <p:spPr>
           <a:xfrm>
             <a:off x="658800" y="950400"/>
-            <a:ext cx="1023840" cy="345960"/>
+            <a:ext cx="1023480" cy="345600"/>
           </a:xfrm>
           <a:prstGeom prst="rect">
             <a:avLst/>
@@ -5022,7 +5290,11 @@
             </a:pPr>
             <a:r>
               <a:rPr b="0" lang="en-US" sz="1800" spc="-1" strike="noStrike">
-                <a:latin typeface="Arial"/>
+                <a:solidFill>
+                  <a:srgbClr val="000000"/>
+                </a:solidFill>
+                <a:latin typeface="Arial"/>
+                <a:ea typeface="DejaVu Sans"/>
               </a:rPr>
               <a:t>RA 20</a:t>
             </a:r>
@@ -5041,7 +5313,7 @@
         <p:spPr>
           <a:xfrm>
             <a:off x="586800" y="1636200"/>
-            <a:ext cx="1023840" cy="345960"/>
+            <a:ext cx="1023480" cy="345600"/>
           </a:xfrm>
           <a:prstGeom prst="rect">
             <a:avLst/>
@@ -5069,7 +5341,11 @@
             </a:pPr>
             <a:r>
               <a:rPr b="0" lang="en-US" sz="1800" spc="-1" strike="noStrike">
-                <a:latin typeface="Arial"/>
+                <a:solidFill>
+                  <a:srgbClr val="000000"/>
+                </a:solidFill>
+                <a:latin typeface="Arial"/>
+                <a:ea typeface="DejaVu Sans"/>
               </a:rPr>
               <a:t>CW 20</a:t>
             </a:r>
@@ -5088,7 +5364,7 @@
         <p:spPr>
           <a:xfrm>
             <a:off x="658800" y="2345400"/>
-            <a:ext cx="1023840" cy="345960"/>
+            <a:ext cx="1023480" cy="345600"/>
           </a:xfrm>
           <a:prstGeom prst="rect">
             <a:avLst/>
@@ -5116,7 +5392,11 @@
             </a:pPr>
             <a:r>
               <a:rPr b="0" lang="en-US" sz="1800" spc="-1" strike="noStrike">
-                <a:latin typeface="Arial"/>
+                <a:solidFill>
+                  <a:srgbClr val="000000"/>
+                </a:solidFill>
+                <a:latin typeface="Arial"/>
+                <a:ea typeface="DejaVu Sans"/>
               </a:rPr>
               <a:t>RA 10</a:t>
             </a:r>
@@ -5135,7 +5415,7 @@
         <p:spPr>
           <a:xfrm>
             <a:off x="550800" y="3021480"/>
-            <a:ext cx="1023840" cy="345960"/>
+            <a:ext cx="1023480" cy="345600"/>
           </a:xfrm>
           <a:prstGeom prst="rect">
             <a:avLst/>
@@ -5163,7 +5443,11 @@
             </a:pPr>
             <a:r>
               <a:rPr b="0" lang="en-US" sz="1800" spc="-1" strike="noStrike">
-                <a:latin typeface="Arial"/>
+                <a:solidFill>
+                  <a:srgbClr val="000000"/>
+                </a:solidFill>
+                <a:latin typeface="Arial"/>
+                <a:ea typeface="DejaVu Sans"/>
               </a:rPr>
               <a:t>CW 10</a:t>
             </a:r>
@@ -5182,7 +5466,7 @@
         <p:spPr>
           <a:xfrm>
             <a:off x="766800" y="3704400"/>
-            <a:ext cx="1023840" cy="345960"/>
+            <a:ext cx="1023480" cy="345600"/>
           </a:xfrm>
           <a:prstGeom prst="rect">
             <a:avLst/>
@@ -5210,7 +5494,11 @@
             </a:pPr>
             <a:r>
               <a:rPr b="0" lang="en-US" sz="1800" spc="-1" strike="noStrike">
-                <a:latin typeface="Arial"/>
+                <a:solidFill>
+                  <a:srgbClr val="000000"/>
+                </a:solidFill>
+                <a:latin typeface="Arial"/>
+                <a:ea typeface="DejaVu Sans"/>
               </a:rPr>
               <a:t>DF 0</a:t>
             </a:r>
@@ -5256,7 +5544,7 @@
         <p:spPr>
           <a:xfrm>
             <a:off x="1576800" y="914760"/>
-            <a:ext cx="4521240" cy="456480"/>
+            <a:ext cx="4520880" cy="456120"/>
           </a:xfrm>
           <a:prstGeom prst="rect">
             <a:avLst/>
@@ -5286,7 +5574,7 @@
         <p:spPr>
           <a:xfrm>
             <a:off x="1576800" y="1600200"/>
-            <a:ext cx="4521240" cy="456480"/>
+            <a:ext cx="4520880" cy="456120"/>
           </a:xfrm>
           <a:prstGeom prst="rect">
             <a:avLst/>
@@ -5316,7 +5604,7 @@
         <p:spPr>
           <a:xfrm>
             <a:off x="1576800" y="2286360"/>
-            <a:ext cx="6350040" cy="456480"/>
+            <a:ext cx="6349680" cy="456120"/>
           </a:xfrm>
           <a:prstGeom prst="rect">
             <a:avLst/>
@@ -5346,7 +5634,7 @@
         <p:spPr>
           <a:xfrm>
             <a:off x="1576800" y="2971800"/>
-            <a:ext cx="6350040" cy="456480"/>
+            <a:ext cx="6349680" cy="456120"/>
           </a:xfrm>
           <a:prstGeom prst="rect">
             <a:avLst/>
@@ -5376,7 +5664,7 @@
         <p:spPr>
           <a:xfrm>
             <a:off x="1576800" y="3657600"/>
-            <a:ext cx="8178840" cy="456480"/>
+            <a:ext cx="8178480" cy="456120"/>
           </a:xfrm>
           <a:prstGeom prst="rect">
             <a:avLst/>
@@ -5406,7 +5694,7 @@
         <p:spPr>
           <a:xfrm>
             <a:off x="9516600" y="3692160"/>
-            <a:ext cx="473040" cy="385920"/>
+            <a:ext cx="472680" cy="385560"/>
           </a:xfrm>
           <a:prstGeom prst="rect">
             <a:avLst/>
@@ -5440,7 +5728,11 @@
             </a:pPr>
             <a:r>
               <a:rPr b="0" lang="en-US" sz="1050" spc="-1" strike="noStrike">
-                <a:latin typeface="Arial"/>
+                <a:solidFill>
+                  <a:srgbClr val="000000"/>
+                </a:solidFill>
+                <a:latin typeface="Arial"/>
+                <a:ea typeface="DejaVu Sans"/>
               </a:rPr>
               <a:t>45</a:t>
             </a:r>
@@ -5456,7 +5748,11 @@
             </a:pPr>
             <a:r>
               <a:rPr b="0" lang="en-US" sz="1050" spc="-1" strike="noStrike">
-                <a:latin typeface="Arial"/>
+                <a:solidFill>
+                  <a:srgbClr val="000000"/>
+                </a:solidFill>
+                <a:latin typeface="Arial"/>
+                <a:ea typeface="DejaVu Sans"/>
               </a:rPr>
               <a:t>2020</a:t>
             </a:r>
@@ -5475,7 +5771,7 @@
         <p:spPr>
           <a:xfrm>
             <a:off x="7684200" y="3007800"/>
-            <a:ext cx="473040" cy="385920"/>
+            <a:ext cx="472680" cy="385560"/>
           </a:xfrm>
           <a:prstGeom prst="rect">
             <a:avLst/>
@@ -5509,7 +5805,11 @@
             </a:pPr>
             <a:r>
               <a:rPr b="0" lang="en-US" sz="1050" spc="-1" strike="noStrike">
-                <a:latin typeface="Arial"/>
+                <a:solidFill>
+                  <a:srgbClr val="000000"/>
+                </a:solidFill>
+                <a:latin typeface="Arial"/>
+                <a:ea typeface="DejaVu Sans"/>
               </a:rPr>
               <a:t>35</a:t>
             </a:r>
@@ -5525,7 +5825,11 @@
             </a:pPr>
             <a:r>
               <a:rPr b="0" lang="en-US" sz="1050" spc="-1" strike="noStrike">
-                <a:latin typeface="Arial"/>
+                <a:solidFill>
+                  <a:srgbClr val="000000"/>
+                </a:solidFill>
+                <a:latin typeface="Arial"/>
+                <a:ea typeface="DejaVu Sans"/>
               </a:rPr>
               <a:t>2020</a:t>
             </a:r>
@@ -5544,7 +5848,7 @@
         <p:spPr>
           <a:xfrm>
             <a:off x="7684200" y="2322360"/>
-            <a:ext cx="473040" cy="385920"/>
+            <a:ext cx="472680" cy="385560"/>
           </a:xfrm>
           <a:prstGeom prst="rect">
             <a:avLst/>
@@ -5578,7 +5882,11 @@
             </a:pPr>
             <a:r>
               <a:rPr b="0" lang="en-US" sz="1050" spc="-1" strike="noStrike">
-                <a:latin typeface="Arial"/>
+                <a:solidFill>
+                  <a:srgbClr val="000000"/>
+                </a:solidFill>
+                <a:latin typeface="Arial"/>
+                <a:ea typeface="DejaVu Sans"/>
               </a:rPr>
               <a:t>35</a:t>
             </a:r>
@@ -5594,7 +5902,11 @@
             </a:pPr>
             <a:r>
               <a:rPr b="0" lang="en-US" sz="1050" spc="-1" strike="noStrike">
-                <a:latin typeface="Arial"/>
+                <a:solidFill>
+                  <a:srgbClr val="000000"/>
+                </a:solidFill>
+                <a:latin typeface="Arial"/>
+                <a:ea typeface="DejaVu Sans"/>
               </a:rPr>
               <a:t>2020</a:t>
             </a:r>
@@ -5613,7 +5925,7 @@
         <p:spPr>
           <a:xfrm>
             <a:off x="5855400" y="1635120"/>
-            <a:ext cx="473040" cy="385920"/>
+            <a:ext cx="472680" cy="385560"/>
           </a:xfrm>
           <a:prstGeom prst="rect">
             <a:avLst/>
@@ -5647,7 +5959,11 @@
             </a:pPr>
             <a:r>
               <a:rPr b="0" lang="en-US" sz="1050" spc="-1" strike="noStrike">
-                <a:latin typeface="Arial"/>
+                <a:solidFill>
+                  <a:srgbClr val="000000"/>
+                </a:solidFill>
+                <a:latin typeface="Arial"/>
+                <a:ea typeface="DejaVu Sans"/>
               </a:rPr>
               <a:t>25</a:t>
             </a:r>
@@ -5663,7 +5979,11 @@
             </a:pPr>
             <a:r>
               <a:rPr b="0" lang="en-US" sz="1050" spc="-1" strike="noStrike">
-                <a:latin typeface="Arial"/>
+                <a:solidFill>
+                  <a:srgbClr val="000000"/>
+                </a:solidFill>
+                <a:latin typeface="Arial"/>
+                <a:ea typeface="DejaVu Sans"/>
               </a:rPr>
               <a:t>2020</a:t>
             </a:r>
@@ -5682,7 +6002,7 @@
         <p:spPr>
           <a:xfrm>
             <a:off x="5855400" y="949320"/>
-            <a:ext cx="473040" cy="385920"/>
+            <a:ext cx="472680" cy="385560"/>
           </a:xfrm>
           <a:prstGeom prst="rect">
             <a:avLst/>
@@ -5716,7 +6036,11 @@
             </a:pPr>
             <a:r>
               <a:rPr b="0" lang="en-US" sz="1050" spc="-1" strike="noStrike">
-                <a:latin typeface="Arial"/>
+                <a:solidFill>
+                  <a:srgbClr val="000000"/>
+                </a:solidFill>
+                <a:latin typeface="Arial"/>
+                <a:ea typeface="DejaVu Sans"/>
               </a:rPr>
               <a:t>25</a:t>
             </a:r>
@@ -5732,7 +6056,11 @@
             </a:pPr>
             <a:r>
               <a:rPr b="0" lang="en-US" sz="1050" spc="-1" strike="noStrike">
-                <a:latin typeface="Arial"/>
+                <a:solidFill>
+                  <a:srgbClr val="000000"/>
+                </a:solidFill>
+                <a:latin typeface="Arial"/>
+                <a:ea typeface="DejaVu Sans"/>
               </a:rPr>
               <a:t>2020</a:t>
             </a:r>
@@ -5751,7 +6079,7 @@
         <p:spPr>
           <a:xfrm>
             <a:off x="7819200" y="3692160"/>
-            <a:ext cx="463680" cy="385920"/>
+            <a:ext cx="463320" cy="385560"/>
           </a:xfrm>
           <a:prstGeom prst="rect">
             <a:avLst/>
@@ -5785,7 +6113,11 @@
             </a:pPr>
             <a:r>
               <a:rPr b="0" lang="en-US" sz="1050" spc="-1" strike="noStrike">
-                <a:latin typeface="Arial"/>
+                <a:solidFill>
+                  <a:srgbClr val="000000"/>
+                </a:solidFill>
+                <a:latin typeface="Arial"/>
+                <a:ea typeface="DejaVu Sans"/>
               </a:rPr>
               <a:t>36</a:t>
             </a:r>
@@ -5801,7 +6133,11 @@
             </a:pPr>
             <a:r>
               <a:rPr b="0" lang="en-US" sz="1050" spc="-1" strike="noStrike">
-                <a:latin typeface="Arial"/>
+                <a:solidFill>
+                  <a:srgbClr val="000000"/>
+                </a:solidFill>
+                <a:latin typeface="Arial"/>
+                <a:ea typeface="DejaVu Sans"/>
               </a:rPr>
               <a:t>2011</a:t>
             </a:r>
@@ -5820,7 +6156,7 @@
         <p:spPr>
           <a:xfrm>
             <a:off x="9516960" y="3692520"/>
-            <a:ext cx="473040" cy="385920"/>
+            <a:ext cx="472680" cy="385560"/>
           </a:xfrm>
           <a:prstGeom prst="rect">
             <a:avLst/>
@@ -5854,7 +6190,11 @@
             </a:pPr>
             <a:r>
               <a:rPr b="0" lang="en-US" sz="1050" spc="-1" strike="noStrike">
-                <a:latin typeface="Arial"/>
+                <a:solidFill>
+                  <a:srgbClr val="000000"/>
+                </a:solidFill>
+                <a:latin typeface="Arial"/>
+                <a:ea typeface="DejaVu Sans"/>
               </a:rPr>
               <a:t>45</a:t>
             </a:r>
@@ -5870,7 +6210,11 @@
             </a:pPr>
             <a:r>
               <a:rPr b="0" lang="en-US" sz="1050" spc="-1" strike="noStrike">
-                <a:latin typeface="Arial"/>
+                <a:solidFill>
+                  <a:srgbClr val="000000"/>
+                </a:solidFill>
+                <a:latin typeface="Arial"/>
+                <a:ea typeface="DejaVu Sans"/>
               </a:rPr>
               <a:t>2020</a:t>
             </a:r>
@@ -5889,7 +6233,7 @@
         <p:spPr>
           <a:xfrm>
             <a:off x="3463200" y="3685320"/>
-            <a:ext cx="473040" cy="385920"/>
+            <a:ext cx="472680" cy="385560"/>
           </a:xfrm>
           <a:prstGeom prst="rect">
             <a:avLst/>
@@ -5923,7 +6267,11 @@
             </a:pPr>
             <a:r>
               <a:rPr b="0" lang="en-US" sz="1050" spc="-1" strike="noStrike">
-                <a:latin typeface="Arial"/>
+                <a:solidFill>
+                  <a:srgbClr val="000000"/>
+                </a:solidFill>
+                <a:latin typeface="Arial"/>
+                <a:ea typeface="DejaVu Sans"/>
               </a:rPr>
               <a:t>12</a:t>
             </a:r>
@@ -5939,7 +6287,11 @@
             </a:pPr>
             <a:r>
               <a:rPr b="0" lang="en-US" sz="1050" spc="-1" strike="noStrike">
-                <a:latin typeface="Arial"/>
+                <a:solidFill>
+                  <a:srgbClr val="000000"/>
+                </a:solidFill>
+                <a:latin typeface="Arial"/>
+                <a:ea typeface="DejaVu Sans"/>
               </a:rPr>
               <a:t>1987</a:t>
             </a:r>
@@ -5958,7 +6310,7 @@
         <p:spPr>
           <a:xfrm>
             <a:off x="6051600" y="3007800"/>
-            <a:ext cx="463680" cy="385920"/>
+            <a:ext cx="463320" cy="385560"/>
           </a:xfrm>
           <a:prstGeom prst="rect">
             <a:avLst/>
@@ -5992,7 +6344,11 @@
             </a:pPr>
             <a:r>
               <a:rPr b="0" lang="en-US" sz="1050" spc="-1" strike="noStrike">
-                <a:latin typeface="Arial"/>
+                <a:solidFill>
+                  <a:srgbClr val="000000"/>
+                </a:solidFill>
+                <a:latin typeface="Arial"/>
+                <a:ea typeface="DejaVu Sans"/>
               </a:rPr>
               <a:t>26</a:t>
             </a:r>
@@ -6008,7 +6364,11 @@
             </a:pPr>
             <a:r>
               <a:rPr b="0" lang="en-US" sz="1050" spc="-1" strike="noStrike">
-                <a:latin typeface="Arial"/>
+                <a:solidFill>
+                  <a:srgbClr val="000000"/>
+                </a:solidFill>
+                <a:latin typeface="Arial"/>
+                <a:ea typeface="DejaVu Sans"/>
               </a:rPr>
               <a:t>2011</a:t>
             </a:r>
@@ -6027,7 +6387,7 @@
         <p:spPr>
           <a:xfrm>
             <a:off x="6057360" y="2320920"/>
-            <a:ext cx="463680" cy="385920"/>
+            <a:ext cx="463320" cy="385560"/>
           </a:xfrm>
           <a:prstGeom prst="rect">
             <a:avLst/>
@@ -6061,7 +6421,11 @@
             </a:pPr>
             <a:r>
               <a:rPr b="0" lang="en-US" sz="1050" spc="-1" strike="noStrike">
-                <a:latin typeface="Arial"/>
+                <a:solidFill>
+                  <a:srgbClr val="000000"/>
+                </a:solidFill>
+                <a:latin typeface="Arial"/>
+                <a:ea typeface="DejaVu Sans"/>
               </a:rPr>
               <a:t>26</a:t>
             </a:r>
@@ -6077,7 +6441,11 @@
             </a:pPr>
             <a:r>
               <a:rPr b="0" lang="en-US" sz="1050" spc="-1" strike="noStrike">
-                <a:latin typeface="Arial"/>
+                <a:solidFill>
+                  <a:srgbClr val="000000"/>
+                </a:solidFill>
+                <a:latin typeface="Arial"/>
+                <a:ea typeface="DejaVu Sans"/>
               </a:rPr>
               <a:t>2011</a:t>
             </a:r>
@@ -6096,7 +6464,7 @@
         <p:spPr>
           <a:xfrm>
             <a:off x="4222800" y="949320"/>
-            <a:ext cx="463680" cy="385920"/>
+            <a:ext cx="463320" cy="385560"/>
           </a:xfrm>
           <a:prstGeom prst="rect">
             <a:avLst/>
@@ -6130,7 +6498,11 @@
             </a:pPr>
             <a:r>
               <a:rPr b="0" lang="en-US" sz="1050" spc="-1" strike="noStrike">
-                <a:latin typeface="Arial"/>
+                <a:solidFill>
+                  <a:srgbClr val="000000"/>
+                </a:solidFill>
+                <a:latin typeface="Arial"/>
+                <a:ea typeface="DejaVu Sans"/>
               </a:rPr>
               <a:t>16</a:t>
             </a:r>
@@ -6146,7 +6518,11 @@
             </a:pPr>
             <a:r>
               <a:rPr b="0" lang="en-US" sz="1050" spc="-1" strike="noStrike">
-                <a:latin typeface="Arial"/>
+                <a:solidFill>
+                  <a:srgbClr val="000000"/>
+                </a:solidFill>
+                <a:latin typeface="Arial"/>
+                <a:ea typeface="DejaVu Sans"/>
               </a:rPr>
               <a:t>2011</a:t>
             </a:r>
@@ -6165,7 +6541,7 @@
         <p:spPr>
           <a:xfrm>
             <a:off x="4215960" y="1636200"/>
-            <a:ext cx="463680" cy="385920"/>
+            <a:ext cx="463320" cy="385560"/>
           </a:xfrm>
           <a:prstGeom prst="rect">
             <a:avLst/>
@@ -6199,7 +6575,11 @@
             </a:pPr>
             <a:r>
               <a:rPr b="0" lang="en-US" sz="1050" spc="-1" strike="noStrike">
-                <a:latin typeface="Arial"/>
+                <a:solidFill>
+                  <a:srgbClr val="000000"/>
+                </a:solidFill>
+                <a:latin typeface="Arial"/>
+                <a:ea typeface="DejaVu Sans"/>
               </a:rPr>
               <a:t>16</a:t>
             </a:r>
@@ -6215,7 +6595,11 @@
             </a:pPr>
             <a:r>
               <a:rPr b="0" lang="en-US" sz="1050" spc="-1" strike="noStrike">
-                <a:latin typeface="Arial"/>
+                <a:solidFill>
+                  <a:srgbClr val="000000"/>
+                </a:solidFill>
+                <a:latin typeface="Arial"/>
+                <a:ea typeface="DejaVu Sans"/>
               </a:rPr>
               <a:t>2011</a:t>
             </a:r>
@@ -6234,7 +6618,84 @@
         <p:spPr>
           <a:xfrm>
             <a:off x="3128400" y="2320920"/>
-            <a:ext cx="473040" cy="385920"/>
+            <a:ext cx="472680" cy="385560"/>
+          </a:xfrm>
+          <a:prstGeom prst="rect">
+            <a:avLst/>
+          </a:prstGeom>
+          <a:solidFill>
+            <a:srgbClr val="ffffa6">
+              <a:alpha val="53000"/>
+            </a:srgbClr>
+          </a:solidFill>
+          <a:ln w="0">
+            <a:solidFill>
+              <a:srgbClr val="000000"/>
+            </a:solidFill>
+          </a:ln>
+        </p:spPr>
+        <p:style>
+          <a:lnRef idx="0"/>
+          <a:fillRef idx="0"/>
+          <a:effectRef idx="0"/>
+          <a:fontRef idx="minor"/>
+        </p:style>
+        <p:txBody>
+          <a:bodyPr lIns="90000" rIns="90000" tIns="45000" bIns="45000">
+            <a:noAutofit/>
+          </a:bodyPr>
+          <a:p>
+            <a:pPr algn="ctr">
+              <a:lnSpc>
+                <a:spcPct val="100000"/>
+              </a:lnSpc>
+            </a:pPr>
+            <a:r>
+              <a:rPr b="0" lang="en-US" sz="1050" spc="-1" strike="noStrike">
+                <a:solidFill>
+                  <a:srgbClr val="000000"/>
+                </a:solidFill>
+                <a:latin typeface="Arial"/>
+                <a:ea typeface="DejaVu Sans"/>
+              </a:rPr>
+              <a:t>10</a:t>
+            </a:r>
+            <a:endParaRPr b="0" lang="en-US" sz="1050" spc="-1" strike="noStrike">
+              <a:latin typeface="Arial"/>
+            </a:endParaRPr>
+          </a:p>
+          <a:p>
+            <a:pPr algn="ctr">
+              <a:lnSpc>
+                <a:spcPct val="100000"/>
+              </a:lnSpc>
+            </a:pPr>
+            <a:r>
+              <a:rPr b="0" lang="en-US" sz="1050" spc="-1" strike="noStrike">
+                <a:solidFill>
+                  <a:srgbClr val="000000"/>
+                </a:solidFill>
+                <a:latin typeface="Arial"/>
+                <a:ea typeface="DejaVu Sans"/>
+              </a:rPr>
+              <a:t>1995</a:t>
+            </a:r>
+            <a:endParaRPr b="0" lang="en-US" sz="1050" spc="-1" strike="noStrike">
+              <a:latin typeface="Arial"/>
+            </a:endParaRPr>
+          </a:p>
+        </p:txBody>
+      </p:sp>
+      <p:sp>
+        <p:nvSpPr>
+          <p:cNvPr id="139" name=""/>
+          <p:cNvSpPr/>
+          <p:nvPr/>
+        </p:nvSpPr>
+        <p:spPr>
+          <a:xfrm>
+            <a:off x="3112200" y="3007800"/>
+            <a:ext cx="472680" cy="385560"/>
           </a:xfrm>
           <a:prstGeom prst="rect">
             <a:avLst/>
@@ -6268,7 +6729,11 @@
             </a:pPr>
             <a:r>
               <a:rPr b="0" lang="en-US" sz="1050" spc="-1" strike="noStrike">
-                <a:latin typeface="Arial"/>
+                <a:solidFill>
+                  <a:srgbClr val="000000"/>
+                </a:solidFill>
+                <a:latin typeface="Arial"/>
+                <a:ea typeface="DejaVu Sans"/>
               </a:rPr>
               <a:t>10</a:t>
             </a:r>
@@ -6284,76 +6749,11 @@
             </a:pPr>
             <a:r>
               <a:rPr b="0" lang="en-US" sz="1050" spc="-1" strike="noStrike">
-                <a:latin typeface="Arial"/>
-              </a:rPr>
-              <a:t>1995</a:t>
-            </a:r>
-            <a:endParaRPr b="0" lang="en-US" sz="1050" spc="-1" strike="noStrike">
-              <a:latin typeface="Arial"/>
-            </a:endParaRPr>
-          </a:p>
-        </p:txBody>
-      </p:sp>
-      <p:sp>
-        <p:nvSpPr>
-          <p:cNvPr id="139" name=""/>
-          <p:cNvSpPr/>
-          <p:nvPr/>
-        </p:nvSpPr>
-        <p:spPr>
-          <a:xfrm>
-            <a:off x="3112200" y="3007800"/>
-            <a:ext cx="473040" cy="385920"/>
-          </a:xfrm>
-          <a:prstGeom prst="rect">
-            <a:avLst/>
-          </a:prstGeom>
-          <a:solidFill>
-            <a:srgbClr val="ffffff">
-              <a:alpha val="53000"/>
-            </a:srgbClr>
-          </a:solidFill>
-          <a:ln w="0">
-            <a:solidFill>
-              <a:srgbClr val="000000"/>
-            </a:solidFill>
-          </a:ln>
-        </p:spPr>
-        <p:style>
-          <a:lnRef idx="0"/>
-          <a:fillRef idx="0"/>
-          <a:effectRef idx="0"/>
-          <a:fontRef idx="minor"/>
-        </p:style>
-        <p:txBody>
-          <a:bodyPr lIns="90000" rIns="90000" tIns="45000" bIns="45000">
-            <a:noAutofit/>
-          </a:bodyPr>
-          <a:p>
-            <a:pPr algn="ctr">
-              <a:lnSpc>
-                <a:spcPct val="100000"/>
-              </a:lnSpc>
-            </a:pPr>
-            <a:r>
-              <a:rPr b="0" lang="en-US" sz="1050" spc="-1" strike="noStrike">
-                <a:latin typeface="Arial"/>
-              </a:rPr>
-              <a:t>10</a:t>
-            </a:r>
-            <a:endParaRPr b="0" lang="en-US" sz="1050" spc="-1" strike="noStrike">
-              <a:latin typeface="Arial"/>
-            </a:endParaRPr>
-          </a:p>
-          <a:p>
-            <a:pPr algn="ctr">
-              <a:lnSpc>
-                <a:spcPct val="100000"/>
-              </a:lnSpc>
-            </a:pPr>
-            <a:r>
-              <a:rPr b="0" lang="en-US" sz="1050" spc="-1" strike="noStrike">
-                <a:latin typeface="Arial"/>
+                <a:solidFill>
+                  <a:srgbClr val="000000"/>
+                </a:solidFill>
+                <a:latin typeface="Arial"/>
+                <a:ea typeface="DejaVu Sans"/>
               </a:rPr>
               <a:t>1995</a:t>
             </a:r>
@@ -6372,7 +6772,7 @@
         <p:spPr>
           <a:xfrm rot="16180800">
             <a:off x="-392040" y="2382840"/>
-            <a:ext cx="1405440" cy="373320"/>
+            <a:ext cx="1405080" cy="372960"/>
           </a:xfrm>
           <a:prstGeom prst="rect">
             <a:avLst/>
@@ -6400,7 +6800,11 @@
             </a:pPr>
             <a:r>
               <a:rPr b="0" lang="en-US" sz="2000" spc="-1" strike="noStrike">
-                <a:latin typeface="Arial"/>
+                <a:solidFill>
+                  <a:srgbClr val="000000"/>
+                </a:solidFill>
+                <a:latin typeface="Arial"/>
+                <a:ea typeface="DejaVu Sans"/>
               </a:rPr>
               <a:t>Treatment</a:t>
             </a:r>
@@ -6419,9 +6823,9 @@
         <p:grpSpPr>
           <a:xfrm>
             <a:off x="7664400" y="299520"/>
-            <a:ext cx="2023560" cy="385920"/>
+            <a:ext cx="2023200" cy="385560"/>
             <a:chOff x="7664400" y="299520"/>
-            <a:chExt cx="2023560" cy="385920"/>
+            <a:chExt cx="2023200" cy="385560"/>
           </a:xfrm>
         </p:grpSpPr>
         <p:sp>
@@ -6433,7 +6837,7 @@
           <p:spPr>
             <a:xfrm>
               <a:off x="7772400" y="339480"/>
-              <a:ext cx="1828440" cy="345960"/>
+              <a:ext cx="1828080" cy="345600"/>
             </a:xfrm>
             <a:prstGeom prst="rect">
               <a:avLst/>
@@ -6461,9 +6865,9 @@
           <p:grpSpPr>
             <a:xfrm>
               <a:off x="7664400" y="299520"/>
-              <a:ext cx="2023560" cy="385920"/>
+              <a:ext cx="2023200" cy="385560"/>
               <a:chOff x="7664400" y="299520"/>
-              <a:chExt cx="2023560" cy="385920"/>
+              <a:chExt cx="2023200" cy="385560"/>
             </a:xfrm>
           </p:grpSpPr>
           <p:sp>
@@ -6475,7 +6879,7 @@
             <p:spPr>
               <a:xfrm>
                 <a:off x="7664400" y="299520"/>
-                <a:ext cx="649800" cy="385920"/>
+                <a:ext cx="649440" cy="385560"/>
               </a:xfrm>
               <a:prstGeom prst="rect">
                 <a:avLst/>
@@ -6509,13 +6913,21 @@
                 </a:pPr>
                 <a:r>
                   <a:rPr b="0" lang="en-US" sz="1050" spc="-1" strike="noStrike">
+                    <a:solidFill>
+                      <a:srgbClr val="000000"/>
+                    </a:solidFill>
                     <a:latin typeface="Arial"/>
+                    <a:ea typeface="DejaVu Sans"/>
                   </a:rPr>
                   <a:t> </a:t>
                 </a:r>
                 <a:r>
                   <a:rPr b="0" lang="en-US" sz="1050" spc="-1" strike="noStrike">
+                    <a:solidFill>
+                      <a:srgbClr val="000000"/>
+                    </a:solidFill>
                     <a:latin typeface="Arial"/>
+                    <a:ea typeface="DejaVu Sans"/>
                   </a:rPr>
                   <a:t>DF age</a:t>
                 </a:r>
@@ -6531,7 +6943,11 @@
                 </a:pPr>
                 <a:r>
                   <a:rPr b="0" lang="en-US" sz="1050" spc="-1" strike="noStrike">
+                    <a:solidFill>
+                      <a:srgbClr val="000000"/>
+                    </a:solidFill>
                     <a:latin typeface="Arial"/>
+                    <a:ea typeface="DejaVu Sans"/>
                   </a:rPr>
                   <a:t>year</a:t>
                 </a:r>
@@ -6550,7 +6966,7 @@
             <p:spPr>
               <a:xfrm>
                 <a:off x="8282520" y="339480"/>
-                <a:ext cx="1405440" cy="345960"/>
+                <a:ext cx="1405080" cy="345600"/>
               </a:xfrm>
               <a:prstGeom prst="rect">
                 <a:avLst/>
@@ -6578,7 +6994,11 @@
                 </a:pPr>
                 <a:r>
                   <a:rPr b="0" lang="en-US" sz="1400" spc="-1" strike="noStrike">
+                    <a:solidFill>
+                      <a:srgbClr val="000000"/>
+                    </a:solidFill>
                     <a:latin typeface="Arial"/>
+                    <a:ea typeface="DejaVu Sans"/>
                   </a:rPr>
                   <a:t>Measurement</a:t>
                 </a:r>

--- a/Experiment_timeline.pptx
+++ b/Experiment_timeline.pptx
@@ -65,7 +65,7 @@
         <p:spPr>
           <a:xfrm>
             <a:off x="504000" y="226080"/>
-            <a:ext cx="9070920" cy="945720"/>
+            <a:ext cx="9072000" cy="946440"/>
           </a:xfrm>
           <a:prstGeom prst="rect">
             <a:avLst/>
@@ -96,7 +96,7 @@
         <p:spPr>
           <a:xfrm>
             <a:off x="504000" y="1326600"/>
-            <a:ext cx="9071640" cy="1568160"/>
+            <a:ext cx="9072000" cy="1568520"/>
           </a:xfrm>
           <a:prstGeom prst="rect">
             <a:avLst/>
@@ -125,8 +125,8 @@
         </p:nvSpPr>
         <p:spPr>
           <a:xfrm>
-            <a:off x="504000" y="3044160"/>
-            <a:ext cx="9071640" cy="1568160"/>
+            <a:off x="504000" y="3044520"/>
+            <a:ext cx="9072000" cy="1568520"/>
           </a:xfrm>
           <a:prstGeom prst="rect">
             <a:avLst/>
@@ -178,7 +178,7 @@
         <p:spPr>
           <a:xfrm>
             <a:off x="504000" y="226080"/>
-            <a:ext cx="9070920" cy="945720"/>
+            <a:ext cx="9072000" cy="946440"/>
           </a:xfrm>
           <a:prstGeom prst="rect">
             <a:avLst/>
@@ -209,7 +209,7 @@
         <p:spPr>
           <a:xfrm>
             <a:off x="504000" y="1326600"/>
-            <a:ext cx="4426920" cy="1568160"/>
+            <a:ext cx="4426920" cy="1568520"/>
           </a:xfrm>
           <a:prstGeom prst="rect">
             <a:avLst/>
@@ -239,7 +239,7 @@
         <p:spPr>
           <a:xfrm>
             <a:off x="5152680" y="1326600"/>
-            <a:ext cx="4426920" cy="1568160"/>
+            <a:ext cx="4426920" cy="1568520"/>
           </a:xfrm>
           <a:prstGeom prst="rect">
             <a:avLst/>
@@ -268,8 +268,8 @@
         </p:nvSpPr>
         <p:spPr>
           <a:xfrm>
-            <a:off x="504000" y="3044160"/>
-            <a:ext cx="4426920" cy="1568160"/>
+            <a:off x="504000" y="3044520"/>
+            <a:ext cx="4426920" cy="1568520"/>
           </a:xfrm>
           <a:prstGeom prst="rect">
             <a:avLst/>
@@ -298,8 +298,8 @@
         </p:nvSpPr>
         <p:spPr>
           <a:xfrm>
-            <a:off x="5152680" y="3044160"/>
-            <a:ext cx="4426920" cy="1568160"/>
+            <a:off x="5152680" y="3044520"/>
+            <a:ext cx="4426920" cy="1568520"/>
           </a:xfrm>
           <a:prstGeom prst="rect">
             <a:avLst/>
@@ -351,7 +351,7 @@
         <p:spPr>
           <a:xfrm>
             <a:off x="504000" y="226080"/>
-            <a:ext cx="9070920" cy="945720"/>
+            <a:ext cx="9072000" cy="946440"/>
           </a:xfrm>
           <a:prstGeom prst="rect">
             <a:avLst/>
@@ -382,7 +382,7 @@
         <p:spPr>
           <a:xfrm>
             <a:off x="504000" y="1326600"/>
-            <a:ext cx="2920680" cy="1568160"/>
+            <a:ext cx="2921040" cy="1568520"/>
           </a:xfrm>
           <a:prstGeom prst="rect">
             <a:avLst/>
@@ -411,8 +411,8 @@
         </p:nvSpPr>
         <p:spPr>
           <a:xfrm>
-            <a:off x="3571200" y="1326600"/>
-            <a:ext cx="2920680" cy="1568160"/>
+            <a:off x="3571560" y="1326600"/>
+            <a:ext cx="2921040" cy="1568520"/>
           </a:xfrm>
           <a:prstGeom prst="rect">
             <a:avLst/>
@@ -441,8 +441,8 @@
         </p:nvSpPr>
         <p:spPr>
           <a:xfrm>
-            <a:off x="6638040" y="1326600"/>
-            <a:ext cx="2920680" cy="1568160"/>
+            <a:off x="6639120" y="1326600"/>
+            <a:ext cx="2921040" cy="1568520"/>
           </a:xfrm>
           <a:prstGeom prst="rect">
             <a:avLst/>
@@ -471,8 +471,8 @@
         </p:nvSpPr>
         <p:spPr>
           <a:xfrm>
-            <a:off x="504000" y="3044160"/>
-            <a:ext cx="2920680" cy="1568160"/>
+            <a:off x="504000" y="3044520"/>
+            <a:ext cx="2921040" cy="1568520"/>
           </a:xfrm>
           <a:prstGeom prst="rect">
             <a:avLst/>
@@ -501,8 +501,8 @@
         </p:nvSpPr>
         <p:spPr>
           <a:xfrm>
-            <a:off x="3571200" y="3044160"/>
-            <a:ext cx="2920680" cy="1568160"/>
+            <a:off x="3571560" y="3044520"/>
+            <a:ext cx="2921040" cy="1568520"/>
           </a:xfrm>
           <a:prstGeom prst="rect">
             <a:avLst/>
@@ -531,8 +531,8 @@
         </p:nvSpPr>
         <p:spPr>
           <a:xfrm>
-            <a:off x="6638040" y="3044160"/>
-            <a:ext cx="2920680" cy="1568160"/>
+            <a:off x="6639120" y="3044520"/>
+            <a:ext cx="2921040" cy="1568520"/>
           </a:xfrm>
           <a:prstGeom prst="rect">
             <a:avLst/>
@@ -584,7 +584,7 @@
         <p:spPr>
           <a:xfrm>
             <a:off x="504000" y="226080"/>
-            <a:ext cx="9070920" cy="945720"/>
+            <a:ext cx="9072000" cy="946440"/>
           </a:xfrm>
           <a:prstGeom prst="rect">
             <a:avLst/>
@@ -615,7 +615,7 @@
         <p:spPr>
           <a:xfrm>
             <a:off x="504000" y="1326600"/>
-            <a:ext cx="9071640" cy="3288240"/>
+            <a:ext cx="9072000" cy="3288600"/>
           </a:xfrm>
           <a:prstGeom prst="rect">
             <a:avLst/>
@@ -668,7 +668,7 @@
         <p:spPr>
           <a:xfrm>
             <a:off x="504000" y="226080"/>
-            <a:ext cx="9070920" cy="945720"/>
+            <a:ext cx="9072000" cy="946440"/>
           </a:xfrm>
           <a:prstGeom prst="rect">
             <a:avLst/>
@@ -699,7 +699,7 @@
         <p:spPr>
           <a:xfrm>
             <a:off x="504000" y="1326600"/>
-            <a:ext cx="9071640" cy="3288240"/>
+            <a:ext cx="9072000" cy="3288600"/>
           </a:xfrm>
           <a:prstGeom prst="rect">
             <a:avLst/>
@@ -751,7 +751,7 @@
         <p:spPr>
           <a:xfrm>
             <a:off x="504000" y="226080"/>
-            <a:ext cx="9070920" cy="945720"/>
+            <a:ext cx="9072000" cy="946440"/>
           </a:xfrm>
           <a:prstGeom prst="rect">
             <a:avLst/>
@@ -782,7 +782,7 @@
         <p:spPr>
           <a:xfrm>
             <a:off x="504000" y="1326600"/>
-            <a:ext cx="4426920" cy="3288240"/>
+            <a:ext cx="4426920" cy="3288600"/>
           </a:xfrm>
           <a:prstGeom prst="rect">
             <a:avLst/>
@@ -812,7 +812,7 @@
         <p:spPr>
           <a:xfrm>
             <a:off x="5152680" y="1326600"/>
-            <a:ext cx="4426920" cy="3288240"/>
+            <a:ext cx="4426920" cy="3288600"/>
           </a:xfrm>
           <a:prstGeom prst="rect">
             <a:avLst/>
@@ -864,7 +864,7 @@
         <p:spPr>
           <a:xfrm>
             <a:off x="504000" y="226080"/>
-            <a:ext cx="9070920" cy="945720"/>
+            <a:ext cx="9072000" cy="946440"/>
           </a:xfrm>
           <a:prstGeom prst="rect">
             <a:avLst/>
@@ -917,7 +917,7 @@
         <p:spPr>
           <a:xfrm>
             <a:off x="504000" y="226080"/>
-            <a:ext cx="9070920" cy="4385160"/>
+            <a:ext cx="9072000" cy="4388400"/>
           </a:xfrm>
           <a:prstGeom prst="rect">
             <a:avLst/>
@@ -970,7 +970,7 @@
         <p:spPr>
           <a:xfrm>
             <a:off x="504000" y="226080"/>
-            <a:ext cx="9070920" cy="945720"/>
+            <a:ext cx="9072000" cy="946440"/>
           </a:xfrm>
           <a:prstGeom prst="rect">
             <a:avLst/>
@@ -1001,7 +1001,7 @@
         <p:spPr>
           <a:xfrm>
             <a:off x="504000" y="1326600"/>
-            <a:ext cx="4426920" cy="1568160"/>
+            <a:ext cx="4426920" cy="1568520"/>
           </a:xfrm>
           <a:prstGeom prst="rect">
             <a:avLst/>
@@ -1031,7 +1031,7 @@
         <p:spPr>
           <a:xfrm>
             <a:off x="5152680" y="1326600"/>
-            <a:ext cx="4426920" cy="3288240"/>
+            <a:ext cx="4426920" cy="3288600"/>
           </a:xfrm>
           <a:prstGeom prst="rect">
             <a:avLst/>
@@ -1060,8 +1060,8 @@
         </p:nvSpPr>
         <p:spPr>
           <a:xfrm>
-            <a:off x="504000" y="3044160"/>
-            <a:ext cx="4426920" cy="1568160"/>
+            <a:off x="504000" y="3044520"/>
+            <a:ext cx="4426920" cy="1568520"/>
           </a:xfrm>
           <a:prstGeom prst="rect">
             <a:avLst/>
@@ -1113,7 +1113,7 @@
         <p:spPr>
           <a:xfrm>
             <a:off x="504000" y="226080"/>
-            <a:ext cx="9070920" cy="945720"/>
+            <a:ext cx="9072000" cy="946440"/>
           </a:xfrm>
           <a:prstGeom prst="rect">
             <a:avLst/>
@@ -1144,7 +1144,7 @@
         <p:spPr>
           <a:xfrm>
             <a:off x="504000" y="1326600"/>
-            <a:ext cx="4426920" cy="3288240"/>
+            <a:ext cx="4426920" cy="3288600"/>
           </a:xfrm>
           <a:prstGeom prst="rect">
             <a:avLst/>
@@ -1174,7 +1174,7 @@
         <p:spPr>
           <a:xfrm>
             <a:off x="5152680" y="1326600"/>
-            <a:ext cx="4426920" cy="1568160"/>
+            <a:ext cx="4426920" cy="1568520"/>
           </a:xfrm>
           <a:prstGeom prst="rect">
             <a:avLst/>
@@ -1203,8 +1203,8 @@
         </p:nvSpPr>
         <p:spPr>
           <a:xfrm>
-            <a:off x="5152680" y="3044160"/>
-            <a:ext cx="4426920" cy="1568160"/>
+            <a:off x="5152680" y="3044520"/>
+            <a:ext cx="4426920" cy="1568520"/>
           </a:xfrm>
           <a:prstGeom prst="rect">
             <a:avLst/>
@@ -1256,7 +1256,7 @@
         <p:spPr>
           <a:xfrm>
             <a:off x="504000" y="226080"/>
-            <a:ext cx="9070920" cy="945720"/>
+            <a:ext cx="9072000" cy="946440"/>
           </a:xfrm>
           <a:prstGeom prst="rect">
             <a:avLst/>
@@ -1287,7 +1287,7 @@
         <p:spPr>
           <a:xfrm>
             <a:off x="504000" y="1326600"/>
-            <a:ext cx="4426920" cy="1568160"/>
+            <a:ext cx="4426920" cy="1568520"/>
           </a:xfrm>
           <a:prstGeom prst="rect">
             <a:avLst/>
@@ -1317,7 +1317,7 @@
         <p:spPr>
           <a:xfrm>
             <a:off x="5152680" y="1326600"/>
-            <a:ext cx="4426920" cy="1568160"/>
+            <a:ext cx="4426920" cy="1568520"/>
           </a:xfrm>
           <a:prstGeom prst="rect">
             <a:avLst/>
@@ -1346,8 +1346,8 @@
         </p:nvSpPr>
         <p:spPr>
           <a:xfrm>
-            <a:off x="504000" y="3044160"/>
-            <a:ext cx="9071640" cy="1568160"/>
+            <a:off x="504000" y="3044520"/>
+            <a:ext cx="9072000" cy="1568520"/>
           </a:xfrm>
           <a:prstGeom prst="rect">
             <a:avLst/>
@@ -1399,7 +1399,7 @@
         <p:spPr>
           <a:xfrm>
             <a:off x="504000" y="226080"/>
-            <a:ext cx="9070920" cy="945720"/>
+            <a:ext cx="9072000" cy="946440"/>
           </a:xfrm>
           <a:prstGeom prst="rect">
             <a:avLst/>
@@ -1410,13 +1410,14 @@
             <a:noAutofit/>
           </a:bodyPr>
           <a:p>
-            <a:r>
-              <a:rPr b="0" lang="en-US" sz="1800" spc="-1" strike="noStrike">
+            <a:pPr algn="ctr"/>
+            <a:r>
+              <a:rPr b="0" lang="en-US" sz="4400" spc="-1" strike="noStrike">
                 <a:latin typeface="Arial"/>
               </a:rPr>
               <a:t>Click to edit the title text format</a:t>
             </a:r>
-            <a:endParaRPr b="0" lang="en-US" sz="1800" spc="-1" strike="noStrike">
+            <a:endParaRPr b="0" lang="en-US" sz="4400" spc="-1" strike="noStrike">
               <a:latin typeface="Arial"/>
             </a:endParaRPr>
           </a:p>
@@ -1435,7 +1436,7 @@
         <p:spPr>
           <a:xfrm>
             <a:off x="504000" y="1326600"/>
-            <a:ext cx="9071640" cy="3288240"/>
+            <a:ext cx="9072000" cy="3288600"/>
           </a:xfrm>
           <a:prstGeom prst="rect">
             <a:avLst/>
@@ -1458,12 +1459,12 @@
               <a:buChar char=""/>
             </a:pPr>
             <a:r>
-              <a:rPr b="0" lang="en-US" sz="1800" spc="-1" strike="noStrike">
+              <a:rPr b="0" lang="en-US" sz="3200" spc="-1" strike="noStrike">
                 <a:latin typeface="Arial"/>
               </a:rPr>
               <a:t>Click to edit the outline text format</a:t>
             </a:r>
-            <a:endParaRPr b="0" lang="en-US" sz="1800" spc="-1" strike="noStrike">
+            <a:endParaRPr b="0" lang="en-US" sz="3200" spc="-1" strike="noStrike">
               <a:latin typeface="Arial"/>
             </a:endParaRPr>
           </a:p>
@@ -1480,12 +1481,12 @@
               <a:buChar char=""/>
             </a:pPr>
             <a:r>
-              <a:rPr b="0" lang="en-US" sz="1800" spc="-1" strike="noStrike">
+              <a:rPr b="0" lang="en-US" sz="2800" spc="-1" strike="noStrike">
                 <a:latin typeface="Arial"/>
               </a:rPr>
               <a:t>Second Outline Level</a:t>
             </a:r>
-            <a:endParaRPr b="0" lang="en-US" sz="1800" spc="-1" strike="noStrike">
+            <a:endParaRPr b="0" lang="en-US" sz="2800" spc="-1" strike="noStrike">
               <a:latin typeface="Arial"/>
             </a:endParaRPr>
           </a:p>
@@ -1502,12 +1503,12 @@
               <a:buChar char=""/>
             </a:pPr>
             <a:r>
-              <a:rPr b="0" lang="en-US" sz="1800" spc="-1" strike="noStrike">
+              <a:rPr b="0" lang="en-US" sz="2400" spc="-1" strike="noStrike">
                 <a:latin typeface="Arial"/>
               </a:rPr>
               <a:t>Third Outline Level</a:t>
             </a:r>
-            <a:endParaRPr b="0" lang="en-US" sz="1800" spc="-1" strike="noStrike">
+            <a:endParaRPr b="0" lang="en-US" sz="2400" spc="-1" strike="noStrike">
               <a:latin typeface="Arial"/>
             </a:endParaRPr>
           </a:p>
@@ -1524,12 +1525,12 @@
               <a:buChar char=""/>
             </a:pPr>
             <a:r>
-              <a:rPr b="0" lang="en-US" sz="1800" spc="-1" strike="noStrike">
+              <a:rPr b="0" lang="en-US" sz="2000" spc="-1" strike="noStrike">
                 <a:latin typeface="Arial"/>
               </a:rPr>
               <a:t>Fourth Outline Level</a:t>
             </a:r>
-            <a:endParaRPr b="0" lang="en-US" sz="1800" spc="-1" strike="noStrike">
+            <a:endParaRPr b="0" lang="en-US" sz="2000" spc="-1" strike="noStrike">
               <a:latin typeface="Arial"/>
             </a:endParaRPr>
           </a:p>
@@ -1546,12 +1547,12 @@
               <a:buChar char=""/>
             </a:pPr>
             <a:r>
-              <a:rPr b="0" lang="en-US" sz="1800" spc="-1" strike="noStrike">
+              <a:rPr b="0" lang="en-US" sz="2000" spc="-1" strike="noStrike">
                 <a:latin typeface="Arial"/>
               </a:rPr>
               <a:t>Fifth Outline Level</a:t>
             </a:r>
-            <a:endParaRPr b="0" lang="en-US" sz="1800" spc="-1" strike="noStrike">
+            <a:endParaRPr b="0" lang="en-US" sz="2000" spc="-1" strike="noStrike">
               <a:latin typeface="Arial"/>
             </a:endParaRPr>
           </a:p>
@@ -1568,12 +1569,12 @@
               <a:buChar char=""/>
             </a:pPr>
             <a:r>
-              <a:rPr b="0" lang="en-US" sz="1800" spc="-1" strike="noStrike">
+              <a:rPr b="0" lang="en-US" sz="2000" spc="-1" strike="noStrike">
                 <a:latin typeface="Arial"/>
               </a:rPr>
               <a:t>Sixth Outline Level</a:t>
             </a:r>
-            <a:endParaRPr b="0" lang="en-US" sz="1800" spc="-1" strike="noStrike">
+            <a:endParaRPr b="0" lang="en-US" sz="2000" spc="-1" strike="noStrike">
               <a:latin typeface="Arial"/>
             </a:endParaRPr>
           </a:p>
@@ -1590,12 +1591,12 @@
               <a:buChar char=""/>
             </a:pPr>
             <a:r>
-              <a:rPr b="0" lang="en-US" sz="1800" spc="-1" strike="noStrike">
+              <a:rPr b="0" lang="en-US" sz="2000" spc="-1" strike="noStrike">
                 <a:latin typeface="Arial"/>
               </a:rPr>
               <a:t>Seventh Outline Level</a:t>
             </a:r>
-            <a:endParaRPr b="0" lang="en-US" sz="1800" spc="-1" strike="noStrike">
+            <a:endParaRPr b="0" lang="en-US" sz="2000" spc="-1" strike="noStrike">
               <a:latin typeface="Arial"/>
             </a:endParaRPr>
           </a:p>
@@ -1890,7 +1891,7 @@
         <p:spPr>
           <a:xfrm>
             <a:off x="2290320" y="4682880"/>
-            <a:ext cx="483480" cy="345600"/>
+            <a:ext cx="483120" cy="345240"/>
           </a:xfrm>
           <a:prstGeom prst="rect">
             <a:avLst/>
@@ -1951,7 +1952,7 @@
         <p:spPr>
           <a:xfrm>
             <a:off x="3132720" y="4682880"/>
-            <a:ext cx="483480" cy="345600"/>
+            <a:ext cx="483120" cy="345240"/>
           </a:xfrm>
           <a:prstGeom prst="rect">
             <a:avLst/>
@@ -2012,7 +2013,7 @@
         <p:spPr>
           <a:xfrm>
             <a:off x="4047120" y="4682880"/>
-            <a:ext cx="483480" cy="345600"/>
+            <a:ext cx="483120" cy="345240"/>
           </a:xfrm>
           <a:prstGeom prst="rect">
             <a:avLst/>
@@ -2073,7 +2074,7 @@
         <p:spPr>
           <a:xfrm>
             <a:off x="4961520" y="4682880"/>
-            <a:ext cx="483480" cy="345600"/>
+            <a:ext cx="483120" cy="345240"/>
           </a:xfrm>
           <a:prstGeom prst="rect">
             <a:avLst/>
@@ -2134,7 +2135,7 @@
         <p:spPr>
           <a:xfrm>
             <a:off x="5715000" y="4682880"/>
-            <a:ext cx="685800" cy="345600"/>
+            <a:ext cx="685440" cy="345240"/>
           </a:xfrm>
           <a:prstGeom prst="rect">
             <a:avLst/>
@@ -2185,7 +2186,7 @@
         <p:spPr>
           <a:xfrm>
             <a:off x="6790320" y="4682880"/>
-            <a:ext cx="483480" cy="345600"/>
+            <a:ext cx="483120" cy="345240"/>
           </a:xfrm>
           <a:prstGeom prst="rect">
             <a:avLst/>
@@ -2246,7 +2247,7 @@
         <p:spPr>
           <a:xfrm>
             <a:off x="7698600" y="4682880"/>
-            <a:ext cx="530280" cy="345600"/>
+            <a:ext cx="529920" cy="345240"/>
           </a:xfrm>
           <a:prstGeom prst="rect">
             <a:avLst/>
@@ -2307,7 +2308,7 @@
         <p:spPr>
           <a:xfrm>
             <a:off x="8619120" y="4682880"/>
-            <a:ext cx="483480" cy="345600"/>
+            <a:ext cx="483120" cy="345240"/>
           </a:xfrm>
           <a:prstGeom prst="rect">
             <a:avLst/>
@@ -2368,7 +2369,7 @@
         <p:spPr>
           <a:xfrm>
             <a:off x="9533520" y="4682880"/>
-            <a:ext cx="483480" cy="345600"/>
+            <a:ext cx="483120" cy="345240"/>
           </a:xfrm>
           <a:prstGeom prst="rect">
             <a:avLst/>
@@ -2429,7 +2430,7 @@
         <p:spPr>
           <a:xfrm>
             <a:off x="1405800" y="4682880"/>
-            <a:ext cx="685800" cy="345600"/>
+            <a:ext cx="685440" cy="345240"/>
           </a:xfrm>
           <a:prstGeom prst="rect">
             <a:avLst/>
@@ -2480,7 +2481,7 @@
         <p:spPr>
           <a:xfrm>
             <a:off x="4919400" y="5140080"/>
-            <a:ext cx="794880" cy="345600"/>
+            <a:ext cx="794520" cy="345240"/>
           </a:xfrm>
           <a:prstGeom prst="rect">
             <a:avLst/>
@@ -2531,7 +2532,7 @@
         <p:spPr>
           <a:xfrm>
             <a:off x="457200" y="950400"/>
-            <a:ext cx="1225080" cy="345600"/>
+            <a:ext cx="1224720" cy="345240"/>
           </a:xfrm>
           <a:prstGeom prst="rect">
             <a:avLst/>
@@ -2582,7 +2583,7 @@
         <p:spPr>
           <a:xfrm>
             <a:off x="408600" y="1636200"/>
-            <a:ext cx="1381680" cy="345600"/>
+            <a:ext cx="1381320" cy="345240"/>
           </a:xfrm>
           <a:prstGeom prst="rect">
             <a:avLst/>
@@ -2633,7 +2634,7 @@
         <p:spPr>
           <a:xfrm>
             <a:off x="465120" y="2345400"/>
-            <a:ext cx="1181160" cy="345600"/>
+            <a:ext cx="1180800" cy="345240"/>
           </a:xfrm>
           <a:prstGeom prst="rect">
             <a:avLst/>
@@ -2684,7 +2685,7 @@
         <p:spPr>
           <a:xfrm>
             <a:off x="408600" y="3021480"/>
-            <a:ext cx="1345680" cy="345600"/>
+            <a:ext cx="1345320" cy="345240"/>
           </a:xfrm>
           <a:prstGeom prst="rect">
             <a:avLst/>
@@ -2735,7 +2736,7 @@
         <p:spPr>
           <a:xfrm>
             <a:off x="541800" y="3704400"/>
-            <a:ext cx="1104480" cy="345600"/>
+            <a:ext cx="1104120" cy="345240"/>
           </a:xfrm>
           <a:prstGeom prst="rect">
             <a:avLst/>
@@ -2813,7 +2814,7 @@
         <p:spPr>
           <a:xfrm>
             <a:off x="1576800" y="3657600"/>
-            <a:ext cx="8178480" cy="456120"/>
+            <a:ext cx="8178120" cy="455760"/>
           </a:xfrm>
           <a:prstGeom prst="rect">
             <a:avLst/>
@@ -2843,7 +2844,7 @@
         <p:spPr>
           <a:xfrm>
             <a:off x="9516600" y="3692160"/>
-            <a:ext cx="472680" cy="385560"/>
+            <a:ext cx="472320" cy="385200"/>
           </a:xfrm>
           <a:prstGeom prst="rect">
             <a:avLst/>
@@ -2920,7 +2921,7 @@
         <p:spPr>
           <a:xfrm>
             <a:off x="7855200" y="3692160"/>
-            <a:ext cx="463320" cy="385560"/>
+            <a:ext cx="462960" cy="385200"/>
           </a:xfrm>
           <a:prstGeom prst="rect">
             <a:avLst/>
@@ -2997,7 +2998,7 @@
         <p:spPr>
           <a:xfrm>
             <a:off x="9516960" y="3692520"/>
-            <a:ext cx="472680" cy="385560"/>
+            <a:ext cx="472320" cy="385200"/>
           </a:xfrm>
           <a:prstGeom prst="rect">
             <a:avLst/>
@@ -3074,7 +3075,7 @@
         <p:spPr>
           <a:xfrm>
             <a:off x="3463200" y="3685320"/>
-            <a:ext cx="472680" cy="385560"/>
+            <a:ext cx="472320" cy="385200"/>
           </a:xfrm>
           <a:prstGeom prst="rect">
             <a:avLst/>
@@ -3151,9 +3152,9 @@
         <p:grpSpPr>
           <a:xfrm>
             <a:off x="1575000" y="914400"/>
-            <a:ext cx="8398080" cy="2513520"/>
+            <a:ext cx="8397720" cy="2513160"/>
             <a:chOff x="1575000" y="914400"/>
-            <a:chExt cx="8398080" cy="2513520"/>
+            <a:chExt cx="8397720" cy="2513160"/>
           </a:xfrm>
         </p:grpSpPr>
         <p:sp>
@@ -3165,7 +3166,7 @@
           <p:spPr>
             <a:xfrm>
               <a:off x="5184000" y="914400"/>
-              <a:ext cx="4558680" cy="456120"/>
+              <a:ext cx="4558320" cy="455760"/>
             </a:xfrm>
             <a:prstGeom prst="rect">
               <a:avLst/>
@@ -3195,7 +3196,7 @@
           <p:spPr>
             <a:xfrm>
               <a:off x="5184000" y="1599840"/>
-              <a:ext cx="4558680" cy="456120"/>
+              <a:ext cx="4558320" cy="455760"/>
             </a:xfrm>
             <a:prstGeom prst="rect">
               <a:avLst/>
@@ -3225,7 +3226,7 @@
           <p:spPr>
             <a:xfrm>
               <a:off x="9500400" y="1634760"/>
-              <a:ext cx="472680" cy="385560"/>
+              <a:ext cx="472320" cy="385200"/>
             </a:xfrm>
             <a:prstGeom prst="rect">
               <a:avLst/>
@@ -3302,7 +3303,7 @@
           <p:spPr>
             <a:xfrm>
               <a:off x="9500400" y="948960"/>
-              <a:ext cx="472680" cy="385560"/>
+              <a:ext cx="472320" cy="385200"/>
             </a:xfrm>
             <a:prstGeom prst="rect">
               <a:avLst/>
@@ -3379,7 +3380,7 @@
           <p:spPr>
             <a:xfrm>
               <a:off x="7867800" y="948960"/>
-              <a:ext cx="463320" cy="385560"/>
+              <a:ext cx="462960" cy="385200"/>
             </a:xfrm>
             <a:prstGeom prst="rect">
               <a:avLst/>
@@ -3456,7 +3457,7 @@
           <p:spPr>
             <a:xfrm>
               <a:off x="7860960" y="1635840"/>
-              <a:ext cx="463320" cy="385560"/>
+              <a:ext cx="462960" cy="385200"/>
             </a:xfrm>
             <a:prstGeom prst="rect">
               <a:avLst/>
@@ -3533,7 +3534,7 @@
           <p:spPr>
             <a:xfrm>
               <a:off x="1576800" y="914400"/>
-              <a:ext cx="3606480" cy="456120"/>
+              <a:ext cx="3606120" cy="455760"/>
             </a:xfrm>
             <a:prstGeom prst="rect">
               <a:avLst/>
@@ -3563,7 +3564,7 @@
           <p:spPr>
             <a:xfrm>
               <a:off x="1576800" y="2286360"/>
-              <a:ext cx="1777680" cy="456120"/>
+              <a:ext cx="1777320" cy="455760"/>
             </a:xfrm>
             <a:prstGeom prst="rect">
               <a:avLst/>
@@ -3593,7 +3594,7 @@
           <p:spPr>
             <a:xfrm>
               <a:off x="1576800" y="1600560"/>
-              <a:ext cx="3606480" cy="456120"/>
+              <a:ext cx="3606120" cy="455760"/>
             </a:xfrm>
             <a:prstGeom prst="rect">
               <a:avLst/>
@@ -3623,7 +3624,7 @@
           <p:spPr>
             <a:xfrm>
               <a:off x="1575000" y="2971800"/>
-              <a:ext cx="1779480" cy="456120"/>
+              <a:ext cx="1779120" cy="455760"/>
             </a:xfrm>
             <a:prstGeom prst="rect">
               <a:avLst/>
@@ -3654,9 +3655,9 @@
         <p:grpSpPr>
           <a:xfrm>
             <a:off x="3355200" y="2286360"/>
-            <a:ext cx="6637680" cy="1141560"/>
+            <a:ext cx="6637320" cy="1141200"/>
             <a:chOff x="3355200" y="2286360"/>
-            <a:chExt cx="6637680" cy="1141560"/>
+            <a:chExt cx="6637320" cy="1141200"/>
           </a:xfrm>
         </p:grpSpPr>
         <p:sp>
@@ -3668,7 +3669,7 @@
           <p:spPr>
             <a:xfrm>
               <a:off x="3355200" y="2286360"/>
-              <a:ext cx="6407280" cy="456120"/>
+              <a:ext cx="6406920" cy="455760"/>
             </a:xfrm>
             <a:prstGeom prst="rect">
               <a:avLst/>
@@ -3698,7 +3699,7 @@
           <p:spPr>
             <a:xfrm>
               <a:off x="3355200" y="2971800"/>
-              <a:ext cx="6407280" cy="456120"/>
+              <a:ext cx="6406920" cy="455760"/>
             </a:xfrm>
             <a:prstGeom prst="rect">
               <a:avLst/>
@@ -3728,7 +3729,7 @@
           <p:spPr>
             <a:xfrm>
               <a:off x="9520200" y="3007800"/>
-              <a:ext cx="472680" cy="385560"/>
+              <a:ext cx="472320" cy="385200"/>
             </a:xfrm>
             <a:prstGeom prst="rect">
               <a:avLst/>
@@ -3805,7 +3806,7 @@
           <p:spPr>
             <a:xfrm>
               <a:off x="9520200" y="2322360"/>
-              <a:ext cx="472680" cy="385560"/>
+              <a:ext cx="472320" cy="385200"/>
             </a:xfrm>
             <a:prstGeom prst="rect">
               <a:avLst/>
@@ -3882,7 +3883,7 @@
           <p:spPr>
             <a:xfrm>
               <a:off x="7851600" y="3007800"/>
-              <a:ext cx="463320" cy="385560"/>
+              <a:ext cx="462960" cy="385200"/>
             </a:xfrm>
             <a:prstGeom prst="rect">
               <a:avLst/>
@@ -3959,7 +3960,7 @@
           <p:spPr>
             <a:xfrm>
               <a:off x="7857360" y="2320920"/>
-              <a:ext cx="463320" cy="385560"/>
+              <a:ext cx="462960" cy="385200"/>
             </a:xfrm>
             <a:prstGeom prst="rect">
               <a:avLst/>
@@ -4036,7 +4037,7 @@
           <p:spPr>
             <a:xfrm>
               <a:off x="4964400" y="2320920"/>
-              <a:ext cx="472680" cy="385560"/>
+              <a:ext cx="472320" cy="385200"/>
             </a:xfrm>
             <a:prstGeom prst="rect">
               <a:avLst/>
@@ -4113,7 +4114,7 @@
           <p:spPr>
             <a:xfrm>
               <a:off x="4948200" y="3007800"/>
-              <a:ext cx="472680" cy="385560"/>
+              <a:ext cx="472320" cy="385200"/>
             </a:xfrm>
             <a:prstGeom prst="rect">
               <a:avLst/>
@@ -4191,7 +4192,7 @@
         <p:spPr>
           <a:xfrm rot="16180800">
             <a:off x="-392040" y="2382840"/>
-            <a:ext cx="1405080" cy="372960"/>
+            <a:ext cx="1404720" cy="372600"/>
           </a:xfrm>
           <a:prstGeom prst="rect">
             <a:avLst/>
@@ -4242,9 +4243,9 @@
         <p:grpSpPr>
           <a:xfrm>
             <a:off x="7592400" y="228600"/>
-            <a:ext cx="2008080" cy="385560"/>
+            <a:ext cx="2007720" cy="385200"/>
             <a:chOff x="7592400" y="228600"/>
-            <a:chExt cx="2008080" cy="385560"/>
+            <a:chExt cx="2007720" cy="385200"/>
           </a:xfrm>
         </p:grpSpPr>
         <p:sp>
@@ -4256,7 +4257,7 @@
           <p:spPr>
             <a:xfrm>
               <a:off x="7772400" y="268560"/>
-              <a:ext cx="1828080" cy="345600"/>
+              <a:ext cx="1827720" cy="345240"/>
             </a:xfrm>
             <a:prstGeom prst="rect">
               <a:avLst/>
@@ -4284,9 +4285,9 @@
           <p:grpSpPr>
             <a:xfrm>
               <a:off x="7592400" y="228600"/>
-              <a:ext cx="1987200" cy="385560"/>
+              <a:ext cx="1986840" cy="385200"/>
               <a:chOff x="7592400" y="228600"/>
-              <a:chExt cx="1987200" cy="385560"/>
+              <a:chExt cx="1986840" cy="385200"/>
             </a:xfrm>
           </p:grpSpPr>
           <p:sp>
@@ -4298,7 +4299,7 @@
             <p:spPr>
               <a:xfrm>
                 <a:off x="7592400" y="228600"/>
-                <a:ext cx="612720" cy="385560"/>
+                <a:ext cx="612360" cy="385200"/>
               </a:xfrm>
               <a:prstGeom prst="rect">
                 <a:avLst/>
@@ -4375,7 +4376,7 @@
             <p:spPr>
               <a:xfrm>
                 <a:off x="8174520" y="268560"/>
-                <a:ext cx="1405080" cy="345600"/>
+                <a:ext cx="1404720" cy="345240"/>
               </a:xfrm>
               <a:prstGeom prst="rect">
                 <a:avLst/>
@@ -4419,6 +4420,144 @@
           </p:sp>
         </p:grpSp>
       </p:grpSp>
+      <p:sp>
+        <p:nvSpPr>
+          <p:cNvPr id="95" name=""/>
+          <p:cNvSpPr/>
+          <p:nvPr/>
+        </p:nvSpPr>
+        <p:spPr>
+          <a:xfrm>
+            <a:off x="3429000" y="685800"/>
+            <a:ext cx="5029200" cy="3886200"/>
+          </a:xfrm>
+          <a:prstGeom prst="rect">
+            <a:avLst/>
+          </a:prstGeom>
+          <a:noFill/>
+          <a:ln w="12600">
+            <a:solidFill>
+              <a:srgbClr val="3465a4"/>
+            </a:solidFill>
+            <a:round/>
+          </a:ln>
+        </p:spPr>
+        <p:style>
+          <a:lnRef idx="0"/>
+          <a:fillRef idx="0"/>
+          <a:effectRef idx="0"/>
+          <a:fontRef idx="minor"/>
+        </p:style>
+      </p:sp>
+      <p:sp>
+        <p:nvSpPr>
+          <p:cNvPr id="96" name=""/>
+          <p:cNvSpPr/>
+          <p:nvPr/>
+        </p:nvSpPr>
+        <p:spPr>
+          <a:xfrm>
+            <a:off x="7772400" y="649800"/>
+            <a:ext cx="2286000" cy="3886200"/>
+          </a:xfrm>
+          <a:prstGeom prst="rect">
+            <a:avLst/>
+          </a:prstGeom>
+          <a:noFill/>
+          <a:ln w="12600">
+            <a:solidFill>
+              <a:srgbClr val="3465a4"/>
+            </a:solidFill>
+            <a:round/>
+          </a:ln>
+        </p:spPr>
+        <p:style>
+          <a:lnRef idx="0"/>
+          <a:fillRef idx="0"/>
+          <a:effectRef idx="0"/>
+          <a:fontRef idx="minor"/>
+        </p:style>
+      </p:sp>
+      <p:sp>
+        <p:nvSpPr>
+          <p:cNvPr id="97" name=""/>
+          <p:cNvSpPr txBox="1"/>
+          <p:nvPr/>
+        </p:nvSpPr>
+        <p:spPr>
+          <a:xfrm>
+            <a:off x="4114800" y="623880"/>
+            <a:ext cx="2286000" cy="489960"/>
+          </a:xfrm>
+          <a:prstGeom prst="rect">
+            <a:avLst/>
+          </a:prstGeom>
+          <a:noFill/>
+          <a:ln w="0">
+            <a:noFill/>
+          </a:ln>
+        </p:spPr>
+        <p:txBody>
+          <a:bodyPr lIns="90000" rIns="90000" tIns="45000" bIns="45000">
+            <a:noAutofit/>
+          </a:bodyPr>
+          <a:p>
+            <a:r>
+              <a:rPr b="0" lang="en-US" sz="1400" spc="-1" strike="noStrike">
+                <a:solidFill>
+                  <a:srgbClr val="000000"/>
+                </a:solidFill>
+                <a:latin typeface="Arial"/>
+                <a:ea typeface="DejaVu Sans"/>
+              </a:rPr>
+              <a:t>Transcribed datasheets</a:t>
+            </a:r>
+            <a:endParaRPr b="0" lang="en-US" sz="1400" spc="-1" strike="noStrike">
+              <a:latin typeface="Arial"/>
+            </a:endParaRPr>
+          </a:p>
+        </p:txBody>
+      </p:sp>
+      <p:sp>
+        <p:nvSpPr>
+          <p:cNvPr id="98" name=""/>
+          <p:cNvSpPr txBox="1"/>
+          <p:nvPr/>
+        </p:nvSpPr>
+        <p:spPr>
+          <a:xfrm>
+            <a:off x="8330760" y="613800"/>
+            <a:ext cx="1276200" cy="489960"/>
+          </a:xfrm>
+          <a:prstGeom prst="rect">
+            <a:avLst/>
+          </a:prstGeom>
+          <a:noFill/>
+          <a:ln w="0">
+            <a:noFill/>
+          </a:ln>
+        </p:spPr>
+        <p:txBody>
+          <a:bodyPr lIns="90000" rIns="90000" tIns="45000" bIns="45000">
+            <a:noAutofit/>
+          </a:bodyPr>
+          <a:p>
+            <a:r>
+              <a:rPr b="0" lang="en-US" sz="1400" spc="-1" strike="noStrike">
+                <a:solidFill>
+                  <a:srgbClr val="000000"/>
+                </a:solidFill>
+                <a:latin typeface="Arial"/>
+                <a:ea typeface="DejaVu Sans"/>
+              </a:rPr>
+              <a:t>Spreadsheet</a:t>
+            </a:r>
+            <a:endParaRPr b="0" lang="en-US" sz="1400" spc="-1" strike="noStrike">
+              <a:latin typeface="Arial"/>
+            </a:endParaRPr>
+          </a:p>
+        </p:txBody>
+      </p:sp>
     </p:spTree>
   </p:cSld>
   <mc:AlternateContent>
@@ -4451,7 +4590,7 @@
       </p:grpSpPr>
       <p:sp>
         <p:nvSpPr>
-          <p:cNvPr id="95" name=""/>
+          <p:cNvPr id="99" name=""/>
           <p:cNvSpPr/>
           <p:nvPr/>
         </p:nvSpPr>
@@ -4478,7 +4617,7 @@
       </p:sp>
       <p:sp>
         <p:nvSpPr>
-          <p:cNvPr id="96" name=""/>
+          <p:cNvPr id="100" name=""/>
           <p:cNvSpPr/>
           <p:nvPr/>
         </p:nvSpPr>
@@ -4505,7 +4644,7 @@
       </p:sp>
       <p:sp>
         <p:nvSpPr>
-          <p:cNvPr id="97" name=""/>
+          <p:cNvPr id="101" name=""/>
           <p:cNvSpPr/>
           <p:nvPr/>
         </p:nvSpPr>
@@ -4532,7 +4671,7 @@
       </p:sp>
       <p:sp>
         <p:nvSpPr>
-          <p:cNvPr id="98" name=""/>
+          <p:cNvPr id="102" name=""/>
           <p:cNvSpPr/>
           <p:nvPr/>
         </p:nvSpPr>
@@ -4559,7 +4698,7 @@
       </p:sp>
       <p:sp>
         <p:nvSpPr>
-          <p:cNvPr id="99" name=""/>
+          <p:cNvPr id="103" name=""/>
           <p:cNvSpPr/>
           <p:nvPr/>
         </p:nvSpPr>
@@ -4586,7 +4725,7 @@
       </p:sp>
       <p:sp>
         <p:nvSpPr>
-          <p:cNvPr id="100" name=""/>
+          <p:cNvPr id="104" name=""/>
           <p:cNvSpPr/>
           <p:nvPr/>
         </p:nvSpPr>
@@ -4613,7 +4752,7 @@
       </p:sp>
       <p:sp>
         <p:nvSpPr>
-          <p:cNvPr id="101" name=""/>
+          <p:cNvPr id="105" name=""/>
           <p:cNvSpPr/>
           <p:nvPr/>
         </p:nvSpPr>
@@ -4640,7 +4779,7 @@
       </p:sp>
       <p:sp>
         <p:nvSpPr>
-          <p:cNvPr id="102" name=""/>
+          <p:cNvPr id="106" name=""/>
           <p:cNvSpPr/>
           <p:nvPr/>
         </p:nvSpPr>
@@ -4667,7 +4806,7 @@
       </p:sp>
       <p:sp>
         <p:nvSpPr>
-          <p:cNvPr id="103" name=""/>
+          <p:cNvPr id="107" name=""/>
           <p:cNvSpPr/>
           <p:nvPr/>
         </p:nvSpPr>
@@ -4694,14 +4833,14 @@
       </p:sp>
       <p:sp>
         <p:nvSpPr>
-          <p:cNvPr id="104" name=""/>
+          <p:cNvPr id="108" name=""/>
           <p:cNvSpPr/>
           <p:nvPr/>
         </p:nvSpPr>
         <p:spPr>
           <a:xfrm>
             <a:off x="2290320" y="4682880"/>
-            <a:ext cx="306360" cy="345600"/>
+            <a:ext cx="306000" cy="345240"/>
           </a:xfrm>
           <a:prstGeom prst="rect">
             <a:avLst/>
@@ -4745,14 +4884,14 @@
       </p:sp>
       <p:sp>
         <p:nvSpPr>
-          <p:cNvPr id="105" name=""/>
+          <p:cNvPr id="109" name=""/>
           <p:cNvSpPr/>
           <p:nvPr/>
         </p:nvSpPr>
         <p:spPr>
           <a:xfrm>
             <a:off x="3132720" y="4682880"/>
-            <a:ext cx="433080" cy="345600"/>
+            <a:ext cx="432720" cy="345240"/>
           </a:xfrm>
           <a:prstGeom prst="rect">
             <a:avLst/>
@@ -4796,14 +4935,14 @@
       </p:sp>
       <p:sp>
         <p:nvSpPr>
-          <p:cNvPr id="106" name=""/>
+          <p:cNvPr id="110" name=""/>
           <p:cNvSpPr/>
           <p:nvPr/>
         </p:nvSpPr>
         <p:spPr>
           <a:xfrm>
             <a:off x="4047120" y="4682880"/>
-            <a:ext cx="433080" cy="345600"/>
+            <a:ext cx="432720" cy="345240"/>
           </a:xfrm>
           <a:prstGeom prst="rect">
             <a:avLst/>
@@ -4847,14 +4986,14 @@
       </p:sp>
       <p:sp>
         <p:nvSpPr>
-          <p:cNvPr id="107" name=""/>
+          <p:cNvPr id="111" name=""/>
           <p:cNvSpPr/>
           <p:nvPr/>
         </p:nvSpPr>
         <p:spPr>
           <a:xfrm>
             <a:off x="4961520" y="4682880"/>
-            <a:ext cx="433080" cy="345600"/>
+            <a:ext cx="432720" cy="345240"/>
           </a:xfrm>
           <a:prstGeom prst="rect">
             <a:avLst/>
@@ -4898,14 +5037,14 @@
       </p:sp>
       <p:sp>
         <p:nvSpPr>
-          <p:cNvPr id="108" name=""/>
+          <p:cNvPr id="112" name=""/>
           <p:cNvSpPr/>
           <p:nvPr/>
         </p:nvSpPr>
         <p:spPr>
           <a:xfrm>
             <a:off x="5875920" y="4682880"/>
-            <a:ext cx="433080" cy="345600"/>
+            <a:ext cx="432720" cy="345240"/>
           </a:xfrm>
           <a:prstGeom prst="rect">
             <a:avLst/>
@@ -4949,14 +5088,14 @@
       </p:sp>
       <p:sp>
         <p:nvSpPr>
-          <p:cNvPr id="109" name=""/>
+          <p:cNvPr id="113" name=""/>
           <p:cNvSpPr/>
           <p:nvPr/>
         </p:nvSpPr>
         <p:spPr>
           <a:xfrm>
             <a:off x="6790320" y="4682880"/>
-            <a:ext cx="433080" cy="345600"/>
+            <a:ext cx="432720" cy="345240"/>
           </a:xfrm>
           <a:prstGeom prst="rect">
             <a:avLst/>
@@ -5000,14 +5139,14 @@
       </p:sp>
       <p:sp>
         <p:nvSpPr>
-          <p:cNvPr id="110" name=""/>
+          <p:cNvPr id="114" name=""/>
           <p:cNvSpPr/>
           <p:nvPr/>
         </p:nvSpPr>
         <p:spPr>
           <a:xfrm>
             <a:off x="7698600" y="4682880"/>
-            <a:ext cx="456480" cy="345600"/>
+            <a:ext cx="456120" cy="345240"/>
           </a:xfrm>
           <a:prstGeom prst="rect">
             <a:avLst/>
@@ -5051,14 +5190,14 @@
       </p:sp>
       <p:sp>
         <p:nvSpPr>
-          <p:cNvPr id="111" name=""/>
+          <p:cNvPr id="115" name=""/>
           <p:cNvSpPr/>
           <p:nvPr/>
         </p:nvSpPr>
         <p:spPr>
           <a:xfrm>
             <a:off x="8619120" y="4682880"/>
-            <a:ext cx="433080" cy="345600"/>
+            <a:ext cx="432720" cy="345240"/>
           </a:xfrm>
           <a:prstGeom prst="rect">
             <a:avLst/>
@@ -5102,14 +5241,14 @@
       </p:sp>
       <p:sp>
         <p:nvSpPr>
-          <p:cNvPr id="112" name=""/>
+          <p:cNvPr id="116" name=""/>
           <p:cNvSpPr/>
           <p:nvPr/>
         </p:nvSpPr>
         <p:spPr>
           <a:xfrm>
             <a:off x="9533520" y="4682880"/>
-            <a:ext cx="433080" cy="345600"/>
+            <a:ext cx="432720" cy="345240"/>
           </a:xfrm>
           <a:prstGeom prst="rect">
             <a:avLst/>
@@ -5153,14 +5292,14 @@
       </p:sp>
       <p:sp>
         <p:nvSpPr>
-          <p:cNvPr id="113" name=""/>
+          <p:cNvPr id="117" name=""/>
           <p:cNvSpPr/>
           <p:nvPr/>
         </p:nvSpPr>
         <p:spPr>
           <a:xfrm>
             <a:off x="1405800" y="4682880"/>
-            <a:ext cx="306360" cy="345600"/>
+            <a:ext cx="306000" cy="345240"/>
           </a:xfrm>
           <a:prstGeom prst="rect">
             <a:avLst/>
@@ -5204,14 +5343,14 @@
       </p:sp>
       <p:sp>
         <p:nvSpPr>
-          <p:cNvPr id="114" name=""/>
+          <p:cNvPr id="118" name=""/>
           <p:cNvSpPr/>
           <p:nvPr/>
         </p:nvSpPr>
         <p:spPr>
           <a:xfrm>
             <a:off x="4233600" y="5140080"/>
-            <a:ext cx="3235680" cy="345600"/>
+            <a:ext cx="3235320" cy="345240"/>
           </a:xfrm>
           <a:prstGeom prst="rect">
             <a:avLst/>
@@ -5255,14 +5394,14 @@
       </p:sp>
       <p:sp>
         <p:nvSpPr>
-          <p:cNvPr id="115" name=""/>
+          <p:cNvPr id="119" name=""/>
           <p:cNvSpPr/>
           <p:nvPr/>
         </p:nvSpPr>
         <p:spPr>
           <a:xfrm>
             <a:off x="658800" y="950400"/>
-            <a:ext cx="1023480" cy="345600"/>
+            <a:ext cx="1023120" cy="345240"/>
           </a:xfrm>
           <a:prstGeom prst="rect">
             <a:avLst/>
@@ -5306,14 +5445,14 @@
       </p:sp>
       <p:sp>
         <p:nvSpPr>
-          <p:cNvPr id="116" name=""/>
+          <p:cNvPr id="120" name=""/>
           <p:cNvSpPr/>
           <p:nvPr/>
         </p:nvSpPr>
         <p:spPr>
           <a:xfrm>
             <a:off x="586800" y="1636200"/>
-            <a:ext cx="1023480" cy="345600"/>
+            <a:ext cx="1023120" cy="345240"/>
           </a:xfrm>
           <a:prstGeom prst="rect">
             <a:avLst/>
@@ -5357,14 +5496,14 @@
       </p:sp>
       <p:sp>
         <p:nvSpPr>
-          <p:cNvPr id="117" name=""/>
+          <p:cNvPr id="121" name=""/>
           <p:cNvSpPr/>
           <p:nvPr/>
         </p:nvSpPr>
         <p:spPr>
           <a:xfrm>
             <a:off x="658800" y="2345400"/>
-            <a:ext cx="1023480" cy="345600"/>
+            <a:ext cx="1023120" cy="345240"/>
           </a:xfrm>
           <a:prstGeom prst="rect">
             <a:avLst/>
@@ -5408,14 +5547,14 @@
       </p:sp>
       <p:sp>
         <p:nvSpPr>
-          <p:cNvPr id="118" name=""/>
+          <p:cNvPr id="122" name=""/>
           <p:cNvSpPr/>
           <p:nvPr/>
         </p:nvSpPr>
         <p:spPr>
           <a:xfrm>
             <a:off x="550800" y="3021480"/>
-            <a:ext cx="1023480" cy="345600"/>
+            <a:ext cx="1023120" cy="345240"/>
           </a:xfrm>
           <a:prstGeom prst="rect">
             <a:avLst/>
@@ -5459,14 +5598,14 @@
       </p:sp>
       <p:sp>
         <p:nvSpPr>
-          <p:cNvPr id="119" name=""/>
+          <p:cNvPr id="123" name=""/>
           <p:cNvSpPr/>
           <p:nvPr/>
         </p:nvSpPr>
         <p:spPr>
           <a:xfrm>
             <a:off x="766800" y="3704400"/>
-            <a:ext cx="1023480" cy="345600"/>
+            <a:ext cx="1023120" cy="345240"/>
           </a:xfrm>
           <a:prstGeom prst="rect">
             <a:avLst/>
@@ -5510,7 +5649,7 @@
       </p:sp>
       <p:sp>
         <p:nvSpPr>
-          <p:cNvPr id="120" name=""/>
+          <p:cNvPr id="124" name=""/>
           <p:cNvSpPr/>
           <p:nvPr/>
         </p:nvSpPr>
@@ -5537,14 +5676,14 @@
       </p:sp>
       <p:sp>
         <p:nvSpPr>
-          <p:cNvPr id="121" name=""/>
+          <p:cNvPr id="125" name=""/>
           <p:cNvSpPr/>
           <p:nvPr/>
         </p:nvSpPr>
         <p:spPr>
           <a:xfrm>
             <a:off x="1576800" y="914760"/>
-            <a:ext cx="4520880" cy="456120"/>
+            <a:ext cx="4520520" cy="455760"/>
           </a:xfrm>
           <a:prstGeom prst="rect">
             <a:avLst/>
@@ -5567,14 +5706,14 @@
       </p:sp>
       <p:sp>
         <p:nvSpPr>
-          <p:cNvPr id="122" name=""/>
+          <p:cNvPr id="126" name=""/>
           <p:cNvSpPr/>
           <p:nvPr/>
         </p:nvSpPr>
         <p:spPr>
           <a:xfrm>
             <a:off x="1576800" y="1600200"/>
-            <a:ext cx="4520880" cy="456120"/>
+            <a:ext cx="4520520" cy="455760"/>
           </a:xfrm>
           <a:prstGeom prst="rect">
             <a:avLst/>
@@ -5597,14 +5736,14 @@
       </p:sp>
       <p:sp>
         <p:nvSpPr>
-          <p:cNvPr id="123" name=""/>
+          <p:cNvPr id="127" name=""/>
           <p:cNvSpPr/>
           <p:nvPr/>
         </p:nvSpPr>
         <p:spPr>
           <a:xfrm>
             <a:off x="1576800" y="2286360"/>
-            <a:ext cx="6349680" cy="456120"/>
+            <a:ext cx="6349320" cy="455760"/>
           </a:xfrm>
           <a:prstGeom prst="rect">
             <a:avLst/>
@@ -5627,14 +5766,14 @@
       </p:sp>
       <p:sp>
         <p:nvSpPr>
-          <p:cNvPr id="124" name=""/>
+          <p:cNvPr id="128" name=""/>
           <p:cNvSpPr/>
           <p:nvPr/>
         </p:nvSpPr>
         <p:spPr>
           <a:xfrm>
             <a:off x="1576800" y="2971800"/>
-            <a:ext cx="6349680" cy="456120"/>
+            <a:ext cx="6349320" cy="455760"/>
           </a:xfrm>
           <a:prstGeom prst="rect">
             <a:avLst/>
@@ -5657,14 +5796,14 @@
       </p:sp>
       <p:sp>
         <p:nvSpPr>
-          <p:cNvPr id="125" name=""/>
+          <p:cNvPr id="129" name=""/>
           <p:cNvSpPr/>
           <p:nvPr/>
         </p:nvSpPr>
         <p:spPr>
           <a:xfrm>
             <a:off x="1576800" y="3657600"/>
-            <a:ext cx="8178480" cy="456120"/>
+            <a:ext cx="8178120" cy="455760"/>
           </a:xfrm>
           <a:prstGeom prst="rect">
             <a:avLst/>
@@ -5687,14 +5826,14 @@
       </p:sp>
       <p:sp>
         <p:nvSpPr>
-          <p:cNvPr id="126" name=""/>
+          <p:cNvPr id="130" name=""/>
           <p:cNvSpPr/>
           <p:nvPr/>
         </p:nvSpPr>
         <p:spPr>
           <a:xfrm>
             <a:off x="9516600" y="3692160"/>
-            <a:ext cx="472680" cy="385560"/>
+            <a:ext cx="472320" cy="385200"/>
           </a:xfrm>
           <a:prstGeom prst="rect">
             <a:avLst/>
@@ -5764,14 +5903,14 @@
       </p:sp>
       <p:sp>
         <p:nvSpPr>
-          <p:cNvPr id="127" name=""/>
+          <p:cNvPr id="131" name=""/>
           <p:cNvSpPr/>
           <p:nvPr/>
         </p:nvSpPr>
         <p:spPr>
           <a:xfrm>
             <a:off x="7684200" y="3007800"/>
-            <a:ext cx="472680" cy="385560"/>
+            <a:ext cx="472320" cy="385200"/>
           </a:xfrm>
           <a:prstGeom prst="rect">
             <a:avLst/>
@@ -5841,14 +5980,14 @@
       </p:sp>
       <p:sp>
         <p:nvSpPr>
-          <p:cNvPr id="128" name=""/>
+          <p:cNvPr id="132" name=""/>
           <p:cNvSpPr/>
           <p:nvPr/>
         </p:nvSpPr>
         <p:spPr>
           <a:xfrm>
             <a:off x="7684200" y="2322360"/>
-            <a:ext cx="472680" cy="385560"/>
+            <a:ext cx="472320" cy="385200"/>
           </a:xfrm>
           <a:prstGeom prst="rect">
             <a:avLst/>
@@ -5918,14 +6057,14 @@
       </p:sp>
       <p:sp>
         <p:nvSpPr>
-          <p:cNvPr id="129" name=""/>
+          <p:cNvPr id="133" name=""/>
           <p:cNvSpPr/>
           <p:nvPr/>
         </p:nvSpPr>
         <p:spPr>
           <a:xfrm>
             <a:off x="5855400" y="1635120"/>
-            <a:ext cx="472680" cy="385560"/>
+            <a:ext cx="472320" cy="385200"/>
           </a:xfrm>
           <a:prstGeom prst="rect">
             <a:avLst/>
@@ -5995,14 +6134,14 @@
       </p:sp>
       <p:sp>
         <p:nvSpPr>
-          <p:cNvPr id="130" name=""/>
+          <p:cNvPr id="134" name=""/>
           <p:cNvSpPr/>
           <p:nvPr/>
         </p:nvSpPr>
         <p:spPr>
           <a:xfrm>
             <a:off x="5855400" y="949320"/>
-            <a:ext cx="472680" cy="385560"/>
+            <a:ext cx="472320" cy="385200"/>
           </a:xfrm>
           <a:prstGeom prst="rect">
             <a:avLst/>
@@ -6072,14 +6211,14 @@
       </p:sp>
       <p:sp>
         <p:nvSpPr>
-          <p:cNvPr id="131" name=""/>
+          <p:cNvPr id="135" name=""/>
           <p:cNvSpPr/>
           <p:nvPr/>
         </p:nvSpPr>
         <p:spPr>
           <a:xfrm>
             <a:off x="7819200" y="3692160"/>
-            <a:ext cx="463320" cy="385560"/>
+            <a:ext cx="462960" cy="385200"/>
           </a:xfrm>
           <a:prstGeom prst="rect">
             <a:avLst/>
@@ -6149,14 +6288,14 @@
       </p:sp>
       <p:sp>
         <p:nvSpPr>
-          <p:cNvPr id="132" name=""/>
+          <p:cNvPr id="136" name=""/>
           <p:cNvSpPr/>
           <p:nvPr/>
         </p:nvSpPr>
         <p:spPr>
           <a:xfrm>
             <a:off x="9516960" y="3692520"/>
-            <a:ext cx="472680" cy="385560"/>
+            <a:ext cx="472320" cy="385200"/>
           </a:xfrm>
           <a:prstGeom prst="rect">
             <a:avLst/>
@@ -6226,14 +6365,14 @@
       </p:sp>
       <p:sp>
         <p:nvSpPr>
-          <p:cNvPr id="133" name=""/>
+          <p:cNvPr id="137" name=""/>
           <p:cNvSpPr/>
           <p:nvPr/>
         </p:nvSpPr>
         <p:spPr>
           <a:xfrm>
             <a:off x="3463200" y="3685320"/>
-            <a:ext cx="472680" cy="385560"/>
+            <a:ext cx="472320" cy="385200"/>
           </a:xfrm>
           <a:prstGeom prst="rect">
             <a:avLst/>
@@ -6303,14 +6442,14 @@
       </p:sp>
       <p:sp>
         <p:nvSpPr>
-          <p:cNvPr id="134" name=""/>
+          <p:cNvPr id="138" name=""/>
           <p:cNvSpPr/>
           <p:nvPr/>
         </p:nvSpPr>
         <p:spPr>
           <a:xfrm>
             <a:off x="6051600" y="3007800"/>
-            <a:ext cx="463320" cy="385560"/>
+            <a:ext cx="462960" cy="385200"/>
           </a:xfrm>
           <a:prstGeom prst="rect">
             <a:avLst/>
@@ -6380,14 +6519,14 @@
       </p:sp>
       <p:sp>
         <p:nvSpPr>
-          <p:cNvPr id="135" name=""/>
+          <p:cNvPr id="139" name=""/>
           <p:cNvSpPr/>
           <p:nvPr/>
         </p:nvSpPr>
         <p:spPr>
           <a:xfrm>
             <a:off x="6057360" y="2320920"/>
-            <a:ext cx="463320" cy="385560"/>
+            <a:ext cx="462960" cy="385200"/>
           </a:xfrm>
           <a:prstGeom prst="rect">
             <a:avLst/>
@@ -6457,14 +6596,14 @@
       </p:sp>
       <p:sp>
         <p:nvSpPr>
-          <p:cNvPr id="136" name=""/>
+          <p:cNvPr id="140" name=""/>
           <p:cNvSpPr/>
           <p:nvPr/>
         </p:nvSpPr>
         <p:spPr>
           <a:xfrm>
             <a:off x="4222800" y="949320"/>
-            <a:ext cx="463320" cy="385560"/>
+            <a:ext cx="462960" cy="385200"/>
           </a:xfrm>
           <a:prstGeom prst="rect">
             <a:avLst/>
@@ -6534,14 +6673,14 @@
       </p:sp>
       <p:sp>
         <p:nvSpPr>
-          <p:cNvPr id="137" name=""/>
+          <p:cNvPr id="141" name=""/>
           <p:cNvSpPr/>
           <p:nvPr/>
         </p:nvSpPr>
         <p:spPr>
           <a:xfrm>
             <a:off x="4215960" y="1636200"/>
-            <a:ext cx="463320" cy="385560"/>
+            <a:ext cx="462960" cy="385200"/>
           </a:xfrm>
           <a:prstGeom prst="rect">
             <a:avLst/>
@@ -6611,14 +6750,14 @@
       </p:sp>
       <p:sp>
         <p:nvSpPr>
-          <p:cNvPr id="138" name=""/>
+          <p:cNvPr id="142" name=""/>
           <p:cNvSpPr/>
           <p:nvPr/>
         </p:nvSpPr>
         <p:spPr>
           <a:xfrm>
             <a:off x="3128400" y="2320920"/>
-            <a:ext cx="472680" cy="385560"/>
+            <a:ext cx="472320" cy="385200"/>
           </a:xfrm>
           <a:prstGeom prst="rect">
             <a:avLst/>
@@ -6688,14 +6827,14 @@
       </p:sp>
       <p:sp>
         <p:nvSpPr>
-          <p:cNvPr id="139" name=""/>
+          <p:cNvPr id="143" name=""/>
           <p:cNvSpPr/>
           <p:nvPr/>
         </p:nvSpPr>
         <p:spPr>
           <a:xfrm>
             <a:off x="3112200" y="3007800"/>
-            <a:ext cx="472680" cy="385560"/>
+            <a:ext cx="472320" cy="385200"/>
           </a:xfrm>
           <a:prstGeom prst="rect">
             <a:avLst/>
@@ -6765,14 +6904,14 @@
       </p:sp>
       <p:sp>
         <p:nvSpPr>
-          <p:cNvPr id="140" name=""/>
+          <p:cNvPr id="144" name=""/>
           <p:cNvSpPr/>
           <p:nvPr/>
         </p:nvSpPr>
         <p:spPr>
           <a:xfrm rot="16180800">
             <a:off x="-392040" y="2382840"/>
-            <a:ext cx="1405080" cy="372960"/>
+            <a:ext cx="1404720" cy="372600"/>
           </a:xfrm>
           <a:prstGeom prst="rect">
             <a:avLst/>
@@ -6816,28 +6955,28 @@
       </p:sp>
       <p:grpSp>
         <p:nvGrpSpPr>
-          <p:cNvPr id="141" name=""/>
+          <p:cNvPr id="145" name=""/>
           <p:cNvGrpSpPr/>
           <p:nvPr/>
         </p:nvGrpSpPr>
         <p:grpSpPr>
           <a:xfrm>
             <a:off x="7664400" y="299520"/>
-            <a:ext cx="2023200" cy="385560"/>
+            <a:ext cx="2022840" cy="385200"/>
             <a:chOff x="7664400" y="299520"/>
-            <a:chExt cx="2023200" cy="385560"/>
+            <a:chExt cx="2022840" cy="385200"/>
           </a:xfrm>
         </p:grpSpPr>
         <p:sp>
           <p:nvSpPr>
-            <p:cNvPr id="142" name=""/>
+            <p:cNvPr id="146" name=""/>
             <p:cNvSpPr/>
             <p:nvPr/>
           </p:nvSpPr>
           <p:spPr>
             <a:xfrm>
               <a:off x="7772400" y="339480"/>
-              <a:ext cx="1828080" cy="345600"/>
+              <a:ext cx="1827720" cy="345240"/>
             </a:xfrm>
             <a:prstGeom prst="rect">
               <a:avLst/>
@@ -6858,28 +6997,28 @@
         </p:sp>
         <p:grpSp>
           <p:nvGrpSpPr>
-            <p:cNvPr id="143" name=""/>
+            <p:cNvPr id="147" name=""/>
             <p:cNvGrpSpPr/>
             <p:nvPr/>
           </p:nvGrpSpPr>
           <p:grpSpPr>
             <a:xfrm>
               <a:off x="7664400" y="299520"/>
-              <a:ext cx="2023200" cy="385560"/>
+              <a:ext cx="2022840" cy="385200"/>
               <a:chOff x="7664400" y="299520"/>
-              <a:chExt cx="2023200" cy="385560"/>
+              <a:chExt cx="2022840" cy="385200"/>
             </a:xfrm>
           </p:grpSpPr>
           <p:sp>
             <p:nvSpPr>
-              <p:cNvPr id="144" name=""/>
+              <p:cNvPr id="148" name=""/>
               <p:cNvSpPr/>
               <p:nvPr/>
             </p:nvSpPr>
             <p:spPr>
               <a:xfrm>
                 <a:off x="7664400" y="299520"/>
-                <a:ext cx="649440" cy="385560"/>
+                <a:ext cx="649080" cy="385200"/>
               </a:xfrm>
               <a:prstGeom prst="rect">
                 <a:avLst/>
@@ -6959,14 +7098,14 @@
           </p:sp>
           <p:sp>
             <p:nvSpPr>
-              <p:cNvPr id="145" name=""/>
+              <p:cNvPr id="149" name=""/>
               <p:cNvSpPr/>
               <p:nvPr/>
             </p:nvSpPr>
             <p:spPr>
               <a:xfrm>
                 <a:off x="8282520" y="339480"/>
-                <a:ext cx="1405080" cy="345600"/>
+                <a:ext cx="1404720" cy="345240"/>
               </a:xfrm>
               <a:prstGeom prst="rect">
                 <a:avLst/>

--- a/Experiment_timeline.pptx
+++ b/Experiment_timeline.pptx
@@ -13040,7 +13040,7 @@
                 <a:latin typeface="Arial"/>
                 <a:ea typeface="DejaVu Sans"/>
               </a:rPr>
-              <a:t>11</a:t>
+              <a:t>12</a:t>
             </a:r>
             <a:endParaRPr b="0" lang="en-US" sz="1000" spc="-1" strike="noStrike">
               <a:latin typeface="Arial"/>
@@ -16290,7 +16290,7 @@
                 <a:latin typeface="Arial"/>
                 <a:ea typeface="DejaVu Sans"/>
               </a:rPr>
-              <a:t>11</a:t>
+              <a:t>12</a:t>
             </a:r>
             <a:endParaRPr b="0" lang="en-US" sz="1000" spc="-1" strike="noStrike">
               <a:latin typeface="Arial"/>

--- a/Experiment_timeline.pptx
+++ b/Experiment_timeline.pptx
@@ -80,10 +80,8 @@
             <a:noAutofit/>
           </a:bodyPr>
           <a:p>
-            <a:endParaRPr b="0" lang="en-US" sz="1800" spc="-1" strike="noStrike">
-              <a:solidFill>
-                <a:srgbClr val="000000"/>
-              </a:solidFill>
+            <a:pPr algn="ctr"/>
+            <a:endParaRPr b="0" lang="en-US" sz="4400" spc="-1" strike="noStrike">
               <a:latin typeface="Arial"/>
             </a:endParaRPr>
           </a:p>
@@ -113,10 +111,7 @@
             <a:normAutofit/>
           </a:bodyPr>
           <a:p>
-            <a:endParaRPr b="0" lang="en-US" sz="2800" spc="-1" strike="noStrike">
-              <a:solidFill>
-                <a:srgbClr val="000000"/>
-              </a:solidFill>
+            <a:endParaRPr b="0" lang="en-US" sz="3200" spc="-1" strike="noStrike">
               <a:latin typeface="Arial"/>
             </a:endParaRPr>
           </a:p>
@@ -146,10 +141,7 @@
             <a:normAutofit/>
           </a:bodyPr>
           <a:p>
-            <a:endParaRPr b="0" lang="en-US" sz="2800" spc="-1" strike="noStrike">
-              <a:solidFill>
-                <a:srgbClr val="000000"/>
-              </a:solidFill>
+            <a:endParaRPr b="0" lang="en-US" sz="3200" spc="-1" strike="noStrike">
               <a:latin typeface="Arial"/>
             </a:endParaRPr>
           </a:p>
@@ -201,10 +193,8 @@
             <a:noAutofit/>
           </a:bodyPr>
           <a:p>
-            <a:endParaRPr b="0" lang="en-US" sz="1800" spc="-1" strike="noStrike">
-              <a:solidFill>
-                <a:srgbClr val="000000"/>
-              </a:solidFill>
+            <a:pPr algn="ctr"/>
+            <a:endParaRPr b="0" lang="en-US" sz="4400" spc="-1" strike="noStrike">
               <a:latin typeface="Arial"/>
             </a:endParaRPr>
           </a:p>
@@ -234,10 +224,7 @@
             <a:normAutofit/>
           </a:bodyPr>
           <a:p>
-            <a:endParaRPr b="0" lang="en-US" sz="2800" spc="-1" strike="noStrike">
-              <a:solidFill>
-                <a:srgbClr val="000000"/>
-              </a:solidFill>
+            <a:endParaRPr b="0" lang="en-US" sz="3200" spc="-1" strike="noStrike">
               <a:latin typeface="Arial"/>
             </a:endParaRPr>
           </a:p>
@@ -267,10 +254,7 @@
             <a:normAutofit/>
           </a:bodyPr>
           <a:p>
-            <a:endParaRPr b="0" lang="en-US" sz="2800" spc="-1" strike="noStrike">
-              <a:solidFill>
-                <a:srgbClr val="000000"/>
-              </a:solidFill>
+            <a:endParaRPr b="0" lang="en-US" sz="3200" spc="-1" strike="noStrike">
               <a:latin typeface="Arial"/>
             </a:endParaRPr>
           </a:p>
@@ -300,10 +284,7 @@
             <a:normAutofit/>
           </a:bodyPr>
           <a:p>
-            <a:endParaRPr b="0" lang="en-US" sz="2800" spc="-1" strike="noStrike">
-              <a:solidFill>
-                <a:srgbClr val="000000"/>
-              </a:solidFill>
+            <a:endParaRPr b="0" lang="en-US" sz="3200" spc="-1" strike="noStrike">
               <a:latin typeface="Arial"/>
             </a:endParaRPr>
           </a:p>
@@ -333,10 +314,7 @@
             <a:normAutofit/>
           </a:bodyPr>
           <a:p>
-            <a:endParaRPr b="0" lang="en-US" sz="2800" spc="-1" strike="noStrike">
-              <a:solidFill>
-                <a:srgbClr val="000000"/>
-              </a:solidFill>
+            <a:endParaRPr b="0" lang="en-US" sz="3200" spc="-1" strike="noStrike">
               <a:latin typeface="Arial"/>
             </a:endParaRPr>
           </a:p>
@@ -388,10 +366,8 @@
             <a:noAutofit/>
           </a:bodyPr>
           <a:p>
-            <a:endParaRPr b="0" lang="en-US" sz="1800" spc="-1" strike="noStrike">
-              <a:solidFill>
-                <a:srgbClr val="000000"/>
-              </a:solidFill>
+            <a:pPr algn="ctr"/>
+            <a:endParaRPr b="0" lang="en-US" sz="4400" spc="-1" strike="noStrike">
               <a:latin typeface="Arial"/>
             </a:endParaRPr>
           </a:p>
@@ -421,10 +397,7 @@
             <a:normAutofit/>
           </a:bodyPr>
           <a:p>
-            <a:endParaRPr b="0" lang="en-US" sz="2800" spc="-1" strike="noStrike">
-              <a:solidFill>
-                <a:srgbClr val="000000"/>
-              </a:solidFill>
+            <a:endParaRPr b="0" lang="en-US" sz="3200" spc="-1" strike="noStrike">
               <a:latin typeface="Arial"/>
             </a:endParaRPr>
           </a:p>
@@ -454,10 +427,7 @@
             <a:normAutofit/>
           </a:bodyPr>
           <a:p>
-            <a:endParaRPr b="0" lang="en-US" sz="2800" spc="-1" strike="noStrike">
-              <a:solidFill>
-                <a:srgbClr val="000000"/>
-              </a:solidFill>
+            <a:endParaRPr b="0" lang="en-US" sz="3200" spc="-1" strike="noStrike">
               <a:latin typeface="Arial"/>
             </a:endParaRPr>
           </a:p>
@@ -487,10 +457,7 @@
             <a:normAutofit/>
           </a:bodyPr>
           <a:p>
-            <a:endParaRPr b="0" lang="en-US" sz="2800" spc="-1" strike="noStrike">
-              <a:solidFill>
-                <a:srgbClr val="000000"/>
-              </a:solidFill>
+            <a:endParaRPr b="0" lang="en-US" sz="3200" spc="-1" strike="noStrike">
               <a:latin typeface="Arial"/>
             </a:endParaRPr>
           </a:p>
@@ -520,10 +487,7 @@
             <a:normAutofit/>
           </a:bodyPr>
           <a:p>
-            <a:endParaRPr b="0" lang="en-US" sz="2800" spc="-1" strike="noStrike">
-              <a:solidFill>
-                <a:srgbClr val="000000"/>
-              </a:solidFill>
+            <a:endParaRPr b="0" lang="en-US" sz="3200" spc="-1" strike="noStrike">
               <a:latin typeface="Arial"/>
             </a:endParaRPr>
           </a:p>
@@ -553,10 +517,7 @@
             <a:normAutofit/>
           </a:bodyPr>
           <a:p>
-            <a:endParaRPr b="0" lang="en-US" sz="2800" spc="-1" strike="noStrike">
-              <a:solidFill>
-                <a:srgbClr val="000000"/>
-              </a:solidFill>
+            <a:endParaRPr b="0" lang="en-US" sz="3200" spc="-1" strike="noStrike">
               <a:latin typeface="Arial"/>
             </a:endParaRPr>
           </a:p>
@@ -586,10 +547,7 @@
             <a:normAutofit/>
           </a:bodyPr>
           <a:p>
-            <a:endParaRPr b="0" lang="en-US" sz="2800" spc="-1" strike="noStrike">
-              <a:solidFill>
-                <a:srgbClr val="000000"/>
-              </a:solidFill>
+            <a:endParaRPr b="0" lang="en-US" sz="3200" spc="-1" strike="noStrike">
               <a:latin typeface="Arial"/>
             </a:endParaRPr>
           </a:p>
@@ -641,10 +599,8 @@
             <a:noAutofit/>
           </a:bodyPr>
           <a:p>
-            <a:endParaRPr b="0" lang="en-US" sz="1800" spc="-1" strike="noStrike">
-              <a:solidFill>
-                <a:srgbClr val="000000"/>
-              </a:solidFill>
+            <a:pPr algn="ctr"/>
+            <a:endParaRPr b="0" lang="en-US" sz="4400" spc="-1" strike="noStrike">
               <a:latin typeface="Arial"/>
             </a:endParaRPr>
           </a:p>
@@ -727,10 +683,8 @@
             <a:noAutofit/>
           </a:bodyPr>
           <a:p>
-            <a:endParaRPr b="0" lang="en-US" sz="1800" spc="-1" strike="noStrike">
-              <a:solidFill>
-                <a:srgbClr val="000000"/>
-              </a:solidFill>
+            <a:pPr algn="ctr"/>
+            <a:endParaRPr b="0" lang="en-US" sz="4400" spc="-1" strike="noStrike">
               <a:latin typeface="Arial"/>
             </a:endParaRPr>
           </a:p>
@@ -760,10 +714,7 @@
             <a:normAutofit/>
           </a:bodyPr>
           <a:p>
-            <a:endParaRPr b="0" lang="en-US" sz="2800" spc="-1" strike="noStrike">
-              <a:solidFill>
-                <a:srgbClr val="000000"/>
-              </a:solidFill>
+            <a:endParaRPr b="0" lang="en-US" sz="3200" spc="-1" strike="noStrike">
               <a:latin typeface="Arial"/>
             </a:endParaRPr>
           </a:p>
@@ -815,10 +766,8 @@
             <a:noAutofit/>
           </a:bodyPr>
           <a:p>
-            <a:endParaRPr b="0" lang="en-US" sz="1800" spc="-1" strike="noStrike">
-              <a:solidFill>
-                <a:srgbClr val="000000"/>
-              </a:solidFill>
+            <a:pPr algn="ctr"/>
+            <a:endParaRPr b="0" lang="en-US" sz="4400" spc="-1" strike="noStrike">
               <a:latin typeface="Arial"/>
             </a:endParaRPr>
           </a:p>
@@ -848,10 +797,7 @@
             <a:normAutofit/>
           </a:bodyPr>
           <a:p>
-            <a:endParaRPr b="0" lang="en-US" sz="2800" spc="-1" strike="noStrike">
-              <a:solidFill>
-                <a:srgbClr val="000000"/>
-              </a:solidFill>
+            <a:endParaRPr b="0" lang="en-US" sz="3200" spc="-1" strike="noStrike">
               <a:latin typeface="Arial"/>
             </a:endParaRPr>
           </a:p>
@@ -881,10 +827,7 @@
             <a:normAutofit/>
           </a:bodyPr>
           <a:p>
-            <a:endParaRPr b="0" lang="en-US" sz="2800" spc="-1" strike="noStrike">
-              <a:solidFill>
-                <a:srgbClr val="000000"/>
-              </a:solidFill>
+            <a:endParaRPr b="0" lang="en-US" sz="3200" spc="-1" strike="noStrike">
               <a:latin typeface="Arial"/>
             </a:endParaRPr>
           </a:p>
@@ -936,10 +879,8 @@
             <a:noAutofit/>
           </a:bodyPr>
           <a:p>
-            <a:endParaRPr b="0" lang="en-US" sz="1800" spc="-1" strike="noStrike">
-              <a:solidFill>
-                <a:srgbClr val="000000"/>
-              </a:solidFill>
+            <a:pPr algn="ctr"/>
+            <a:endParaRPr b="0" lang="en-US" sz="4400" spc="-1" strike="noStrike">
               <a:latin typeface="Arial"/>
             </a:endParaRPr>
           </a:p>
@@ -1044,10 +985,8 @@
             <a:noAutofit/>
           </a:bodyPr>
           <a:p>
-            <a:endParaRPr b="0" lang="en-US" sz="1800" spc="-1" strike="noStrike">
-              <a:solidFill>
-                <a:srgbClr val="000000"/>
-              </a:solidFill>
+            <a:pPr algn="ctr"/>
+            <a:endParaRPr b="0" lang="en-US" sz="4400" spc="-1" strike="noStrike">
               <a:latin typeface="Arial"/>
             </a:endParaRPr>
           </a:p>
@@ -1077,10 +1016,7 @@
             <a:normAutofit/>
           </a:bodyPr>
           <a:p>
-            <a:endParaRPr b="0" lang="en-US" sz="2800" spc="-1" strike="noStrike">
-              <a:solidFill>
-                <a:srgbClr val="000000"/>
-              </a:solidFill>
+            <a:endParaRPr b="0" lang="en-US" sz="3200" spc="-1" strike="noStrike">
               <a:latin typeface="Arial"/>
             </a:endParaRPr>
           </a:p>
@@ -1110,10 +1046,7 @@
             <a:normAutofit/>
           </a:bodyPr>
           <a:p>
-            <a:endParaRPr b="0" lang="en-US" sz="2800" spc="-1" strike="noStrike">
-              <a:solidFill>
-                <a:srgbClr val="000000"/>
-              </a:solidFill>
+            <a:endParaRPr b="0" lang="en-US" sz="3200" spc="-1" strike="noStrike">
               <a:latin typeface="Arial"/>
             </a:endParaRPr>
           </a:p>
@@ -1143,10 +1076,7 @@
             <a:normAutofit/>
           </a:bodyPr>
           <a:p>
-            <a:endParaRPr b="0" lang="en-US" sz="2800" spc="-1" strike="noStrike">
-              <a:solidFill>
-                <a:srgbClr val="000000"/>
-              </a:solidFill>
+            <a:endParaRPr b="0" lang="en-US" sz="3200" spc="-1" strike="noStrike">
               <a:latin typeface="Arial"/>
             </a:endParaRPr>
           </a:p>
@@ -1198,10 +1128,8 @@
             <a:noAutofit/>
           </a:bodyPr>
           <a:p>
-            <a:endParaRPr b="0" lang="en-US" sz="1800" spc="-1" strike="noStrike">
-              <a:solidFill>
-                <a:srgbClr val="000000"/>
-              </a:solidFill>
+            <a:pPr algn="ctr"/>
+            <a:endParaRPr b="0" lang="en-US" sz="4400" spc="-1" strike="noStrike">
               <a:latin typeface="Arial"/>
             </a:endParaRPr>
           </a:p>
@@ -1231,10 +1159,7 @@
             <a:normAutofit/>
           </a:bodyPr>
           <a:p>
-            <a:endParaRPr b="0" lang="en-US" sz="2800" spc="-1" strike="noStrike">
-              <a:solidFill>
-                <a:srgbClr val="000000"/>
-              </a:solidFill>
+            <a:endParaRPr b="0" lang="en-US" sz="3200" spc="-1" strike="noStrike">
               <a:latin typeface="Arial"/>
             </a:endParaRPr>
           </a:p>
@@ -1264,10 +1189,7 @@
             <a:normAutofit/>
           </a:bodyPr>
           <a:p>
-            <a:endParaRPr b="0" lang="en-US" sz="2800" spc="-1" strike="noStrike">
-              <a:solidFill>
-                <a:srgbClr val="000000"/>
-              </a:solidFill>
+            <a:endParaRPr b="0" lang="en-US" sz="3200" spc="-1" strike="noStrike">
               <a:latin typeface="Arial"/>
             </a:endParaRPr>
           </a:p>
@@ -1297,10 +1219,7 @@
             <a:normAutofit/>
           </a:bodyPr>
           <a:p>
-            <a:endParaRPr b="0" lang="en-US" sz="2800" spc="-1" strike="noStrike">
-              <a:solidFill>
-                <a:srgbClr val="000000"/>
-              </a:solidFill>
+            <a:endParaRPr b="0" lang="en-US" sz="3200" spc="-1" strike="noStrike">
               <a:latin typeface="Arial"/>
             </a:endParaRPr>
           </a:p>
@@ -1352,10 +1271,8 @@
             <a:noAutofit/>
           </a:bodyPr>
           <a:p>
-            <a:endParaRPr b="0" lang="en-US" sz="1800" spc="-1" strike="noStrike">
-              <a:solidFill>
-                <a:srgbClr val="000000"/>
-              </a:solidFill>
+            <a:pPr algn="ctr"/>
+            <a:endParaRPr b="0" lang="en-US" sz="4400" spc="-1" strike="noStrike">
               <a:latin typeface="Arial"/>
             </a:endParaRPr>
           </a:p>
@@ -1385,10 +1302,7 @@
             <a:normAutofit/>
           </a:bodyPr>
           <a:p>
-            <a:endParaRPr b="0" lang="en-US" sz="2800" spc="-1" strike="noStrike">
-              <a:solidFill>
-                <a:srgbClr val="000000"/>
-              </a:solidFill>
+            <a:endParaRPr b="0" lang="en-US" sz="3200" spc="-1" strike="noStrike">
               <a:latin typeface="Arial"/>
             </a:endParaRPr>
           </a:p>
@@ -1418,10 +1332,7 @@
             <a:normAutofit/>
           </a:bodyPr>
           <a:p>
-            <a:endParaRPr b="0" lang="en-US" sz="2800" spc="-1" strike="noStrike">
-              <a:solidFill>
-                <a:srgbClr val="000000"/>
-              </a:solidFill>
+            <a:endParaRPr b="0" lang="en-US" sz="3200" spc="-1" strike="noStrike">
               <a:latin typeface="Arial"/>
             </a:endParaRPr>
           </a:p>
@@ -1451,10 +1362,7 @@
             <a:normAutofit/>
           </a:bodyPr>
           <a:p>
-            <a:endParaRPr b="0" lang="en-US" sz="2800" spc="-1" strike="noStrike">
-              <a:solidFill>
-                <a:srgbClr val="000000"/>
-              </a:solidFill>
+            <a:endParaRPr b="0" lang="en-US" sz="3200" spc="-1" strike="noStrike">
               <a:latin typeface="Arial"/>
             </a:endParaRPr>
           </a:p>
@@ -1513,19 +1421,14 @@
             <a:noAutofit/>
           </a:bodyPr>
           <a:p>
-            <a:r>
-              <a:rPr b="0" lang="en-US" sz="1800" spc="-1" strike="noStrike">
-                <a:solidFill>
-                  <a:srgbClr val="000000"/>
-                </a:solidFill>
+            <a:pPr algn="ctr"/>
+            <a:r>
+              <a:rPr b="0" lang="en-US" sz="4400" spc="-1" strike="noStrike">
                 <a:latin typeface="Arial"/>
               </a:rPr>
               <a:t>Click to edit the title text format</a:t>
             </a:r>
-            <a:endParaRPr b="0" lang="en-US" sz="1800" spc="-1" strike="noStrike">
-              <a:solidFill>
-                <a:srgbClr val="000000"/>
-              </a:solidFill>
+            <a:endParaRPr b="0" lang="en-US" sz="4400" spc="-1" strike="noStrike">
               <a:latin typeface="Arial"/>
             </a:endParaRPr>
           </a:p>
@@ -1567,18 +1470,12 @@
               <a:buChar char=""/>
             </a:pPr>
             <a:r>
-              <a:rPr b="0" lang="en-US" sz="2800" spc="-1" strike="noStrike">
-                <a:solidFill>
-                  <a:srgbClr val="000000"/>
-                </a:solidFill>
+              <a:rPr b="0" lang="en-US" sz="3200" spc="-1" strike="noStrike">
                 <a:latin typeface="Arial"/>
               </a:rPr>
               <a:t>Click to edit the outline text format</a:t>
             </a:r>
-            <a:endParaRPr b="0" lang="en-US" sz="2800" spc="-1" strike="noStrike">
-              <a:solidFill>
-                <a:srgbClr val="000000"/>
-              </a:solidFill>
+            <a:endParaRPr b="0" lang="en-US" sz="3200" spc="-1" strike="noStrike">
               <a:latin typeface="Arial"/>
             </a:endParaRPr>
           </a:p>
@@ -1595,18 +1492,12 @@
               <a:buChar char=""/>
             </a:pPr>
             <a:r>
-              <a:rPr b="0" lang="en-US" sz="2000" spc="-1" strike="noStrike">
-                <a:solidFill>
-                  <a:srgbClr val="000000"/>
-                </a:solidFill>
+              <a:rPr b="0" lang="en-US" sz="2800" spc="-1" strike="noStrike">
                 <a:latin typeface="Arial"/>
               </a:rPr>
               <a:t>Second Outline Level</a:t>
             </a:r>
-            <a:endParaRPr b="0" lang="en-US" sz="2000" spc="-1" strike="noStrike">
-              <a:solidFill>
-                <a:srgbClr val="000000"/>
-              </a:solidFill>
+            <a:endParaRPr b="0" lang="en-US" sz="2800" spc="-1" strike="noStrike">
               <a:latin typeface="Arial"/>
             </a:endParaRPr>
           </a:p>
@@ -1623,18 +1514,12 @@
               <a:buChar char=""/>
             </a:pPr>
             <a:r>
-              <a:rPr b="0" lang="en-US" sz="1800" spc="-1" strike="noStrike">
-                <a:solidFill>
-                  <a:srgbClr val="000000"/>
-                </a:solidFill>
+              <a:rPr b="0" lang="en-US" sz="2400" spc="-1" strike="noStrike">
                 <a:latin typeface="Arial"/>
               </a:rPr>
               <a:t>Third Outline Level</a:t>
             </a:r>
-            <a:endParaRPr b="0" lang="en-US" sz="1800" spc="-1" strike="noStrike">
-              <a:solidFill>
-                <a:srgbClr val="000000"/>
-              </a:solidFill>
+            <a:endParaRPr b="0" lang="en-US" sz="2400" spc="-1" strike="noStrike">
               <a:latin typeface="Arial"/>
             </a:endParaRPr>
           </a:p>
@@ -1651,18 +1536,12 @@
               <a:buChar char=""/>
             </a:pPr>
             <a:r>
-              <a:rPr b="0" lang="en-US" sz="1800" spc="-1" strike="noStrike">
-                <a:solidFill>
-                  <a:srgbClr val="000000"/>
-                </a:solidFill>
+              <a:rPr b="0" lang="en-US" sz="2000" spc="-1" strike="noStrike">
                 <a:latin typeface="Arial"/>
               </a:rPr>
               <a:t>Fourth Outline Level</a:t>
             </a:r>
-            <a:endParaRPr b="0" lang="en-US" sz="1800" spc="-1" strike="noStrike">
-              <a:solidFill>
-                <a:srgbClr val="000000"/>
-              </a:solidFill>
+            <a:endParaRPr b="0" lang="en-US" sz="2000" spc="-1" strike="noStrike">
               <a:latin typeface="Arial"/>
             </a:endParaRPr>
           </a:p>
@@ -1680,17 +1559,11 @@
             </a:pPr>
             <a:r>
               <a:rPr b="0" lang="en-US" sz="2000" spc="-1" strike="noStrike">
-                <a:solidFill>
-                  <a:srgbClr val="000000"/>
-                </a:solidFill>
                 <a:latin typeface="Arial"/>
               </a:rPr>
               <a:t>Fifth Outline Level</a:t>
             </a:r>
             <a:endParaRPr b="0" lang="en-US" sz="2000" spc="-1" strike="noStrike">
-              <a:solidFill>
-                <a:srgbClr val="000000"/>
-              </a:solidFill>
               <a:latin typeface="Arial"/>
             </a:endParaRPr>
           </a:p>
@@ -1708,17 +1581,11 @@
             </a:pPr>
             <a:r>
               <a:rPr b="0" lang="en-US" sz="2000" spc="-1" strike="noStrike">
-                <a:solidFill>
-                  <a:srgbClr val="000000"/>
-                </a:solidFill>
                 <a:latin typeface="Arial"/>
               </a:rPr>
               <a:t>Sixth Outline Level</a:t>
             </a:r>
             <a:endParaRPr b="0" lang="en-US" sz="2000" spc="-1" strike="noStrike">
-              <a:solidFill>
-                <a:srgbClr val="000000"/>
-              </a:solidFill>
               <a:latin typeface="Arial"/>
             </a:endParaRPr>
           </a:p>
@@ -1736,17 +1603,11 @@
             </a:pPr>
             <a:r>
               <a:rPr b="0" lang="en-US" sz="2000" spc="-1" strike="noStrike">
-                <a:solidFill>
-                  <a:srgbClr val="000000"/>
-                </a:solidFill>
                 <a:latin typeface="Arial"/>
               </a:rPr>
               <a:t>Seventh Outline Level</a:t>
             </a:r>
             <a:endParaRPr b="0" lang="en-US" sz="2000" spc="-1" strike="noStrike">
-              <a:solidFill>
-                <a:srgbClr val="000000"/>
-              </a:solidFill>
               <a:latin typeface="Arial"/>
             </a:endParaRPr>
           </a:p>
@@ -2041,7 +1902,7 @@
         <p:spPr>
           <a:xfrm>
             <a:off x="2290320" y="4682880"/>
-            <a:ext cx="482760" cy="344880"/>
+            <a:ext cx="482400" cy="344520"/>
           </a:xfrm>
           <a:prstGeom prst="rect">
             <a:avLst/>
@@ -2102,7 +1963,7 @@
         <p:spPr>
           <a:xfrm>
             <a:off x="3132720" y="4682880"/>
-            <a:ext cx="482760" cy="344880"/>
+            <a:ext cx="482400" cy="344520"/>
           </a:xfrm>
           <a:prstGeom prst="rect">
             <a:avLst/>
@@ -2163,7 +2024,7 @@
         <p:spPr>
           <a:xfrm>
             <a:off x="4047120" y="4682880"/>
-            <a:ext cx="482760" cy="344880"/>
+            <a:ext cx="482400" cy="344520"/>
           </a:xfrm>
           <a:prstGeom prst="rect">
             <a:avLst/>
@@ -2224,7 +2085,7 @@
         <p:spPr>
           <a:xfrm>
             <a:off x="4961520" y="4682880"/>
-            <a:ext cx="482760" cy="344880"/>
+            <a:ext cx="482400" cy="344520"/>
           </a:xfrm>
           <a:prstGeom prst="rect">
             <a:avLst/>
@@ -2285,7 +2146,7 @@
         <p:spPr>
           <a:xfrm>
             <a:off x="5715000" y="4682880"/>
-            <a:ext cx="685080" cy="344880"/>
+            <a:ext cx="684720" cy="344520"/>
           </a:xfrm>
           <a:prstGeom prst="rect">
             <a:avLst/>
@@ -2336,7 +2197,7 @@
         <p:spPr>
           <a:xfrm>
             <a:off x="6790320" y="4682880"/>
-            <a:ext cx="482760" cy="344880"/>
+            <a:ext cx="482400" cy="344520"/>
           </a:xfrm>
           <a:prstGeom prst="rect">
             <a:avLst/>
@@ -2397,7 +2258,7 @@
         <p:spPr>
           <a:xfrm>
             <a:off x="7698600" y="4682880"/>
-            <a:ext cx="529560" cy="344880"/>
+            <a:ext cx="529200" cy="344520"/>
           </a:xfrm>
           <a:prstGeom prst="rect">
             <a:avLst/>
@@ -2458,7 +2319,7 @@
         <p:spPr>
           <a:xfrm>
             <a:off x="8619120" y="4682880"/>
-            <a:ext cx="482760" cy="344880"/>
+            <a:ext cx="482400" cy="344520"/>
           </a:xfrm>
           <a:prstGeom prst="rect">
             <a:avLst/>
@@ -2519,7 +2380,7 @@
         <p:spPr>
           <a:xfrm>
             <a:off x="9533520" y="4682880"/>
-            <a:ext cx="482760" cy="344880"/>
+            <a:ext cx="482400" cy="344520"/>
           </a:xfrm>
           <a:prstGeom prst="rect">
             <a:avLst/>
@@ -2580,7 +2441,7 @@
         <p:spPr>
           <a:xfrm>
             <a:off x="1405800" y="4682880"/>
-            <a:ext cx="685080" cy="344880"/>
+            <a:ext cx="684720" cy="344520"/>
           </a:xfrm>
           <a:prstGeom prst="rect">
             <a:avLst/>
@@ -2631,7 +2492,7 @@
         <p:spPr>
           <a:xfrm>
             <a:off x="4919400" y="5140080"/>
-            <a:ext cx="794160" cy="344880"/>
+            <a:ext cx="793800" cy="344520"/>
           </a:xfrm>
           <a:prstGeom prst="rect">
             <a:avLst/>
@@ -2682,7 +2543,7 @@
         <p:spPr>
           <a:xfrm>
             <a:off x="457200" y="950400"/>
-            <a:ext cx="1224360" cy="344880"/>
+            <a:ext cx="1224000" cy="344520"/>
           </a:xfrm>
           <a:prstGeom prst="rect">
             <a:avLst/>
@@ -2733,7 +2594,7 @@
         <p:spPr>
           <a:xfrm>
             <a:off x="408600" y="1636200"/>
-            <a:ext cx="1380960" cy="344880"/>
+            <a:ext cx="1380600" cy="344520"/>
           </a:xfrm>
           <a:prstGeom prst="rect">
             <a:avLst/>
@@ -2784,7 +2645,7 @@
         <p:spPr>
           <a:xfrm>
             <a:off x="465120" y="2345400"/>
-            <a:ext cx="1180440" cy="344880"/>
+            <a:ext cx="1180080" cy="344520"/>
           </a:xfrm>
           <a:prstGeom prst="rect">
             <a:avLst/>
@@ -2835,7 +2696,7 @@
         <p:spPr>
           <a:xfrm>
             <a:off x="408600" y="3021480"/>
-            <a:ext cx="1344960" cy="344880"/>
+            <a:ext cx="1344600" cy="344520"/>
           </a:xfrm>
           <a:prstGeom prst="rect">
             <a:avLst/>
@@ -2886,7 +2747,7 @@
         <p:spPr>
           <a:xfrm>
             <a:off x="541800" y="3704400"/>
-            <a:ext cx="1103760" cy="344880"/>
+            <a:ext cx="1103400" cy="344520"/>
           </a:xfrm>
           <a:prstGeom prst="rect">
             <a:avLst/>
@@ -2964,7 +2825,7 @@
         <p:spPr>
           <a:xfrm>
             <a:off x="1576800" y="3657600"/>
-            <a:ext cx="8177760" cy="455400"/>
+            <a:ext cx="8177400" cy="455040"/>
           </a:xfrm>
           <a:prstGeom prst="rect">
             <a:avLst/>
@@ -2994,7 +2855,7 @@
         <p:spPr>
           <a:xfrm>
             <a:off x="9516600" y="3692160"/>
-            <a:ext cx="471960" cy="384840"/>
+            <a:ext cx="471600" cy="384480"/>
           </a:xfrm>
           <a:prstGeom prst="rect">
             <a:avLst/>
@@ -3071,7 +2932,7 @@
         <p:spPr>
           <a:xfrm>
             <a:off x="7855200" y="3692160"/>
-            <a:ext cx="462600" cy="384840"/>
+            <a:ext cx="462240" cy="384480"/>
           </a:xfrm>
           <a:prstGeom prst="rect">
             <a:avLst/>
@@ -3148,7 +3009,7 @@
         <p:spPr>
           <a:xfrm>
             <a:off x="3463200" y="3685320"/>
-            <a:ext cx="471960" cy="384840"/>
+            <a:ext cx="471600" cy="384480"/>
           </a:xfrm>
           <a:prstGeom prst="rect">
             <a:avLst/>
@@ -3225,9 +3086,9 @@
         <p:grpSpPr>
           <a:xfrm>
             <a:off x="1575000" y="914400"/>
-            <a:ext cx="8397360" cy="2512800"/>
+            <a:ext cx="8397000" cy="2512440"/>
             <a:chOff x="1575000" y="914400"/>
-            <a:chExt cx="8397360" cy="2512800"/>
+            <a:chExt cx="8397000" cy="2512440"/>
           </a:xfrm>
         </p:grpSpPr>
         <p:sp>
@@ -3239,7 +3100,7 @@
           <p:spPr>
             <a:xfrm>
               <a:off x="5184000" y="914400"/>
-              <a:ext cx="4557960" cy="455400"/>
+              <a:ext cx="4557600" cy="455040"/>
             </a:xfrm>
             <a:prstGeom prst="rect">
               <a:avLst/>
@@ -3269,7 +3130,7 @@
           <p:spPr>
             <a:xfrm>
               <a:off x="5184000" y="1599840"/>
-              <a:ext cx="4557960" cy="455400"/>
+              <a:ext cx="4557600" cy="455040"/>
             </a:xfrm>
             <a:prstGeom prst="rect">
               <a:avLst/>
@@ -3299,7 +3160,7 @@
           <p:spPr>
             <a:xfrm>
               <a:off x="9500400" y="1634760"/>
-              <a:ext cx="471960" cy="384840"/>
+              <a:ext cx="471600" cy="384480"/>
             </a:xfrm>
             <a:prstGeom prst="rect">
               <a:avLst/>
@@ -3376,7 +3237,7 @@
           <p:spPr>
             <a:xfrm>
               <a:off x="9500400" y="948960"/>
-              <a:ext cx="471960" cy="384840"/>
+              <a:ext cx="471600" cy="384480"/>
             </a:xfrm>
             <a:prstGeom prst="rect">
               <a:avLst/>
@@ -3453,7 +3314,7 @@
           <p:spPr>
             <a:xfrm>
               <a:off x="7867800" y="948960"/>
-              <a:ext cx="462600" cy="384840"/>
+              <a:ext cx="462240" cy="384480"/>
             </a:xfrm>
             <a:prstGeom prst="rect">
               <a:avLst/>
@@ -3530,7 +3391,7 @@
           <p:spPr>
             <a:xfrm>
               <a:off x="7860960" y="1635840"/>
-              <a:ext cx="462600" cy="384840"/>
+              <a:ext cx="462240" cy="384480"/>
             </a:xfrm>
             <a:prstGeom prst="rect">
               <a:avLst/>
@@ -3607,7 +3468,7 @@
           <p:spPr>
             <a:xfrm>
               <a:off x="1576800" y="914400"/>
-              <a:ext cx="3605760" cy="455400"/>
+              <a:ext cx="3605400" cy="455040"/>
             </a:xfrm>
             <a:prstGeom prst="rect">
               <a:avLst/>
@@ -3637,7 +3498,7 @@
           <p:spPr>
             <a:xfrm>
               <a:off x="1576800" y="2286360"/>
-              <a:ext cx="1776960" cy="455400"/>
+              <a:ext cx="1776600" cy="455040"/>
             </a:xfrm>
             <a:prstGeom prst="rect">
               <a:avLst/>
@@ -3667,7 +3528,7 @@
           <p:spPr>
             <a:xfrm>
               <a:off x="1576800" y="1600560"/>
-              <a:ext cx="3605760" cy="455400"/>
+              <a:ext cx="3605400" cy="455040"/>
             </a:xfrm>
             <a:prstGeom prst="rect">
               <a:avLst/>
@@ -3697,7 +3558,7 @@
           <p:spPr>
             <a:xfrm>
               <a:off x="1575000" y="2971800"/>
-              <a:ext cx="1778760" cy="455400"/>
+              <a:ext cx="1778400" cy="455040"/>
             </a:xfrm>
             <a:prstGeom prst="rect">
               <a:avLst/>
@@ -3728,9 +3589,9 @@
         <p:grpSpPr>
           <a:xfrm>
             <a:off x="3355200" y="2286360"/>
-            <a:ext cx="6636960" cy="1140840"/>
+            <a:ext cx="6636600" cy="1140480"/>
             <a:chOff x="3355200" y="2286360"/>
-            <a:chExt cx="6636960" cy="1140840"/>
+            <a:chExt cx="6636600" cy="1140480"/>
           </a:xfrm>
         </p:grpSpPr>
         <p:sp>
@@ -3742,7 +3603,7 @@
           <p:spPr>
             <a:xfrm>
               <a:off x="3355200" y="2286360"/>
-              <a:ext cx="6406560" cy="455400"/>
+              <a:ext cx="6406200" cy="455040"/>
             </a:xfrm>
             <a:prstGeom prst="rect">
               <a:avLst/>
@@ -3772,7 +3633,7 @@
           <p:spPr>
             <a:xfrm>
               <a:off x="3355200" y="2971800"/>
-              <a:ext cx="6406560" cy="455400"/>
+              <a:ext cx="6406200" cy="455040"/>
             </a:xfrm>
             <a:prstGeom prst="rect">
               <a:avLst/>
@@ -3802,7 +3663,7 @@
           <p:spPr>
             <a:xfrm>
               <a:off x="9520200" y="3007800"/>
-              <a:ext cx="471960" cy="384840"/>
+              <a:ext cx="471600" cy="384480"/>
             </a:xfrm>
             <a:prstGeom prst="rect">
               <a:avLst/>
@@ -3879,7 +3740,7 @@
           <p:spPr>
             <a:xfrm>
               <a:off x="9520200" y="2322360"/>
-              <a:ext cx="471960" cy="384840"/>
+              <a:ext cx="471600" cy="384480"/>
             </a:xfrm>
             <a:prstGeom prst="rect">
               <a:avLst/>
@@ -3956,7 +3817,7 @@
           <p:spPr>
             <a:xfrm>
               <a:off x="7851600" y="3007800"/>
-              <a:ext cx="462600" cy="384840"/>
+              <a:ext cx="462240" cy="384480"/>
             </a:xfrm>
             <a:prstGeom prst="rect">
               <a:avLst/>
@@ -4033,7 +3894,7 @@
           <p:spPr>
             <a:xfrm>
               <a:off x="7857360" y="2320920"/>
-              <a:ext cx="462600" cy="384840"/>
+              <a:ext cx="462240" cy="384480"/>
             </a:xfrm>
             <a:prstGeom prst="rect">
               <a:avLst/>
@@ -4110,7 +3971,7 @@
           <p:spPr>
             <a:xfrm>
               <a:off x="4964400" y="2320920"/>
-              <a:ext cx="471960" cy="384840"/>
+              <a:ext cx="471600" cy="384480"/>
             </a:xfrm>
             <a:prstGeom prst="rect">
               <a:avLst/>
@@ -4187,7 +4048,7 @@
           <p:spPr>
             <a:xfrm>
               <a:off x="4948200" y="3007800"/>
-              <a:ext cx="471960" cy="384840"/>
+              <a:ext cx="471600" cy="384480"/>
             </a:xfrm>
             <a:prstGeom prst="rect">
               <a:avLst/>
@@ -4265,7 +4126,7 @@
         <p:spPr>
           <a:xfrm rot="16180800">
             <a:off x="-392040" y="2382840"/>
-            <a:ext cx="1404360" cy="372240"/>
+            <a:ext cx="1404000" cy="371880"/>
           </a:xfrm>
           <a:prstGeom prst="rect">
             <a:avLst/>
@@ -4316,9 +4177,9 @@
         <p:grpSpPr>
           <a:xfrm>
             <a:off x="7592400" y="228600"/>
-            <a:ext cx="2007360" cy="384840"/>
+            <a:ext cx="2007000" cy="384480"/>
             <a:chOff x="7592400" y="228600"/>
-            <a:chExt cx="2007360" cy="384840"/>
+            <a:chExt cx="2007000" cy="384480"/>
           </a:xfrm>
         </p:grpSpPr>
         <p:sp>
@@ -4330,7 +4191,7 @@
           <p:spPr>
             <a:xfrm>
               <a:off x="7772400" y="268560"/>
-              <a:ext cx="1827360" cy="344880"/>
+              <a:ext cx="1827000" cy="344520"/>
             </a:xfrm>
             <a:prstGeom prst="rect">
               <a:avLst/>
@@ -4358,9 +4219,9 @@
           <p:grpSpPr>
             <a:xfrm>
               <a:off x="7592400" y="228600"/>
-              <a:ext cx="1986480" cy="384840"/>
+              <a:ext cx="1986120" cy="384480"/>
               <a:chOff x="7592400" y="228600"/>
-              <a:chExt cx="1986480" cy="384840"/>
+              <a:chExt cx="1986120" cy="384480"/>
             </a:xfrm>
           </p:grpSpPr>
           <p:sp>
@@ -4372,7 +4233,7 @@
             <p:spPr>
               <a:xfrm>
                 <a:off x="7592400" y="228600"/>
-                <a:ext cx="612000" cy="384840"/>
+                <a:ext cx="611640" cy="384480"/>
               </a:xfrm>
               <a:prstGeom prst="rect">
                 <a:avLst/>
@@ -4449,7 +4310,7 @@
             <p:spPr>
               <a:xfrm>
                 <a:off x="8174520" y="268560"/>
-                <a:ext cx="1404360" cy="344880"/>
+                <a:ext cx="1404000" cy="344520"/>
               </a:xfrm>
               <a:prstGeom prst="rect">
                 <a:avLst/>
@@ -4502,7 +4363,7 @@
         <p:spPr>
           <a:xfrm>
             <a:off x="3429000" y="685800"/>
-            <a:ext cx="5028840" cy="3885840"/>
+            <a:ext cx="5028480" cy="3885480"/>
           </a:xfrm>
           <a:prstGeom prst="rect">
             <a:avLst/>
@@ -4531,7 +4392,7 @@
         <p:spPr>
           <a:xfrm>
             <a:off x="7772400" y="649800"/>
-            <a:ext cx="2285640" cy="3885840"/>
+            <a:ext cx="2285280" cy="3885480"/>
           </a:xfrm>
           <a:prstGeom prst="rect">
             <a:avLst/>
@@ -4539,10 +4400,7 @@
           <a:noFill/>
           <a:ln w="12600">
             <a:solidFill>
-              <a:srgbClr val="1f497d">
-                <a:lumMod val="40000"/>
-                <a:lumOff val="60000"/>
-              </a:srgbClr>
+              <a:srgbClr val="8eb4e3"/>
             </a:solidFill>
             <a:round/>
           </a:ln>
@@ -4563,7 +4421,7 @@
         <p:spPr>
           <a:xfrm>
             <a:off x="4114800" y="623880"/>
-            <a:ext cx="2285640" cy="489600"/>
+            <a:ext cx="2285280" cy="489240"/>
           </a:xfrm>
           <a:prstGeom prst="rect">
             <a:avLst/>
@@ -4614,7 +4472,7 @@
         <p:spPr>
           <a:xfrm>
             <a:off x="8330760" y="613800"/>
-            <a:ext cx="1275840" cy="489600"/>
+            <a:ext cx="1275480" cy="489240"/>
           </a:xfrm>
           <a:prstGeom prst="rect">
             <a:avLst/>
@@ -4656,6 +4514,72 @@
           </a:p>
         </p:txBody>
       </p:sp>
+      <p:grpSp>
+        <p:nvGrpSpPr>
+          <p:cNvPr id="98" name="Group 89_3"/>
+          <p:cNvGrpSpPr/>
+          <p:nvPr/>
+        </p:nvGrpSpPr>
+        <p:grpSpPr>
+          <a:xfrm>
+            <a:off x="2057400" y="268560"/>
+            <a:ext cx="1143000" cy="645840"/>
+            <a:chOff x="2057400" y="268560"/>
+            <a:chExt cx="1143000" cy="645840"/>
+          </a:xfrm>
+        </p:grpSpPr>
+        <p:sp>
+          <p:nvSpPr>
+            <p:cNvPr id="99" name="Rectangle 93_3"/>
+            <p:cNvSpPr/>
+            <p:nvPr/>
+          </p:nvSpPr>
+          <p:spPr>
+            <a:xfrm>
+              <a:off x="2057400" y="268560"/>
+              <a:ext cx="1143000" cy="645840"/>
+            </a:xfrm>
+            <a:prstGeom prst="rect">
+              <a:avLst/>
+            </a:prstGeom>
+            <a:noFill/>
+            <a:ln w="0">
+              <a:noFill/>
+            </a:ln>
+          </p:spPr>
+          <p:style>
+            <a:lnRef idx="0"/>
+            <a:fillRef idx="0"/>
+            <a:effectRef idx="0"/>
+            <a:fontRef idx="minor"/>
+          </p:style>
+          <p:txBody>
+            <a:bodyPr lIns="90000" rIns="90000" tIns="45000" bIns="45000">
+              <a:noAutofit/>
+            </a:bodyPr>
+            <a:p>
+              <a:pPr>
+                <a:lnSpc>
+                  <a:spcPct val="100000"/>
+                </a:lnSpc>
+              </a:pPr>
+              <a:r>
+                <a:rPr b="0" lang="en-US" sz="3600" spc="-1" strike="noStrike">
+                  <a:solidFill>
+                    <a:srgbClr val="000000"/>
+                  </a:solidFill>
+                  <a:latin typeface="Arial"/>
+                  <a:ea typeface="DejaVu Sans"/>
+                </a:rPr>
+                <a:t>OLD</a:t>
+              </a:r>
+              <a:endParaRPr b="0" lang="en-US" sz="3600" spc="-1" strike="noStrike">
+                <a:latin typeface="Arial"/>
+              </a:endParaRPr>
+            </a:p>
+          </p:txBody>
+        </p:sp>
+      </p:grpSp>
     </p:spTree>
   </p:cSld>
   <mc:AlternateContent>
@@ -4688,7 +4612,7 @@
       </p:grpSpPr>
       <p:sp>
         <p:nvSpPr>
-          <p:cNvPr id="98" name="Straight Connector 98"/>
+          <p:cNvPr id="100" name="Straight Connector 98"/>
           <p:cNvSpPr/>
           <p:nvPr/>
         </p:nvSpPr>
@@ -4715,7 +4639,7 @@
       </p:sp>
       <p:sp>
         <p:nvSpPr>
-          <p:cNvPr id="99" name="Straight Connector 99"/>
+          <p:cNvPr id="101" name="Straight Connector 99"/>
           <p:cNvSpPr/>
           <p:nvPr/>
         </p:nvSpPr>
@@ -4742,7 +4666,7 @@
       </p:sp>
       <p:sp>
         <p:nvSpPr>
-          <p:cNvPr id="100" name="Straight Connector 100"/>
+          <p:cNvPr id="102" name="Straight Connector 100"/>
           <p:cNvSpPr/>
           <p:nvPr/>
         </p:nvSpPr>
@@ -4769,7 +4693,7 @@
       </p:sp>
       <p:sp>
         <p:nvSpPr>
-          <p:cNvPr id="101" name="Straight Connector 101"/>
+          <p:cNvPr id="103" name="Straight Connector 101"/>
           <p:cNvSpPr/>
           <p:nvPr/>
         </p:nvSpPr>
@@ -4796,7 +4720,7 @@
       </p:sp>
       <p:sp>
         <p:nvSpPr>
-          <p:cNvPr id="102" name="Straight Connector 102"/>
+          <p:cNvPr id="104" name="Straight Connector 102"/>
           <p:cNvSpPr/>
           <p:nvPr/>
         </p:nvSpPr>
@@ -4823,7 +4747,7 @@
       </p:sp>
       <p:sp>
         <p:nvSpPr>
-          <p:cNvPr id="103" name="Straight Connector 103"/>
+          <p:cNvPr id="105" name="Straight Connector 103"/>
           <p:cNvSpPr/>
           <p:nvPr/>
         </p:nvSpPr>
@@ -4850,7 +4774,7 @@
       </p:sp>
       <p:sp>
         <p:nvSpPr>
-          <p:cNvPr id="104" name="Straight Connector 104"/>
+          <p:cNvPr id="106" name="Straight Connector 104"/>
           <p:cNvSpPr/>
           <p:nvPr/>
         </p:nvSpPr>
@@ -4877,7 +4801,7 @@
       </p:sp>
       <p:sp>
         <p:nvSpPr>
-          <p:cNvPr id="105" name="Straight Connector 105"/>
+          <p:cNvPr id="107" name="Straight Connector 105"/>
           <p:cNvSpPr/>
           <p:nvPr/>
         </p:nvSpPr>
@@ -4904,7 +4828,7 @@
       </p:sp>
       <p:sp>
         <p:nvSpPr>
-          <p:cNvPr id="106" name="Straight Connector 106"/>
+          <p:cNvPr id="108" name="Straight Connector 106"/>
           <p:cNvSpPr/>
           <p:nvPr/>
         </p:nvSpPr>
@@ -4931,14 +4855,14 @@
       </p:sp>
       <p:sp>
         <p:nvSpPr>
-          <p:cNvPr id="107" name="Rectangle 107"/>
+          <p:cNvPr id="109" name="Rectangle 107"/>
           <p:cNvSpPr/>
           <p:nvPr/>
         </p:nvSpPr>
         <p:spPr>
           <a:xfrm>
             <a:off x="2290320" y="4682880"/>
-            <a:ext cx="305640" cy="344880"/>
+            <a:ext cx="305280" cy="344520"/>
           </a:xfrm>
           <a:prstGeom prst="rect">
             <a:avLst/>
@@ -4982,14 +4906,14 @@
       </p:sp>
       <p:sp>
         <p:nvSpPr>
-          <p:cNvPr id="108" name="Rectangle 108"/>
+          <p:cNvPr id="110" name="Rectangle 108"/>
           <p:cNvSpPr/>
           <p:nvPr/>
         </p:nvSpPr>
         <p:spPr>
           <a:xfrm>
             <a:off x="3132720" y="4682880"/>
-            <a:ext cx="432360" cy="344880"/>
+            <a:ext cx="432000" cy="344520"/>
           </a:xfrm>
           <a:prstGeom prst="rect">
             <a:avLst/>
@@ -5033,14 +4957,14 @@
       </p:sp>
       <p:sp>
         <p:nvSpPr>
-          <p:cNvPr id="109" name="Rectangle 109"/>
+          <p:cNvPr id="111" name="Rectangle 109"/>
           <p:cNvSpPr/>
           <p:nvPr/>
         </p:nvSpPr>
         <p:spPr>
           <a:xfrm>
             <a:off x="4047120" y="4682880"/>
-            <a:ext cx="432360" cy="344880"/>
+            <a:ext cx="432000" cy="344520"/>
           </a:xfrm>
           <a:prstGeom prst="rect">
             <a:avLst/>
@@ -5084,14 +5008,14 @@
       </p:sp>
       <p:sp>
         <p:nvSpPr>
-          <p:cNvPr id="110" name="Rectangle 110"/>
+          <p:cNvPr id="112" name="Rectangle 110"/>
           <p:cNvSpPr/>
           <p:nvPr/>
         </p:nvSpPr>
         <p:spPr>
           <a:xfrm>
             <a:off x="4961520" y="4682880"/>
-            <a:ext cx="432360" cy="344880"/>
+            <a:ext cx="432000" cy="344520"/>
           </a:xfrm>
           <a:prstGeom prst="rect">
             <a:avLst/>
@@ -5135,14 +5059,14 @@
       </p:sp>
       <p:sp>
         <p:nvSpPr>
-          <p:cNvPr id="111" name="Rectangle 111"/>
+          <p:cNvPr id="113" name="Rectangle 111"/>
           <p:cNvSpPr/>
           <p:nvPr/>
         </p:nvSpPr>
         <p:spPr>
           <a:xfrm>
             <a:off x="5875920" y="4682880"/>
-            <a:ext cx="432360" cy="344880"/>
+            <a:ext cx="432000" cy="344520"/>
           </a:xfrm>
           <a:prstGeom prst="rect">
             <a:avLst/>
@@ -5186,14 +5110,14 @@
       </p:sp>
       <p:sp>
         <p:nvSpPr>
-          <p:cNvPr id="112" name="Rectangle 112"/>
+          <p:cNvPr id="114" name="Rectangle 112"/>
           <p:cNvSpPr/>
           <p:nvPr/>
         </p:nvSpPr>
         <p:spPr>
           <a:xfrm>
             <a:off x="6790320" y="4682880"/>
-            <a:ext cx="432360" cy="344880"/>
+            <a:ext cx="432000" cy="344520"/>
           </a:xfrm>
           <a:prstGeom prst="rect">
             <a:avLst/>
@@ -5237,14 +5161,14 @@
       </p:sp>
       <p:sp>
         <p:nvSpPr>
-          <p:cNvPr id="113" name="Rectangle 113"/>
+          <p:cNvPr id="115" name="Rectangle 113"/>
           <p:cNvSpPr/>
           <p:nvPr/>
         </p:nvSpPr>
         <p:spPr>
           <a:xfrm>
             <a:off x="7698600" y="4682880"/>
-            <a:ext cx="455760" cy="344880"/>
+            <a:ext cx="455400" cy="344520"/>
           </a:xfrm>
           <a:prstGeom prst="rect">
             <a:avLst/>
@@ -5288,14 +5212,14 @@
       </p:sp>
       <p:sp>
         <p:nvSpPr>
-          <p:cNvPr id="114" name="Rectangle 114"/>
+          <p:cNvPr id="116" name="Rectangle 114"/>
           <p:cNvSpPr/>
           <p:nvPr/>
         </p:nvSpPr>
         <p:spPr>
           <a:xfrm>
             <a:off x="8619120" y="4682880"/>
-            <a:ext cx="432360" cy="344880"/>
+            <a:ext cx="432000" cy="344520"/>
           </a:xfrm>
           <a:prstGeom prst="rect">
             <a:avLst/>
@@ -5339,14 +5263,14 @@
       </p:sp>
       <p:sp>
         <p:nvSpPr>
-          <p:cNvPr id="115" name="Rectangle 115"/>
+          <p:cNvPr id="117" name="Rectangle 115"/>
           <p:cNvSpPr/>
           <p:nvPr/>
         </p:nvSpPr>
         <p:spPr>
           <a:xfrm>
             <a:off x="9533520" y="4682880"/>
-            <a:ext cx="432360" cy="344880"/>
+            <a:ext cx="432000" cy="344520"/>
           </a:xfrm>
           <a:prstGeom prst="rect">
             <a:avLst/>
@@ -5390,14 +5314,14 @@
       </p:sp>
       <p:sp>
         <p:nvSpPr>
-          <p:cNvPr id="116" name="Rectangle 116"/>
+          <p:cNvPr id="118" name="Rectangle 116"/>
           <p:cNvSpPr/>
           <p:nvPr/>
         </p:nvSpPr>
         <p:spPr>
           <a:xfrm>
             <a:off x="1405800" y="4682880"/>
-            <a:ext cx="305640" cy="344880"/>
+            <a:ext cx="305280" cy="344520"/>
           </a:xfrm>
           <a:prstGeom prst="rect">
             <a:avLst/>
@@ -5441,14 +5365,14 @@
       </p:sp>
       <p:sp>
         <p:nvSpPr>
-          <p:cNvPr id="117" name="Rectangle 117"/>
+          <p:cNvPr id="119" name="Rectangle 117"/>
           <p:cNvSpPr/>
           <p:nvPr/>
         </p:nvSpPr>
         <p:spPr>
           <a:xfrm>
             <a:off x="4233600" y="5140080"/>
-            <a:ext cx="3234960" cy="344880"/>
+            <a:ext cx="3234600" cy="344520"/>
           </a:xfrm>
           <a:prstGeom prst="rect">
             <a:avLst/>
@@ -5492,14 +5416,14 @@
       </p:sp>
       <p:sp>
         <p:nvSpPr>
-          <p:cNvPr id="118" name="Rectangle 118"/>
+          <p:cNvPr id="120" name="Rectangle 118"/>
           <p:cNvSpPr/>
           <p:nvPr/>
         </p:nvSpPr>
         <p:spPr>
           <a:xfrm>
             <a:off x="658800" y="950400"/>
-            <a:ext cx="1022760" cy="344880"/>
+            <a:ext cx="1022400" cy="344520"/>
           </a:xfrm>
           <a:prstGeom prst="rect">
             <a:avLst/>
@@ -5543,14 +5467,14 @@
       </p:sp>
       <p:sp>
         <p:nvSpPr>
-          <p:cNvPr id="119" name="Rectangle 119"/>
+          <p:cNvPr id="121" name="Rectangle 119"/>
           <p:cNvSpPr/>
           <p:nvPr/>
         </p:nvSpPr>
         <p:spPr>
           <a:xfrm>
             <a:off x="586800" y="1636200"/>
-            <a:ext cx="1022760" cy="344880"/>
+            <a:ext cx="1022400" cy="344520"/>
           </a:xfrm>
           <a:prstGeom prst="rect">
             <a:avLst/>
@@ -5594,14 +5518,14 @@
       </p:sp>
       <p:sp>
         <p:nvSpPr>
-          <p:cNvPr id="120" name="Rectangle 120"/>
+          <p:cNvPr id="122" name="Rectangle 120"/>
           <p:cNvSpPr/>
           <p:nvPr/>
         </p:nvSpPr>
         <p:spPr>
           <a:xfrm>
             <a:off x="658800" y="2345400"/>
-            <a:ext cx="1022760" cy="344880"/>
+            <a:ext cx="1022400" cy="344520"/>
           </a:xfrm>
           <a:prstGeom prst="rect">
             <a:avLst/>
@@ -5645,14 +5569,14 @@
       </p:sp>
       <p:sp>
         <p:nvSpPr>
-          <p:cNvPr id="121" name="Rectangle 121"/>
+          <p:cNvPr id="123" name="Rectangle 121"/>
           <p:cNvSpPr/>
           <p:nvPr/>
         </p:nvSpPr>
         <p:spPr>
           <a:xfrm>
             <a:off x="550800" y="3021480"/>
-            <a:ext cx="1022760" cy="344880"/>
+            <a:ext cx="1022400" cy="344520"/>
           </a:xfrm>
           <a:prstGeom prst="rect">
             <a:avLst/>
@@ -5696,14 +5620,14 @@
       </p:sp>
       <p:sp>
         <p:nvSpPr>
-          <p:cNvPr id="122" name="Rectangle 122"/>
+          <p:cNvPr id="124" name="Rectangle 122"/>
           <p:cNvSpPr/>
           <p:nvPr/>
         </p:nvSpPr>
         <p:spPr>
           <a:xfrm>
             <a:off x="766800" y="3704400"/>
-            <a:ext cx="1022760" cy="344880"/>
+            <a:ext cx="1022400" cy="344520"/>
           </a:xfrm>
           <a:prstGeom prst="rect">
             <a:avLst/>
@@ -5747,7 +5671,7 @@
       </p:sp>
       <p:sp>
         <p:nvSpPr>
-          <p:cNvPr id="123" name="Straight Connector 123"/>
+          <p:cNvPr id="125" name="Straight Connector 123"/>
           <p:cNvSpPr/>
           <p:nvPr/>
         </p:nvSpPr>
@@ -5774,14 +5698,14 @@
       </p:sp>
       <p:sp>
         <p:nvSpPr>
-          <p:cNvPr id="124" name="Rectangle 124"/>
+          <p:cNvPr id="126" name="Rectangle 124"/>
           <p:cNvSpPr/>
           <p:nvPr/>
         </p:nvSpPr>
         <p:spPr>
           <a:xfrm>
             <a:off x="1576800" y="914760"/>
-            <a:ext cx="4520160" cy="455400"/>
+            <a:ext cx="4519800" cy="455040"/>
           </a:xfrm>
           <a:prstGeom prst="rect">
             <a:avLst/>
@@ -5804,14 +5728,14 @@
       </p:sp>
       <p:sp>
         <p:nvSpPr>
-          <p:cNvPr id="125" name="Rectangle 125"/>
+          <p:cNvPr id="127" name="Rectangle 125"/>
           <p:cNvSpPr/>
           <p:nvPr/>
         </p:nvSpPr>
         <p:spPr>
           <a:xfrm>
             <a:off x="1576800" y="1600200"/>
-            <a:ext cx="4520160" cy="455400"/>
+            <a:ext cx="4519800" cy="455040"/>
           </a:xfrm>
           <a:prstGeom prst="rect">
             <a:avLst/>
@@ -5834,14 +5758,14 @@
       </p:sp>
       <p:sp>
         <p:nvSpPr>
-          <p:cNvPr id="126" name="Rectangle 126"/>
+          <p:cNvPr id="128" name="Rectangle 126"/>
           <p:cNvSpPr/>
           <p:nvPr/>
         </p:nvSpPr>
         <p:spPr>
           <a:xfrm>
             <a:off x="1576800" y="2286360"/>
-            <a:ext cx="6348960" cy="455400"/>
+            <a:ext cx="6348600" cy="455040"/>
           </a:xfrm>
           <a:prstGeom prst="rect">
             <a:avLst/>
@@ -5864,14 +5788,14 @@
       </p:sp>
       <p:sp>
         <p:nvSpPr>
-          <p:cNvPr id="127" name="Rectangle 127"/>
+          <p:cNvPr id="129" name="Rectangle 127"/>
           <p:cNvSpPr/>
           <p:nvPr/>
         </p:nvSpPr>
         <p:spPr>
           <a:xfrm>
             <a:off x="1576800" y="2971800"/>
-            <a:ext cx="6348960" cy="455400"/>
+            <a:ext cx="6348600" cy="455040"/>
           </a:xfrm>
           <a:prstGeom prst="rect">
             <a:avLst/>
@@ -5894,14 +5818,14 @@
       </p:sp>
       <p:sp>
         <p:nvSpPr>
-          <p:cNvPr id="128" name="Rectangle 128"/>
+          <p:cNvPr id="130" name="Rectangle 128"/>
           <p:cNvSpPr/>
           <p:nvPr/>
         </p:nvSpPr>
         <p:spPr>
           <a:xfrm>
             <a:off x="1576800" y="3657600"/>
-            <a:ext cx="8177760" cy="455400"/>
+            <a:ext cx="8177400" cy="455040"/>
           </a:xfrm>
           <a:prstGeom prst="rect">
             <a:avLst/>
@@ -5924,14 +5848,14 @@
       </p:sp>
       <p:sp>
         <p:nvSpPr>
-          <p:cNvPr id="129" name="Rectangle 129"/>
+          <p:cNvPr id="131" name="Rectangle 129"/>
           <p:cNvSpPr/>
           <p:nvPr/>
         </p:nvSpPr>
         <p:spPr>
           <a:xfrm>
             <a:off x="9516600" y="3692160"/>
-            <a:ext cx="471960" cy="384840"/>
+            <a:ext cx="471600" cy="384480"/>
           </a:xfrm>
           <a:prstGeom prst="rect">
             <a:avLst/>
@@ -6001,14 +5925,14 @@
       </p:sp>
       <p:sp>
         <p:nvSpPr>
-          <p:cNvPr id="130" name="Rectangle 130"/>
+          <p:cNvPr id="132" name="Rectangle 130"/>
           <p:cNvSpPr/>
           <p:nvPr/>
         </p:nvSpPr>
         <p:spPr>
           <a:xfrm>
             <a:off x="7684200" y="3007800"/>
-            <a:ext cx="471960" cy="384840"/>
+            <a:ext cx="471600" cy="384480"/>
           </a:xfrm>
           <a:prstGeom prst="rect">
             <a:avLst/>
@@ -6078,14 +6002,14 @@
       </p:sp>
       <p:sp>
         <p:nvSpPr>
-          <p:cNvPr id="131" name="Rectangle 131"/>
+          <p:cNvPr id="133" name="Rectangle 131"/>
           <p:cNvSpPr/>
           <p:nvPr/>
         </p:nvSpPr>
         <p:spPr>
           <a:xfrm>
             <a:off x="7684200" y="2322360"/>
-            <a:ext cx="471960" cy="384840"/>
+            <a:ext cx="471600" cy="384480"/>
           </a:xfrm>
           <a:prstGeom prst="rect">
             <a:avLst/>
@@ -6155,14 +6079,14 @@
       </p:sp>
       <p:sp>
         <p:nvSpPr>
-          <p:cNvPr id="132" name="Rectangle 132"/>
+          <p:cNvPr id="134" name="Rectangle 132"/>
           <p:cNvSpPr/>
           <p:nvPr/>
         </p:nvSpPr>
         <p:spPr>
           <a:xfrm>
             <a:off x="5855400" y="1635120"/>
-            <a:ext cx="471960" cy="384840"/>
+            <a:ext cx="471600" cy="384480"/>
           </a:xfrm>
           <a:prstGeom prst="rect">
             <a:avLst/>
@@ -6232,14 +6156,14 @@
       </p:sp>
       <p:sp>
         <p:nvSpPr>
-          <p:cNvPr id="133" name="Rectangle 133"/>
+          <p:cNvPr id="135" name="Rectangle 133"/>
           <p:cNvSpPr/>
           <p:nvPr/>
         </p:nvSpPr>
         <p:spPr>
           <a:xfrm>
             <a:off x="5855400" y="949320"/>
-            <a:ext cx="471960" cy="384840"/>
+            <a:ext cx="471600" cy="384480"/>
           </a:xfrm>
           <a:prstGeom prst="rect">
             <a:avLst/>
@@ -6309,14 +6233,14 @@
       </p:sp>
       <p:sp>
         <p:nvSpPr>
-          <p:cNvPr id="134" name="Rectangle 134"/>
+          <p:cNvPr id="136" name="Rectangle 134"/>
           <p:cNvSpPr/>
           <p:nvPr/>
         </p:nvSpPr>
         <p:spPr>
           <a:xfrm>
             <a:off x="7819200" y="3692160"/>
-            <a:ext cx="462600" cy="384840"/>
+            <a:ext cx="462240" cy="384480"/>
           </a:xfrm>
           <a:prstGeom prst="rect">
             <a:avLst/>
@@ -6386,14 +6310,14 @@
       </p:sp>
       <p:sp>
         <p:nvSpPr>
-          <p:cNvPr id="135" name="Rectangle 136"/>
+          <p:cNvPr id="137" name="Rectangle 136"/>
           <p:cNvSpPr/>
           <p:nvPr/>
         </p:nvSpPr>
         <p:spPr>
           <a:xfrm>
             <a:off x="3463200" y="3685320"/>
-            <a:ext cx="471960" cy="384840"/>
+            <a:ext cx="471600" cy="384480"/>
           </a:xfrm>
           <a:prstGeom prst="rect">
             <a:avLst/>
@@ -6463,14 +6387,14 @@
       </p:sp>
       <p:sp>
         <p:nvSpPr>
-          <p:cNvPr id="136" name="Rectangle 137"/>
+          <p:cNvPr id="138" name="Rectangle 137"/>
           <p:cNvSpPr/>
           <p:nvPr/>
         </p:nvSpPr>
         <p:spPr>
           <a:xfrm>
             <a:off x="6051600" y="3007800"/>
-            <a:ext cx="462600" cy="384840"/>
+            <a:ext cx="462240" cy="384480"/>
           </a:xfrm>
           <a:prstGeom prst="rect">
             <a:avLst/>
@@ -6540,14 +6464,14 @@
       </p:sp>
       <p:sp>
         <p:nvSpPr>
-          <p:cNvPr id="137" name="Rectangle 138"/>
+          <p:cNvPr id="139" name="Rectangle 138"/>
           <p:cNvSpPr/>
           <p:nvPr/>
         </p:nvSpPr>
         <p:spPr>
           <a:xfrm>
             <a:off x="6057360" y="2320920"/>
-            <a:ext cx="462600" cy="384840"/>
+            <a:ext cx="462240" cy="384480"/>
           </a:xfrm>
           <a:prstGeom prst="rect">
             <a:avLst/>
@@ -6617,14 +6541,14 @@
       </p:sp>
       <p:sp>
         <p:nvSpPr>
-          <p:cNvPr id="138" name="Rectangle 139"/>
+          <p:cNvPr id="140" name="Rectangle 139"/>
           <p:cNvSpPr/>
           <p:nvPr/>
         </p:nvSpPr>
         <p:spPr>
           <a:xfrm>
             <a:off x="4222800" y="949320"/>
-            <a:ext cx="462600" cy="384840"/>
+            <a:ext cx="462240" cy="384480"/>
           </a:xfrm>
           <a:prstGeom prst="rect">
             <a:avLst/>
@@ -6694,14 +6618,14 @@
       </p:sp>
       <p:sp>
         <p:nvSpPr>
-          <p:cNvPr id="139" name="Rectangle 140"/>
+          <p:cNvPr id="141" name="Rectangle 140"/>
           <p:cNvSpPr/>
           <p:nvPr/>
         </p:nvSpPr>
         <p:spPr>
           <a:xfrm>
             <a:off x="4215960" y="1636200"/>
-            <a:ext cx="462600" cy="384840"/>
+            <a:ext cx="462240" cy="384480"/>
           </a:xfrm>
           <a:prstGeom prst="rect">
             <a:avLst/>
@@ -6771,14 +6695,14 @@
       </p:sp>
       <p:sp>
         <p:nvSpPr>
-          <p:cNvPr id="140" name="Rectangle 141"/>
+          <p:cNvPr id="142" name="Rectangle 141"/>
           <p:cNvSpPr/>
           <p:nvPr/>
         </p:nvSpPr>
         <p:spPr>
           <a:xfrm>
             <a:off x="3128400" y="2320920"/>
-            <a:ext cx="471960" cy="384840"/>
+            <a:ext cx="471600" cy="384480"/>
           </a:xfrm>
           <a:prstGeom prst="rect">
             <a:avLst/>
@@ -6848,14 +6772,14 @@
       </p:sp>
       <p:sp>
         <p:nvSpPr>
-          <p:cNvPr id="141" name="Rectangle 142"/>
+          <p:cNvPr id="143" name="Rectangle 142"/>
           <p:cNvSpPr/>
           <p:nvPr/>
         </p:nvSpPr>
         <p:spPr>
           <a:xfrm>
             <a:off x="3112200" y="3007800"/>
-            <a:ext cx="471960" cy="384840"/>
+            <a:ext cx="471600" cy="384480"/>
           </a:xfrm>
           <a:prstGeom prst="rect">
             <a:avLst/>
@@ -6925,14 +6849,14 @@
       </p:sp>
       <p:sp>
         <p:nvSpPr>
-          <p:cNvPr id="142" name="Rectangle 143"/>
+          <p:cNvPr id="144" name="Rectangle 143"/>
           <p:cNvSpPr/>
           <p:nvPr/>
         </p:nvSpPr>
         <p:spPr>
           <a:xfrm rot="16180800">
             <a:off x="-392040" y="2382840"/>
-            <a:ext cx="1404360" cy="372240"/>
+            <a:ext cx="1404000" cy="371880"/>
           </a:xfrm>
           <a:prstGeom prst="rect">
             <a:avLst/>
@@ -6976,28 +6900,28 @@
       </p:sp>
       <p:grpSp>
         <p:nvGrpSpPr>
-          <p:cNvPr id="143" name="Group 144"/>
+          <p:cNvPr id="145" name="Group 144"/>
           <p:cNvGrpSpPr/>
           <p:nvPr/>
         </p:nvGrpSpPr>
         <p:grpSpPr>
           <a:xfrm>
             <a:off x="7664400" y="299520"/>
-            <a:ext cx="2022480" cy="384840"/>
+            <a:ext cx="2022120" cy="384480"/>
             <a:chOff x="7664400" y="299520"/>
-            <a:chExt cx="2022480" cy="384840"/>
+            <a:chExt cx="2022120" cy="384480"/>
           </a:xfrm>
         </p:grpSpPr>
         <p:sp>
           <p:nvSpPr>
-            <p:cNvPr id="144" name="Rectangle 145"/>
+            <p:cNvPr id="146" name="Rectangle 145"/>
             <p:cNvSpPr/>
             <p:nvPr/>
           </p:nvSpPr>
           <p:spPr>
             <a:xfrm>
               <a:off x="7772400" y="339480"/>
-              <a:ext cx="1827360" cy="344880"/>
+              <a:ext cx="1827000" cy="344520"/>
             </a:xfrm>
             <a:prstGeom prst="rect">
               <a:avLst/>
@@ -7018,28 +6942,28 @@
         </p:sp>
         <p:grpSp>
           <p:nvGrpSpPr>
-            <p:cNvPr id="145" name="Group 146"/>
+            <p:cNvPr id="147" name="Group 146"/>
             <p:cNvGrpSpPr/>
             <p:nvPr/>
           </p:nvGrpSpPr>
           <p:grpSpPr>
             <a:xfrm>
               <a:off x="7664400" y="299520"/>
-              <a:ext cx="2022480" cy="384840"/>
+              <a:ext cx="2022120" cy="384480"/>
               <a:chOff x="7664400" y="299520"/>
-              <a:chExt cx="2022480" cy="384840"/>
+              <a:chExt cx="2022120" cy="384480"/>
             </a:xfrm>
           </p:grpSpPr>
           <p:sp>
             <p:nvSpPr>
-              <p:cNvPr id="146" name="Rectangle 147"/>
+              <p:cNvPr id="148" name="Rectangle 147"/>
               <p:cNvSpPr/>
               <p:nvPr/>
             </p:nvSpPr>
             <p:spPr>
               <a:xfrm>
                 <a:off x="7664400" y="299520"/>
-                <a:ext cx="648720" cy="384840"/>
+                <a:ext cx="648360" cy="384480"/>
               </a:xfrm>
               <a:prstGeom prst="rect">
                 <a:avLst/>
@@ -7119,14 +7043,14 @@
           </p:sp>
           <p:sp>
             <p:nvSpPr>
-              <p:cNvPr id="147" name="Rectangle 148"/>
+              <p:cNvPr id="149" name="Rectangle 148"/>
               <p:cNvSpPr/>
               <p:nvPr/>
             </p:nvSpPr>
             <p:spPr>
               <a:xfrm>
                 <a:off x="8282520" y="339480"/>
-                <a:ext cx="1404360" cy="344880"/>
+                <a:ext cx="1404000" cy="344520"/>
               </a:xfrm>
               <a:prstGeom prst="rect">
                 <a:avLst/>
@@ -7170,6 +7094,72 @@
           </p:sp>
         </p:grpSp>
       </p:grpSp>
+      <p:grpSp>
+        <p:nvGrpSpPr>
+          <p:cNvPr id="150" name="Group 89_4"/>
+          <p:cNvGrpSpPr/>
+          <p:nvPr/>
+        </p:nvGrpSpPr>
+        <p:grpSpPr>
+          <a:xfrm>
+            <a:off x="2057400" y="268560"/>
+            <a:ext cx="1143000" cy="645840"/>
+            <a:chOff x="2057400" y="268560"/>
+            <a:chExt cx="1143000" cy="645840"/>
+          </a:xfrm>
+        </p:grpSpPr>
+        <p:sp>
+          <p:nvSpPr>
+            <p:cNvPr id="151" name="Rectangle 93_4"/>
+            <p:cNvSpPr/>
+            <p:nvPr/>
+          </p:nvSpPr>
+          <p:spPr>
+            <a:xfrm>
+              <a:off x="2057400" y="268560"/>
+              <a:ext cx="1143000" cy="645840"/>
+            </a:xfrm>
+            <a:prstGeom prst="rect">
+              <a:avLst/>
+            </a:prstGeom>
+            <a:noFill/>
+            <a:ln w="0">
+              <a:noFill/>
+            </a:ln>
+          </p:spPr>
+          <p:style>
+            <a:lnRef idx="0"/>
+            <a:fillRef idx="0"/>
+            <a:effectRef idx="0"/>
+            <a:fontRef idx="minor"/>
+          </p:style>
+          <p:txBody>
+            <a:bodyPr lIns="90000" rIns="90000" tIns="45000" bIns="45000">
+              <a:noAutofit/>
+            </a:bodyPr>
+            <a:p>
+              <a:pPr>
+                <a:lnSpc>
+                  <a:spcPct val="100000"/>
+                </a:lnSpc>
+              </a:pPr>
+              <a:r>
+                <a:rPr b="0" lang="en-US" sz="3600" spc="-1" strike="noStrike">
+                  <a:solidFill>
+                    <a:srgbClr val="000000"/>
+                  </a:solidFill>
+                  <a:latin typeface="Arial"/>
+                  <a:ea typeface="DejaVu Sans"/>
+                </a:rPr>
+                <a:t>OLD</a:t>
+              </a:r>
+              <a:endParaRPr b="0" lang="en-US" sz="3600" spc="-1" strike="noStrike">
+                <a:latin typeface="Arial"/>
+              </a:endParaRPr>
+            </a:p>
+          </p:txBody>
+        </p:sp>
+      </p:grpSp>
     </p:spTree>
   </p:cSld>
   <mc:AlternateContent>
@@ -7202,14 +7192,14 @@
       </p:grpSpPr>
       <p:sp>
         <p:nvSpPr>
-          <p:cNvPr id="148" name="Rectangle 46"/>
+          <p:cNvPr id="152" name="Rectangle 46"/>
           <p:cNvSpPr/>
           <p:nvPr/>
         </p:nvSpPr>
         <p:spPr>
           <a:xfrm>
             <a:off x="2290320" y="4682880"/>
-            <a:ext cx="482760" cy="344880"/>
+            <a:ext cx="482400" cy="344520"/>
           </a:xfrm>
           <a:prstGeom prst="rect">
             <a:avLst/>
@@ -7263,14 +7253,14 @@
       </p:sp>
       <p:sp>
         <p:nvSpPr>
-          <p:cNvPr id="149" name="Rectangle 47"/>
+          <p:cNvPr id="153" name="Rectangle 47"/>
           <p:cNvSpPr/>
           <p:nvPr/>
         </p:nvSpPr>
         <p:spPr>
           <a:xfrm>
             <a:off x="3132720" y="4682880"/>
-            <a:ext cx="482760" cy="344880"/>
+            <a:ext cx="482400" cy="344520"/>
           </a:xfrm>
           <a:prstGeom prst="rect">
             <a:avLst/>
@@ -7324,14 +7314,14 @@
       </p:sp>
       <p:sp>
         <p:nvSpPr>
-          <p:cNvPr id="150" name="Rectangle 48"/>
+          <p:cNvPr id="154" name="Rectangle 48"/>
           <p:cNvSpPr/>
           <p:nvPr/>
         </p:nvSpPr>
         <p:spPr>
           <a:xfrm>
             <a:off x="4047120" y="4682880"/>
-            <a:ext cx="482760" cy="344880"/>
+            <a:ext cx="482400" cy="344520"/>
           </a:xfrm>
           <a:prstGeom prst="rect">
             <a:avLst/>
@@ -7385,14 +7375,14 @@
       </p:sp>
       <p:sp>
         <p:nvSpPr>
-          <p:cNvPr id="151" name="Rectangle 49"/>
+          <p:cNvPr id="155" name="Rectangle 49"/>
           <p:cNvSpPr/>
           <p:nvPr/>
         </p:nvSpPr>
         <p:spPr>
           <a:xfrm>
             <a:off x="4961520" y="4682880"/>
-            <a:ext cx="482760" cy="344880"/>
+            <a:ext cx="482400" cy="344520"/>
           </a:xfrm>
           <a:prstGeom prst="rect">
             <a:avLst/>
@@ -7446,14 +7436,14 @@
       </p:sp>
       <p:sp>
         <p:nvSpPr>
-          <p:cNvPr id="152" name="Rectangle 50"/>
+          <p:cNvPr id="156" name="Rectangle 50"/>
           <p:cNvSpPr/>
           <p:nvPr/>
         </p:nvSpPr>
         <p:spPr>
           <a:xfrm>
             <a:off x="5715000" y="4682880"/>
-            <a:ext cx="685080" cy="344880"/>
+            <a:ext cx="684720" cy="344520"/>
           </a:xfrm>
           <a:prstGeom prst="rect">
             <a:avLst/>
@@ -7497,14 +7487,14 @@
       </p:sp>
       <p:sp>
         <p:nvSpPr>
-          <p:cNvPr id="153" name="Rectangle 51"/>
+          <p:cNvPr id="157" name="Rectangle 51"/>
           <p:cNvSpPr/>
           <p:nvPr/>
         </p:nvSpPr>
         <p:spPr>
           <a:xfrm>
             <a:off x="6790320" y="4682880"/>
-            <a:ext cx="482760" cy="344880"/>
+            <a:ext cx="482400" cy="344520"/>
           </a:xfrm>
           <a:prstGeom prst="rect">
             <a:avLst/>
@@ -7558,14 +7548,14 @@
       </p:sp>
       <p:sp>
         <p:nvSpPr>
-          <p:cNvPr id="154" name="Rectangle 52"/>
+          <p:cNvPr id="158" name="Rectangle 52"/>
           <p:cNvSpPr/>
           <p:nvPr/>
         </p:nvSpPr>
         <p:spPr>
           <a:xfrm>
             <a:off x="7698600" y="4682880"/>
-            <a:ext cx="529560" cy="344880"/>
+            <a:ext cx="529200" cy="344520"/>
           </a:xfrm>
           <a:prstGeom prst="rect">
             <a:avLst/>
@@ -7619,14 +7609,14 @@
       </p:sp>
       <p:sp>
         <p:nvSpPr>
-          <p:cNvPr id="155" name="Rectangle 53"/>
+          <p:cNvPr id="159" name="Rectangle 53"/>
           <p:cNvSpPr/>
           <p:nvPr/>
         </p:nvSpPr>
         <p:spPr>
           <a:xfrm>
             <a:off x="8619120" y="4682880"/>
-            <a:ext cx="482760" cy="344880"/>
+            <a:ext cx="482400" cy="344520"/>
           </a:xfrm>
           <a:prstGeom prst="rect">
             <a:avLst/>
@@ -7680,14 +7670,14 @@
       </p:sp>
       <p:sp>
         <p:nvSpPr>
-          <p:cNvPr id="156" name="Rectangle 54"/>
+          <p:cNvPr id="160" name="Rectangle 54"/>
           <p:cNvSpPr/>
           <p:nvPr/>
         </p:nvSpPr>
         <p:spPr>
           <a:xfrm>
             <a:off x="9533520" y="4682880"/>
-            <a:ext cx="482760" cy="344880"/>
+            <a:ext cx="482400" cy="344520"/>
           </a:xfrm>
           <a:prstGeom prst="rect">
             <a:avLst/>
@@ -7741,14 +7731,14 @@
       </p:sp>
       <p:sp>
         <p:nvSpPr>
-          <p:cNvPr id="157" name="Rectangle 55"/>
+          <p:cNvPr id="161" name="Rectangle 55"/>
           <p:cNvSpPr/>
           <p:nvPr/>
         </p:nvSpPr>
         <p:spPr>
           <a:xfrm>
             <a:off x="1405800" y="4682880"/>
-            <a:ext cx="685080" cy="344880"/>
+            <a:ext cx="684720" cy="344520"/>
           </a:xfrm>
           <a:prstGeom prst="rect">
             <a:avLst/>
@@ -7792,14 +7782,14 @@
       </p:sp>
       <p:sp>
         <p:nvSpPr>
-          <p:cNvPr id="158" name="Rectangle 56"/>
+          <p:cNvPr id="162" name="Rectangle 56"/>
           <p:cNvSpPr/>
           <p:nvPr/>
         </p:nvSpPr>
         <p:spPr>
           <a:xfrm>
             <a:off x="4919400" y="5140080"/>
-            <a:ext cx="794160" cy="344880"/>
+            <a:ext cx="793800" cy="344520"/>
           </a:xfrm>
           <a:prstGeom prst="rect">
             <a:avLst/>
@@ -7843,14 +7833,14 @@
       </p:sp>
       <p:sp>
         <p:nvSpPr>
-          <p:cNvPr id="159" name="Rectangle 59"/>
+          <p:cNvPr id="163" name="Rectangle 59"/>
           <p:cNvSpPr/>
           <p:nvPr/>
         </p:nvSpPr>
         <p:spPr>
           <a:xfrm>
             <a:off x="465120" y="2345400"/>
-            <a:ext cx="1180440" cy="344880"/>
+            <a:ext cx="1180080" cy="344520"/>
           </a:xfrm>
           <a:prstGeom prst="rect">
             <a:avLst/>
@@ -7894,14 +7884,14 @@
       </p:sp>
       <p:sp>
         <p:nvSpPr>
-          <p:cNvPr id="160" name="Rectangle 60"/>
+          <p:cNvPr id="164" name="Rectangle 60"/>
           <p:cNvSpPr/>
           <p:nvPr/>
         </p:nvSpPr>
         <p:spPr>
           <a:xfrm>
             <a:off x="408600" y="3021480"/>
-            <a:ext cx="1344960" cy="344880"/>
+            <a:ext cx="1344600" cy="344520"/>
           </a:xfrm>
           <a:prstGeom prst="rect">
             <a:avLst/>
@@ -7945,14 +7935,14 @@
       </p:sp>
       <p:sp>
         <p:nvSpPr>
-          <p:cNvPr id="161" name="Rectangle 61"/>
+          <p:cNvPr id="165" name="Rectangle 61"/>
           <p:cNvSpPr/>
           <p:nvPr/>
         </p:nvSpPr>
         <p:spPr>
           <a:xfrm>
             <a:off x="541800" y="3704400"/>
-            <a:ext cx="1103760" cy="344880"/>
+            <a:ext cx="1103400" cy="344520"/>
           </a:xfrm>
           <a:prstGeom prst="rect">
             <a:avLst/>
@@ -7996,7 +7986,7 @@
       </p:sp>
       <p:grpSp>
         <p:nvGrpSpPr>
-          <p:cNvPr id="162" name="Group 1"/>
+          <p:cNvPr id="166" name="Group 1"/>
           <p:cNvGrpSpPr/>
           <p:nvPr/>
         </p:nvGrpSpPr>
@@ -8010,7 +8000,7 @@
         </p:grpSpPr>
         <p:sp>
           <p:nvSpPr>
-            <p:cNvPr id="163" name="Straight Connector 37"/>
+            <p:cNvPr id="167" name="Straight Connector 37"/>
             <p:cNvSpPr/>
             <p:nvPr/>
           </p:nvSpPr>
@@ -8037,7 +8027,7 @@
         </p:sp>
         <p:sp>
           <p:nvSpPr>
-            <p:cNvPr id="164" name="Straight Connector 38"/>
+            <p:cNvPr id="168" name="Straight Connector 38"/>
             <p:cNvSpPr/>
             <p:nvPr/>
           </p:nvSpPr>
@@ -8064,7 +8054,7 @@
         </p:sp>
         <p:sp>
           <p:nvSpPr>
-            <p:cNvPr id="165" name="Straight Connector 39"/>
+            <p:cNvPr id="169" name="Straight Connector 39"/>
             <p:cNvSpPr/>
             <p:nvPr/>
           </p:nvSpPr>
@@ -8091,7 +8081,7 @@
         </p:sp>
         <p:sp>
           <p:nvSpPr>
-            <p:cNvPr id="166" name="Straight Connector 40"/>
+            <p:cNvPr id="170" name="Straight Connector 40"/>
             <p:cNvSpPr/>
             <p:nvPr/>
           </p:nvSpPr>
@@ -8118,7 +8108,7 @@
         </p:sp>
         <p:sp>
           <p:nvSpPr>
-            <p:cNvPr id="167" name="Straight Connector 41"/>
+            <p:cNvPr id="171" name="Straight Connector 41"/>
             <p:cNvSpPr/>
             <p:nvPr/>
           </p:nvSpPr>
@@ -8145,7 +8135,7 @@
         </p:sp>
         <p:sp>
           <p:nvSpPr>
-            <p:cNvPr id="168" name="Straight Connector 42"/>
+            <p:cNvPr id="172" name="Straight Connector 42"/>
             <p:cNvSpPr/>
             <p:nvPr/>
           </p:nvSpPr>
@@ -8172,7 +8162,7 @@
         </p:sp>
         <p:sp>
           <p:nvSpPr>
-            <p:cNvPr id="169" name="Straight Connector 43"/>
+            <p:cNvPr id="173" name="Straight Connector 43"/>
             <p:cNvSpPr/>
             <p:nvPr/>
           </p:nvSpPr>
@@ -8199,7 +8189,7 @@
         </p:sp>
         <p:sp>
           <p:nvSpPr>
-            <p:cNvPr id="170" name="Straight Connector 44"/>
+            <p:cNvPr id="174" name="Straight Connector 44"/>
             <p:cNvSpPr/>
             <p:nvPr/>
           </p:nvSpPr>
@@ -8226,7 +8216,7 @@
         </p:sp>
         <p:sp>
           <p:nvSpPr>
-            <p:cNvPr id="171" name="Straight Connector 45"/>
+            <p:cNvPr id="175" name="Straight Connector 45"/>
             <p:cNvSpPr/>
             <p:nvPr/>
           </p:nvSpPr>
@@ -8253,14 +8243,14 @@
         </p:sp>
         <p:sp>
           <p:nvSpPr>
-            <p:cNvPr id="172" name="Straight Connector 62"/>
+            <p:cNvPr id="176" name="Straight Connector 62"/>
             <p:cNvSpPr/>
             <p:nvPr/>
           </p:nvSpPr>
           <p:spPr>
             <a:xfrm>
               <a:off x="1576800" y="2090160"/>
-              <a:ext cx="0" cy="2253240"/>
+              <a:ext cx="360" cy="2253240"/>
             </a:xfrm>
             <a:prstGeom prst="line">
               <a:avLst/>
@@ -8281,14 +8271,14 @@
       </p:grpSp>
       <p:sp>
         <p:nvSpPr>
-          <p:cNvPr id="173" name="Rectangle 63"/>
+          <p:cNvPr id="177" name="Rectangle 63"/>
           <p:cNvSpPr/>
           <p:nvPr/>
         </p:nvSpPr>
         <p:spPr>
           <a:xfrm>
             <a:off x="1576800" y="3657600"/>
-            <a:ext cx="8177760" cy="455400"/>
+            <a:ext cx="8177400" cy="455040"/>
           </a:xfrm>
           <a:prstGeom prst="rect">
             <a:avLst/>
@@ -8311,14 +8301,14 @@
       </p:sp>
       <p:sp>
         <p:nvSpPr>
-          <p:cNvPr id="174" name="Rectangle 64"/>
+          <p:cNvPr id="178" name="Rectangle 64"/>
           <p:cNvSpPr/>
           <p:nvPr/>
         </p:nvSpPr>
         <p:spPr>
           <a:xfrm>
             <a:off x="9516600" y="3692160"/>
-            <a:ext cx="471960" cy="384840"/>
+            <a:ext cx="471600" cy="384480"/>
           </a:xfrm>
           <a:prstGeom prst="rect">
             <a:avLst/>
@@ -8388,14 +8378,14 @@
       </p:sp>
       <p:sp>
         <p:nvSpPr>
-          <p:cNvPr id="175" name="Rectangle 65"/>
+          <p:cNvPr id="179" name="Rectangle 65"/>
           <p:cNvSpPr/>
           <p:nvPr/>
         </p:nvSpPr>
         <p:spPr>
           <a:xfrm>
             <a:off x="7855200" y="3692160"/>
-            <a:ext cx="462600" cy="384840"/>
+            <a:ext cx="462240" cy="384480"/>
           </a:xfrm>
           <a:prstGeom prst="rect">
             <a:avLst/>
@@ -8465,14 +8455,14 @@
       </p:sp>
       <p:sp>
         <p:nvSpPr>
-          <p:cNvPr id="176" name="Rectangle 67"/>
+          <p:cNvPr id="180" name="Rectangle 67"/>
           <p:cNvSpPr/>
           <p:nvPr/>
         </p:nvSpPr>
         <p:spPr>
           <a:xfrm>
             <a:off x="3463200" y="3685320"/>
-            <a:ext cx="471960" cy="384840"/>
+            <a:ext cx="471600" cy="384480"/>
           </a:xfrm>
           <a:prstGeom prst="rect">
             <a:avLst/>
@@ -8542,28 +8532,28 @@
       </p:sp>
       <p:grpSp>
         <p:nvGrpSpPr>
-          <p:cNvPr id="177" name="Group 68"/>
+          <p:cNvPr id="181" name="Group 68"/>
           <p:cNvGrpSpPr/>
           <p:nvPr/>
         </p:nvGrpSpPr>
         <p:grpSpPr>
           <a:xfrm>
             <a:off x="1575000" y="2286360"/>
-            <a:ext cx="1778760" cy="1140840"/>
+            <a:ext cx="1778400" cy="1140480"/>
             <a:chOff x="1575000" y="2286360"/>
-            <a:chExt cx="1778760" cy="1140840"/>
+            <a:chExt cx="1778400" cy="1140480"/>
           </a:xfrm>
         </p:grpSpPr>
         <p:sp>
           <p:nvSpPr>
-            <p:cNvPr id="178" name="Rectangle 76"/>
+            <p:cNvPr id="182" name="Rectangle 76"/>
             <p:cNvSpPr/>
             <p:nvPr/>
           </p:nvSpPr>
           <p:spPr>
             <a:xfrm>
               <a:off x="1576800" y="2286360"/>
-              <a:ext cx="1776960" cy="455400"/>
+              <a:ext cx="1776600" cy="455040"/>
             </a:xfrm>
             <a:prstGeom prst="rect">
               <a:avLst/>
@@ -8586,14 +8576,14 @@
         </p:sp>
         <p:sp>
           <p:nvSpPr>
-            <p:cNvPr id="179" name="Rectangle 78"/>
+            <p:cNvPr id="183" name="Rectangle 78"/>
             <p:cNvSpPr/>
             <p:nvPr/>
           </p:nvSpPr>
           <p:spPr>
             <a:xfrm>
               <a:off x="1575000" y="2971800"/>
-              <a:ext cx="1778760" cy="455400"/>
+              <a:ext cx="1778400" cy="455040"/>
             </a:xfrm>
             <a:prstGeom prst="rect">
               <a:avLst/>
@@ -8617,28 +8607,28 @@
       </p:grpSp>
       <p:grpSp>
         <p:nvGrpSpPr>
-          <p:cNvPr id="180" name="Group 79"/>
+          <p:cNvPr id="184" name="Group 79"/>
           <p:cNvGrpSpPr/>
           <p:nvPr/>
         </p:nvGrpSpPr>
         <p:grpSpPr>
           <a:xfrm>
             <a:off x="3355200" y="2286360"/>
-            <a:ext cx="6636960" cy="1140840"/>
+            <a:ext cx="6636600" cy="1140480"/>
             <a:chOff x="3355200" y="2286360"/>
-            <a:chExt cx="6636960" cy="1140840"/>
+            <a:chExt cx="6636600" cy="1140480"/>
           </a:xfrm>
         </p:grpSpPr>
         <p:sp>
           <p:nvSpPr>
-            <p:cNvPr id="181" name="Rectangle 80"/>
+            <p:cNvPr id="185" name="Rectangle 80"/>
             <p:cNvSpPr/>
             <p:nvPr/>
           </p:nvSpPr>
           <p:spPr>
             <a:xfrm>
               <a:off x="3355200" y="2286360"/>
-              <a:ext cx="6406560" cy="455400"/>
+              <a:ext cx="6406200" cy="455040"/>
             </a:xfrm>
             <a:prstGeom prst="rect">
               <a:avLst/>
@@ -8661,14 +8651,14 @@
         </p:sp>
         <p:sp>
           <p:nvSpPr>
-            <p:cNvPr id="182" name="Rectangle 81"/>
+            <p:cNvPr id="186" name="Rectangle 81"/>
             <p:cNvSpPr/>
             <p:nvPr/>
           </p:nvSpPr>
           <p:spPr>
             <a:xfrm>
               <a:off x="3355200" y="2971800"/>
-              <a:ext cx="6406560" cy="455400"/>
+              <a:ext cx="6406200" cy="455040"/>
             </a:xfrm>
             <a:prstGeom prst="rect">
               <a:avLst/>
@@ -8691,14 +8681,14 @@
         </p:sp>
         <p:sp>
           <p:nvSpPr>
-            <p:cNvPr id="183" name="Rectangle 82"/>
+            <p:cNvPr id="187" name="Rectangle 82"/>
             <p:cNvSpPr/>
             <p:nvPr/>
           </p:nvSpPr>
           <p:spPr>
             <a:xfrm>
               <a:off x="9520200" y="3007800"/>
-              <a:ext cx="471960" cy="384840"/>
+              <a:ext cx="471600" cy="384480"/>
             </a:xfrm>
             <a:prstGeom prst="rect">
               <a:avLst/>
@@ -8768,14 +8758,14 @@
         </p:sp>
         <p:sp>
           <p:nvSpPr>
-            <p:cNvPr id="184" name="Rectangle 83"/>
+            <p:cNvPr id="188" name="Rectangle 83"/>
             <p:cNvSpPr/>
             <p:nvPr/>
           </p:nvSpPr>
           <p:spPr>
             <a:xfrm>
               <a:off x="9520200" y="2322360"/>
-              <a:ext cx="471960" cy="384840"/>
+              <a:ext cx="471600" cy="384480"/>
             </a:xfrm>
             <a:prstGeom prst="rect">
               <a:avLst/>
@@ -8845,14 +8835,14 @@
         </p:sp>
         <p:sp>
           <p:nvSpPr>
-            <p:cNvPr id="185" name="Rectangle 84"/>
+            <p:cNvPr id="189" name="Rectangle 84"/>
             <p:cNvSpPr/>
             <p:nvPr/>
           </p:nvSpPr>
           <p:spPr>
             <a:xfrm>
               <a:off x="7851600" y="3007800"/>
-              <a:ext cx="462600" cy="384840"/>
+              <a:ext cx="462240" cy="384480"/>
             </a:xfrm>
             <a:prstGeom prst="rect">
               <a:avLst/>
@@ -8922,14 +8912,14 @@
         </p:sp>
         <p:sp>
           <p:nvSpPr>
-            <p:cNvPr id="186" name="Rectangle 85"/>
+            <p:cNvPr id="190" name="Rectangle 85"/>
             <p:cNvSpPr/>
             <p:nvPr/>
           </p:nvSpPr>
           <p:spPr>
             <a:xfrm>
               <a:off x="7857360" y="2320920"/>
-              <a:ext cx="462600" cy="384840"/>
+              <a:ext cx="462240" cy="384480"/>
             </a:xfrm>
             <a:prstGeom prst="rect">
               <a:avLst/>
@@ -8999,14 +8989,14 @@
         </p:sp>
         <p:sp>
           <p:nvSpPr>
-            <p:cNvPr id="187" name="Rectangle 86"/>
+            <p:cNvPr id="191" name="Rectangle 86"/>
             <p:cNvSpPr/>
             <p:nvPr/>
           </p:nvSpPr>
           <p:spPr>
             <a:xfrm>
               <a:off x="4964400" y="2320920"/>
-              <a:ext cx="471960" cy="384840"/>
+              <a:ext cx="471600" cy="384480"/>
             </a:xfrm>
             <a:prstGeom prst="rect">
               <a:avLst/>
@@ -9076,14 +9066,14 @@
         </p:sp>
         <p:sp>
           <p:nvSpPr>
-            <p:cNvPr id="188" name="Rectangle 87"/>
+            <p:cNvPr id="192" name="Rectangle 87"/>
             <p:cNvSpPr/>
             <p:nvPr/>
           </p:nvSpPr>
           <p:spPr>
             <a:xfrm>
               <a:off x="4948200" y="3007800"/>
-              <a:ext cx="471960" cy="384840"/>
+              <a:ext cx="471600" cy="384480"/>
             </a:xfrm>
             <a:prstGeom prst="rect">
               <a:avLst/>
@@ -9154,14 +9144,14 @@
       </p:grpSp>
       <p:sp>
         <p:nvSpPr>
-          <p:cNvPr id="189" name="Rectangle 88"/>
+          <p:cNvPr id="193" name="Rectangle 88"/>
           <p:cNvSpPr/>
           <p:nvPr/>
         </p:nvSpPr>
         <p:spPr>
           <a:xfrm rot="16180800">
             <a:off x="-459360" y="3068640"/>
-            <a:ext cx="1404360" cy="372240"/>
+            <a:ext cx="1404000" cy="371880"/>
           </a:xfrm>
           <a:prstGeom prst="rect">
             <a:avLst/>
@@ -9205,28 +9195,28 @@
       </p:sp>
       <p:grpSp>
         <p:nvGrpSpPr>
-          <p:cNvPr id="190" name="Group 89"/>
+          <p:cNvPr id="194" name="Group 89"/>
           <p:cNvGrpSpPr/>
           <p:nvPr/>
         </p:nvGrpSpPr>
         <p:grpSpPr>
           <a:xfrm>
             <a:off x="433080" y="5032800"/>
-            <a:ext cx="2007360" cy="384840"/>
+            <a:ext cx="2007000" cy="384480"/>
             <a:chOff x="433080" y="5032800"/>
-            <a:chExt cx="2007360" cy="384840"/>
+            <a:chExt cx="2007000" cy="384480"/>
           </a:xfrm>
         </p:grpSpPr>
         <p:sp>
           <p:nvSpPr>
-            <p:cNvPr id="191" name="Rectangle 90"/>
+            <p:cNvPr id="195" name="Rectangle 90"/>
             <p:cNvSpPr/>
             <p:nvPr/>
           </p:nvSpPr>
           <p:spPr>
             <a:xfrm>
               <a:off x="613080" y="5072760"/>
-              <a:ext cx="1827360" cy="344880"/>
+              <a:ext cx="1827000" cy="344520"/>
             </a:xfrm>
             <a:prstGeom prst="rect">
               <a:avLst/>
@@ -9247,28 +9237,28 @@
         </p:sp>
         <p:grpSp>
           <p:nvGrpSpPr>
-            <p:cNvPr id="192" name="Group 91"/>
+            <p:cNvPr id="196" name="Group 91"/>
             <p:cNvGrpSpPr/>
             <p:nvPr/>
           </p:nvGrpSpPr>
           <p:grpSpPr>
             <a:xfrm>
               <a:off x="433080" y="5032800"/>
-              <a:ext cx="1986480" cy="384840"/>
+              <a:ext cx="1986120" cy="384480"/>
               <a:chOff x="433080" y="5032800"/>
-              <a:chExt cx="1986480" cy="384840"/>
+              <a:chExt cx="1986120" cy="384480"/>
             </a:xfrm>
           </p:grpSpPr>
           <p:sp>
             <p:nvSpPr>
-              <p:cNvPr id="193" name="Rectangle 92"/>
+              <p:cNvPr id="197" name="Rectangle 92"/>
               <p:cNvSpPr/>
               <p:nvPr/>
             </p:nvSpPr>
             <p:spPr>
               <a:xfrm>
                 <a:off x="433080" y="5032800"/>
-                <a:ext cx="612000" cy="384840"/>
+                <a:ext cx="611640" cy="384480"/>
               </a:xfrm>
               <a:prstGeom prst="rect">
                 <a:avLst/>
@@ -9338,14 +9328,14 @@
           </p:sp>
           <p:sp>
             <p:nvSpPr>
-              <p:cNvPr id="194" name="Rectangle 93"/>
+              <p:cNvPr id="198" name="Rectangle 93"/>
               <p:cNvSpPr/>
               <p:nvPr/>
             </p:nvSpPr>
             <p:spPr>
               <a:xfrm>
                 <a:off x="1015200" y="5072760"/>
-                <a:ext cx="1404360" cy="344880"/>
+                <a:ext cx="1404000" cy="344520"/>
               </a:xfrm>
               <a:prstGeom prst="rect">
                 <a:avLst/>
@@ -9391,14 +9381,14 @@
       </p:grpSp>
       <p:sp>
         <p:nvSpPr>
-          <p:cNvPr id="195" name="Rectangle 94"/>
+          <p:cNvPr id="199" name="Rectangle 94"/>
           <p:cNvSpPr/>
           <p:nvPr/>
         </p:nvSpPr>
         <p:spPr>
           <a:xfrm>
             <a:off x="3429000" y="1937520"/>
-            <a:ext cx="5028840" cy="2634120"/>
+            <a:ext cx="5028480" cy="2633760"/>
           </a:xfrm>
           <a:prstGeom prst="rect">
             <a:avLst/>
@@ -9420,14 +9410,14 @@
       </p:sp>
       <p:sp>
         <p:nvSpPr>
-          <p:cNvPr id="196" name="Rectangle 95"/>
+          <p:cNvPr id="200" name="Rectangle 95"/>
           <p:cNvSpPr/>
           <p:nvPr/>
         </p:nvSpPr>
         <p:spPr>
           <a:xfrm>
             <a:off x="7772400" y="1865880"/>
-            <a:ext cx="2285640" cy="2669760"/>
+            <a:ext cx="2285280" cy="2669400"/>
           </a:xfrm>
           <a:prstGeom prst="rect">
             <a:avLst/>
@@ -9435,10 +9425,7 @@
           <a:noFill/>
           <a:ln w="12600">
             <a:solidFill>
-              <a:srgbClr val="1f497d">
-                <a:lumMod val="40000"/>
-                <a:lumOff val="60000"/>
-              </a:srgbClr>
+              <a:srgbClr val="8eb4e3"/>
             </a:solidFill>
             <a:round/>
           </a:ln>
@@ -9452,14 +9439,14 @@
       </p:sp>
       <p:sp>
         <p:nvSpPr>
-          <p:cNvPr id="197" name="TextBox 96"/>
+          <p:cNvPr id="201" name="TextBox 96"/>
           <p:cNvSpPr/>
           <p:nvPr/>
         </p:nvSpPr>
         <p:spPr>
           <a:xfrm>
             <a:off x="4114800" y="1552680"/>
-            <a:ext cx="2285640" cy="489600"/>
+            <a:ext cx="2285280" cy="489240"/>
           </a:xfrm>
           <a:prstGeom prst="rect">
             <a:avLst/>
@@ -9503,14 +9490,14 @@
       </p:sp>
       <p:sp>
         <p:nvSpPr>
-          <p:cNvPr id="198" name="TextBox 97"/>
+          <p:cNvPr id="202" name="TextBox 97"/>
           <p:cNvSpPr/>
           <p:nvPr/>
         </p:nvSpPr>
         <p:spPr>
           <a:xfrm>
             <a:off x="8330760" y="1542600"/>
-            <a:ext cx="1275840" cy="489600"/>
+            <a:ext cx="1275480" cy="489240"/>
           </a:xfrm>
           <a:prstGeom prst="rect">
             <a:avLst/>
@@ -9552,6 +9539,72 @@
           </a:p>
         </p:txBody>
       </p:sp>
+      <p:grpSp>
+        <p:nvGrpSpPr>
+          <p:cNvPr id="203" name="Group 89_5"/>
+          <p:cNvGrpSpPr/>
+          <p:nvPr/>
+        </p:nvGrpSpPr>
+        <p:grpSpPr>
+          <a:xfrm>
+            <a:off x="2057400" y="268560"/>
+            <a:ext cx="1143000" cy="645840"/>
+            <a:chOff x="2057400" y="268560"/>
+            <a:chExt cx="1143000" cy="645840"/>
+          </a:xfrm>
+        </p:grpSpPr>
+        <p:sp>
+          <p:nvSpPr>
+            <p:cNvPr id="204" name="Rectangle 93_5"/>
+            <p:cNvSpPr/>
+            <p:nvPr/>
+          </p:nvSpPr>
+          <p:spPr>
+            <a:xfrm>
+              <a:off x="2057400" y="268560"/>
+              <a:ext cx="1143000" cy="645840"/>
+            </a:xfrm>
+            <a:prstGeom prst="rect">
+              <a:avLst/>
+            </a:prstGeom>
+            <a:noFill/>
+            <a:ln w="0">
+              <a:noFill/>
+            </a:ln>
+          </p:spPr>
+          <p:style>
+            <a:lnRef idx="0"/>
+            <a:fillRef idx="0"/>
+            <a:effectRef idx="0"/>
+            <a:fontRef idx="minor"/>
+          </p:style>
+          <p:txBody>
+            <a:bodyPr lIns="90000" rIns="90000" tIns="45000" bIns="45000">
+              <a:noAutofit/>
+            </a:bodyPr>
+            <a:p>
+              <a:pPr>
+                <a:lnSpc>
+                  <a:spcPct val="100000"/>
+                </a:lnSpc>
+              </a:pPr>
+              <a:r>
+                <a:rPr b="0" lang="en-US" sz="3600" spc="-1" strike="noStrike">
+                  <a:solidFill>
+                    <a:srgbClr val="000000"/>
+                  </a:solidFill>
+                  <a:latin typeface="Arial"/>
+                  <a:ea typeface="DejaVu Sans"/>
+                </a:rPr>
+                <a:t>OLD</a:t>
+              </a:r>
+              <a:endParaRPr b="0" lang="en-US" sz="3600" spc="-1" strike="noStrike">
+                <a:latin typeface="Arial"/>
+              </a:endParaRPr>
+            </a:p>
+          </p:txBody>
+        </p:sp>
+      </p:grpSp>
     </p:spTree>
   </p:cSld>
   <mc:AlternateContent>
@@ -9584,14 +9637,14 @@
       </p:grpSpPr>
       <p:sp>
         <p:nvSpPr>
-          <p:cNvPr id="199" name="Rectangle 107"/>
+          <p:cNvPr id="205" name="Rectangle 107"/>
           <p:cNvSpPr/>
           <p:nvPr/>
         </p:nvSpPr>
         <p:spPr>
           <a:xfrm>
             <a:off x="2290320" y="4682880"/>
-            <a:ext cx="305640" cy="344880"/>
+            <a:ext cx="305280" cy="344520"/>
           </a:xfrm>
           <a:prstGeom prst="rect">
             <a:avLst/>
@@ -9635,14 +9688,14 @@
       </p:sp>
       <p:sp>
         <p:nvSpPr>
-          <p:cNvPr id="200" name="Rectangle 108"/>
+          <p:cNvPr id="206" name="Rectangle 108"/>
           <p:cNvSpPr/>
           <p:nvPr/>
         </p:nvSpPr>
         <p:spPr>
           <a:xfrm>
             <a:off x="3132720" y="4682880"/>
-            <a:ext cx="432360" cy="344880"/>
+            <a:ext cx="432000" cy="344520"/>
           </a:xfrm>
           <a:prstGeom prst="rect">
             <a:avLst/>
@@ -9686,14 +9739,14 @@
       </p:sp>
       <p:sp>
         <p:nvSpPr>
-          <p:cNvPr id="201" name="Rectangle 109"/>
+          <p:cNvPr id="207" name="Rectangle 109"/>
           <p:cNvSpPr/>
           <p:nvPr/>
         </p:nvSpPr>
         <p:spPr>
           <a:xfrm>
             <a:off x="4047120" y="4682880"/>
-            <a:ext cx="432360" cy="344880"/>
+            <a:ext cx="432000" cy="344520"/>
           </a:xfrm>
           <a:prstGeom prst="rect">
             <a:avLst/>
@@ -9737,14 +9790,14 @@
       </p:sp>
       <p:sp>
         <p:nvSpPr>
-          <p:cNvPr id="202" name="Rectangle 110"/>
+          <p:cNvPr id="208" name="Rectangle 110"/>
           <p:cNvSpPr/>
           <p:nvPr/>
         </p:nvSpPr>
         <p:spPr>
           <a:xfrm>
             <a:off x="4961520" y="4682880"/>
-            <a:ext cx="432360" cy="344880"/>
+            <a:ext cx="432000" cy="344520"/>
           </a:xfrm>
           <a:prstGeom prst="rect">
             <a:avLst/>
@@ -9788,14 +9841,14 @@
       </p:sp>
       <p:sp>
         <p:nvSpPr>
-          <p:cNvPr id="203" name="Rectangle 111"/>
+          <p:cNvPr id="209" name="Rectangle 111"/>
           <p:cNvSpPr/>
           <p:nvPr/>
         </p:nvSpPr>
         <p:spPr>
           <a:xfrm>
             <a:off x="5875920" y="4682880"/>
-            <a:ext cx="432360" cy="344880"/>
+            <a:ext cx="432000" cy="344520"/>
           </a:xfrm>
           <a:prstGeom prst="rect">
             <a:avLst/>
@@ -9839,14 +9892,14 @@
       </p:sp>
       <p:sp>
         <p:nvSpPr>
-          <p:cNvPr id="204" name="Rectangle 112"/>
+          <p:cNvPr id="210" name="Rectangle 112"/>
           <p:cNvSpPr/>
           <p:nvPr/>
         </p:nvSpPr>
         <p:spPr>
           <a:xfrm>
             <a:off x="6790320" y="4682880"/>
-            <a:ext cx="432360" cy="344880"/>
+            <a:ext cx="432000" cy="344520"/>
           </a:xfrm>
           <a:prstGeom prst="rect">
             <a:avLst/>
@@ -9890,14 +9943,14 @@
       </p:sp>
       <p:sp>
         <p:nvSpPr>
-          <p:cNvPr id="205" name="Rectangle 113"/>
+          <p:cNvPr id="211" name="Rectangle 113"/>
           <p:cNvSpPr/>
           <p:nvPr/>
         </p:nvSpPr>
         <p:spPr>
           <a:xfrm>
             <a:off x="7698600" y="4682880"/>
-            <a:ext cx="455760" cy="344880"/>
+            <a:ext cx="455400" cy="344520"/>
           </a:xfrm>
           <a:prstGeom prst="rect">
             <a:avLst/>
@@ -9941,14 +9994,14 @@
       </p:sp>
       <p:sp>
         <p:nvSpPr>
-          <p:cNvPr id="206" name="Rectangle 114"/>
+          <p:cNvPr id="212" name="Rectangle 114"/>
           <p:cNvSpPr/>
           <p:nvPr/>
         </p:nvSpPr>
         <p:spPr>
           <a:xfrm>
             <a:off x="8619120" y="4682880"/>
-            <a:ext cx="432360" cy="344880"/>
+            <a:ext cx="432000" cy="344520"/>
           </a:xfrm>
           <a:prstGeom prst="rect">
             <a:avLst/>
@@ -9992,14 +10045,14 @@
       </p:sp>
       <p:sp>
         <p:nvSpPr>
-          <p:cNvPr id="207" name="Rectangle 115"/>
+          <p:cNvPr id="213" name="Rectangle 115"/>
           <p:cNvSpPr/>
           <p:nvPr/>
         </p:nvSpPr>
         <p:spPr>
           <a:xfrm>
             <a:off x="9533520" y="4682880"/>
-            <a:ext cx="432360" cy="344880"/>
+            <a:ext cx="432000" cy="344520"/>
           </a:xfrm>
           <a:prstGeom prst="rect">
             <a:avLst/>
@@ -10043,14 +10096,14 @@
       </p:sp>
       <p:sp>
         <p:nvSpPr>
-          <p:cNvPr id="208" name="Rectangle 116"/>
+          <p:cNvPr id="214" name="Rectangle 116"/>
           <p:cNvSpPr/>
           <p:nvPr/>
         </p:nvSpPr>
         <p:spPr>
           <a:xfrm>
             <a:off x="1405800" y="4682880"/>
-            <a:ext cx="305640" cy="344880"/>
+            <a:ext cx="305280" cy="344520"/>
           </a:xfrm>
           <a:prstGeom prst="rect">
             <a:avLst/>
@@ -10094,14 +10147,14 @@
       </p:sp>
       <p:sp>
         <p:nvSpPr>
-          <p:cNvPr id="209" name="Rectangle 117"/>
+          <p:cNvPr id="215" name="Rectangle 117"/>
           <p:cNvSpPr/>
           <p:nvPr/>
         </p:nvSpPr>
         <p:spPr>
           <a:xfrm>
             <a:off x="4233600" y="5140080"/>
-            <a:ext cx="3234960" cy="344880"/>
+            <a:ext cx="3234600" cy="344520"/>
           </a:xfrm>
           <a:prstGeom prst="rect">
             <a:avLst/>
@@ -10145,14 +10198,14 @@
       </p:sp>
       <p:sp>
         <p:nvSpPr>
-          <p:cNvPr id="210" name="Rectangle 120"/>
+          <p:cNvPr id="216" name="Rectangle 120"/>
           <p:cNvSpPr/>
           <p:nvPr/>
         </p:nvSpPr>
         <p:spPr>
           <a:xfrm>
             <a:off x="658800" y="2345400"/>
-            <a:ext cx="1022760" cy="344880"/>
+            <a:ext cx="1022400" cy="344520"/>
           </a:xfrm>
           <a:prstGeom prst="rect">
             <a:avLst/>
@@ -10196,14 +10249,14 @@
       </p:sp>
       <p:sp>
         <p:nvSpPr>
-          <p:cNvPr id="211" name="Rectangle 121"/>
+          <p:cNvPr id="217" name="Rectangle 121"/>
           <p:cNvSpPr/>
           <p:nvPr/>
         </p:nvSpPr>
         <p:spPr>
           <a:xfrm>
             <a:off x="550800" y="3021480"/>
-            <a:ext cx="1022760" cy="344880"/>
+            <a:ext cx="1022400" cy="344520"/>
           </a:xfrm>
           <a:prstGeom prst="rect">
             <a:avLst/>
@@ -10247,14 +10300,14 @@
       </p:sp>
       <p:sp>
         <p:nvSpPr>
-          <p:cNvPr id="212" name="Rectangle 122"/>
+          <p:cNvPr id="218" name="Rectangle 122"/>
           <p:cNvSpPr/>
           <p:nvPr/>
         </p:nvSpPr>
         <p:spPr>
           <a:xfrm>
             <a:off x="766800" y="3704400"/>
-            <a:ext cx="1022760" cy="344880"/>
+            <a:ext cx="1022400" cy="344520"/>
           </a:xfrm>
           <a:prstGeom prst="rect">
             <a:avLst/>
@@ -10298,7 +10351,7 @@
       </p:sp>
       <p:grpSp>
         <p:nvGrpSpPr>
-          <p:cNvPr id="213" name="Group 1"/>
+          <p:cNvPr id="219" name="Group 1"/>
           <p:cNvGrpSpPr/>
           <p:nvPr/>
         </p:nvGrpSpPr>
@@ -10312,7 +10365,7 @@
         </p:grpSpPr>
         <p:sp>
           <p:nvSpPr>
-            <p:cNvPr id="214" name="Straight Connector 98"/>
+            <p:cNvPr id="220" name="Straight Connector 98"/>
             <p:cNvSpPr/>
             <p:nvPr/>
           </p:nvSpPr>
@@ -10339,7 +10392,7 @@
         </p:sp>
         <p:sp>
           <p:nvSpPr>
-            <p:cNvPr id="215" name="Straight Connector 99"/>
+            <p:cNvPr id="221" name="Straight Connector 99"/>
             <p:cNvSpPr/>
             <p:nvPr/>
           </p:nvSpPr>
@@ -10366,7 +10419,7 @@
         </p:sp>
         <p:sp>
           <p:nvSpPr>
-            <p:cNvPr id="216" name="Straight Connector 100"/>
+            <p:cNvPr id="222" name="Straight Connector 100"/>
             <p:cNvSpPr/>
             <p:nvPr/>
           </p:nvSpPr>
@@ -10393,7 +10446,7 @@
         </p:sp>
         <p:sp>
           <p:nvSpPr>
-            <p:cNvPr id="217" name="Straight Connector 101"/>
+            <p:cNvPr id="223" name="Straight Connector 101"/>
             <p:cNvSpPr/>
             <p:nvPr/>
           </p:nvSpPr>
@@ -10420,7 +10473,7 @@
         </p:sp>
         <p:sp>
           <p:nvSpPr>
-            <p:cNvPr id="218" name="Straight Connector 102"/>
+            <p:cNvPr id="224" name="Straight Connector 102"/>
             <p:cNvSpPr/>
             <p:nvPr/>
           </p:nvSpPr>
@@ -10447,7 +10500,7 @@
         </p:sp>
         <p:sp>
           <p:nvSpPr>
-            <p:cNvPr id="219" name="Straight Connector 103"/>
+            <p:cNvPr id="225" name="Straight Connector 103"/>
             <p:cNvSpPr/>
             <p:nvPr/>
           </p:nvSpPr>
@@ -10474,7 +10527,7 @@
         </p:sp>
         <p:sp>
           <p:nvSpPr>
-            <p:cNvPr id="220" name="Straight Connector 104"/>
+            <p:cNvPr id="226" name="Straight Connector 104"/>
             <p:cNvSpPr/>
             <p:nvPr/>
           </p:nvSpPr>
@@ -10501,7 +10554,7 @@
         </p:sp>
         <p:sp>
           <p:nvSpPr>
-            <p:cNvPr id="221" name="Straight Connector 105"/>
+            <p:cNvPr id="227" name="Straight Connector 105"/>
             <p:cNvSpPr/>
             <p:nvPr/>
           </p:nvSpPr>
@@ -10528,7 +10581,7 @@
         </p:sp>
         <p:sp>
           <p:nvSpPr>
-            <p:cNvPr id="222" name="Straight Connector 106"/>
+            <p:cNvPr id="228" name="Straight Connector 106"/>
             <p:cNvSpPr/>
             <p:nvPr/>
           </p:nvSpPr>
@@ -10555,7 +10608,7 @@
         </p:sp>
         <p:sp>
           <p:nvSpPr>
-            <p:cNvPr id="223" name="Straight Connector 123"/>
+            <p:cNvPr id="229" name="Straight Connector 123"/>
             <p:cNvSpPr/>
             <p:nvPr/>
           </p:nvSpPr>
@@ -10583,14 +10636,14 @@
       </p:grpSp>
       <p:sp>
         <p:nvSpPr>
-          <p:cNvPr id="224" name="Rectangle 126"/>
+          <p:cNvPr id="230" name="Rectangle 126"/>
           <p:cNvSpPr/>
           <p:nvPr/>
         </p:nvSpPr>
         <p:spPr>
           <a:xfrm>
             <a:off x="1576800" y="2286360"/>
-            <a:ext cx="6348960" cy="455400"/>
+            <a:ext cx="6348600" cy="455040"/>
           </a:xfrm>
           <a:prstGeom prst="rect">
             <a:avLst/>
@@ -10613,14 +10666,14 @@
       </p:sp>
       <p:sp>
         <p:nvSpPr>
-          <p:cNvPr id="225" name="Rectangle 127"/>
+          <p:cNvPr id="231" name="Rectangle 127"/>
           <p:cNvSpPr/>
           <p:nvPr/>
         </p:nvSpPr>
         <p:spPr>
           <a:xfrm>
             <a:off x="1576800" y="2971800"/>
-            <a:ext cx="6348960" cy="455400"/>
+            <a:ext cx="6348600" cy="455040"/>
           </a:xfrm>
           <a:prstGeom prst="rect">
             <a:avLst/>
@@ -10643,14 +10696,14 @@
       </p:sp>
       <p:sp>
         <p:nvSpPr>
-          <p:cNvPr id="226" name="Rectangle 128"/>
+          <p:cNvPr id="232" name="Rectangle 128"/>
           <p:cNvSpPr/>
           <p:nvPr/>
         </p:nvSpPr>
         <p:spPr>
           <a:xfrm>
             <a:off x="1576800" y="3657600"/>
-            <a:ext cx="8177760" cy="455400"/>
+            <a:ext cx="8177400" cy="455040"/>
           </a:xfrm>
           <a:prstGeom prst="rect">
             <a:avLst/>
@@ -10673,14 +10726,14 @@
       </p:sp>
       <p:sp>
         <p:nvSpPr>
-          <p:cNvPr id="227" name="Rectangle 129"/>
+          <p:cNvPr id="233" name="Rectangle 129"/>
           <p:cNvSpPr/>
           <p:nvPr/>
         </p:nvSpPr>
         <p:spPr>
           <a:xfrm>
             <a:off x="9516600" y="3692160"/>
-            <a:ext cx="471960" cy="384840"/>
+            <a:ext cx="471600" cy="384480"/>
           </a:xfrm>
           <a:prstGeom prst="rect">
             <a:avLst/>
@@ -10750,14 +10803,14 @@
       </p:sp>
       <p:sp>
         <p:nvSpPr>
-          <p:cNvPr id="228" name="Rectangle 130"/>
+          <p:cNvPr id="234" name="Rectangle 130"/>
           <p:cNvSpPr/>
           <p:nvPr/>
         </p:nvSpPr>
         <p:spPr>
           <a:xfrm>
             <a:off x="7684200" y="3007800"/>
-            <a:ext cx="471960" cy="384840"/>
+            <a:ext cx="471600" cy="384480"/>
           </a:xfrm>
           <a:prstGeom prst="rect">
             <a:avLst/>
@@ -10827,14 +10880,14 @@
       </p:sp>
       <p:sp>
         <p:nvSpPr>
-          <p:cNvPr id="229" name="Rectangle 131"/>
+          <p:cNvPr id="235" name="Rectangle 131"/>
           <p:cNvSpPr/>
           <p:nvPr/>
         </p:nvSpPr>
         <p:spPr>
           <a:xfrm>
             <a:off x="7684200" y="2322360"/>
-            <a:ext cx="471960" cy="384840"/>
+            <a:ext cx="471600" cy="384480"/>
           </a:xfrm>
           <a:prstGeom prst="rect">
             <a:avLst/>
@@ -10904,14 +10957,14 @@
       </p:sp>
       <p:sp>
         <p:nvSpPr>
-          <p:cNvPr id="230" name="Rectangle 134"/>
+          <p:cNvPr id="236" name="Rectangle 134"/>
           <p:cNvSpPr/>
           <p:nvPr/>
         </p:nvSpPr>
         <p:spPr>
           <a:xfrm>
             <a:off x="7819200" y="3692160"/>
-            <a:ext cx="462600" cy="384840"/>
+            <a:ext cx="462240" cy="384480"/>
           </a:xfrm>
           <a:prstGeom prst="rect">
             <a:avLst/>
@@ -10981,14 +11034,14 @@
       </p:sp>
       <p:sp>
         <p:nvSpPr>
-          <p:cNvPr id="231" name="Rectangle 136"/>
+          <p:cNvPr id="237" name="Rectangle 136"/>
           <p:cNvSpPr/>
           <p:nvPr/>
         </p:nvSpPr>
         <p:spPr>
           <a:xfrm>
             <a:off x="3463200" y="3685320"/>
-            <a:ext cx="471960" cy="384840"/>
+            <a:ext cx="471600" cy="384480"/>
           </a:xfrm>
           <a:prstGeom prst="rect">
             <a:avLst/>
@@ -11058,14 +11111,14 @@
       </p:sp>
       <p:sp>
         <p:nvSpPr>
-          <p:cNvPr id="232" name="Rectangle 137"/>
+          <p:cNvPr id="238" name="Rectangle 137"/>
           <p:cNvSpPr/>
           <p:nvPr/>
         </p:nvSpPr>
         <p:spPr>
           <a:xfrm>
             <a:off x="6051600" y="3007800"/>
-            <a:ext cx="462600" cy="384840"/>
+            <a:ext cx="462240" cy="384480"/>
           </a:xfrm>
           <a:prstGeom prst="rect">
             <a:avLst/>
@@ -11135,14 +11188,14 @@
       </p:sp>
       <p:sp>
         <p:nvSpPr>
-          <p:cNvPr id="233" name="Rectangle 138"/>
+          <p:cNvPr id="239" name="Rectangle 138"/>
           <p:cNvSpPr/>
           <p:nvPr/>
         </p:nvSpPr>
         <p:spPr>
           <a:xfrm>
             <a:off x="6057360" y="2320920"/>
-            <a:ext cx="462600" cy="384840"/>
+            <a:ext cx="462240" cy="384480"/>
           </a:xfrm>
           <a:prstGeom prst="rect">
             <a:avLst/>
@@ -11212,14 +11265,14 @@
       </p:sp>
       <p:sp>
         <p:nvSpPr>
-          <p:cNvPr id="234" name="Rectangle 141"/>
+          <p:cNvPr id="240" name="Rectangle 141"/>
           <p:cNvSpPr/>
           <p:nvPr/>
         </p:nvSpPr>
         <p:spPr>
           <a:xfrm>
             <a:off x="3128400" y="2320920"/>
-            <a:ext cx="471960" cy="384840"/>
+            <a:ext cx="471600" cy="384480"/>
           </a:xfrm>
           <a:prstGeom prst="rect">
             <a:avLst/>
@@ -11289,14 +11342,14 @@
       </p:sp>
       <p:sp>
         <p:nvSpPr>
-          <p:cNvPr id="235" name="Rectangle 142"/>
+          <p:cNvPr id="241" name="Rectangle 142"/>
           <p:cNvSpPr/>
           <p:nvPr/>
         </p:nvSpPr>
         <p:spPr>
           <a:xfrm>
             <a:off x="3112200" y="3007800"/>
-            <a:ext cx="471960" cy="384840"/>
+            <a:ext cx="471600" cy="384480"/>
           </a:xfrm>
           <a:prstGeom prst="rect">
             <a:avLst/>
@@ -11366,14 +11419,14 @@
       </p:sp>
       <p:sp>
         <p:nvSpPr>
-          <p:cNvPr id="236" name="Rectangle 143"/>
+          <p:cNvPr id="242" name="Rectangle 143"/>
           <p:cNvSpPr/>
           <p:nvPr/>
         </p:nvSpPr>
         <p:spPr>
           <a:xfrm rot="16180800">
             <a:off x="-362880" y="3013560"/>
-            <a:ext cx="1404360" cy="372240"/>
+            <a:ext cx="1404000" cy="371880"/>
           </a:xfrm>
           <a:prstGeom prst="rect">
             <a:avLst/>
@@ -11417,28 +11470,28 @@
       </p:sp>
       <p:grpSp>
         <p:nvGrpSpPr>
-          <p:cNvPr id="237" name="Group 144"/>
+          <p:cNvPr id="243" name="Group 144"/>
           <p:cNvGrpSpPr/>
           <p:nvPr/>
         </p:nvGrpSpPr>
         <p:grpSpPr>
           <a:xfrm>
             <a:off x="394560" y="5011920"/>
-            <a:ext cx="2022480" cy="384840"/>
+            <a:ext cx="2022120" cy="384480"/>
             <a:chOff x="394560" y="5011920"/>
-            <a:chExt cx="2022480" cy="384840"/>
+            <a:chExt cx="2022120" cy="384480"/>
           </a:xfrm>
         </p:grpSpPr>
         <p:sp>
           <p:nvSpPr>
-            <p:cNvPr id="238" name="Rectangle 145"/>
+            <p:cNvPr id="244" name="Rectangle 145"/>
             <p:cNvSpPr/>
             <p:nvPr/>
           </p:nvSpPr>
           <p:spPr>
             <a:xfrm>
               <a:off x="502560" y="5051880"/>
-              <a:ext cx="1827360" cy="344880"/>
+              <a:ext cx="1827000" cy="344520"/>
             </a:xfrm>
             <a:prstGeom prst="rect">
               <a:avLst/>
@@ -11459,28 +11512,28 @@
         </p:sp>
         <p:grpSp>
           <p:nvGrpSpPr>
-            <p:cNvPr id="239" name="Group 146"/>
+            <p:cNvPr id="245" name="Group 146"/>
             <p:cNvGrpSpPr/>
             <p:nvPr/>
           </p:nvGrpSpPr>
           <p:grpSpPr>
             <a:xfrm>
               <a:off x="394560" y="5011920"/>
-              <a:ext cx="2022480" cy="384840"/>
+              <a:ext cx="2022120" cy="384480"/>
               <a:chOff x="394560" y="5011920"/>
-              <a:chExt cx="2022480" cy="384840"/>
+              <a:chExt cx="2022120" cy="384480"/>
             </a:xfrm>
           </p:grpSpPr>
           <p:sp>
             <p:nvSpPr>
-              <p:cNvPr id="240" name="Rectangle 147"/>
+              <p:cNvPr id="246" name="Rectangle 147"/>
               <p:cNvSpPr/>
               <p:nvPr/>
             </p:nvSpPr>
             <p:spPr>
               <a:xfrm>
                 <a:off x="394560" y="5011920"/>
-                <a:ext cx="648720" cy="384840"/>
+                <a:ext cx="648360" cy="384480"/>
               </a:xfrm>
               <a:prstGeom prst="rect">
                 <a:avLst/>
@@ -11560,14 +11613,14 @@
           </p:sp>
           <p:sp>
             <p:nvSpPr>
-              <p:cNvPr id="241" name="Rectangle 148"/>
+              <p:cNvPr id="247" name="Rectangle 148"/>
               <p:cNvSpPr/>
               <p:nvPr/>
             </p:nvSpPr>
             <p:spPr>
               <a:xfrm>
                 <a:off x="1012680" y="5051880"/>
-                <a:ext cx="1404360" cy="344880"/>
+                <a:ext cx="1404000" cy="344520"/>
               </a:xfrm>
               <a:prstGeom prst="rect">
                 <a:avLst/>
@@ -11611,6 +11664,72 @@
           </p:sp>
         </p:grpSp>
       </p:grpSp>
+      <p:grpSp>
+        <p:nvGrpSpPr>
+          <p:cNvPr id="248" name="Group 89_6"/>
+          <p:cNvGrpSpPr/>
+          <p:nvPr/>
+        </p:nvGrpSpPr>
+        <p:grpSpPr>
+          <a:xfrm>
+            <a:off x="2057400" y="268560"/>
+            <a:ext cx="1143000" cy="645840"/>
+            <a:chOff x="2057400" y="268560"/>
+            <a:chExt cx="1143000" cy="645840"/>
+          </a:xfrm>
+        </p:grpSpPr>
+        <p:sp>
+          <p:nvSpPr>
+            <p:cNvPr id="249" name="Rectangle 93_6"/>
+            <p:cNvSpPr/>
+            <p:nvPr/>
+          </p:nvSpPr>
+          <p:spPr>
+            <a:xfrm>
+              <a:off x="2057400" y="268560"/>
+              <a:ext cx="1143000" cy="645840"/>
+            </a:xfrm>
+            <a:prstGeom prst="rect">
+              <a:avLst/>
+            </a:prstGeom>
+            <a:noFill/>
+            <a:ln w="0">
+              <a:noFill/>
+            </a:ln>
+          </p:spPr>
+          <p:style>
+            <a:lnRef idx="0"/>
+            <a:fillRef idx="0"/>
+            <a:effectRef idx="0"/>
+            <a:fontRef idx="minor"/>
+          </p:style>
+          <p:txBody>
+            <a:bodyPr lIns="90000" rIns="90000" tIns="45000" bIns="45000">
+              <a:noAutofit/>
+            </a:bodyPr>
+            <a:p>
+              <a:pPr>
+                <a:lnSpc>
+                  <a:spcPct val="100000"/>
+                </a:lnSpc>
+              </a:pPr>
+              <a:r>
+                <a:rPr b="0" lang="en-US" sz="3600" spc="-1" strike="noStrike">
+                  <a:solidFill>
+                    <a:srgbClr val="000000"/>
+                  </a:solidFill>
+                  <a:latin typeface="Arial"/>
+                  <a:ea typeface="DejaVu Sans"/>
+                </a:rPr>
+                <a:t>OLD</a:t>
+              </a:r>
+              <a:endParaRPr b="0" lang="en-US" sz="3600" spc="-1" strike="noStrike">
+                <a:latin typeface="Arial"/>
+              </a:endParaRPr>
+            </a:p>
+          </p:txBody>
+        </p:sp>
+      </p:grpSp>
     </p:spTree>
   </p:cSld>
   <mc:AlternateContent>
@@ -11643,7 +11762,7 @@
       </p:grpSpPr>
       <p:sp>
         <p:nvSpPr>
-          <p:cNvPr id="242" name="Straight Connector 37_0"/>
+          <p:cNvPr id="250" name="Straight Connector 37_0"/>
           <p:cNvSpPr/>
           <p:nvPr/>
         </p:nvSpPr>
@@ -11670,7 +11789,7 @@
       </p:sp>
       <p:sp>
         <p:nvSpPr>
-          <p:cNvPr id="243" name="Straight Connector 38_1"/>
+          <p:cNvPr id="251" name="Straight Connector 38_1"/>
           <p:cNvSpPr/>
           <p:nvPr/>
         </p:nvSpPr>
@@ -11697,7 +11816,7 @@
       </p:sp>
       <p:sp>
         <p:nvSpPr>
-          <p:cNvPr id="244" name="Straight Connector 39_1"/>
+          <p:cNvPr id="252" name="Straight Connector 39_1"/>
           <p:cNvSpPr/>
           <p:nvPr/>
         </p:nvSpPr>
@@ -11724,7 +11843,7 @@
       </p:sp>
       <p:sp>
         <p:nvSpPr>
-          <p:cNvPr id="245" name="Straight Connector 40_1"/>
+          <p:cNvPr id="253" name="Straight Connector 40_1"/>
           <p:cNvSpPr/>
           <p:nvPr/>
         </p:nvSpPr>
@@ -11751,7 +11870,7 @@
       </p:sp>
       <p:sp>
         <p:nvSpPr>
-          <p:cNvPr id="246" name="Straight Connector 41_1"/>
+          <p:cNvPr id="254" name="Straight Connector 41_1"/>
           <p:cNvSpPr/>
           <p:nvPr/>
         </p:nvSpPr>
@@ -11778,7 +11897,7 @@
       </p:sp>
       <p:sp>
         <p:nvSpPr>
-          <p:cNvPr id="247" name="Straight Connector 42_1"/>
+          <p:cNvPr id="255" name="Straight Connector 42_1"/>
           <p:cNvSpPr/>
           <p:nvPr/>
         </p:nvSpPr>
@@ -11805,7 +11924,7 @@
       </p:sp>
       <p:sp>
         <p:nvSpPr>
-          <p:cNvPr id="248" name="Straight Connector 43_1"/>
+          <p:cNvPr id="256" name="Straight Connector 43_1"/>
           <p:cNvSpPr/>
           <p:nvPr/>
         </p:nvSpPr>
@@ -11832,7 +11951,7 @@
       </p:sp>
       <p:sp>
         <p:nvSpPr>
-          <p:cNvPr id="249" name="Straight Connector 44_1"/>
+          <p:cNvPr id="257" name="Straight Connector 44_1"/>
           <p:cNvSpPr/>
           <p:nvPr/>
         </p:nvSpPr>
@@ -11859,7 +11978,7 @@
       </p:sp>
       <p:sp>
         <p:nvSpPr>
-          <p:cNvPr id="250" name="Straight Connector 45_1"/>
+          <p:cNvPr id="258" name="Straight Connector 45_1"/>
           <p:cNvSpPr/>
           <p:nvPr/>
         </p:nvSpPr>
@@ -11886,14 +12005,14 @@
       </p:sp>
       <p:sp>
         <p:nvSpPr>
-          <p:cNvPr id="251" name="Rectangle 46_1"/>
+          <p:cNvPr id="259" name="Rectangle 46_1"/>
           <p:cNvSpPr/>
           <p:nvPr/>
         </p:nvSpPr>
         <p:spPr>
           <a:xfrm>
             <a:off x="2290320" y="4682880"/>
-            <a:ext cx="482760" cy="344880"/>
+            <a:ext cx="482400" cy="344520"/>
           </a:xfrm>
           <a:prstGeom prst="rect">
             <a:avLst/>
@@ -11947,14 +12066,14 @@
       </p:sp>
       <p:sp>
         <p:nvSpPr>
-          <p:cNvPr id="252" name="Rectangle 47_1"/>
+          <p:cNvPr id="260" name="Rectangle 47_1"/>
           <p:cNvSpPr/>
           <p:nvPr/>
         </p:nvSpPr>
         <p:spPr>
           <a:xfrm>
             <a:off x="3132720" y="4682880"/>
-            <a:ext cx="482760" cy="344880"/>
+            <a:ext cx="482400" cy="344520"/>
           </a:xfrm>
           <a:prstGeom prst="rect">
             <a:avLst/>
@@ -12008,14 +12127,14 @@
       </p:sp>
       <p:sp>
         <p:nvSpPr>
-          <p:cNvPr id="253" name="Rectangle 48_1"/>
+          <p:cNvPr id="261" name="Rectangle 48_1"/>
           <p:cNvSpPr/>
           <p:nvPr/>
         </p:nvSpPr>
         <p:spPr>
           <a:xfrm>
             <a:off x="4047120" y="4682880"/>
-            <a:ext cx="482760" cy="344880"/>
+            <a:ext cx="482400" cy="344520"/>
           </a:xfrm>
           <a:prstGeom prst="rect">
             <a:avLst/>
@@ -12069,14 +12188,14 @@
       </p:sp>
       <p:sp>
         <p:nvSpPr>
-          <p:cNvPr id="254" name="Rectangle 49_1"/>
+          <p:cNvPr id="262" name="Rectangle 49_1"/>
           <p:cNvSpPr/>
           <p:nvPr/>
         </p:nvSpPr>
         <p:spPr>
           <a:xfrm>
             <a:off x="4961520" y="4682880"/>
-            <a:ext cx="482760" cy="344880"/>
+            <a:ext cx="482400" cy="344520"/>
           </a:xfrm>
           <a:prstGeom prst="rect">
             <a:avLst/>
@@ -12130,14 +12249,14 @@
       </p:sp>
       <p:sp>
         <p:nvSpPr>
-          <p:cNvPr id="255" name="Rectangle 50_1"/>
+          <p:cNvPr id="263" name="Rectangle 50_1"/>
           <p:cNvSpPr/>
           <p:nvPr/>
         </p:nvSpPr>
         <p:spPr>
           <a:xfrm>
             <a:off x="5715000" y="4682880"/>
-            <a:ext cx="685080" cy="344880"/>
+            <a:ext cx="684720" cy="344520"/>
           </a:xfrm>
           <a:prstGeom prst="rect">
             <a:avLst/>
@@ -12181,14 +12300,14 @@
       </p:sp>
       <p:sp>
         <p:nvSpPr>
-          <p:cNvPr id="256" name="Rectangle 51_1"/>
+          <p:cNvPr id="264" name="Rectangle 51_1"/>
           <p:cNvSpPr/>
           <p:nvPr/>
         </p:nvSpPr>
         <p:spPr>
           <a:xfrm>
             <a:off x="6790320" y="4682880"/>
-            <a:ext cx="482760" cy="344880"/>
+            <a:ext cx="482400" cy="344520"/>
           </a:xfrm>
           <a:prstGeom prst="rect">
             <a:avLst/>
@@ -12242,14 +12361,14 @@
       </p:sp>
       <p:sp>
         <p:nvSpPr>
-          <p:cNvPr id="257" name="Rectangle 52_1"/>
+          <p:cNvPr id="265" name="Rectangle 52_1"/>
           <p:cNvSpPr/>
           <p:nvPr/>
         </p:nvSpPr>
         <p:spPr>
           <a:xfrm>
             <a:off x="7698600" y="4682880"/>
-            <a:ext cx="529560" cy="344880"/>
+            <a:ext cx="529200" cy="344520"/>
           </a:xfrm>
           <a:prstGeom prst="rect">
             <a:avLst/>
@@ -12303,14 +12422,14 @@
       </p:sp>
       <p:sp>
         <p:nvSpPr>
-          <p:cNvPr id="258" name="Rectangle 53_1"/>
+          <p:cNvPr id="266" name="Rectangle 53_1"/>
           <p:cNvSpPr/>
           <p:nvPr/>
         </p:nvSpPr>
         <p:spPr>
           <a:xfrm>
             <a:off x="8619120" y="4682880"/>
-            <a:ext cx="482760" cy="344880"/>
+            <a:ext cx="482400" cy="344520"/>
           </a:xfrm>
           <a:prstGeom prst="rect">
             <a:avLst/>
@@ -12364,14 +12483,14 @@
       </p:sp>
       <p:sp>
         <p:nvSpPr>
-          <p:cNvPr id="259" name="Rectangle 54_1"/>
+          <p:cNvPr id="267" name="Rectangle 54_1"/>
           <p:cNvSpPr/>
           <p:nvPr/>
         </p:nvSpPr>
         <p:spPr>
           <a:xfrm>
             <a:off x="9533520" y="4682880"/>
-            <a:ext cx="482760" cy="344880"/>
+            <a:ext cx="482400" cy="344520"/>
           </a:xfrm>
           <a:prstGeom prst="rect">
             <a:avLst/>
@@ -12425,14 +12544,14 @@
       </p:sp>
       <p:sp>
         <p:nvSpPr>
-          <p:cNvPr id="260" name="Rectangle 55_1"/>
+          <p:cNvPr id="268" name="Rectangle 55_1"/>
           <p:cNvSpPr/>
           <p:nvPr/>
         </p:nvSpPr>
         <p:spPr>
           <a:xfrm>
             <a:off x="1405800" y="4682880"/>
-            <a:ext cx="685080" cy="344880"/>
+            <a:ext cx="684720" cy="344520"/>
           </a:xfrm>
           <a:prstGeom prst="rect">
             <a:avLst/>
@@ -12476,14 +12595,14 @@
       </p:sp>
       <p:sp>
         <p:nvSpPr>
-          <p:cNvPr id="261" name="Rectangle 56_1"/>
+          <p:cNvPr id="269" name="Rectangle 56_1"/>
           <p:cNvSpPr/>
           <p:nvPr/>
         </p:nvSpPr>
         <p:spPr>
           <a:xfrm>
             <a:off x="4919400" y="5140080"/>
-            <a:ext cx="794160" cy="344880"/>
+            <a:ext cx="793800" cy="344520"/>
           </a:xfrm>
           <a:prstGeom prst="rect">
             <a:avLst/>
@@ -12527,14 +12646,14 @@
       </p:sp>
       <p:sp>
         <p:nvSpPr>
-          <p:cNvPr id="262" name="Rectangle 57_1"/>
+          <p:cNvPr id="270" name="Rectangle 57_1"/>
           <p:cNvSpPr/>
           <p:nvPr/>
         </p:nvSpPr>
         <p:spPr>
           <a:xfrm>
             <a:off x="457200" y="950400"/>
-            <a:ext cx="1224360" cy="344880"/>
+            <a:ext cx="1224000" cy="344520"/>
           </a:xfrm>
           <a:prstGeom prst="rect">
             <a:avLst/>
@@ -12578,14 +12697,14 @@
       </p:sp>
       <p:sp>
         <p:nvSpPr>
-          <p:cNvPr id="263" name="Rectangle 58_1"/>
+          <p:cNvPr id="271" name="Rectangle 58_1"/>
           <p:cNvSpPr/>
           <p:nvPr/>
         </p:nvSpPr>
         <p:spPr>
           <a:xfrm>
             <a:off x="408600" y="1636200"/>
-            <a:ext cx="1380960" cy="344880"/>
+            <a:ext cx="1380600" cy="344520"/>
           </a:xfrm>
           <a:prstGeom prst="rect">
             <a:avLst/>
@@ -12629,14 +12748,14 @@
       </p:sp>
       <p:sp>
         <p:nvSpPr>
-          <p:cNvPr id="264" name="Rectangle 59_1"/>
+          <p:cNvPr id="272" name="Rectangle 59_1"/>
           <p:cNvSpPr/>
           <p:nvPr/>
         </p:nvSpPr>
         <p:spPr>
           <a:xfrm>
             <a:off x="465120" y="2345400"/>
-            <a:ext cx="1180440" cy="344880"/>
+            <a:ext cx="1180080" cy="344520"/>
           </a:xfrm>
           <a:prstGeom prst="rect">
             <a:avLst/>
@@ -12680,14 +12799,14 @@
       </p:sp>
       <p:sp>
         <p:nvSpPr>
-          <p:cNvPr id="265" name="Rectangle 60_1"/>
+          <p:cNvPr id="273" name="Rectangle 60_1"/>
           <p:cNvSpPr/>
           <p:nvPr/>
         </p:nvSpPr>
         <p:spPr>
           <a:xfrm>
             <a:off x="408600" y="3021480"/>
-            <a:ext cx="1344960" cy="344880"/>
+            <a:ext cx="1344600" cy="344520"/>
           </a:xfrm>
           <a:prstGeom prst="rect">
             <a:avLst/>
@@ -12731,14 +12850,14 @@
       </p:sp>
       <p:sp>
         <p:nvSpPr>
-          <p:cNvPr id="266" name="Rectangle 61_1"/>
+          <p:cNvPr id="274" name="Rectangle 61_1"/>
           <p:cNvSpPr/>
           <p:nvPr/>
         </p:nvSpPr>
         <p:spPr>
           <a:xfrm>
             <a:off x="541800" y="3704400"/>
-            <a:ext cx="1103760" cy="344880"/>
+            <a:ext cx="1103400" cy="344520"/>
           </a:xfrm>
           <a:prstGeom prst="rect">
             <a:avLst/>
@@ -12782,7 +12901,7 @@
       </p:sp>
       <p:sp>
         <p:nvSpPr>
-          <p:cNvPr id="267" name="Straight Connector 62_1"/>
+          <p:cNvPr id="275" name="Straight Connector 62_1"/>
           <p:cNvSpPr/>
           <p:nvPr/>
         </p:nvSpPr>
@@ -12809,14 +12928,14 @@
       </p:sp>
       <p:sp>
         <p:nvSpPr>
-          <p:cNvPr id="268" name="Rectangle 63_1"/>
+          <p:cNvPr id="276" name="Rectangle 63_1"/>
           <p:cNvSpPr/>
           <p:nvPr/>
         </p:nvSpPr>
         <p:spPr>
           <a:xfrm>
             <a:off x="1576800" y="3657600"/>
-            <a:ext cx="8177760" cy="455400"/>
+            <a:ext cx="8177400" cy="455040"/>
           </a:xfrm>
           <a:prstGeom prst="rect">
             <a:avLst/>
@@ -12839,14 +12958,14 @@
       </p:sp>
       <p:sp>
         <p:nvSpPr>
-          <p:cNvPr id="269" name="Rectangle 64_1"/>
+          <p:cNvPr id="277" name="Rectangle 64_1"/>
           <p:cNvSpPr/>
           <p:nvPr/>
         </p:nvSpPr>
         <p:spPr>
           <a:xfrm>
             <a:off x="9516600" y="3692160"/>
-            <a:ext cx="471960" cy="384840"/>
+            <a:ext cx="471600" cy="384480"/>
           </a:xfrm>
           <a:prstGeom prst="rect">
             <a:avLst/>
@@ -12916,14 +13035,14 @@
       </p:sp>
       <p:sp>
         <p:nvSpPr>
-          <p:cNvPr id="270" name="Rectangle 65_1"/>
+          <p:cNvPr id="278" name="Rectangle 65_1"/>
           <p:cNvSpPr/>
           <p:nvPr/>
         </p:nvSpPr>
         <p:spPr>
           <a:xfrm>
             <a:off x="7855200" y="3692160"/>
-            <a:ext cx="462600" cy="384840"/>
+            <a:ext cx="462240" cy="384480"/>
           </a:xfrm>
           <a:prstGeom prst="rect">
             <a:avLst/>
@@ -12993,14 +13112,14 @@
       </p:sp>
       <p:sp>
         <p:nvSpPr>
-          <p:cNvPr id="271" name="Rectangle 67_1"/>
+          <p:cNvPr id="279" name="Rectangle 67_1"/>
           <p:cNvSpPr/>
           <p:nvPr/>
         </p:nvSpPr>
         <p:spPr>
           <a:xfrm>
             <a:off x="3571200" y="3685320"/>
-            <a:ext cx="471960" cy="384840"/>
+            <a:ext cx="471600" cy="384480"/>
           </a:xfrm>
           <a:prstGeom prst="rect">
             <a:avLst/>
@@ -13070,28 +13189,28 @@
       </p:sp>
       <p:grpSp>
         <p:nvGrpSpPr>
-          <p:cNvPr id="272" name="Group 68_1"/>
+          <p:cNvPr id="280" name="Group 68_1"/>
           <p:cNvGrpSpPr/>
           <p:nvPr/>
         </p:nvGrpSpPr>
         <p:grpSpPr>
           <a:xfrm>
             <a:off x="1575000" y="914400"/>
-            <a:ext cx="8397360" cy="2512800"/>
+            <a:ext cx="8397000" cy="2512440"/>
             <a:chOff x="1575000" y="914400"/>
-            <a:chExt cx="8397360" cy="2512800"/>
+            <a:chExt cx="8397000" cy="2512440"/>
           </a:xfrm>
         </p:grpSpPr>
         <p:sp>
           <p:nvSpPr>
-            <p:cNvPr id="273" name="Rectangle 69_1"/>
+            <p:cNvPr id="281" name="Rectangle 69_1"/>
             <p:cNvSpPr/>
             <p:nvPr/>
           </p:nvSpPr>
           <p:spPr>
             <a:xfrm>
               <a:off x="6098400" y="914400"/>
-              <a:ext cx="3643560" cy="455400"/>
+              <a:ext cx="3643200" cy="455040"/>
             </a:xfrm>
             <a:prstGeom prst="rect">
               <a:avLst/>
@@ -13114,14 +13233,14 @@
         </p:sp>
         <p:sp>
           <p:nvSpPr>
-            <p:cNvPr id="274" name="Rectangle 70_1"/>
+            <p:cNvPr id="282" name="Rectangle 70_1"/>
             <p:cNvSpPr/>
             <p:nvPr/>
           </p:nvSpPr>
           <p:spPr>
             <a:xfrm>
               <a:off x="6098760" y="1599840"/>
-              <a:ext cx="3643200" cy="455400"/>
+              <a:ext cx="3642840" cy="455040"/>
             </a:xfrm>
             <a:prstGeom prst="rect">
               <a:avLst/>
@@ -13144,14 +13263,14 @@
         </p:sp>
         <p:sp>
           <p:nvSpPr>
-            <p:cNvPr id="275" name="Rectangle 71_1"/>
+            <p:cNvPr id="283" name="Rectangle 71_1"/>
             <p:cNvSpPr/>
             <p:nvPr/>
           </p:nvSpPr>
           <p:spPr>
             <a:xfrm>
               <a:off x="9500400" y="1634760"/>
-              <a:ext cx="471960" cy="384840"/>
+              <a:ext cx="471600" cy="384480"/>
             </a:xfrm>
             <a:prstGeom prst="rect">
               <a:avLst/>
@@ -13221,14 +13340,14 @@
         </p:sp>
         <p:sp>
           <p:nvSpPr>
-            <p:cNvPr id="276" name="Rectangle 72_1"/>
+            <p:cNvPr id="284" name="Rectangle 72_1"/>
             <p:cNvSpPr/>
             <p:nvPr/>
           </p:nvSpPr>
           <p:spPr>
             <a:xfrm>
               <a:off x="9500400" y="948960"/>
-              <a:ext cx="471960" cy="384840"/>
+              <a:ext cx="471600" cy="384480"/>
             </a:xfrm>
             <a:prstGeom prst="rect">
               <a:avLst/>
@@ -13298,14 +13417,14 @@
         </p:sp>
         <p:sp>
           <p:nvSpPr>
-            <p:cNvPr id="277" name="Rectangle 73_1"/>
+            <p:cNvPr id="285" name="Rectangle 73_1"/>
             <p:cNvSpPr/>
             <p:nvPr/>
           </p:nvSpPr>
           <p:spPr>
             <a:xfrm>
               <a:off x="7867800" y="948960"/>
-              <a:ext cx="462600" cy="384840"/>
+              <a:ext cx="462240" cy="384480"/>
             </a:xfrm>
             <a:prstGeom prst="rect">
               <a:avLst/>
@@ -13375,14 +13494,14 @@
         </p:sp>
         <p:sp>
           <p:nvSpPr>
-            <p:cNvPr id="278" name="Rectangle 74_1"/>
+            <p:cNvPr id="286" name="Rectangle 74_1"/>
             <p:cNvSpPr/>
             <p:nvPr/>
           </p:nvSpPr>
           <p:spPr>
             <a:xfrm>
               <a:off x="7860960" y="1635840"/>
-              <a:ext cx="462600" cy="384840"/>
+              <a:ext cx="462240" cy="384480"/>
             </a:xfrm>
             <a:prstGeom prst="rect">
               <a:avLst/>
@@ -13452,14 +13571,14 @@
         </p:sp>
         <p:sp>
           <p:nvSpPr>
-            <p:cNvPr id="279" name="Rectangle 75_1"/>
+            <p:cNvPr id="287" name="Rectangle 75_1"/>
             <p:cNvSpPr/>
             <p:nvPr/>
           </p:nvSpPr>
           <p:spPr>
             <a:xfrm>
               <a:off x="1576800" y="914400"/>
-              <a:ext cx="4521960" cy="455400"/>
+              <a:ext cx="4521600" cy="455040"/>
             </a:xfrm>
             <a:prstGeom prst="rect">
               <a:avLst/>
@@ -13482,14 +13601,14 @@
         </p:sp>
         <p:sp>
           <p:nvSpPr>
-            <p:cNvPr id="280" name="Rectangle 76_1"/>
+            <p:cNvPr id="288" name="Rectangle 76_1"/>
             <p:cNvSpPr/>
             <p:nvPr/>
           </p:nvSpPr>
           <p:spPr>
             <a:xfrm>
               <a:off x="1576800" y="2286360"/>
-              <a:ext cx="2309400" cy="455400"/>
+              <a:ext cx="2309040" cy="455040"/>
             </a:xfrm>
             <a:prstGeom prst="rect">
               <a:avLst/>
@@ -13512,14 +13631,14 @@
         </p:sp>
         <p:sp>
           <p:nvSpPr>
-            <p:cNvPr id="281" name="Rectangle 77_1"/>
+            <p:cNvPr id="289" name="Rectangle 77_1"/>
             <p:cNvSpPr/>
             <p:nvPr/>
           </p:nvSpPr>
           <p:spPr>
             <a:xfrm>
               <a:off x="1576800" y="1600560"/>
-              <a:ext cx="4521960" cy="455400"/>
+              <a:ext cx="4521600" cy="455040"/>
             </a:xfrm>
             <a:prstGeom prst="rect">
               <a:avLst/>
@@ -13542,14 +13661,14 @@
         </p:sp>
         <p:sp>
           <p:nvSpPr>
-            <p:cNvPr id="282" name="Rectangle 78_1"/>
+            <p:cNvPr id="290" name="Rectangle 78_1"/>
             <p:cNvSpPr/>
             <p:nvPr/>
           </p:nvSpPr>
           <p:spPr>
             <a:xfrm>
               <a:off x="1575000" y="2971800"/>
-              <a:ext cx="2311200" cy="455400"/>
+              <a:ext cx="2310840" cy="455040"/>
             </a:xfrm>
             <a:prstGeom prst="rect">
               <a:avLst/>
@@ -13573,28 +13692,28 @@
       </p:grpSp>
       <p:grpSp>
         <p:nvGrpSpPr>
-          <p:cNvPr id="283" name="Group 79_1"/>
+          <p:cNvPr id="291" name="Group 79_1"/>
           <p:cNvGrpSpPr/>
           <p:nvPr/>
         </p:nvGrpSpPr>
         <p:grpSpPr>
           <a:xfrm>
             <a:off x="3886200" y="2286360"/>
-            <a:ext cx="6105960" cy="1140840"/>
+            <a:ext cx="6105600" cy="1140480"/>
             <a:chOff x="3886200" y="2286360"/>
-            <a:chExt cx="6105960" cy="1140840"/>
+            <a:chExt cx="6105600" cy="1140480"/>
           </a:xfrm>
         </p:grpSpPr>
         <p:sp>
           <p:nvSpPr>
-            <p:cNvPr id="284" name="Rectangle 80_1"/>
+            <p:cNvPr id="292" name="Rectangle 80_1"/>
             <p:cNvSpPr/>
             <p:nvPr/>
           </p:nvSpPr>
           <p:spPr>
             <a:xfrm>
               <a:off x="3886200" y="2286360"/>
-              <a:ext cx="5875560" cy="455400"/>
+              <a:ext cx="5875200" cy="455040"/>
             </a:xfrm>
             <a:prstGeom prst="rect">
               <a:avLst/>
@@ -13617,14 +13736,14 @@
         </p:sp>
         <p:sp>
           <p:nvSpPr>
-            <p:cNvPr id="285" name="Rectangle 81_1"/>
+            <p:cNvPr id="293" name="Rectangle 81_1"/>
             <p:cNvSpPr/>
             <p:nvPr/>
           </p:nvSpPr>
           <p:spPr>
             <a:xfrm>
               <a:off x="3886200" y="2971800"/>
-              <a:ext cx="5875560" cy="455400"/>
+              <a:ext cx="5875200" cy="455040"/>
             </a:xfrm>
             <a:prstGeom prst="rect">
               <a:avLst/>
@@ -13647,14 +13766,14 @@
         </p:sp>
         <p:sp>
           <p:nvSpPr>
-            <p:cNvPr id="286" name="Rectangle 82_1"/>
+            <p:cNvPr id="294" name="Rectangle 82_1"/>
             <p:cNvSpPr/>
             <p:nvPr/>
           </p:nvSpPr>
           <p:spPr>
             <a:xfrm>
               <a:off x="9520200" y="3007800"/>
-              <a:ext cx="471960" cy="384840"/>
+              <a:ext cx="471600" cy="384480"/>
             </a:xfrm>
             <a:prstGeom prst="rect">
               <a:avLst/>
@@ -13724,14 +13843,14 @@
         </p:sp>
         <p:sp>
           <p:nvSpPr>
-            <p:cNvPr id="287" name="Rectangle 83_1"/>
+            <p:cNvPr id="295" name="Rectangle 83_1"/>
             <p:cNvSpPr/>
             <p:nvPr/>
           </p:nvSpPr>
           <p:spPr>
             <a:xfrm>
               <a:off x="9520200" y="2322360"/>
-              <a:ext cx="471960" cy="384840"/>
+              <a:ext cx="471600" cy="384480"/>
             </a:xfrm>
             <a:prstGeom prst="rect">
               <a:avLst/>
@@ -13801,14 +13920,14 @@
         </p:sp>
         <p:sp>
           <p:nvSpPr>
-            <p:cNvPr id="288" name="Rectangle 84_1"/>
+            <p:cNvPr id="296" name="Rectangle 84_1"/>
             <p:cNvSpPr/>
             <p:nvPr/>
           </p:nvSpPr>
           <p:spPr>
             <a:xfrm>
               <a:off x="7851600" y="3007800"/>
-              <a:ext cx="462600" cy="384840"/>
+              <a:ext cx="462240" cy="384480"/>
             </a:xfrm>
             <a:prstGeom prst="rect">
               <a:avLst/>
@@ -13878,14 +13997,14 @@
         </p:sp>
         <p:sp>
           <p:nvSpPr>
-            <p:cNvPr id="289" name="Rectangle 85_1"/>
+            <p:cNvPr id="297" name="Rectangle 85_1"/>
             <p:cNvSpPr/>
             <p:nvPr/>
           </p:nvSpPr>
           <p:spPr>
             <a:xfrm>
               <a:off x="7857360" y="2320920"/>
-              <a:ext cx="462600" cy="384840"/>
+              <a:ext cx="462240" cy="384480"/>
             </a:xfrm>
             <a:prstGeom prst="rect">
               <a:avLst/>
@@ -13955,14 +14074,14 @@
         </p:sp>
         <p:sp>
           <p:nvSpPr>
-            <p:cNvPr id="290" name="Rectangle 86_1"/>
+            <p:cNvPr id="298" name="Rectangle 86_1"/>
             <p:cNvSpPr/>
             <p:nvPr/>
           </p:nvSpPr>
           <p:spPr>
             <a:xfrm>
               <a:off x="4964400" y="2320920"/>
-              <a:ext cx="471960" cy="384840"/>
+              <a:ext cx="471600" cy="384480"/>
             </a:xfrm>
             <a:prstGeom prst="rect">
               <a:avLst/>
@@ -14032,14 +14151,14 @@
         </p:sp>
         <p:sp>
           <p:nvSpPr>
-            <p:cNvPr id="291" name="Rectangle 87_1"/>
+            <p:cNvPr id="299" name="Rectangle 87_1"/>
             <p:cNvSpPr/>
             <p:nvPr/>
           </p:nvSpPr>
           <p:spPr>
             <a:xfrm>
               <a:off x="4948200" y="3007800"/>
-              <a:ext cx="471960" cy="384840"/>
+              <a:ext cx="471600" cy="384480"/>
             </a:xfrm>
             <a:prstGeom prst="rect">
               <a:avLst/>
@@ -14110,14 +14229,14 @@
       </p:grpSp>
       <p:sp>
         <p:nvSpPr>
-          <p:cNvPr id="292" name="Rectangle 88_1"/>
+          <p:cNvPr id="300" name="Rectangle 88_1"/>
           <p:cNvSpPr/>
           <p:nvPr/>
         </p:nvSpPr>
         <p:spPr>
           <a:xfrm rot="16180800">
             <a:off x="-392040" y="2382840"/>
-            <a:ext cx="1404360" cy="372240"/>
+            <a:ext cx="1404000" cy="371880"/>
           </a:xfrm>
           <a:prstGeom prst="rect">
             <a:avLst/>
@@ -14161,28 +14280,28 @@
       </p:sp>
       <p:grpSp>
         <p:nvGrpSpPr>
-          <p:cNvPr id="293" name="Group 89_1"/>
+          <p:cNvPr id="301" name="Group 89_1"/>
           <p:cNvGrpSpPr/>
           <p:nvPr/>
         </p:nvGrpSpPr>
         <p:grpSpPr>
           <a:xfrm>
             <a:off x="7592400" y="228600"/>
-            <a:ext cx="2007360" cy="384840"/>
+            <a:ext cx="2007000" cy="384480"/>
             <a:chOff x="7592400" y="228600"/>
-            <a:chExt cx="2007360" cy="384840"/>
+            <a:chExt cx="2007000" cy="384480"/>
           </a:xfrm>
         </p:grpSpPr>
         <p:sp>
           <p:nvSpPr>
-            <p:cNvPr id="294" name="Rectangle 90_1"/>
+            <p:cNvPr id="302" name="Rectangle 90_1"/>
             <p:cNvSpPr/>
             <p:nvPr/>
           </p:nvSpPr>
           <p:spPr>
             <a:xfrm>
               <a:off x="7772400" y="268560"/>
-              <a:ext cx="1827360" cy="344880"/>
+              <a:ext cx="1827000" cy="344520"/>
             </a:xfrm>
             <a:prstGeom prst="rect">
               <a:avLst/>
@@ -14203,28 +14322,28 @@
         </p:sp>
         <p:grpSp>
           <p:nvGrpSpPr>
-            <p:cNvPr id="295" name="Group 91_1"/>
+            <p:cNvPr id="303" name="Group 91_1"/>
             <p:cNvGrpSpPr/>
             <p:nvPr/>
           </p:nvGrpSpPr>
           <p:grpSpPr>
             <a:xfrm>
               <a:off x="7592400" y="228600"/>
-              <a:ext cx="1986480" cy="384840"/>
+              <a:ext cx="1986120" cy="384480"/>
               <a:chOff x="7592400" y="228600"/>
-              <a:chExt cx="1986480" cy="384840"/>
+              <a:chExt cx="1986120" cy="384480"/>
             </a:xfrm>
           </p:grpSpPr>
           <p:sp>
             <p:nvSpPr>
-              <p:cNvPr id="296" name="Rectangle 92_1"/>
+              <p:cNvPr id="304" name="Rectangle 92_1"/>
               <p:cNvSpPr/>
               <p:nvPr/>
             </p:nvSpPr>
             <p:spPr>
               <a:xfrm>
                 <a:off x="7592400" y="228600"/>
-                <a:ext cx="612000" cy="384840"/>
+                <a:ext cx="611640" cy="384480"/>
               </a:xfrm>
               <a:prstGeom prst="rect">
                 <a:avLst/>
@@ -14294,14 +14413,14 @@
           </p:sp>
           <p:sp>
             <p:nvSpPr>
-              <p:cNvPr id="297" name="Rectangle 93_1"/>
+              <p:cNvPr id="305" name="Rectangle 93_1"/>
               <p:cNvSpPr/>
               <p:nvPr/>
             </p:nvSpPr>
             <p:spPr>
               <a:xfrm>
                 <a:off x="8174520" y="268560"/>
-                <a:ext cx="1404360" cy="344880"/>
+                <a:ext cx="1404000" cy="344520"/>
               </a:xfrm>
               <a:prstGeom prst="rect">
                 <a:avLst/>
@@ -14347,14 +14466,14 @@
       </p:grpSp>
       <p:sp>
         <p:nvSpPr>
-          <p:cNvPr id="298" name="TextBox 96_1"/>
+          <p:cNvPr id="306" name="TextBox 96_1"/>
           <p:cNvSpPr/>
           <p:nvPr/>
         </p:nvSpPr>
         <p:spPr>
           <a:xfrm>
             <a:off x="4114800" y="623880"/>
-            <a:ext cx="2285640" cy="489600"/>
+            <a:ext cx="2285280" cy="489240"/>
           </a:xfrm>
           <a:prstGeom prst="rect">
             <a:avLst/>
@@ -14398,14 +14517,14 @@
       </p:sp>
       <p:sp>
         <p:nvSpPr>
-          <p:cNvPr id="299" name="TextBox 97_1"/>
+          <p:cNvPr id="307" name="TextBox 97_1"/>
           <p:cNvSpPr/>
           <p:nvPr/>
         </p:nvSpPr>
         <p:spPr>
           <a:xfrm>
             <a:off x="8330760" y="613800"/>
-            <a:ext cx="1275840" cy="489600"/>
+            <a:ext cx="1275480" cy="489240"/>
           </a:xfrm>
           <a:prstGeom prst="rect">
             <a:avLst/>
@@ -14449,28 +14568,28 @@
       </p:sp>
       <p:grpSp>
         <p:nvGrpSpPr>
-          <p:cNvPr id="300" name="Group 89_0"/>
+          <p:cNvPr id="308" name="Group 89_0"/>
           <p:cNvGrpSpPr/>
           <p:nvPr/>
         </p:nvGrpSpPr>
         <p:grpSpPr>
           <a:xfrm>
             <a:off x="2057400" y="268560"/>
-            <a:ext cx="4343400" cy="344880"/>
+            <a:ext cx="4343040" cy="344520"/>
             <a:chOff x="2057400" y="268560"/>
-            <a:chExt cx="4343400" cy="344880"/>
+            <a:chExt cx="4343040" cy="344520"/>
           </a:xfrm>
         </p:grpSpPr>
         <p:sp>
           <p:nvSpPr>
-            <p:cNvPr id="301" name="Rectangle 93_0"/>
+            <p:cNvPr id="309" name="Rectangle 93_0"/>
             <p:cNvSpPr/>
             <p:nvPr/>
           </p:nvSpPr>
           <p:spPr>
             <a:xfrm>
               <a:off x="2057400" y="268560"/>
-              <a:ext cx="4343400" cy="344880"/>
+              <a:ext cx="4343040" cy="344520"/>
             </a:xfrm>
             <a:prstGeom prst="rect">
               <a:avLst/>
@@ -14545,7 +14664,7 @@
       </p:grpSpPr>
       <p:sp>
         <p:nvSpPr>
-          <p:cNvPr id="302" name="Straight Connector 98_0"/>
+          <p:cNvPr id="310" name="Straight Connector 98_0"/>
           <p:cNvSpPr/>
           <p:nvPr/>
         </p:nvSpPr>
@@ -14572,7 +14691,7 @@
       </p:sp>
       <p:sp>
         <p:nvSpPr>
-          <p:cNvPr id="303" name="Straight Connector 99_1"/>
+          <p:cNvPr id="311" name="Straight Connector 99_1"/>
           <p:cNvSpPr/>
           <p:nvPr/>
         </p:nvSpPr>
@@ -14599,7 +14718,7 @@
       </p:sp>
       <p:sp>
         <p:nvSpPr>
-          <p:cNvPr id="304" name="Straight Connector 100_1"/>
+          <p:cNvPr id="312" name="Straight Connector 100_1"/>
           <p:cNvSpPr/>
           <p:nvPr/>
         </p:nvSpPr>
@@ -14626,7 +14745,7 @@
       </p:sp>
       <p:sp>
         <p:nvSpPr>
-          <p:cNvPr id="305" name="Straight Connector 101_1"/>
+          <p:cNvPr id="313" name="Straight Connector 101_1"/>
           <p:cNvSpPr/>
           <p:nvPr/>
         </p:nvSpPr>
@@ -14653,7 +14772,7 @@
       </p:sp>
       <p:sp>
         <p:nvSpPr>
-          <p:cNvPr id="306" name="Straight Connector 102_1"/>
+          <p:cNvPr id="314" name="Straight Connector 102_1"/>
           <p:cNvSpPr/>
           <p:nvPr/>
         </p:nvSpPr>
@@ -14680,7 +14799,7 @@
       </p:sp>
       <p:sp>
         <p:nvSpPr>
-          <p:cNvPr id="307" name="Straight Connector 103_1"/>
+          <p:cNvPr id="315" name="Straight Connector 103_1"/>
           <p:cNvSpPr/>
           <p:nvPr/>
         </p:nvSpPr>
@@ -14707,7 +14826,7 @@
       </p:sp>
       <p:sp>
         <p:nvSpPr>
-          <p:cNvPr id="308" name="Straight Connector 104_1"/>
+          <p:cNvPr id="316" name="Straight Connector 104_1"/>
           <p:cNvSpPr/>
           <p:nvPr/>
         </p:nvSpPr>
@@ -14734,7 +14853,7 @@
       </p:sp>
       <p:sp>
         <p:nvSpPr>
-          <p:cNvPr id="309" name="Straight Connector 105_1"/>
+          <p:cNvPr id="317" name="Straight Connector 105_1"/>
           <p:cNvSpPr/>
           <p:nvPr/>
         </p:nvSpPr>
@@ -14761,7 +14880,7 @@
       </p:sp>
       <p:sp>
         <p:nvSpPr>
-          <p:cNvPr id="310" name="Straight Connector 106_1"/>
+          <p:cNvPr id="318" name="Straight Connector 106_1"/>
           <p:cNvSpPr/>
           <p:nvPr/>
         </p:nvSpPr>
@@ -14788,14 +14907,14 @@
       </p:sp>
       <p:sp>
         <p:nvSpPr>
-          <p:cNvPr id="311" name="Rectangle 107_1"/>
+          <p:cNvPr id="319" name="Rectangle 107_1"/>
           <p:cNvSpPr/>
           <p:nvPr/>
         </p:nvSpPr>
         <p:spPr>
           <a:xfrm>
             <a:off x="2290320" y="4682880"/>
-            <a:ext cx="305640" cy="344880"/>
+            <a:ext cx="305280" cy="344520"/>
           </a:xfrm>
           <a:prstGeom prst="rect">
             <a:avLst/>
@@ -14839,14 +14958,14 @@
       </p:sp>
       <p:sp>
         <p:nvSpPr>
-          <p:cNvPr id="312" name="Rectangle 108_1"/>
+          <p:cNvPr id="320" name="Rectangle 108_1"/>
           <p:cNvSpPr/>
           <p:nvPr/>
         </p:nvSpPr>
         <p:spPr>
           <a:xfrm>
             <a:off x="3132720" y="4682880"/>
-            <a:ext cx="432360" cy="344880"/>
+            <a:ext cx="432000" cy="344520"/>
           </a:xfrm>
           <a:prstGeom prst="rect">
             <a:avLst/>
@@ -14890,14 +15009,14 @@
       </p:sp>
       <p:sp>
         <p:nvSpPr>
-          <p:cNvPr id="313" name="Rectangle 109_1"/>
+          <p:cNvPr id="321" name="Rectangle 109_1"/>
           <p:cNvSpPr/>
           <p:nvPr/>
         </p:nvSpPr>
         <p:spPr>
           <a:xfrm>
             <a:off x="4047120" y="4682880"/>
-            <a:ext cx="432360" cy="344880"/>
+            <a:ext cx="432000" cy="344520"/>
           </a:xfrm>
           <a:prstGeom prst="rect">
             <a:avLst/>
@@ -14941,14 +15060,14 @@
       </p:sp>
       <p:sp>
         <p:nvSpPr>
-          <p:cNvPr id="314" name="Rectangle 110_1"/>
+          <p:cNvPr id="322" name="Rectangle 110_1"/>
           <p:cNvSpPr/>
           <p:nvPr/>
         </p:nvSpPr>
         <p:spPr>
           <a:xfrm>
             <a:off x="4961520" y="4682880"/>
-            <a:ext cx="432360" cy="344880"/>
+            <a:ext cx="432000" cy="344520"/>
           </a:xfrm>
           <a:prstGeom prst="rect">
             <a:avLst/>
@@ -14992,14 +15111,14 @@
       </p:sp>
       <p:sp>
         <p:nvSpPr>
-          <p:cNvPr id="315" name="Rectangle 111_1"/>
+          <p:cNvPr id="323" name="Rectangle 111_1"/>
           <p:cNvSpPr/>
           <p:nvPr/>
         </p:nvSpPr>
         <p:spPr>
           <a:xfrm>
             <a:off x="5875920" y="4682880"/>
-            <a:ext cx="432360" cy="344880"/>
+            <a:ext cx="432000" cy="344520"/>
           </a:xfrm>
           <a:prstGeom prst="rect">
             <a:avLst/>
@@ -15043,14 +15162,14 @@
       </p:sp>
       <p:sp>
         <p:nvSpPr>
-          <p:cNvPr id="316" name="Rectangle 112_1"/>
+          <p:cNvPr id="324" name="Rectangle 112_1"/>
           <p:cNvSpPr/>
           <p:nvPr/>
         </p:nvSpPr>
         <p:spPr>
           <a:xfrm>
             <a:off x="6790320" y="4682880"/>
-            <a:ext cx="432360" cy="344880"/>
+            <a:ext cx="432000" cy="344520"/>
           </a:xfrm>
           <a:prstGeom prst="rect">
             <a:avLst/>
@@ -15094,14 +15213,14 @@
       </p:sp>
       <p:sp>
         <p:nvSpPr>
-          <p:cNvPr id="317" name="Rectangle 113_1"/>
+          <p:cNvPr id="325" name="Rectangle 113_1"/>
           <p:cNvSpPr/>
           <p:nvPr/>
         </p:nvSpPr>
         <p:spPr>
           <a:xfrm>
             <a:off x="7698600" y="4682880"/>
-            <a:ext cx="455760" cy="344880"/>
+            <a:ext cx="455400" cy="344520"/>
           </a:xfrm>
           <a:prstGeom prst="rect">
             <a:avLst/>
@@ -15145,14 +15264,14 @@
       </p:sp>
       <p:sp>
         <p:nvSpPr>
-          <p:cNvPr id="318" name="Rectangle 114_1"/>
+          <p:cNvPr id="326" name="Rectangle 114_1"/>
           <p:cNvSpPr/>
           <p:nvPr/>
         </p:nvSpPr>
         <p:spPr>
           <a:xfrm>
             <a:off x="8619120" y="4682880"/>
-            <a:ext cx="432360" cy="344880"/>
+            <a:ext cx="432000" cy="344520"/>
           </a:xfrm>
           <a:prstGeom prst="rect">
             <a:avLst/>
@@ -15196,14 +15315,14 @@
       </p:sp>
       <p:sp>
         <p:nvSpPr>
-          <p:cNvPr id="319" name="Rectangle 115_1"/>
+          <p:cNvPr id="327" name="Rectangle 115_1"/>
           <p:cNvSpPr/>
           <p:nvPr/>
         </p:nvSpPr>
         <p:spPr>
           <a:xfrm>
             <a:off x="9533520" y="4682880"/>
-            <a:ext cx="432360" cy="344880"/>
+            <a:ext cx="432000" cy="344520"/>
           </a:xfrm>
           <a:prstGeom prst="rect">
             <a:avLst/>
@@ -15247,14 +15366,14 @@
       </p:sp>
       <p:sp>
         <p:nvSpPr>
-          <p:cNvPr id="320" name="Rectangle 116_1"/>
+          <p:cNvPr id="328" name="Rectangle 116_1"/>
           <p:cNvSpPr/>
           <p:nvPr/>
         </p:nvSpPr>
         <p:spPr>
           <a:xfrm>
             <a:off x="1405800" y="4682880"/>
-            <a:ext cx="305640" cy="344880"/>
+            <a:ext cx="305280" cy="344520"/>
           </a:xfrm>
           <a:prstGeom prst="rect">
             <a:avLst/>
@@ -15298,14 +15417,14 @@
       </p:sp>
       <p:sp>
         <p:nvSpPr>
-          <p:cNvPr id="321" name="Rectangle 117_1"/>
+          <p:cNvPr id="329" name="Rectangle 117_1"/>
           <p:cNvSpPr/>
           <p:nvPr/>
         </p:nvSpPr>
         <p:spPr>
           <a:xfrm>
             <a:off x="4233600" y="5140080"/>
-            <a:ext cx="3234960" cy="344880"/>
+            <a:ext cx="3234600" cy="344520"/>
           </a:xfrm>
           <a:prstGeom prst="rect">
             <a:avLst/>
@@ -15349,14 +15468,14 @@
       </p:sp>
       <p:sp>
         <p:nvSpPr>
-          <p:cNvPr id="322" name="Rectangle 118_1"/>
+          <p:cNvPr id="330" name="Rectangle 118_1"/>
           <p:cNvSpPr/>
           <p:nvPr/>
         </p:nvSpPr>
         <p:spPr>
           <a:xfrm>
             <a:off x="658800" y="950400"/>
-            <a:ext cx="1022760" cy="344880"/>
+            <a:ext cx="1022400" cy="344520"/>
           </a:xfrm>
           <a:prstGeom prst="rect">
             <a:avLst/>
@@ -15400,14 +15519,14 @@
       </p:sp>
       <p:sp>
         <p:nvSpPr>
-          <p:cNvPr id="323" name="Rectangle 119_1"/>
+          <p:cNvPr id="331" name="Rectangle 119_1"/>
           <p:cNvSpPr/>
           <p:nvPr/>
         </p:nvSpPr>
         <p:spPr>
           <a:xfrm>
             <a:off x="586800" y="1636200"/>
-            <a:ext cx="1022760" cy="344880"/>
+            <a:ext cx="1022400" cy="344520"/>
           </a:xfrm>
           <a:prstGeom prst="rect">
             <a:avLst/>
@@ -15451,14 +15570,14 @@
       </p:sp>
       <p:sp>
         <p:nvSpPr>
-          <p:cNvPr id="324" name="Rectangle 120_1"/>
+          <p:cNvPr id="332" name="Rectangle 120_1"/>
           <p:cNvSpPr/>
           <p:nvPr/>
         </p:nvSpPr>
         <p:spPr>
           <a:xfrm>
             <a:off x="658800" y="2345400"/>
-            <a:ext cx="1022760" cy="344880"/>
+            <a:ext cx="1022400" cy="344520"/>
           </a:xfrm>
           <a:prstGeom prst="rect">
             <a:avLst/>
@@ -15502,14 +15621,14 @@
       </p:sp>
       <p:sp>
         <p:nvSpPr>
-          <p:cNvPr id="325" name="Rectangle 121_1"/>
+          <p:cNvPr id="333" name="Rectangle 121_1"/>
           <p:cNvSpPr/>
           <p:nvPr/>
         </p:nvSpPr>
         <p:spPr>
           <a:xfrm>
             <a:off x="550800" y="3021480"/>
-            <a:ext cx="1022760" cy="344880"/>
+            <a:ext cx="1022400" cy="344520"/>
           </a:xfrm>
           <a:prstGeom prst="rect">
             <a:avLst/>
@@ -15553,14 +15672,14 @@
       </p:sp>
       <p:sp>
         <p:nvSpPr>
-          <p:cNvPr id="326" name="Rectangle 122_1"/>
+          <p:cNvPr id="334" name="Rectangle 122_1"/>
           <p:cNvSpPr/>
           <p:nvPr/>
         </p:nvSpPr>
         <p:spPr>
           <a:xfrm>
             <a:off x="766800" y="3704400"/>
-            <a:ext cx="1022760" cy="344880"/>
+            <a:ext cx="1022400" cy="344520"/>
           </a:xfrm>
           <a:prstGeom prst="rect">
             <a:avLst/>
@@ -15604,7 +15723,7 @@
       </p:sp>
       <p:sp>
         <p:nvSpPr>
-          <p:cNvPr id="327" name="Straight Connector 123_1"/>
+          <p:cNvPr id="335" name="Straight Connector 123_1"/>
           <p:cNvSpPr/>
           <p:nvPr/>
         </p:nvSpPr>
@@ -15631,14 +15750,14 @@
       </p:sp>
       <p:sp>
         <p:nvSpPr>
-          <p:cNvPr id="328" name="Rectangle 124_1"/>
+          <p:cNvPr id="336" name="Rectangle 124_1"/>
           <p:cNvSpPr/>
           <p:nvPr/>
         </p:nvSpPr>
         <p:spPr>
           <a:xfrm>
             <a:off x="1577160" y="914760"/>
-            <a:ext cx="3655800" cy="455400"/>
+            <a:ext cx="3655440" cy="455040"/>
           </a:xfrm>
           <a:prstGeom prst="rect">
             <a:avLst/>
@@ -15661,14 +15780,14 @@
       </p:sp>
       <p:sp>
         <p:nvSpPr>
-          <p:cNvPr id="329" name="Rectangle 125_1"/>
+          <p:cNvPr id="337" name="Rectangle 125_1"/>
           <p:cNvSpPr/>
           <p:nvPr/>
         </p:nvSpPr>
         <p:spPr>
           <a:xfrm>
             <a:off x="1577160" y="1600200"/>
-            <a:ext cx="3655800" cy="455400"/>
+            <a:ext cx="3655440" cy="455040"/>
           </a:xfrm>
           <a:prstGeom prst="rect">
             <a:avLst/>
@@ -15691,14 +15810,14 @@
       </p:sp>
       <p:sp>
         <p:nvSpPr>
-          <p:cNvPr id="330" name="Rectangle 126_1"/>
+          <p:cNvPr id="338" name="Rectangle 126_1"/>
           <p:cNvSpPr/>
           <p:nvPr/>
         </p:nvSpPr>
         <p:spPr>
           <a:xfrm>
             <a:off x="1576800" y="2286360"/>
-            <a:ext cx="5967000" cy="455400"/>
+            <a:ext cx="5966640" cy="455040"/>
           </a:xfrm>
           <a:prstGeom prst="rect">
             <a:avLst/>
@@ -15721,14 +15840,14 @@
       </p:sp>
       <p:sp>
         <p:nvSpPr>
-          <p:cNvPr id="331" name="Rectangle 127_1"/>
+          <p:cNvPr id="339" name="Rectangle 127_1"/>
           <p:cNvSpPr/>
           <p:nvPr/>
         </p:nvSpPr>
         <p:spPr>
           <a:xfrm>
             <a:off x="1576800" y="2971800"/>
-            <a:ext cx="5967000" cy="455400"/>
+            <a:ext cx="5966640" cy="455040"/>
           </a:xfrm>
           <a:prstGeom prst="rect">
             <a:avLst/>
@@ -15751,14 +15870,14 @@
       </p:sp>
       <p:sp>
         <p:nvSpPr>
-          <p:cNvPr id="332" name="Rectangle 128_1"/>
+          <p:cNvPr id="340" name="Rectangle 128_1"/>
           <p:cNvSpPr/>
           <p:nvPr/>
         </p:nvSpPr>
         <p:spPr>
           <a:xfrm>
             <a:off x="1576800" y="3657600"/>
-            <a:ext cx="8177760" cy="455400"/>
+            <a:ext cx="8177400" cy="455040"/>
           </a:xfrm>
           <a:prstGeom prst="rect">
             <a:avLst/>
@@ -15781,14 +15900,14 @@
       </p:sp>
       <p:sp>
         <p:nvSpPr>
-          <p:cNvPr id="333" name="Rectangle 129_1"/>
+          <p:cNvPr id="341" name="Rectangle 129_1"/>
           <p:cNvSpPr/>
           <p:nvPr/>
         </p:nvSpPr>
         <p:spPr>
           <a:xfrm>
             <a:off x="9516600" y="3692160"/>
-            <a:ext cx="471960" cy="384840"/>
+            <a:ext cx="471600" cy="384480"/>
           </a:xfrm>
           <a:prstGeom prst="rect">
             <a:avLst/>
@@ -15858,14 +15977,14 @@
       </p:sp>
       <p:sp>
         <p:nvSpPr>
-          <p:cNvPr id="334" name="Rectangle 130_1"/>
+          <p:cNvPr id="342" name="Rectangle 130_1"/>
           <p:cNvSpPr/>
           <p:nvPr/>
         </p:nvSpPr>
         <p:spPr>
           <a:xfrm>
             <a:off x="7288200" y="3007800"/>
-            <a:ext cx="471960" cy="384840"/>
+            <a:ext cx="471600" cy="384480"/>
           </a:xfrm>
           <a:prstGeom prst="rect">
             <a:avLst/>
@@ -15935,14 +16054,14 @@
       </p:sp>
       <p:sp>
         <p:nvSpPr>
-          <p:cNvPr id="335" name="Rectangle 131_1"/>
+          <p:cNvPr id="343" name="Rectangle 131_1"/>
           <p:cNvSpPr/>
           <p:nvPr/>
         </p:nvSpPr>
         <p:spPr>
           <a:xfrm>
             <a:off x="7288200" y="2322360"/>
-            <a:ext cx="471960" cy="384840"/>
+            <a:ext cx="471600" cy="384480"/>
           </a:xfrm>
           <a:prstGeom prst="rect">
             <a:avLst/>
@@ -16012,14 +16131,14 @@
       </p:sp>
       <p:sp>
         <p:nvSpPr>
-          <p:cNvPr id="336" name="Rectangle 132_1"/>
+          <p:cNvPr id="344" name="Rectangle 132_1"/>
           <p:cNvSpPr/>
           <p:nvPr/>
         </p:nvSpPr>
         <p:spPr>
           <a:xfrm>
             <a:off x="4991400" y="1635120"/>
-            <a:ext cx="471960" cy="384840"/>
+            <a:ext cx="471600" cy="384480"/>
           </a:xfrm>
           <a:prstGeom prst="rect">
             <a:avLst/>
@@ -16089,14 +16208,14 @@
       </p:sp>
       <p:sp>
         <p:nvSpPr>
-          <p:cNvPr id="337" name="Rectangle 133_1"/>
+          <p:cNvPr id="345" name="Rectangle 133_1"/>
           <p:cNvSpPr/>
           <p:nvPr/>
         </p:nvSpPr>
         <p:spPr>
           <a:xfrm>
             <a:off x="4991400" y="949320"/>
-            <a:ext cx="471960" cy="384840"/>
+            <a:ext cx="471600" cy="384480"/>
           </a:xfrm>
           <a:prstGeom prst="rect">
             <a:avLst/>
@@ -16166,14 +16285,14 @@
       </p:sp>
       <p:sp>
         <p:nvSpPr>
-          <p:cNvPr id="338" name="Rectangle 134_1"/>
+          <p:cNvPr id="346" name="Rectangle 134_1"/>
           <p:cNvSpPr/>
           <p:nvPr/>
         </p:nvSpPr>
         <p:spPr>
           <a:xfrm>
             <a:off x="7819200" y="3692160"/>
-            <a:ext cx="462600" cy="384840"/>
+            <a:ext cx="462240" cy="384480"/>
           </a:xfrm>
           <a:prstGeom prst="rect">
             <a:avLst/>
@@ -16243,14 +16362,14 @@
       </p:sp>
       <p:sp>
         <p:nvSpPr>
-          <p:cNvPr id="339" name="Rectangle 136_1"/>
+          <p:cNvPr id="347" name="Rectangle 136_1"/>
           <p:cNvSpPr/>
           <p:nvPr/>
         </p:nvSpPr>
         <p:spPr>
           <a:xfrm>
             <a:off x="3283200" y="3685320"/>
-            <a:ext cx="471960" cy="384840"/>
+            <a:ext cx="471600" cy="384480"/>
           </a:xfrm>
           <a:prstGeom prst="rect">
             <a:avLst/>
@@ -16320,14 +16439,14 @@
       </p:sp>
       <p:sp>
         <p:nvSpPr>
-          <p:cNvPr id="340" name="Rectangle 137_1"/>
+          <p:cNvPr id="348" name="Rectangle 137_1"/>
           <p:cNvSpPr/>
           <p:nvPr/>
         </p:nvSpPr>
         <p:spPr>
           <a:xfrm>
             <a:off x="5763600" y="3007800"/>
-            <a:ext cx="462600" cy="384840"/>
+            <a:ext cx="462240" cy="384480"/>
           </a:xfrm>
           <a:prstGeom prst="rect">
             <a:avLst/>
@@ -16397,14 +16516,14 @@
       </p:sp>
       <p:sp>
         <p:nvSpPr>
-          <p:cNvPr id="341" name="Rectangle 138_1"/>
+          <p:cNvPr id="349" name="Rectangle 138_1"/>
           <p:cNvSpPr/>
           <p:nvPr/>
         </p:nvSpPr>
         <p:spPr>
           <a:xfrm>
             <a:off x="5769360" y="2320920"/>
-            <a:ext cx="462600" cy="384840"/>
+            <a:ext cx="462240" cy="384480"/>
           </a:xfrm>
           <a:prstGeom prst="rect">
             <a:avLst/>
@@ -16474,14 +16593,14 @@
       </p:sp>
       <p:sp>
         <p:nvSpPr>
-          <p:cNvPr id="342" name="Rectangle 139_1"/>
+          <p:cNvPr id="350" name="Rectangle 139_1"/>
           <p:cNvSpPr/>
           <p:nvPr/>
         </p:nvSpPr>
         <p:spPr>
           <a:xfrm>
             <a:off x="3286800" y="949320"/>
-            <a:ext cx="462600" cy="384840"/>
+            <a:ext cx="462240" cy="384480"/>
           </a:xfrm>
           <a:prstGeom prst="rect">
             <a:avLst/>
@@ -16551,14 +16670,14 @@
       </p:sp>
       <p:sp>
         <p:nvSpPr>
-          <p:cNvPr id="343" name="Rectangle 140_1"/>
+          <p:cNvPr id="351" name="Rectangle 140_1"/>
           <p:cNvSpPr/>
           <p:nvPr/>
         </p:nvSpPr>
         <p:spPr>
           <a:xfrm>
             <a:off x="3279960" y="1636200"/>
-            <a:ext cx="462600" cy="384840"/>
+            <a:ext cx="462240" cy="384480"/>
           </a:xfrm>
           <a:prstGeom prst="rect">
             <a:avLst/>
@@ -16628,14 +16747,14 @@
       </p:sp>
       <p:sp>
         <p:nvSpPr>
-          <p:cNvPr id="344" name="Rectangle 141_1"/>
+          <p:cNvPr id="352" name="Rectangle 141_1"/>
           <p:cNvSpPr/>
           <p:nvPr/>
         </p:nvSpPr>
         <p:spPr>
           <a:xfrm>
             <a:off x="2876400" y="2320920"/>
-            <a:ext cx="471960" cy="384840"/>
+            <a:ext cx="471600" cy="384480"/>
           </a:xfrm>
           <a:prstGeom prst="rect">
             <a:avLst/>
@@ -16705,14 +16824,14 @@
       </p:sp>
       <p:sp>
         <p:nvSpPr>
-          <p:cNvPr id="345" name="Rectangle 142_1"/>
+          <p:cNvPr id="353" name="Rectangle 142_1"/>
           <p:cNvSpPr/>
           <p:nvPr/>
         </p:nvSpPr>
         <p:spPr>
           <a:xfrm>
             <a:off x="2860200" y="3007800"/>
-            <a:ext cx="471960" cy="384840"/>
+            <a:ext cx="471600" cy="384480"/>
           </a:xfrm>
           <a:prstGeom prst="rect">
             <a:avLst/>
@@ -16782,14 +16901,14 @@
       </p:sp>
       <p:sp>
         <p:nvSpPr>
-          <p:cNvPr id="346" name="Rectangle 143_1"/>
+          <p:cNvPr id="354" name="Rectangle 143_1"/>
           <p:cNvSpPr/>
           <p:nvPr/>
         </p:nvSpPr>
         <p:spPr>
           <a:xfrm rot="16180800">
             <a:off x="-392040" y="2382840"/>
-            <a:ext cx="1404360" cy="372240"/>
+            <a:ext cx="1404000" cy="371880"/>
           </a:xfrm>
           <a:prstGeom prst="rect">
             <a:avLst/>
@@ -16833,28 +16952,28 @@
       </p:sp>
       <p:grpSp>
         <p:nvGrpSpPr>
-          <p:cNvPr id="347" name="Group 144_1"/>
+          <p:cNvPr id="355" name="Group 144_1"/>
           <p:cNvGrpSpPr/>
           <p:nvPr/>
         </p:nvGrpSpPr>
         <p:grpSpPr>
           <a:xfrm>
             <a:off x="7664400" y="299520"/>
-            <a:ext cx="2022480" cy="384840"/>
+            <a:ext cx="2022120" cy="384480"/>
             <a:chOff x="7664400" y="299520"/>
-            <a:chExt cx="2022480" cy="384840"/>
+            <a:chExt cx="2022120" cy="384480"/>
           </a:xfrm>
         </p:grpSpPr>
         <p:sp>
           <p:nvSpPr>
-            <p:cNvPr id="348" name="Rectangle 145_1"/>
+            <p:cNvPr id="356" name="Rectangle 145_1"/>
             <p:cNvSpPr/>
             <p:nvPr/>
           </p:nvSpPr>
           <p:spPr>
             <a:xfrm>
               <a:off x="7772400" y="339480"/>
-              <a:ext cx="1827360" cy="344880"/>
+              <a:ext cx="1827000" cy="344520"/>
             </a:xfrm>
             <a:prstGeom prst="rect">
               <a:avLst/>
@@ -16875,28 +16994,28 @@
         </p:sp>
         <p:grpSp>
           <p:nvGrpSpPr>
-            <p:cNvPr id="349" name="Group 146_1"/>
+            <p:cNvPr id="357" name="Group 146_1"/>
             <p:cNvGrpSpPr/>
             <p:nvPr/>
           </p:nvGrpSpPr>
           <p:grpSpPr>
             <a:xfrm>
               <a:off x="7664400" y="299520"/>
-              <a:ext cx="2022480" cy="384840"/>
+              <a:ext cx="2022120" cy="384480"/>
               <a:chOff x="7664400" y="299520"/>
-              <a:chExt cx="2022480" cy="384840"/>
+              <a:chExt cx="2022120" cy="384480"/>
             </a:xfrm>
           </p:grpSpPr>
           <p:sp>
             <p:nvSpPr>
-              <p:cNvPr id="350" name="Rectangle 147_1"/>
+              <p:cNvPr id="358" name="Rectangle 147_1"/>
               <p:cNvSpPr/>
               <p:nvPr/>
             </p:nvSpPr>
             <p:spPr>
               <a:xfrm>
                 <a:off x="7664400" y="299520"/>
-                <a:ext cx="648720" cy="384840"/>
+                <a:ext cx="648360" cy="384480"/>
               </a:xfrm>
               <a:prstGeom prst="rect">
                 <a:avLst/>
@@ -16976,14 +17095,14 @@
           </p:sp>
           <p:sp>
             <p:nvSpPr>
-              <p:cNvPr id="351" name="Rectangle 148_1"/>
+              <p:cNvPr id="359" name="Rectangle 148_1"/>
               <p:cNvSpPr/>
               <p:nvPr/>
             </p:nvSpPr>
             <p:spPr>
               <a:xfrm>
                 <a:off x="8282520" y="339480"/>
-                <a:ext cx="1404360" cy="344880"/>
+                <a:ext cx="1404000" cy="344520"/>
               </a:xfrm>
               <a:prstGeom prst="rect">
                 <a:avLst/>
@@ -17029,28 +17148,28 @@
       </p:grpSp>
       <p:grpSp>
         <p:nvGrpSpPr>
-          <p:cNvPr id="352" name="Group 89_2"/>
+          <p:cNvPr id="360" name="Group 89_2"/>
           <p:cNvGrpSpPr/>
           <p:nvPr/>
         </p:nvGrpSpPr>
         <p:grpSpPr>
           <a:xfrm>
             <a:off x="2057400" y="268560"/>
-            <a:ext cx="4343400" cy="344880"/>
+            <a:ext cx="4343040" cy="344520"/>
             <a:chOff x="2057400" y="268560"/>
-            <a:chExt cx="4343400" cy="344880"/>
+            <a:chExt cx="4343040" cy="344520"/>
           </a:xfrm>
         </p:grpSpPr>
         <p:sp>
           <p:nvSpPr>
-            <p:cNvPr id="353" name="Rectangle 93_2"/>
+            <p:cNvPr id="361" name="Rectangle 93_2"/>
             <p:cNvSpPr/>
             <p:nvPr/>
           </p:nvSpPr>
           <p:spPr>
             <a:xfrm>
               <a:off x="2057400" y="268560"/>
-              <a:ext cx="4343400" cy="344880"/>
+              <a:ext cx="4343040" cy="344520"/>
             </a:xfrm>
             <a:prstGeom prst="rect">
               <a:avLst/>

--- a/Experiment_timeline.pptx
+++ b/Experiment_timeline.pptx
@@ -1902,7 +1902,7 @@
         <p:spPr>
           <a:xfrm>
             <a:off x="2290320" y="4682880"/>
-            <a:ext cx="482400" cy="344520"/>
+            <a:ext cx="482040" cy="344160"/>
           </a:xfrm>
           <a:prstGeom prst="rect">
             <a:avLst/>
@@ -1963,7 +1963,7 @@
         <p:spPr>
           <a:xfrm>
             <a:off x="3132720" y="4682880"/>
-            <a:ext cx="482400" cy="344520"/>
+            <a:ext cx="482040" cy="344160"/>
           </a:xfrm>
           <a:prstGeom prst="rect">
             <a:avLst/>
@@ -2024,7 +2024,7 @@
         <p:spPr>
           <a:xfrm>
             <a:off x="4047120" y="4682880"/>
-            <a:ext cx="482400" cy="344520"/>
+            <a:ext cx="482040" cy="344160"/>
           </a:xfrm>
           <a:prstGeom prst="rect">
             <a:avLst/>
@@ -2085,7 +2085,7 @@
         <p:spPr>
           <a:xfrm>
             <a:off x="4961520" y="4682880"/>
-            <a:ext cx="482400" cy="344520"/>
+            <a:ext cx="482040" cy="344160"/>
           </a:xfrm>
           <a:prstGeom prst="rect">
             <a:avLst/>
@@ -2146,7 +2146,7 @@
         <p:spPr>
           <a:xfrm>
             <a:off x="5715000" y="4682880"/>
-            <a:ext cx="684720" cy="344520"/>
+            <a:ext cx="684360" cy="344160"/>
           </a:xfrm>
           <a:prstGeom prst="rect">
             <a:avLst/>
@@ -2197,7 +2197,7 @@
         <p:spPr>
           <a:xfrm>
             <a:off x="6790320" y="4682880"/>
-            <a:ext cx="482400" cy="344520"/>
+            <a:ext cx="482040" cy="344160"/>
           </a:xfrm>
           <a:prstGeom prst="rect">
             <a:avLst/>
@@ -2258,7 +2258,7 @@
         <p:spPr>
           <a:xfrm>
             <a:off x="7698600" y="4682880"/>
-            <a:ext cx="529200" cy="344520"/>
+            <a:ext cx="528840" cy="344160"/>
           </a:xfrm>
           <a:prstGeom prst="rect">
             <a:avLst/>
@@ -2319,7 +2319,7 @@
         <p:spPr>
           <a:xfrm>
             <a:off x="8619120" y="4682880"/>
-            <a:ext cx="482400" cy="344520"/>
+            <a:ext cx="482040" cy="344160"/>
           </a:xfrm>
           <a:prstGeom prst="rect">
             <a:avLst/>
@@ -2380,7 +2380,7 @@
         <p:spPr>
           <a:xfrm>
             <a:off x="9533520" y="4682880"/>
-            <a:ext cx="482400" cy="344520"/>
+            <a:ext cx="482040" cy="344160"/>
           </a:xfrm>
           <a:prstGeom prst="rect">
             <a:avLst/>
@@ -2441,7 +2441,7 @@
         <p:spPr>
           <a:xfrm>
             <a:off x="1405800" y="4682880"/>
-            <a:ext cx="684720" cy="344520"/>
+            <a:ext cx="684360" cy="344160"/>
           </a:xfrm>
           <a:prstGeom prst="rect">
             <a:avLst/>
@@ -2492,7 +2492,7 @@
         <p:spPr>
           <a:xfrm>
             <a:off x="4919400" y="5140080"/>
-            <a:ext cx="793800" cy="344520"/>
+            <a:ext cx="793440" cy="344160"/>
           </a:xfrm>
           <a:prstGeom prst="rect">
             <a:avLst/>
@@ -2543,7 +2543,7 @@
         <p:spPr>
           <a:xfrm>
             <a:off x="457200" y="950400"/>
-            <a:ext cx="1224000" cy="344520"/>
+            <a:ext cx="1223640" cy="344160"/>
           </a:xfrm>
           <a:prstGeom prst="rect">
             <a:avLst/>
@@ -2594,7 +2594,7 @@
         <p:spPr>
           <a:xfrm>
             <a:off x="408600" y="1636200"/>
-            <a:ext cx="1380600" cy="344520"/>
+            <a:ext cx="1380240" cy="344160"/>
           </a:xfrm>
           <a:prstGeom prst="rect">
             <a:avLst/>
@@ -2645,7 +2645,7 @@
         <p:spPr>
           <a:xfrm>
             <a:off x="465120" y="2345400"/>
-            <a:ext cx="1180080" cy="344520"/>
+            <a:ext cx="1179720" cy="344160"/>
           </a:xfrm>
           <a:prstGeom prst="rect">
             <a:avLst/>
@@ -2696,7 +2696,7 @@
         <p:spPr>
           <a:xfrm>
             <a:off x="408600" y="3021480"/>
-            <a:ext cx="1344600" cy="344520"/>
+            <a:ext cx="1344240" cy="344160"/>
           </a:xfrm>
           <a:prstGeom prst="rect">
             <a:avLst/>
@@ -2747,7 +2747,7 @@
         <p:spPr>
           <a:xfrm>
             <a:off x="541800" y="3704400"/>
-            <a:ext cx="1103400" cy="344520"/>
+            <a:ext cx="1103040" cy="344160"/>
           </a:xfrm>
           <a:prstGeom prst="rect">
             <a:avLst/>
@@ -2825,7 +2825,7 @@
         <p:spPr>
           <a:xfrm>
             <a:off x="1576800" y="3657600"/>
-            <a:ext cx="8177400" cy="455040"/>
+            <a:ext cx="8177040" cy="454680"/>
           </a:xfrm>
           <a:prstGeom prst="rect">
             <a:avLst/>
@@ -2855,7 +2855,7 @@
         <p:spPr>
           <a:xfrm>
             <a:off x="9516600" y="3692160"/>
-            <a:ext cx="471600" cy="384480"/>
+            <a:ext cx="471240" cy="384120"/>
           </a:xfrm>
           <a:prstGeom prst="rect">
             <a:avLst/>
@@ -2932,7 +2932,7 @@
         <p:spPr>
           <a:xfrm>
             <a:off x="7855200" y="3692160"/>
-            <a:ext cx="462240" cy="384480"/>
+            <a:ext cx="461880" cy="384120"/>
           </a:xfrm>
           <a:prstGeom prst="rect">
             <a:avLst/>
@@ -3009,7 +3009,7 @@
         <p:spPr>
           <a:xfrm>
             <a:off x="3463200" y="3685320"/>
-            <a:ext cx="471600" cy="384480"/>
+            <a:ext cx="471240" cy="384120"/>
           </a:xfrm>
           <a:prstGeom prst="rect">
             <a:avLst/>
@@ -3086,9 +3086,9 @@
         <p:grpSpPr>
           <a:xfrm>
             <a:off x="1575000" y="914400"/>
-            <a:ext cx="8397000" cy="2512440"/>
+            <a:ext cx="8396640" cy="2512080"/>
             <a:chOff x="1575000" y="914400"/>
-            <a:chExt cx="8397000" cy="2512440"/>
+            <a:chExt cx="8396640" cy="2512080"/>
           </a:xfrm>
         </p:grpSpPr>
         <p:sp>
@@ -3100,7 +3100,7 @@
           <p:spPr>
             <a:xfrm>
               <a:off x="5184000" y="914400"/>
-              <a:ext cx="4557600" cy="455040"/>
+              <a:ext cx="4557240" cy="454680"/>
             </a:xfrm>
             <a:prstGeom prst="rect">
               <a:avLst/>
@@ -3130,7 +3130,7 @@
           <p:spPr>
             <a:xfrm>
               <a:off x="5184000" y="1599840"/>
-              <a:ext cx="4557600" cy="455040"/>
+              <a:ext cx="4557240" cy="454680"/>
             </a:xfrm>
             <a:prstGeom prst="rect">
               <a:avLst/>
@@ -3160,7 +3160,7 @@
           <p:spPr>
             <a:xfrm>
               <a:off x="9500400" y="1634760"/>
-              <a:ext cx="471600" cy="384480"/>
+              <a:ext cx="471240" cy="384120"/>
             </a:xfrm>
             <a:prstGeom prst="rect">
               <a:avLst/>
@@ -3237,7 +3237,7 @@
           <p:spPr>
             <a:xfrm>
               <a:off x="9500400" y="948960"/>
-              <a:ext cx="471600" cy="384480"/>
+              <a:ext cx="471240" cy="384120"/>
             </a:xfrm>
             <a:prstGeom prst="rect">
               <a:avLst/>
@@ -3314,7 +3314,7 @@
           <p:spPr>
             <a:xfrm>
               <a:off x="7867800" y="948960"/>
-              <a:ext cx="462240" cy="384480"/>
+              <a:ext cx="461880" cy="384120"/>
             </a:xfrm>
             <a:prstGeom prst="rect">
               <a:avLst/>
@@ -3391,7 +3391,7 @@
           <p:spPr>
             <a:xfrm>
               <a:off x="7860960" y="1635840"/>
-              <a:ext cx="462240" cy="384480"/>
+              <a:ext cx="461880" cy="384120"/>
             </a:xfrm>
             <a:prstGeom prst="rect">
               <a:avLst/>
@@ -3468,7 +3468,7 @@
           <p:spPr>
             <a:xfrm>
               <a:off x="1576800" y="914400"/>
-              <a:ext cx="3605400" cy="455040"/>
+              <a:ext cx="3605040" cy="454680"/>
             </a:xfrm>
             <a:prstGeom prst="rect">
               <a:avLst/>
@@ -3498,7 +3498,7 @@
           <p:spPr>
             <a:xfrm>
               <a:off x="1576800" y="2286360"/>
-              <a:ext cx="1776600" cy="455040"/>
+              <a:ext cx="1776240" cy="454680"/>
             </a:xfrm>
             <a:prstGeom prst="rect">
               <a:avLst/>
@@ -3528,7 +3528,7 @@
           <p:spPr>
             <a:xfrm>
               <a:off x="1576800" y="1600560"/>
-              <a:ext cx="3605400" cy="455040"/>
+              <a:ext cx="3605040" cy="454680"/>
             </a:xfrm>
             <a:prstGeom prst="rect">
               <a:avLst/>
@@ -3558,7 +3558,7 @@
           <p:spPr>
             <a:xfrm>
               <a:off x="1575000" y="2971800"/>
-              <a:ext cx="1778400" cy="455040"/>
+              <a:ext cx="1778040" cy="454680"/>
             </a:xfrm>
             <a:prstGeom prst="rect">
               <a:avLst/>
@@ -3589,9 +3589,9 @@
         <p:grpSpPr>
           <a:xfrm>
             <a:off x="3355200" y="2286360"/>
-            <a:ext cx="6636600" cy="1140480"/>
+            <a:ext cx="6636240" cy="1140120"/>
             <a:chOff x="3355200" y="2286360"/>
-            <a:chExt cx="6636600" cy="1140480"/>
+            <a:chExt cx="6636240" cy="1140120"/>
           </a:xfrm>
         </p:grpSpPr>
         <p:sp>
@@ -3603,7 +3603,7 @@
           <p:spPr>
             <a:xfrm>
               <a:off x="3355200" y="2286360"/>
-              <a:ext cx="6406200" cy="455040"/>
+              <a:ext cx="6405840" cy="454680"/>
             </a:xfrm>
             <a:prstGeom prst="rect">
               <a:avLst/>
@@ -3633,7 +3633,7 @@
           <p:spPr>
             <a:xfrm>
               <a:off x="3355200" y="2971800"/>
-              <a:ext cx="6406200" cy="455040"/>
+              <a:ext cx="6405840" cy="454680"/>
             </a:xfrm>
             <a:prstGeom prst="rect">
               <a:avLst/>
@@ -3663,7 +3663,7 @@
           <p:spPr>
             <a:xfrm>
               <a:off x="9520200" y="3007800"/>
-              <a:ext cx="471600" cy="384480"/>
+              <a:ext cx="471240" cy="384120"/>
             </a:xfrm>
             <a:prstGeom prst="rect">
               <a:avLst/>
@@ -3740,7 +3740,7 @@
           <p:spPr>
             <a:xfrm>
               <a:off x="9520200" y="2322360"/>
-              <a:ext cx="471600" cy="384480"/>
+              <a:ext cx="471240" cy="384120"/>
             </a:xfrm>
             <a:prstGeom prst="rect">
               <a:avLst/>
@@ -3817,7 +3817,7 @@
           <p:spPr>
             <a:xfrm>
               <a:off x="7851600" y="3007800"/>
-              <a:ext cx="462240" cy="384480"/>
+              <a:ext cx="461880" cy="384120"/>
             </a:xfrm>
             <a:prstGeom prst="rect">
               <a:avLst/>
@@ -3894,7 +3894,7 @@
           <p:spPr>
             <a:xfrm>
               <a:off x="7857360" y="2320920"/>
-              <a:ext cx="462240" cy="384480"/>
+              <a:ext cx="461880" cy="384120"/>
             </a:xfrm>
             <a:prstGeom prst="rect">
               <a:avLst/>
@@ -3971,7 +3971,7 @@
           <p:spPr>
             <a:xfrm>
               <a:off x="4964400" y="2320920"/>
-              <a:ext cx="471600" cy="384480"/>
+              <a:ext cx="471240" cy="384120"/>
             </a:xfrm>
             <a:prstGeom prst="rect">
               <a:avLst/>
@@ -4048,7 +4048,7 @@
           <p:spPr>
             <a:xfrm>
               <a:off x="4948200" y="3007800"/>
-              <a:ext cx="471600" cy="384480"/>
+              <a:ext cx="471240" cy="384120"/>
             </a:xfrm>
             <a:prstGeom prst="rect">
               <a:avLst/>
@@ -4126,7 +4126,7 @@
         <p:spPr>
           <a:xfrm rot="16180800">
             <a:off x="-392040" y="2382840"/>
-            <a:ext cx="1404000" cy="371880"/>
+            <a:ext cx="1403640" cy="371520"/>
           </a:xfrm>
           <a:prstGeom prst="rect">
             <a:avLst/>
@@ -4177,9 +4177,9 @@
         <p:grpSpPr>
           <a:xfrm>
             <a:off x="7592400" y="228600"/>
-            <a:ext cx="2007000" cy="384480"/>
+            <a:ext cx="2006640" cy="384120"/>
             <a:chOff x="7592400" y="228600"/>
-            <a:chExt cx="2007000" cy="384480"/>
+            <a:chExt cx="2006640" cy="384120"/>
           </a:xfrm>
         </p:grpSpPr>
         <p:sp>
@@ -4191,7 +4191,7 @@
           <p:spPr>
             <a:xfrm>
               <a:off x="7772400" y="268560"/>
-              <a:ext cx="1827000" cy="344520"/>
+              <a:ext cx="1826640" cy="344160"/>
             </a:xfrm>
             <a:prstGeom prst="rect">
               <a:avLst/>
@@ -4219,9 +4219,9 @@
           <p:grpSpPr>
             <a:xfrm>
               <a:off x="7592400" y="228600"/>
-              <a:ext cx="1986120" cy="384480"/>
+              <a:ext cx="1985760" cy="384120"/>
               <a:chOff x="7592400" y="228600"/>
-              <a:chExt cx="1986120" cy="384480"/>
+              <a:chExt cx="1985760" cy="384120"/>
             </a:xfrm>
           </p:grpSpPr>
           <p:sp>
@@ -4233,7 +4233,7 @@
             <p:spPr>
               <a:xfrm>
                 <a:off x="7592400" y="228600"/>
-                <a:ext cx="611640" cy="384480"/>
+                <a:ext cx="611280" cy="384120"/>
               </a:xfrm>
               <a:prstGeom prst="rect">
                 <a:avLst/>
@@ -4310,7 +4310,7 @@
             <p:spPr>
               <a:xfrm>
                 <a:off x="8174520" y="268560"/>
-                <a:ext cx="1404000" cy="344520"/>
+                <a:ext cx="1403640" cy="344160"/>
               </a:xfrm>
               <a:prstGeom prst="rect">
                 <a:avLst/>
@@ -4363,7 +4363,7 @@
         <p:spPr>
           <a:xfrm>
             <a:off x="3429000" y="685800"/>
-            <a:ext cx="5028480" cy="3885480"/>
+            <a:ext cx="5028120" cy="3885120"/>
           </a:xfrm>
           <a:prstGeom prst="rect">
             <a:avLst/>
@@ -4392,7 +4392,7 @@
         <p:spPr>
           <a:xfrm>
             <a:off x="7772400" y="649800"/>
-            <a:ext cx="2285280" cy="3885480"/>
+            <a:ext cx="2284920" cy="3885120"/>
           </a:xfrm>
           <a:prstGeom prst="rect">
             <a:avLst/>
@@ -4421,7 +4421,7 @@
         <p:spPr>
           <a:xfrm>
             <a:off x="4114800" y="623880"/>
-            <a:ext cx="2285280" cy="489240"/>
+            <a:ext cx="2284920" cy="488880"/>
           </a:xfrm>
           <a:prstGeom prst="rect">
             <a:avLst/>
@@ -4472,7 +4472,7 @@
         <p:spPr>
           <a:xfrm>
             <a:off x="8330760" y="613800"/>
-            <a:ext cx="1275480" cy="489240"/>
+            <a:ext cx="1275120" cy="488880"/>
           </a:xfrm>
           <a:prstGeom prst="rect">
             <a:avLst/>
@@ -4523,9 +4523,9 @@
         <p:grpSpPr>
           <a:xfrm>
             <a:off x="2057400" y="268560"/>
-            <a:ext cx="1143000" cy="645840"/>
+            <a:ext cx="1142640" cy="645480"/>
             <a:chOff x="2057400" y="268560"/>
-            <a:chExt cx="1143000" cy="645840"/>
+            <a:chExt cx="1142640" cy="645480"/>
           </a:xfrm>
         </p:grpSpPr>
         <p:sp>
@@ -4537,7 +4537,7 @@
           <p:spPr>
             <a:xfrm>
               <a:off x="2057400" y="268560"/>
-              <a:ext cx="1143000" cy="645840"/>
+              <a:ext cx="1142640" cy="645480"/>
             </a:xfrm>
             <a:prstGeom prst="rect">
               <a:avLst/>
@@ -4862,7 +4862,7 @@
         <p:spPr>
           <a:xfrm>
             <a:off x="2290320" y="4682880"/>
-            <a:ext cx="305280" cy="344520"/>
+            <a:ext cx="304920" cy="344160"/>
           </a:xfrm>
           <a:prstGeom prst="rect">
             <a:avLst/>
@@ -4913,7 +4913,7 @@
         <p:spPr>
           <a:xfrm>
             <a:off x="3132720" y="4682880"/>
-            <a:ext cx="432000" cy="344520"/>
+            <a:ext cx="431640" cy="344160"/>
           </a:xfrm>
           <a:prstGeom prst="rect">
             <a:avLst/>
@@ -4964,7 +4964,7 @@
         <p:spPr>
           <a:xfrm>
             <a:off x="4047120" y="4682880"/>
-            <a:ext cx="432000" cy="344520"/>
+            <a:ext cx="431640" cy="344160"/>
           </a:xfrm>
           <a:prstGeom prst="rect">
             <a:avLst/>
@@ -5015,7 +5015,7 @@
         <p:spPr>
           <a:xfrm>
             <a:off x="4961520" y="4682880"/>
-            <a:ext cx="432000" cy="344520"/>
+            <a:ext cx="431640" cy="344160"/>
           </a:xfrm>
           <a:prstGeom prst="rect">
             <a:avLst/>
@@ -5066,7 +5066,7 @@
         <p:spPr>
           <a:xfrm>
             <a:off x="5875920" y="4682880"/>
-            <a:ext cx="432000" cy="344520"/>
+            <a:ext cx="431640" cy="344160"/>
           </a:xfrm>
           <a:prstGeom prst="rect">
             <a:avLst/>
@@ -5117,7 +5117,7 @@
         <p:spPr>
           <a:xfrm>
             <a:off x="6790320" y="4682880"/>
-            <a:ext cx="432000" cy="344520"/>
+            <a:ext cx="431640" cy="344160"/>
           </a:xfrm>
           <a:prstGeom prst="rect">
             <a:avLst/>
@@ -5168,7 +5168,7 @@
         <p:spPr>
           <a:xfrm>
             <a:off x="7698600" y="4682880"/>
-            <a:ext cx="455400" cy="344520"/>
+            <a:ext cx="455040" cy="344160"/>
           </a:xfrm>
           <a:prstGeom prst="rect">
             <a:avLst/>
@@ -5219,7 +5219,7 @@
         <p:spPr>
           <a:xfrm>
             <a:off x="8619120" y="4682880"/>
-            <a:ext cx="432000" cy="344520"/>
+            <a:ext cx="431640" cy="344160"/>
           </a:xfrm>
           <a:prstGeom prst="rect">
             <a:avLst/>
@@ -5270,7 +5270,7 @@
         <p:spPr>
           <a:xfrm>
             <a:off x="9533520" y="4682880"/>
-            <a:ext cx="432000" cy="344520"/>
+            <a:ext cx="431640" cy="344160"/>
           </a:xfrm>
           <a:prstGeom prst="rect">
             <a:avLst/>
@@ -5321,7 +5321,7 @@
         <p:spPr>
           <a:xfrm>
             <a:off x="1405800" y="4682880"/>
-            <a:ext cx="305280" cy="344520"/>
+            <a:ext cx="304920" cy="344160"/>
           </a:xfrm>
           <a:prstGeom prst="rect">
             <a:avLst/>
@@ -5372,7 +5372,7 @@
         <p:spPr>
           <a:xfrm>
             <a:off x="4233600" y="5140080"/>
-            <a:ext cx="3234600" cy="344520"/>
+            <a:ext cx="3234240" cy="344160"/>
           </a:xfrm>
           <a:prstGeom prst="rect">
             <a:avLst/>
@@ -5423,7 +5423,7 @@
         <p:spPr>
           <a:xfrm>
             <a:off x="658800" y="950400"/>
-            <a:ext cx="1022400" cy="344520"/>
+            <a:ext cx="1022040" cy="344160"/>
           </a:xfrm>
           <a:prstGeom prst="rect">
             <a:avLst/>
@@ -5474,7 +5474,7 @@
         <p:spPr>
           <a:xfrm>
             <a:off x="586800" y="1636200"/>
-            <a:ext cx="1022400" cy="344520"/>
+            <a:ext cx="1022040" cy="344160"/>
           </a:xfrm>
           <a:prstGeom prst="rect">
             <a:avLst/>
@@ -5525,7 +5525,7 @@
         <p:spPr>
           <a:xfrm>
             <a:off x="658800" y="2345400"/>
-            <a:ext cx="1022400" cy="344520"/>
+            <a:ext cx="1022040" cy="344160"/>
           </a:xfrm>
           <a:prstGeom prst="rect">
             <a:avLst/>
@@ -5576,7 +5576,7 @@
         <p:spPr>
           <a:xfrm>
             <a:off x="550800" y="3021480"/>
-            <a:ext cx="1022400" cy="344520"/>
+            <a:ext cx="1022040" cy="344160"/>
           </a:xfrm>
           <a:prstGeom prst="rect">
             <a:avLst/>
@@ -5627,7 +5627,7 @@
         <p:spPr>
           <a:xfrm>
             <a:off x="766800" y="3704400"/>
-            <a:ext cx="1022400" cy="344520"/>
+            <a:ext cx="1022040" cy="344160"/>
           </a:xfrm>
           <a:prstGeom prst="rect">
             <a:avLst/>
@@ -5705,7 +5705,7 @@
         <p:spPr>
           <a:xfrm>
             <a:off x="1576800" y="914760"/>
-            <a:ext cx="4519800" cy="455040"/>
+            <a:ext cx="4519440" cy="454680"/>
           </a:xfrm>
           <a:prstGeom prst="rect">
             <a:avLst/>
@@ -5735,7 +5735,7 @@
         <p:spPr>
           <a:xfrm>
             <a:off x="1576800" y="1600200"/>
-            <a:ext cx="4519800" cy="455040"/>
+            <a:ext cx="4519440" cy="454680"/>
           </a:xfrm>
           <a:prstGeom prst="rect">
             <a:avLst/>
@@ -5765,7 +5765,7 @@
         <p:spPr>
           <a:xfrm>
             <a:off x="1576800" y="2286360"/>
-            <a:ext cx="6348600" cy="455040"/>
+            <a:ext cx="6348240" cy="454680"/>
           </a:xfrm>
           <a:prstGeom prst="rect">
             <a:avLst/>
@@ -5795,7 +5795,7 @@
         <p:spPr>
           <a:xfrm>
             <a:off x="1576800" y="2971800"/>
-            <a:ext cx="6348600" cy="455040"/>
+            <a:ext cx="6348240" cy="454680"/>
           </a:xfrm>
           <a:prstGeom prst="rect">
             <a:avLst/>
@@ -5825,7 +5825,7 @@
         <p:spPr>
           <a:xfrm>
             <a:off x="1576800" y="3657600"/>
-            <a:ext cx="8177400" cy="455040"/>
+            <a:ext cx="8177040" cy="454680"/>
           </a:xfrm>
           <a:prstGeom prst="rect">
             <a:avLst/>
@@ -5855,7 +5855,7 @@
         <p:spPr>
           <a:xfrm>
             <a:off x="9516600" y="3692160"/>
-            <a:ext cx="471600" cy="384480"/>
+            <a:ext cx="471240" cy="384120"/>
           </a:xfrm>
           <a:prstGeom prst="rect">
             <a:avLst/>
@@ -5932,7 +5932,7 @@
         <p:spPr>
           <a:xfrm>
             <a:off x="7684200" y="3007800"/>
-            <a:ext cx="471600" cy="384480"/>
+            <a:ext cx="471240" cy="384120"/>
           </a:xfrm>
           <a:prstGeom prst="rect">
             <a:avLst/>
@@ -6009,7 +6009,7 @@
         <p:spPr>
           <a:xfrm>
             <a:off x="7684200" y="2322360"/>
-            <a:ext cx="471600" cy="384480"/>
+            <a:ext cx="471240" cy="384120"/>
           </a:xfrm>
           <a:prstGeom prst="rect">
             <a:avLst/>
@@ -6086,7 +6086,7 @@
         <p:spPr>
           <a:xfrm>
             <a:off x="5855400" y="1635120"/>
-            <a:ext cx="471600" cy="384480"/>
+            <a:ext cx="471240" cy="384120"/>
           </a:xfrm>
           <a:prstGeom prst="rect">
             <a:avLst/>
@@ -6163,7 +6163,7 @@
         <p:spPr>
           <a:xfrm>
             <a:off x="5855400" y="949320"/>
-            <a:ext cx="471600" cy="384480"/>
+            <a:ext cx="471240" cy="384120"/>
           </a:xfrm>
           <a:prstGeom prst="rect">
             <a:avLst/>
@@ -6240,7 +6240,7 @@
         <p:spPr>
           <a:xfrm>
             <a:off x="7819200" y="3692160"/>
-            <a:ext cx="462240" cy="384480"/>
+            <a:ext cx="461880" cy="384120"/>
           </a:xfrm>
           <a:prstGeom prst="rect">
             <a:avLst/>
@@ -6317,7 +6317,7 @@
         <p:spPr>
           <a:xfrm>
             <a:off x="3463200" y="3685320"/>
-            <a:ext cx="471600" cy="384480"/>
+            <a:ext cx="471240" cy="384120"/>
           </a:xfrm>
           <a:prstGeom prst="rect">
             <a:avLst/>
@@ -6394,7 +6394,7 @@
         <p:spPr>
           <a:xfrm>
             <a:off x="6051600" y="3007800"/>
-            <a:ext cx="462240" cy="384480"/>
+            <a:ext cx="461880" cy="384120"/>
           </a:xfrm>
           <a:prstGeom prst="rect">
             <a:avLst/>
@@ -6471,7 +6471,7 @@
         <p:spPr>
           <a:xfrm>
             <a:off x="6057360" y="2320920"/>
-            <a:ext cx="462240" cy="384480"/>
+            <a:ext cx="461880" cy="384120"/>
           </a:xfrm>
           <a:prstGeom prst="rect">
             <a:avLst/>
@@ -6548,7 +6548,7 @@
         <p:spPr>
           <a:xfrm>
             <a:off x="4222800" y="949320"/>
-            <a:ext cx="462240" cy="384480"/>
+            <a:ext cx="461880" cy="384120"/>
           </a:xfrm>
           <a:prstGeom prst="rect">
             <a:avLst/>
@@ -6625,7 +6625,7 @@
         <p:spPr>
           <a:xfrm>
             <a:off x="4215960" y="1636200"/>
-            <a:ext cx="462240" cy="384480"/>
+            <a:ext cx="461880" cy="384120"/>
           </a:xfrm>
           <a:prstGeom prst="rect">
             <a:avLst/>
@@ -6702,7 +6702,7 @@
         <p:spPr>
           <a:xfrm>
             <a:off x="3128400" y="2320920"/>
-            <a:ext cx="471600" cy="384480"/>
+            <a:ext cx="471240" cy="384120"/>
           </a:xfrm>
           <a:prstGeom prst="rect">
             <a:avLst/>
@@ -6779,7 +6779,7 @@
         <p:spPr>
           <a:xfrm>
             <a:off x="3112200" y="3007800"/>
-            <a:ext cx="471600" cy="384480"/>
+            <a:ext cx="471240" cy="384120"/>
           </a:xfrm>
           <a:prstGeom prst="rect">
             <a:avLst/>
@@ -6856,7 +6856,7 @@
         <p:spPr>
           <a:xfrm rot="16180800">
             <a:off x="-392040" y="2382840"/>
-            <a:ext cx="1404000" cy="371880"/>
+            <a:ext cx="1403640" cy="371520"/>
           </a:xfrm>
           <a:prstGeom prst="rect">
             <a:avLst/>
@@ -6907,9 +6907,9 @@
         <p:grpSpPr>
           <a:xfrm>
             <a:off x="7664400" y="299520"/>
-            <a:ext cx="2022120" cy="384480"/>
+            <a:ext cx="2021760" cy="384120"/>
             <a:chOff x="7664400" y="299520"/>
-            <a:chExt cx="2022120" cy="384480"/>
+            <a:chExt cx="2021760" cy="384120"/>
           </a:xfrm>
         </p:grpSpPr>
         <p:sp>
@@ -6921,7 +6921,7 @@
           <p:spPr>
             <a:xfrm>
               <a:off x="7772400" y="339480"/>
-              <a:ext cx="1827000" cy="344520"/>
+              <a:ext cx="1826640" cy="344160"/>
             </a:xfrm>
             <a:prstGeom prst="rect">
               <a:avLst/>
@@ -6949,9 +6949,9 @@
           <p:grpSpPr>
             <a:xfrm>
               <a:off x="7664400" y="299520"/>
-              <a:ext cx="2022120" cy="384480"/>
+              <a:ext cx="2021760" cy="384120"/>
               <a:chOff x="7664400" y="299520"/>
-              <a:chExt cx="2022120" cy="384480"/>
+              <a:chExt cx="2021760" cy="384120"/>
             </a:xfrm>
           </p:grpSpPr>
           <p:sp>
@@ -6963,7 +6963,7 @@
             <p:spPr>
               <a:xfrm>
                 <a:off x="7664400" y="299520"/>
-                <a:ext cx="648360" cy="384480"/>
+                <a:ext cx="648000" cy="384120"/>
               </a:xfrm>
               <a:prstGeom prst="rect">
                 <a:avLst/>
@@ -7050,7 +7050,7 @@
             <p:spPr>
               <a:xfrm>
                 <a:off x="8282520" y="339480"/>
-                <a:ext cx="1404000" cy="344520"/>
+                <a:ext cx="1403640" cy="344160"/>
               </a:xfrm>
               <a:prstGeom prst="rect">
                 <a:avLst/>
@@ -7103,9 +7103,9 @@
         <p:grpSpPr>
           <a:xfrm>
             <a:off x="2057400" y="268560"/>
-            <a:ext cx="1143000" cy="645840"/>
+            <a:ext cx="1142640" cy="645480"/>
             <a:chOff x="2057400" y="268560"/>
-            <a:chExt cx="1143000" cy="645840"/>
+            <a:chExt cx="1142640" cy="645480"/>
           </a:xfrm>
         </p:grpSpPr>
         <p:sp>
@@ -7117,7 +7117,7 @@
           <p:spPr>
             <a:xfrm>
               <a:off x="2057400" y="268560"/>
-              <a:ext cx="1143000" cy="645840"/>
+              <a:ext cx="1142640" cy="645480"/>
             </a:xfrm>
             <a:prstGeom prst="rect">
               <a:avLst/>
@@ -7199,7 +7199,7 @@
         <p:spPr>
           <a:xfrm>
             <a:off x="2290320" y="4682880"/>
-            <a:ext cx="482400" cy="344520"/>
+            <a:ext cx="482040" cy="344160"/>
           </a:xfrm>
           <a:prstGeom prst="rect">
             <a:avLst/>
@@ -7260,7 +7260,7 @@
         <p:spPr>
           <a:xfrm>
             <a:off x="3132720" y="4682880"/>
-            <a:ext cx="482400" cy="344520"/>
+            <a:ext cx="482040" cy="344160"/>
           </a:xfrm>
           <a:prstGeom prst="rect">
             <a:avLst/>
@@ -7321,7 +7321,7 @@
         <p:spPr>
           <a:xfrm>
             <a:off x="4047120" y="4682880"/>
-            <a:ext cx="482400" cy="344520"/>
+            <a:ext cx="482040" cy="344160"/>
           </a:xfrm>
           <a:prstGeom prst="rect">
             <a:avLst/>
@@ -7382,7 +7382,7 @@
         <p:spPr>
           <a:xfrm>
             <a:off x="4961520" y="4682880"/>
-            <a:ext cx="482400" cy="344520"/>
+            <a:ext cx="482040" cy="344160"/>
           </a:xfrm>
           <a:prstGeom prst="rect">
             <a:avLst/>
@@ -7443,7 +7443,7 @@
         <p:spPr>
           <a:xfrm>
             <a:off x="5715000" y="4682880"/>
-            <a:ext cx="684720" cy="344520"/>
+            <a:ext cx="684360" cy="344160"/>
           </a:xfrm>
           <a:prstGeom prst="rect">
             <a:avLst/>
@@ -7494,7 +7494,7 @@
         <p:spPr>
           <a:xfrm>
             <a:off x="6790320" y="4682880"/>
-            <a:ext cx="482400" cy="344520"/>
+            <a:ext cx="482040" cy="344160"/>
           </a:xfrm>
           <a:prstGeom prst="rect">
             <a:avLst/>
@@ -7555,7 +7555,7 @@
         <p:spPr>
           <a:xfrm>
             <a:off x="7698600" y="4682880"/>
-            <a:ext cx="529200" cy="344520"/>
+            <a:ext cx="528840" cy="344160"/>
           </a:xfrm>
           <a:prstGeom prst="rect">
             <a:avLst/>
@@ -7616,7 +7616,7 @@
         <p:spPr>
           <a:xfrm>
             <a:off x="8619120" y="4682880"/>
-            <a:ext cx="482400" cy="344520"/>
+            <a:ext cx="482040" cy="344160"/>
           </a:xfrm>
           <a:prstGeom prst="rect">
             <a:avLst/>
@@ -7677,7 +7677,7 @@
         <p:spPr>
           <a:xfrm>
             <a:off x="9533520" y="4682880"/>
-            <a:ext cx="482400" cy="344520"/>
+            <a:ext cx="482040" cy="344160"/>
           </a:xfrm>
           <a:prstGeom prst="rect">
             <a:avLst/>
@@ -7738,7 +7738,7 @@
         <p:spPr>
           <a:xfrm>
             <a:off x="1405800" y="4682880"/>
-            <a:ext cx="684720" cy="344520"/>
+            <a:ext cx="684360" cy="344160"/>
           </a:xfrm>
           <a:prstGeom prst="rect">
             <a:avLst/>
@@ -7789,7 +7789,7 @@
         <p:spPr>
           <a:xfrm>
             <a:off x="4919400" y="5140080"/>
-            <a:ext cx="793800" cy="344520"/>
+            <a:ext cx="793440" cy="344160"/>
           </a:xfrm>
           <a:prstGeom prst="rect">
             <a:avLst/>
@@ -7840,7 +7840,7 @@
         <p:spPr>
           <a:xfrm>
             <a:off x="465120" y="2345400"/>
-            <a:ext cx="1180080" cy="344520"/>
+            <a:ext cx="1179720" cy="344160"/>
           </a:xfrm>
           <a:prstGeom prst="rect">
             <a:avLst/>
@@ -7891,7 +7891,7 @@
         <p:spPr>
           <a:xfrm>
             <a:off x="408600" y="3021480"/>
-            <a:ext cx="1344600" cy="344520"/>
+            <a:ext cx="1344240" cy="344160"/>
           </a:xfrm>
           <a:prstGeom prst="rect">
             <a:avLst/>
@@ -7942,7 +7942,7 @@
         <p:spPr>
           <a:xfrm>
             <a:off x="541800" y="3704400"/>
-            <a:ext cx="1103400" cy="344520"/>
+            <a:ext cx="1103040" cy="344160"/>
           </a:xfrm>
           <a:prstGeom prst="rect">
             <a:avLst/>
@@ -8278,7 +8278,7 @@
         <p:spPr>
           <a:xfrm>
             <a:off x="1576800" y="3657600"/>
-            <a:ext cx="8177400" cy="455040"/>
+            <a:ext cx="8177040" cy="454680"/>
           </a:xfrm>
           <a:prstGeom prst="rect">
             <a:avLst/>
@@ -8308,7 +8308,7 @@
         <p:spPr>
           <a:xfrm>
             <a:off x="9516600" y="3692160"/>
-            <a:ext cx="471600" cy="384480"/>
+            <a:ext cx="471240" cy="384120"/>
           </a:xfrm>
           <a:prstGeom prst="rect">
             <a:avLst/>
@@ -8385,7 +8385,7 @@
         <p:spPr>
           <a:xfrm>
             <a:off x="7855200" y="3692160"/>
-            <a:ext cx="462240" cy="384480"/>
+            <a:ext cx="461880" cy="384120"/>
           </a:xfrm>
           <a:prstGeom prst="rect">
             <a:avLst/>
@@ -8462,7 +8462,7 @@
         <p:spPr>
           <a:xfrm>
             <a:off x="3463200" y="3685320"/>
-            <a:ext cx="471600" cy="384480"/>
+            <a:ext cx="471240" cy="384120"/>
           </a:xfrm>
           <a:prstGeom prst="rect">
             <a:avLst/>
@@ -8539,9 +8539,9 @@
         <p:grpSpPr>
           <a:xfrm>
             <a:off x="1575000" y="2286360"/>
-            <a:ext cx="1778400" cy="1140480"/>
+            <a:ext cx="1778040" cy="1140120"/>
             <a:chOff x="1575000" y="2286360"/>
-            <a:chExt cx="1778400" cy="1140480"/>
+            <a:chExt cx="1778040" cy="1140120"/>
           </a:xfrm>
         </p:grpSpPr>
         <p:sp>
@@ -8553,7 +8553,7 @@
           <p:spPr>
             <a:xfrm>
               <a:off x="1576800" y="2286360"/>
-              <a:ext cx="1776600" cy="455040"/>
+              <a:ext cx="1776240" cy="454680"/>
             </a:xfrm>
             <a:prstGeom prst="rect">
               <a:avLst/>
@@ -8583,7 +8583,7 @@
           <p:spPr>
             <a:xfrm>
               <a:off x="1575000" y="2971800"/>
-              <a:ext cx="1778400" cy="455040"/>
+              <a:ext cx="1778040" cy="454680"/>
             </a:xfrm>
             <a:prstGeom prst="rect">
               <a:avLst/>
@@ -8614,9 +8614,9 @@
         <p:grpSpPr>
           <a:xfrm>
             <a:off x="3355200" y="2286360"/>
-            <a:ext cx="6636600" cy="1140480"/>
+            <a:ext cx="6636240" cy="1140120"/>
             <a:chOff x="3355200" y="2286360"/>
-            <a:chExt cx="6636600" cy="1140480"/>
+            <a:chExt cx="6636240" cy="1140120"/>
           </a:xfrm>
         </p:grpSpPr>
         <p:sp>
@@ -8628,7 +8628,7 @@
           <p:spPr>
             <a:xfrm>
               <a:off x="3355200" y="2286360"/>
-              <a:ext cx="6406200" cy="455040"/>
+              <a:ext cx="6405840" cy="454680"/>
             </a:xfrm>
             <a:prstGeom prst="rect">
               <a:avLst/>
@@ -8658,7 +8658,7 @@
           <p:spPr>
             <a:xfrm>
               <a:off x="3355200" y="2971800"/>
-              <a:ext cx="6406200" cy="455040"/>
+              <a:ext cx="6405840" cy="454680"/>
             </a:xfrm>
             <a:prstGeom prst="rect">
               <a:avLst/>
@@ -8688,7 +8688,7 @@
           <p:spPr>
             <a:xfrm>
               <a:off x="9520200" y="3007800"/>
-              <a:ext cx="471600" cy="384480"/>
+              <a:ext cx="471240" cy="384120"/>
             </a:xfrm>
             <a:prstGeom prst="rect">
               <a:avLst/>
@@ -8765,7 +8765,7 @@
           <p:spPr>
             <a:xfrm>
               <a:off x="9520200" y="2322360"/>
-              <a:ext cx="471600" cy="384480"/>
+              <a:ext cx="471240" cy="384120"/>
             </a:xfrm>
             <a:prstGeom prst="rect">
               <a:avLst/>
@@ -8842,7 +8842,7 @@
           <p:spPr>
             <a:xfrm>
               <a:off x="7851600" y="3007800"/>
-              <a:ext cx="462240" cy="384480"/>
+              <a:ext cx="461880" cy="384120"/>
             </a:xfrm>
             <a:prstGeom prst="rect">
               <a:avLst/>
@@ -8919,7 +8919,7 @@
           <p:spPr>
             <a:xfrm>
               <a:off x="7857360" y="2320920"/>
-              <a:ext cx="462240" cy="384480"/>
+              <a:ext cx="461880" cy="384120"/>
             </a:xfrm>
             <a:prstGeom prst="rect">
               <a:avLst/>
@@ -8996,7 +8996,7 @@
           <p:spPr>
             <a:xfrm>
               <a:off x="4964400" y="2320920"/>
-              <a:ext cx="471600" cy="384480"/>
+              <a:ext cx="471240" cy="384120"/>
             </a:xfrm>
             <a:prstGeom prst="rect">
               <a:avLst/>
@@ -9073,7 +9073,7 @@
           <p:spPr>
             <a:xfrm>
               <a:off x="4948200" y="3007800"/>
-              <a:ext cx="471600" cy="384480"/>
+              <a:ext cx="471240" cy="384120"/>
             </a:xfrm>
             <a:prstGeom prst="rect">
               <a:avLst/>
@@ -9151,7 +9151,7 @@
         <p:spPr>
           <a:xfrm rot="16180800">
             <a:off x="-459360" y="3068640"/>
-            <a:ext cx="1404000" cy="371880"/>
+            <a:ext cx="1403640" cy="371520"/>
           </a:xfrm>
           <a:prstGeom prst="rect">
             <a:avLst/>
@@ -9202,9 +9202,9 @@
         <p:grpSpPr>
           <a:xfrm>
             <a:off x="433080" y="5032800"/>
-            <a:ext cx="2007000" cy="384480"/>
+            <a:ext cx="2006640" cy="384120"/>
             <a:chOff x="433080" y="5032800"/>
-            <a:chExt cx="2007000" cy="384480"/>
+            <a:chExt cx="2006640" cy="384120"/>
           </a:xfrm>
         </p:grpSpPr>
         <p:sp>
@@ -9216,7 +9216,7 @@
           <p:spPr>
             <a:xfrm>
               <a:off x="613080" y="5072760"/>
-              <a:ext cx="1827000" cy="344520"/>
+              <a:ext cx="1826640" cy="344160"/>
             </a:xfrm>
             <a:prstGeom prst="rect">
               <a:avLst/>
@@ -9244,9 +9244,9 @@
           <p:grpSpPr>
             <a:xfrm>
               <a:off x="433080" y="5032800"/>
-              <a:ext cx="1986120" cy="384480"/>
+              <a:ext cx="1985760" cy="384120"/>
               <a:chOff x="433080" y="5032800"/>
-              <a:chExt cx="1986120" cy="384480"/>
+              <a:chExt cx="1985760" cy="384120"/>
             </a:xfrm>
           </p:grpSpPr>
           <p:sp>
@@ -9258,7 +9258,7 @@
             <p:spPr>
               <a:xfrm>
                 <a:off x="433080" y="5032800"/>
-                <a:ext cx="611640" cy="384480"/>
+                <a:ext cx="611280" cy="384120"/>
               </a:xfrm>
               <a:prstGeom prst="rect">
                 <a:avLst/>
@@ -9335,7 +9335,7 @@
             <p:spPr>
               <a:xfrm>
                 <a:off x="1015200" y="5072760"/>
-                <a:ext cx="1404000" cy="344520"/>
+                <a:ext cx="1403640" cy="344160"/>
               </a:xfrm>
               <a:prstGeom prst="rect">
                 <a:avLst/>
@@ -9388,7 +9388,7 @@
         <p:spPr>
           <a:xfrm>
             <a:off x="3429000" y="1937520"/>
-            <a:ext cx="5028480" cy="2633760"/>
+            <a:ext cx="5028120" cy="2633400"/>
           </a:xfrm>
           <a:prstGeom prst="rect">
             <a:avLst/>
@@ -9417,7 +9417,7 @@
         <p:spPr>
           <a:xfrm>
             <a:off x="7772400" y="1865880"/>
-            <a:ext cx="2285280" cy="2669400"/>
+            <a:ext cx="2284920" cy="2669040"/>
           </a:xfrm>
           <a:prstGeom prst="rect">
             <a:avLst/>
@@ -9446,7 +9446,7 @@
         <p:spPr>
           <a:xfrm>
             <a:off x="4114800" y="1552680"/>
-            <a:ext cx="2285280" cy="489240"/>
+            <a:ext cx="2284920" cy="488880"/>
           </a:xfrm>
           <a:prstGeom prst="rect">
             <a:avLst/>
@@ -9497,7 +9497,7 @@
         <p:spPr>
           <a:xfrm>
             <a:off x="8330760" y="1542600"/>
-            <a:ext cx="1275480" cy="489240"/>
+            <a:ext cx="1275120" cy="488880"/>
           </a:xfrm>
           <a:prstGeom prst="rect">
             <a:avLst/>
@@ -9548,9 +9548,9 @@
         <p:grpSpPr>
           <a:xfrm>
             <a:off x="2057400" y="268560"/>
-            <a:ext cx="1143000" cy="645840"/>
+            <a:ext cx="1142640" cy="645480"/>
             <a:chOff x="2057400" y="268560"/>
-            <a:chExt cx="1143000" cy="645840"/>
+            <a:chExt cx="1142640" cy="645480"/>
           </a:xfrm>
         </p:grpSpPr>
         <p:sp>
@@ -9562,7 +9562,7 @@
           <p:spPr>
             <a:xfrm>
               <a:off x="2057400" y="268560"/>
-              <a:ext cx="1143000" cy="645840"/>
+              <a:ext cx="1142640" cy="645480"/>
             </a:xfrm>
             <a:prstGeom prst="rect">
               <a:avLst/>
@@ -9644,7 +9644,7 @@
         <p:spPr>
           <a:xfrm>
             <a:off x="2290320" y="4682880"/>
-            <a:ext cx="305280" cy="344520"/>
+            <a:ext cx="304920" cy="344160"/>
           </a:xfrm>
           <a:prstGeom prst="rect">
             <a:avLst/>
@@ -9695,7 +9695,7 @@
         <p:spPr>
           <a:xfrm>
             <a:off x="3132720" y="4682880"/>
-            <a:ext cx="432000" cy="344520"/>
+            <a:ext cx="431640" cy="344160"/>
           </a:xfrm>
           <a:prstGeom prst="rect">
             <a:avLst/>
@@ -9746,7 +9746,7 @@
         <p:spPr>
           <a:xfrm>
             <a:off x="4047120" y="4682880"/>
-            <a:ext cx="432000" cy="344520"/>
+            <a:ext cx="431640" cy="344160"/>
           </a:xfrm>
           <a:prstGeom prst="rect">
             <a:avLst/>
@@ -9797,7 +9797,7 @@
         <p:spPr>
           <a:xfrm>
             <a:off x="4961520" y="4682880"/>
-            <a:ext cx="432000" cy="344520"/>
+            <a:ext cx="431640" cy="344160"/>
           </a:xfrm>
           <a:prstGeom prst="rect">
             <a:avLst/>
@@ -9848,7 +9848,7 @@
         <p:spPr>
           <a:xfrm>
             <a:off x="5875920" y="4682880"/>
-            <a:ext cx="432000" cy="344520"/>
+            <a:ext cx="431640" cy="344160"/>
           </a:xfrm>
           <a:prstGeom prst="rect">
             <a:avLst/>
@@ -9899,7 +9899,7 @@
         <p:spPr>
           <a:xfrm>
             <a:off x="6790320" y="4682880"/>
-            <a:ext cx="432000" cy="344520"/>
+            <a:ext cx="431640" cy="344160"/>
           </a:xfrm>
           <a:prstGeom prst="rect">
             <a:avLst/>
@@ -9950,7 +9950,7 @@
         <p:spPr>
           <a:xfrm>
             <a:off x="7698600" y="4682880"/>
-            <a:ext cx="455400" cy="344520"/>
+            <a:ext cx="455040" cy="344160"/>
           </a:xfrm>
           <a:prstGeom prst="rect">
             <a:avLst/>
@@ -10001,7 +10001,7 @@
         <p:spPr>
           <a:xfrm>
             <a:off x="8619120" y="4682880"/>
-            <a:ext cx="432000" cy="344520"/>
+            <a:ext cx="431640" cy="344160"/>
           </a:xfrm>
           <a:prstGeom prst="rect">
             <a:avLst/>
@@ -10052,7 +10052,7 @@
         <p:spPr>
           <a:xfrm>
             <a:off x="9533520" y="4682880"/>
-            <a:ext cx="432000" cy="344520"/>
+            <a:ext cx="431640" cy="344160"/>
           </a:xfrm>
           <a:prstGeom prst="rect">
             <a:avLst/>
@@ -10103,7 +10103,7 @@
         <p:spPr>
           <a:xfrm>
             <a:off x="1405800" y="4682880"/>
-            <a:ext cx="305280" cy="344520"/>
+            <a:ext cx="304920" cy="344160"/>
           </a:xfrm>
           <a:prstGeom prst="rect">
             <a:avLst/>
@@ -10154,7 +10154,7 @@
         <p:spPr>
           <a:xfrm>
             <a:off x="4233600" y="5140080"/>
-            <a:ext cx="3234600" cy="344520"/>
+            <a:ext cx="3234240" cy="344160"/>
           </a:xfrm>
           <a:prstGeom prst="rect">
             <a:avLst/>
@@ -10205,7 +10205,7 @@
         <p:spPr>
           <a:xfrm>
             <a:off x="658800" y="2345400"/>
-            <a:ext cx="1022400" cy="344520"/>
+            <a:ext cx="1022040" cy="344160"/>
           </a:xfrm>
           <a:prstGeom prst="rect">
             <a:avLst/>
@@ -10256,7 +10256,7 @@
         <p:spPr>
           <a:xfrm>
             <a:off x="550800" y="3021480"/>
-            <a:ext cx="1022400" cy="344520"/>
+            <a:ext cx="1022040" cy="344160"/>
           </a:xfrm>
           <a:prstGeom prst="rect">
             <a:avLst/>
@@ -10307,7 +10307,7 @@
         <p:spPr>
           <a:xfrm>
             <a:off x="766800" y="3704400"/>
-            <a:ext cx="1022400" cy="344520"/>
+            <a:ext cx="1022040" cy="344160"/>
           </a:xfrm>
           <a:prstGeom prst="rect">
             <a:avLst/>
@@ -10643,7 +10643,7 @@
         <p:spPr>
           <a:xfrm>
             <a:off x="1576800" y="2286360"/>
-            <a:ext cx="6348600" cy="455040"/>
+            <a:ext cx="6348240" cy="454680"/>
           </a:xfrm>
           <a:prstGeom prst="rect">
             <a:avLst/>
@@ -10673,7 +10673,7 @@
         <p:spPr>
           <a:xfrm>
             <a:off x="1576800" y="2971800"/>
-            <a:ext cx="6348600" cy="455040"/>
+            <a:ext cx="6348240" cy="454680"/>
           </a:xfrm>
           <a:prstGeom prst="rect">
             <a:avLst/>
@@ -10703,7 +10703,7 @@
         <p:spPr>
           <a:xfrm>
             <a:off x="1576800" y="3657600"/>
-            <a:ext cx="8177400" cy="455040"/>
+            <a:ext cx="8177040" cy="454680"/>
           </a:xfrm>
           <a:prstGeom prst="rect">
             <a:avLst/>
@@ -10733,7 +10733,7 @@
         <p:spPr>
           <a:xfrm>
             <a:off x="9516600" y="3692160"/>
-            <a:ext cx="471600" cy="384480"/>
+            <a:ext cx="471240" cy="384120"/>
           </a:xfrm>
           <a:prstGeom prst="rect">
             <a:avLst/>
@@ -10810,7 +10810,7 @@
         <p:spPr>
           <a:xfrm>
             <a:off x="7684200" y="3007800"/>
-            <a:ext cx="471600" cy="384480"/>
+            <a:ext cx="471240" cy="384120"/>
           </a:xfrm>
           <a:prstGeom prst="rect">
             <a:avLst/>
@@ -10887,7 +10887,7 @@
         <p:spPr>
           <a:xfrm>
             <a:off x="7684200" y="2322360"/>
-            <a:ext cx="471600" cy="384480"/>
+            <a:ext cx="471240" cy="384120"/>
           </a:xfrm>
           <a:prstGeom prst="rect">
             <a:avLst/>
@@ -10964,7 +10964,7 @@
         <p:spPr>
           <a:xfrm>
             <a:off x="7819200" y="3692160"/>
-            <a:ext cx="462240" cy="384480"/>
+            <a:ext cx="461880" cy="384120"/>
           </a:xfrm>
           <a:prstGeom prst="rect">
             <a:avLst/>
@@ -11041,7 +11041,7 @@
         <p:spPr>
           <a:xfrm>
             <a:off x="3463200" y="3685320"/>
-            <a:ext cx="471600" cy="384480"/>
+            <a:ext cx="471240" cy="384120"/>
           </a:xfrm>
           <a:prstGeom prst="rect">
             <a:avLst/>
@@ -11118,7 +11118,7 @@
         <p:spPr>
           <a:xfrm>
             <a:off x="6051600" y="3007800"/>
-            <a:ext cx="462240" cy="384480"/>
+            <a:ext cx="461880" cy="384120"/>
           </a:xfrm>
           <a:prstGeom prst="rect">
             <a:avLst/>
@@ -11195,7 +11195,7 @@
         <p:spPr>
           <a:xfrm>
             <a:off x="6057360" y="2320920"/>
-            <a:ext cx="462240" cy="384480"/>
+            <a:ext cx="461880" cy="384120"/>
           </a:xfrm>
           <a:prstGeom prst="rect">
             <a:avLst/>
@@ -11272,7 +11272,7 @@
         <p:spPr>
           <a:xfrm>
             <a:off x="3128400" y="2320920"/>
-            <a:ext cx="471600" cy="384480"/>
+            <a:ext cx="471240" cy="384120"/>
           </a:xfrm>
           <a:prstGeom prst="rect">
             <a:avLst/>
@@ -11349,7 +11349,7 @@
         <p:spPr>
           <a:xfrm>
             <a:off x="3112200" y="3007800"/>
-            <a:ext cx="471600" cy="384480"/>
+            <a:ext cx="471240" cy="384120"/>
           </a:xfrm>
           <a:prstGeom prst="rect">
             <a:avLst/>
@@ -11426,7 +11426,7 @@
         <p:spPr>
           <a:xfrm rot="16180800">
             <a:off x="-362880" y="3013560"/>
-            <a:ext cx="1404000" cy="371880"/>
+            <a:ext cx="1403640" cy="371520"/>
           </a:xfrm>
           <a:prstGeom prst="rect">
             <a:avLst/>
@@ -11477,9 +11477,9 @@
         <p:grpSpPr>
           <a:xfrm>
             <a:off x="394560" y="5011920"/>
-            <a:ext cx="2022120" cy="384480"/>
+            <a:ext cx="2021760" cy="384120"/>
             <a:chOff x="394560" y="5011920"/>
-            <a:chExt cx="2022120" cy="384480"/>
+            <a:chExt cx="2021760" cy="384120"/>
           </a:xfrm>
         </p:grpSpPr>
         <p:sp>
@@ -11491,7 +11491,7 @@
           <p:spPr>
             <a:xfrm>
               <a:off x="502560" y="5051880"/>
-              <a:ext cx="1827000" cy="344520"/>
+              <a:ext cx="1826640" cy="344160"/>
             </a:xfrm>
             <a:prstGeom prst="rect">
               <a:avLst/>
@@ -11519,9 +11519,9 @@
           <p:grpSpPr>
             <a:xfrm>
               <a:off x="394560" y="5011920"/>
-              <a:ext cx="2022120" cy="384480"/>
+              <a:ext cx="2021760" cy="384120"/>
               <a:chOff x="394560" y="5011920"/>
-              <a:chExt cx="2022120" cy="384480"/>
+              <a:chExt cx="2021760" cy="384120"/>
             </a:xfrm>
           </p:grpSpPr>
           <p:sp>
@@ -11533,7 +11533,7 @@
             <p:spPr>
               <a:xfrm>
                 <a:off x="394560" y="5011920"/>
-                <a:ext cx="648360" cy="384480"/>
+                <a:ext cx="648000" cy="384120"/>
               </a:xfrm>
               <a:prstGeom prst="rect">
                 <a:avLst/>
@@ -11620,7 +11620,7 @@
             <p:spPr>
               <a:xfrm>
                 <a:off x="1012680" y="5051880"/>
-                <a:ext cx="1404000" cy="344520"/>
+                <a:ext cx="1403640" cy="344160"/>
               </a:xfrm>
               <a:prstGeom prst="rect">
                 <a:avLst/>
@@ -11673,9 +11673,9 @@
         <p:grpSpPr>
           <a:xfrm>
             <a:off x="2057400" y="268560"/>
-            <a:ext cx="1143000" cy="645840"/>
+            <a:ext cx="1142640" cy="645480"/>
             <a:chOff x="2057400" y="268560"/>
-            <a:chExt cx="1143000" cy="645840"/>
+            <a:chExt cx="1142640" cy="645480"/>
           </a:xfrm>
         </p:grpSpPr>
         <p:sp>
@@ -11687,7 +11687,7 @@
           <p:spPr>
             <a:xfrm>
               <a:off x="2057400" y="268560"/>
-              <a:ext cx="1143000" cy="645840"/>
+              <a:ext cx="1142640" cy="645480"/>
             </a:xfrm>
             <a:prstGeom prst="rect">
               <a:avLst/>
@@ -12012,7 +12012,7 @@
         <p:spPr>
           <a:xfrm>
             <a:off x="2290320" y="4682880"/>
-            <a:ext cx="482400" cy="344520"/>
+            <a:ext cx="482040" cy="344160"/>
           </a:xfrm>
           <a:prstGeom prst="rect">
             <a:avLst/>
@@ -12073,7 +12073,7 @@
         <p:spPr>
           <a:xfrm>
             <a:off x="3132720" y="4682880"/>
-            <a:ext cx="482400" cy="344520"/>
+            <a:ext cx="482040" cy="344160"/>
           </a:xfrm>
           <a:prstGeom prst="rect">
             <a:avLst/>
@@ -12134,7 +12134,7 @@
         <p:spPr>
           <a:xfrm>
             <a:off x="4047120" y="4682880"/>
-            <a:ext cx="482400" cy="344520"/>
+            <a:ext cx="482040" cy="344160"/>
           </a:xfrm>
           <a:prstGeom prst="rect">
             <a:avLst/>
@@ -12195,7 +12195,7 @@
         <p:spPr>
           <a:xfrm>
             <a:off x="4961520" y="4682880"/>
-            <a:ext cx="482400" cy="344520"/>
+            <a:ext cx="482040" cy="344160"/>
           </a:xfrm>
           <a:prstGeom prst="rect">
             <a:avLst/>
@@ -12256,7 +12256,7 @@
         <p:spPr>
           <a:xfrm>
             <a:off x="5715000" y="4682880"/>
-            <a:ext cx="684720" cy="344520"/>
+            <a:ext cx="684360" cy="344160"/>
           </a:xfrm>
           <a:prstGeom prst="rect">
             <a:avLst/>
@@ -12307,7 +12307,7 @@
         <p:spPr>
           <a:xfrm>
             <a:off x="6790320" y="4682880"/>
-            <a:ext cx="482400" cy="344520"/>
+            <a:ext cx="482040" cy="344160"/>
           </a:xfrm>
           <a:prstGeom prst="rect">
             <a:avLst/>
@@ -12368,7 +12368,7 @@
         <p:spPr>
           <a:xfrm>
             <a:off x="7698600" y="4682880"/>
-            <a:ext cx="529200" cy="344520"/>
+            <a:ext cx="528840" cy="344160"/>
           </a:xfrm>
           <a:prstGeom prst="rect">
             <a:avLst/>
@@ -12429,7 +12429,7 @@
         <p:spPr>
           <a:xfrm>
             <a:off x="8619120" y="4682880"/>
-            <a:ext cx="482400" cy="344520"/>
+            <a:ext cx="482040" cy="344160"/>
           </a:xfrm>
           <a:prstGeom prst="rect">
             <a:avLst/>
@@ -12490,7 +12490,7 @@
         <p:spPr>
           <a:xfrm>
             <a:off x="9533520" y="4682880"/>
-            <a:ext cx="482400" cy="344520"/>
+            <a:ext cx="482040" cy="344160"/>
           </a:xfrm>
           <a:prstGeom prst="rect">
             <a:avLst/>
@@ -12551,7 +12551,7 @@
         <p:spPr>
           <a:xfrm>
             <a:off x="1405800" y="4682880"/>
-            <a:ext cx="684720" cy="344520"/>
+            <a:ext cx="684360" cy="344160"/>
           </a:xfrm>
           <a:prstGeom prst="rect">
             <a:avLst/>
@@ -12602,7 +12602,7 @@
         <p:spPr>
           <a:xfrm>
             <a:off x="4919400" y="5140080"/>
-            <a:ext cx="793800" cy="344520"/>
+            <a:ext cx="793440" cy="344160"/>
           </a:xfrm>
           <a:prstGeom prst="rect">
             <a:avLst/>
@@ -12653,7 +12653,7 @@
         <p:spPr>
           <a:xfrm>
             <a:off x="457200" y="950400"/>
-            <a:ext cx="1224000" cy="344520"/>
+            <a:ext cx="1223640" cy="344160"/>
           </a:xfrm>
           <a:prstGeom prst="rect">
             <a:avLst/>
@@ -12704,7 +12704,7 @@
         <p:spPr>
           <a:xfrm>
             <a:off x="408600" y="1636200"/>
-            <a:ext cx="1380600" cy="344520"/>
+            <a:ext cx="1380240" cy="344160"/>
           </a:xfrm>
           <a:prstGeom prst="rect">
             <a:avLst/>
@@ -12755,7 +12755,7 @@
         <p:spPr>
           <a:xfrm>
             <a:off x="465120" y="2345400"/>
-            <a:ext cx="1180080" cy="344520"/>
+            <a:ext cx="1179720" cy="344160"/>
           </a:xfrm>
           <a:prstGeom prst="rect">
             <a:avLst/>
@@ -12806,7 +12806,7 @@
         <p:spPr>
           <a:xfrm>
             <a:off x="408600" y="3021480"/>
-            <a:ext cx="1344600" cy="344520"/>
+            <a:ext cx="1344240" cy="344160"/>
           </a:xfrm>
           <a:prstGeom prst="rect">
             <a:avLst/>
@@ -12857,7 +12857,7 @@
         <p:spPr>
           <a:xfrm>
             <a:off x="541800" y="3704400"/>
-            <a:ext cx="1103400" cy="344520"/>
+            <a:ext cx="1103040" cy="344160"/>
           </a:xfrm>
           <a:prstGeom prst="rect">
             <a:avLst/>
@@ -12935,7 +12935,7 @@
         <p:spPr>
           <a:xfrm>
             <a:off x="1576800" y="3657600"/>
-            <a:ext cx="8177400" cy="455040"/>
+            <a:ext cx="8177040" cy="454680"/>
           </a:xfrm>
           <a:prstGeom prst="rect">
             <a:avLst/>
@@ -12965,7 +12965,7 @@
         <p:spPr>
           <a:xfrm>
             <a:off x="9516600" y="3692160"/>
-            <a:ext cx="471600" cy="384480"/>
+            <a:ext cx="471240" cy="384120"/>
           </a:xfrm>
           <a:prstGeom prst="rect">
             <a:avLst/>
@@ -13042,7 +13042,7 @@
         <p:spPr>
           <a:xfrm>
             <a:off x="7855200" y="3692160"/>
-            <a:ext cx="462240" cy="384480"/>
+            <a:ext cx="461880" cy="384120"/>
           </a:xfrm>
           <a:prstGeom prst="rect">
             <a:avLst/>
@@ -13119,7 +13119,7 @@
         <p:spPr>
           <a:xfrm>
             <a:off x="3571200" y="3685320"/>
-            <a:ext cx="471600" cy="384480"/>
+            <a:ext cx="471240" cy="384120"/>
           </a:xfrm>
           <a:prstGeom prst="rect">
             <a:avLst/>
@@ -13196,9 +13196,9 @@
         <p:grpSpPr>
           <a:xfrm>
             <a:off x="1575000" y="914400"/>
-            <a:ext cx="8397000" cy="2512440"/>
+            <a:ext cx="8396640" cy="2512080"/>
             <a:chOff x="1575000" y="914400"/>
-            <a:chExt cx="8397000" cy="2512440"/>
+            <a:chExt cx="8396640" cy="2512080"/>
           </a:xfrm>
         </p:grpSpPr>
         <p:sp>
@@ -13210,7 +13210,7 @@
           <p:spPr>
             <a:xfrm>
               <a:off x="6098400" y="914400"/>
-              <a:ext cx="3643200" cy="455040"/>
+              <a:ext cx="3642840" cy="454680"/>
             </a:xfrm>
             <a:prstGeom prst="rect">
               <a:avLst/>
@@ -13240,7 +13240,7 @@
           <p:spPr>
             <a:xfrm>
               <a:off x="6098760" y="1599840"/>
-              <a:ext cx="3642840" cy="455040"/>
+              <a:ext cx="3642480" cy="454680"/>
             </a:xfrm>
             <a:prstGeom prst="rect">
               <a:avLst/>
@@ -13270,7 +13270,7 @@
           <p:spPr>
             <a:xfrm>
               <a:off x="9500400" y="1634760"/>
-              <a:ext cx="471600" cy="384480"/>
+              <a:ext cx="471240" cy="384120"/>
             </a:xfrm>
             <a:prstGeom prst="rect">
               <a:avLst/>
@@ -13347,7 +13347,7 @@
           <p:spPr>
             <a:xfrm>
               <a:off x="9500400" y="948960"/>
-              <a:ext cx="471600" cy="384480"/>
+              <a:ext cx="471240" cy="384120"/>
             </a:xfrm>
             <a:prstGeom prst="rect">
               <a:avLst/>
@@ -13424,7 +13424,7 @@
           <p:spPr>
             <a:xfrm>
               <a:off x="7867800" y="948960"/>
-              <a:ext cx="462240" cy="384480"/>
+              <a:ext cx="461880" cy="384120"/>
             </a:xfrm>
             <a:prstGeom prst="rect">
               <a:avLst/>
@@ -13501,7 +13501,7 @@
           <p:spPr>
             <a:xfrm>
               <a:off x="7860960" y="1635840"/>
-              <a:ext cx="462240" cy="384480"/>
+              <a:ext cx="461880" cy="384120"/>
             </a:xfrm>
             <a:prstGeom prst="rect">
               <a:avLst/>
@@ -13578,7 +13578,7 @@
           <p:spPr>
             <a:xfrm>
               <a:off x="1576800" y="914400"/>
-              <a:ext cx="4521600" cy="455040"/>
+              <a:ext cx="4521240" cy="454680"/>
             </a:xfrm>
             <a:prstGeom prst="rect">
               <a:avLst/>
@@ -13608,7 +13608,7 @@
           <p:spPr>
             <a:xfrm>
               <a:off x="1576800" y="2286360"/>
-              <a:ext cx="2309040" cy="455040"/>
+              <a:ext cx="2308680" cy="454680"/>
             </a:xfrm>
             <a:prstGeom prst="rect">
               <a:avLst/>
@@ -13638,7 +13638,7 @@
           <p:spPr>
             <a:xfrm>
               <a:off x="1576800" y="1600560"/>
-              <a:ext cx="4521600" cy="455040"/>
+              <a:ext cx="4521240" cy="454680"/>
             </a:xfrm>
             <a:prstGeom prst="rect">
               <a:avLst/>
@@ -13668,7 +13668,7 @@
           <p:spPr>
             <a:xfrm>
               <a:off x="1575000" y="2971800"/>
-              <a:ext cx="2310840" cy="455040"/>
+              <a:ext cx="2310480" cy="454680"/>
             </a:xfrm>
             <a:prstGeom prst="rect">
               <a:avLst/>
@@ -13699,9 +13699,9 @@
         <p:grpSpPr>
           <a:xfrm>
             <a:off x="3886200" y="2286360"/>
-            <a:ext cx="6105600" cy="1140480"/>
+            <a:ext cx="6105240" cy="1140120"/>
             <a:chOff x="3886200" y="2286360"/>
-            <a:chExt cx="6105600" cy="1140480"/>
+            <a:chExt cx="6105240" cy="1140120"/>
           </a:xfrm>
         </p:grpSpPr>
         <p:sp>
@@ -13713,7 +13713,7 @@
           <p:spPr>
             <a:xfrm>
               <a:off x="3886200" y="2286360"/>
-              <a:ext cx="5875200" cy="455040"/>
+              <a:ext cx="5874840" cy="454680"/>
             </a:xfrm>
             <a:prstGeom prst="rect">
               <a:avLst/>
@@ -13743,7 +13743,7 @@
           <p:spPr>
             <a:xfrm>
               <a:off x="3886200" y="2971800"/>
-              <a:ext cx="5875200" cy="455040"/>
+              <a:ext cx="5874840" cy="454680"/>
             </a:xfrm>
             <a:prstGeom prst="rect">
               <a:avLst/>
@@ -13773,7 +13773,7 @@
           <p:spPr>
             <a:xfrm>
               <a:off x="9520200" y="3007800"/>
-              <a:ext cx="471600" cy="384480"/>
+              <a:ext cx="471240" cy="384120"/>
             </a:xfrm>
             <a:prstGeom prst="rect">
               <a:avLst/>
@@ -13850,7 +13850,7 @@
           <p:spPr>
             <a:xfrm>
               <a:off x="9520200" y="2322360"/>
-              <a:ext cx="471600" cy="384480"/>
+              <a:ext cx="471240" cy="384120"/>
             </a:xfrm>
             <a:prstGeom prst="rect">
               <a:avLst/>
@@ -13927,7 +13927,7 @@
           <p:spPr>
             <a:xfrm>
               <a:off x="7851600" y="3007800"/>
-              <a:ext cx="462240" cy="384480"/>
+              <a:ext cx="461880" cy="384120"/>
             </a:xfrm>
             <a:prstGeom prst="rect">
               <a:avLst/>
@@ -14004,7 +14004,7 @@
           <p:spPr>
             <a:xfrm>
               <a:off x="7857360" y="2320920"/>
-              <a:ext cx="462240" cy="384480"/>
+              <a:ext cx="461880" cy="384120"/>
             </a:xfrm>
             <a:prstGeom prst="rect">
               <a:avLst/>
@@ -14081,84 +14081,7 @@
           <p:spPr>
             <a:xfrm>
               <a:off x="4964400" y="2320920"/>
-              <a:ext cx="471600" cy="384480"/>
-            </a:xfrm>
-            <a:prstGeom prst="rect">
-              <a:avLst/>
-            </a:prstGeom>
-            <a:solidFill>
-              <a:srgbClr val="ffffa6">
-                <a:alpha val="53000"/>
-              </a:srgbClr>
-            </a:solidFill>
-            <a:ln w="0">
-              <a:solidFill>
-                <a:srgbClr val="000000"/>
-              </a:solidFill>
-            </a:ln>
-          </p:spPr>
-          <p:style>
-            <a:lnRef idx="0"/>
-            <a:fillRef idx="0"/>
-            <a:effectRef idx="0"/>
-            <a:fontRef idx="minor"/>
-          </p:style>
-          <p:txBody>
-            <a:bodyPr lIns="90000" rIns="90000" tIns="45000" bIns="45000">
-              <a:noAutofit/>
-            </a:bodyPr>
-            <a:p>
-              <a:pPr algn="ctr">
-                <a:lnSpc>
-                  <a:spcPct val="100000"/>
-                </a:lnSpc>
-              </a:pPr>
-              <a:r>
-                <a:rPr b="0" lang="en-US" sz="1000" spc="-1" strike="noStrike">
-                  <a:solidFill>
-                    <a:srgbClr val="000000"/>
-                  </a:solidFill>
-                  <a:latin typeface="Arial"/>
-                  <a:ea typeface="DejaVu Sans"/>
-                </a:rPr>
-                <a:t>8</a:t>
-              </a:r>
-              <a:endParaRPr b="0" lang="en-US" sz="1000" spc="-1" strike="noStrike">
-                <a:latin typeface="Arial"/>
-              </a:endParaRPr>
-            </a:p>
-            <a:p>
-              <a:pPr algn="ctr">
-                <a:lnSpc>
-                  <a:spcPct val="100000"/>
-                </a:lnSpc>
-              </a:pPr>
-              <a:r>
-                <a:rPr b="0" lang="en-US" sz="1000" spc="-1" strike="noStrike">
-                  <a:solidFill>
-                    <a:srgbClr val="000000"/>
-                  </a:solidFill>
-                  <a:latin typeface="Arial"/>
-                  <a:ea typeface="DejaVu Sans"/>
-                </a:rPr>
-                <a:t>1995</a:t>
-              </a:r>
-              <a:endParaRPr b="0" lang="en-US" sz="1000" spc="-1" strike="noStrike">
-                <a:latin typeface="Arial"/>
-              </a:endParaRPr>
-            </a:p>
-          </p:txBody>
-        </p:sp>
-        <p:sp>
-          <p:nvSpPr>
-            <p:cNvPr id="299" name="Rectangle 87_1"/>
-            <p:cNvSpPr/>
-            <p:nvPr/>
-          </p:nvSpPr>
-          <p:spPr>
-            <a:xfrm>
-              <a:off x="4948200" y="3007800"/>
-              <a:ext cx="471600" cy="384480"/>
+              <a:ext cx="471240" cy="384120"/>
             </a:xfrm>
             <a:prstGeom prst="rect">
               <a:avLst/>
@@ -14226,6 +14149,83 @@
             </a:p>
           </p:txBody>
         </p:sp>
+        <p:sp>
+          <p:nvSpPr>
+            <p:cNvPr id="299" name="Rectangle 87_1"/>
+            <p:cNvSpPr/>
+            <p:nvPr/>
+          </p:nvSpPr>
+          <p:spPr>
+            <a:xfrm>
+              <a:off x="4948200" y="3007800"/>
+              <a:ext cx="471240" cy="384120"/>
+            </a:xfrm>
+            <a:prstGeom prst="rect">
+              <a:avLst/>
+            </a:prstGeom>
+            <a:solidFill>
+              <a:srgbClr val="ffffff">
+                <a:alpha val="53000"/>
+              </a:srgbClr>
+            </a:solidFill>
+            <a:ln w="0">
+              <a:solidFill>
+                <a:srgbClr val="000000"/>
+              </a:solidFill>
+            </a:ln>
+          </p:spPr>
+          <p:style>
+            <a:lnRef idx="0"/>
+            <a:fillRef idx="0"/>
+            <a:effectRef idx="0"/>
+            <a:fontRef idx="minor"/>
+          </p:style>
+          <p:txBody>
+            <a:bodyPr lIns="90000" rIns="90000" tIns="45000" bIns="45000">
+              <a:noAutofit/>
+            </a:bodyPr>
+            <a:p>
+              <a:pPr algn="ctr">
+                <a:lnSpc>
+                  <a:spcPct val="100000"/>
+                </a:lnSpc>
+              </a:pPr>
+              <a:r>
+                <a:rPr b="0" lang="en-US" sz="1000" spc="-1" strike="noStrike">
+                  <a:solidFill>
+                    <a:srgbClr val="000000"/>
+                  </a:solidFill>
+                  <a:latin typeface="Arial"/>
+                  <a:ea typeface="DejaVu Sans"/>
+                </a:rPr>
+                <a:t>8</a:t>
+              </a:r>
+              <a:endParaRPr b="0" lang="en-US" sz="1000" spc="-1" strike="noStrike">
+                <a:latin typeface="Arial"/>
+              </a:endParaRPr>
+            </a:p>
+            <a:p>
+              <a:pPr algn="ctr">
+                <a:lnSpc>
+                  <a:spcPct val="100000"/>
+                </a:lnSpc>
+              </a:pPr>
+              <a:r>
+                <a:rPr b="0" lang="en-US" sz="1000" spc="-1" strike="noStrike">
+                  <a:solidFill>
+                    <a:srgbClr val="000000"/>
+                  </a:solidFill>
+                  <a:latin typeface="Arial"/>
+                  <a:ea typeface="DejaVu Sans"/>
+                </a:rPr>
+                <a:t>1995</a:t>
+              </a:r>
+              <a:endParaRPr b="0" lang="en-US" sz="1000" spc="-1" strike="noStrike">
+                <a:latin typeface="Arial"/>
+              </a:endParaRPr>
+            </a:p>
+          </p:txBody>
+        </p:sp>
       </p:grpSp>
       <p:sp>
         <p:nvSpPr>
@@ -14236,7 +14236,7 @@
         <p:spPr>
           <a:xfrm rot="16180800">
             <a:off x="-392040" y="2382840"/>
-            <a:ext cx="1404000" cy="371880"/>
+            <a:ext cx="1403640" cy="371520"/>
           </a:xfrm>
           <a:prstGeom prst="rect">
             <a:avLst/>
@@ -14287,9 +14287,9 @@
         <p:grpSpPr>
           <a:xfrm>
             <a:off x="7592400" y="228600"/>
-            <a:ext cx="2007000" cy="384480"/>
+            <a:ext cx="2006640" cy="384120"/>
             <a:chOff x="7592400" y="228600"/>
-            <a:chExt cx="2007000" cy="384480"/>
+            <a:chExt cx="2006640" cy="384120"/>
           </a:xfrm>
         </p:grpSpPr>
         <p:sp>
@@ -14301,7 +14301,7 @@
           <p:spPr>
             <a:xfrm>
               <a:off x="7772400" y="268560"/>
-              <a:ext cx="1827000" cy="344520"/>
+              <a:ext cx="1826640" cy="344160"/>
             </a:xfrm>
             <a:prstGeom prst="rect">
               <a:avLst/>
@@ -14329,9 +14329,9 @@
           <p:grpSpPr>
             <a:xfrm>
               <a:off x="7592400" y="228600"/>
-              <a:ext cx="1986120" cy="384480"/>
+              <a:ext cx="1985760" cy="384120"/>
               <a:chOff x="7592400" y="228600"/>
-              <a:chExt cx="1986120" cy="384480"/>
+              <a:chExt cx="1985760" cy="384120"/>
             </a:xfrm>
           </p:grpSpPr>
           <p:sp>
@@ -14343,7 +14343,7 @@
             <p:spPr>
               <a:xfrm>
                 <a:off x="7592400" y="228600"/>
-                <a:ext cx="611640" cy="384480"/>
+                <a:ext cx="611280" cy="384120"/>
               </a:xfrm>
               <a:prstGeom prst="rect">
                 <a:avLst/>
@@ -14420,7 +14420,7 @@
             <p:spPr>
               <a:xfrm>
                 <a:off x="8174520" y="268560"/>
-                <a:ext cx="1404000" cy="344520"/>
+                <a:ext cx="1403640" cy="344160"/>
               </a:xfrm>
               <a:prstGeom prst="rect">
                 <a:avLst/>
@@ -14473,7 +14473,7 @@
         <p:spPr>
           <a:xfrm>
             <a:off x="4114800" y="623880"/>
-            <a:ext cx="2285280" cy="489240"/>
+            <a:ext cx="2284920" cy="488880"/>
           </a:xfrm>
           <a:prstGeom prst="rect">
             <a:avLst/>
@@ -14524,7 +14524,7 @@
         <p:spPr>
           <a:xfrm>
             <a:off x="8330760" y="613800"/>
-            <a:ext cx="1275480" cy="489240"/>
+            <a:ext cx="1275120" cy="488880"/>
           </a:xfrm>
           <a:prstGeom prst="rect">
             <a:avLst/>
@@ -14575,9 +14575,9 @@
         <p:grpSpPr>
           <a:xfrm>
             <a:off x="2057400" y="268560"/>
-            <a:ext cx="4343040" cy="344520"/>
+            <a:ext cx="4342680" cy="344160"/>
             <a:chOff x="2057400" y="268560"/>
-            <a:chExt cx="4343040" cy="344520"/>
+            <a:chExt cx="4342680" cy="344160"/>
           </a:xfrm>
         </p:grpSpPr>
         <p:sp>
@@ -14589,7 +14589,7 @@
           <p:spPr>
             <a:xfrm>
               <a:off x="2057400" y="268560"/>
-              <a:ext cx="4343040" cy="344520"/>
+              <a:ext cx="4342680" cy="344160"/>
             </a:xfrm>
             <a:prstGeom prst="rect">
               <a:avLst/>
@@ -14914,7 +14914,7 @@
         <p:spPr>
           <a:xfrm>
             <a:off x="2290320" y="4682880"/>
-            <a:ext cx="305280" cy="344520"/>
+            <a:ext cx="304920" cy="344160"/>
           </a:xfrm>
           <a:prstGeom prst="rect">
             <a:avLst/>
@@ -14965,7 +14965,7 @@
         <p:spPr>
           <a:xfrm>
             <a:off x="3132720" y="4682880"/>
-            <a:ext cx="432000" cy="344520"/>
+            <a:ext cx="431640" cy="344160"/>
           </a:xfrm>
           <a:prstGeom prst="rect">
             <a:avLst/>
@@ -15016,7 +15016,7 @@
         <p:spPr>
           <a:xfrm>
             <a:off x="4047120" y="4682880"/>
-            <a:ext cx="432000" cy="344520"/>
+            <a:ext cx="431640" cy="344160"/>
           </a:xfrm>
           <a:prstGeom prst="rect">
             <a:avLst/>
@@ -15067,7 +15067,7 @@
         <p:spPr>
           <a:xfrm>
             <a:off x="4961520" y="4682880"/>
-            <a:ext cx="432000" cy="344520"/>
+            <a:ext cx="431640" cy="344160"/>
           </a:xfrm>
           <a:prstGeom prst="rect">
             <a:avLst/>
@@ -15118,7 +15118,7 @@
         <p:spPr>
           <a:xfrm>
             <a:off x="5875920" y="4682880"/>
-            <a:ext cx="432000" cy="344520"/>
+            <a:ext cx="431640" cy="344160"/>
           </a:xfrm>
           <a:prstGeom prst="rect">
             <a:avLst/>
@@ -15169,7 +15169,7 @@
         <p:spPr>
           <a:xfrm>
             <a:off x="6790320" y="4682880"/>
-            <a:ext cx="432000" cy="344520"/>
+            <a:ext cx="431640" cy="344160"/>
           </a:xfrm>
           <a:prstGeom prst="rect">
             <a:avLst/>
@@ -15220,7 +15220,7 @@
         <p:spPr>
           <a:xfrm>
             <a:off x="7698600" y="4682880"/>
-            <a:ext cx="455400" cy="344520"/>
+            <a:ext cx="455040" cy="344160"/>
           </a:xfrm>
           <a:prstGeom prst="rect">
             <a:avLst/>
@@ -15271,7 +15271,7 @@
         <p:spPr>
           <a:xfrm>
             <a:off x="8619120" y="4682880"/>
-            <a:ext cx="432000" cy="344520"/>
+            <a:ext cx="431640" cy="344160"/>
           </a:xfrm>
           <a:prstGeom prst="rect">
             <a:avLst/>
@@ -15322,7 +15322,7 @@
         <p:spPr>
           <a:xfrm>
             <a:off x="9533520" y="4682880"/>
-            <a:ext cx="432000" cy="344520"/>
+            <a:ext cx="431640" cy="344160"/>
           </a:xfrm>
           <a:prstGeom prst="rect">
             <a:avLst/>
@@ -15373,7 +15373,7 @@
         <p:spPr>
           <a:xfrm>
             <a:off x="1405800" y="4682880"/>
-            <a:ext cx="305280" cy="344520"/>
+            <a:ext cx="304920" cy="344160"/>
           </a:xfrm>
           <a:prstGeom prst="rect">
             <a:avLst/>
@@ -15424,7 +15424,7 @@
         <p:spPr>
           <a:xfrm>
             <a:off x="4233600" y="5140080"/>
-            <a:ext cx="3234600" cy="344520"/>
+            <a:ext cx="3234240" cy="344160"/>
           </a:xfrm>
           <a:prstGeom prst="rect">
             <a:avLst/>
@@ -15475,7 +15475,7 @@
         <p:spPr>
           <a:xfrm>
             <a:off x="658800" y="950400"/>
-            <a:ext cx="1022400" cy="344520"/>
+            <a:ext cx="1022040" cy="344160"/>
           </a:xfrm>
           <a:prstGeom prst="rect">
             <a:avLst/>
@@ -15509,7 +15509,7 @@
                 <a:latin typeface="Arial"/>
                 <a:ea typeface="DejaVu Sans"/>
               </a:rPr>
-              <a:t>RA 20</a:t>
+              <a:t>RA 25</a:t>
             </a:r>
             <a:endParaRPr b="0" lang="en-US" sz="1800" spc="-1" strike="noStrike">
               <a:latin typeface="Arial"/>
@@ -15526,7 +15526,7 @@
         <p:spPr>
           <a:xfrm>
             <a:off x="586800" y="1636200"/>
-            <a:ext cx="1022400" cy="344520"/>
+            <a:ext cx="1022040" cy="344160"/>
           </a:xfrm>
           <a:prstGeom prst="rect">
             <a:avLst/>
@@ -15560,7 +15560,7 @@
                 <a:latin typeface="Arial"/>
                 <a:ea typeface="DejaVu Sans"/>
               </a:rPr>
-              <a:t>CW 20</a:t>
+              <a:t>CW 25</a:t>
             </a:r>
             <a:endParaRPr b="0" lang="en-US" sz="1800" spc="-1" strike="noStrike">
               <a:latin typeface="Arial"/>
@@ -15577,7 +15577,7 @@
         <p:spPr>
           <a:xfrm>
             <a:off x="658800" y="2345400"/>
-            <a:ext cx="1022400" cy="344520"/>
+            <a:ext cx="1022040" cy="344160"/>
           </a:xfrm>
           <a:prstGeom prst="rect">
             <a:avLst/>
@@ -15611,7 +15611,7 @@
                 <a:latin typeface="Arial"/>
                 <a:ea typeface="DejaVu Sans"/>
               </a:rPr>
-              <a:t>RA 10</a:t>
+              <a:t>RA 12</a:t>
             </a:r>
             <a:endParaRPr b="0" lang="en-US" sz="1800" spc="-1" strike="noStrike">
               <a:latin typeface="Arial"/>
@@ -15628,7 +15628,7 @@
         <p:spPr>
           <a:xfrm>
             <a:off x="550800" y="3021480"/>
-            <a:ext cx="1022400" cy="344520"/>
+            <a:ext cx="1022040" cy="344160"/>
           </a:xfrm>
           <a:prstGeom prst="rect">
             <a:avLst/>
@@ -15662,7 +15662,7 @@
                 <a:latin typeface="Arial"/>
                 <a:ea typeface="DejaVu Sans"/>
               </a:rPr>
-              <a:t>CW 10</a:t>
+              <a:t>CW 12</a:t>
             </a:r>
             <a:endParaRPr b="0" lang="en-US" sz="1800" spc="-1" strike="noStrike">
               <a:latin typeface="Arial"/>
@@ -15679,7 +15679,7 @@
         <p:spPr>
           <a:xfrm>
             <a:off x="766800" y="3704400"/>
-            <a:ext cx="1022400" cy="344520"/>
+            <a:ext cx="1022040" cy="344160"/>
           </a:xfrm>
           <a:prstGeom prst="rect">
             <a:avLst/>
@@ -15757,7 +15757,7 @@
         <p:spPr>
           <a:xfrm>
             <a:off x="1577160" y="914760"/>
-            <a:ext cx="3655440" cy="455040"/>
+            <a:ext cx="3655080" cy="454680"/>
           </a:xfrm>
           <a:prstGeom prst="rect">
             <a:avLst/>
@@ -15787,7 +15787,7 @@
         <p:spPr>
           <a:xfrm>
             <a:off x="1577160" y="1600200"/>
-            <a:ext cx="3655440" cy="455040"/>
+            <a:ext cx="3655080" cy="454680"/>
           </a:xfrm>
           <a:prstGeom prst="rect">
             <a:avLst/>
@@ -15817,7 +15817,7 @@
         <p:spPr>
           <a:xfrm>
             <a:off x="1576800" y="2286360"/>
-            <a:ext cx="5966640" cy="455040"/>
+            <a:ext cx="5966280" cy="454680"/>
           </a:xfrm>
           <a:prstGeom prst="rect">
             <a:avLst/>
@@ -15847,7 +15847,7 @@
         <p:spPr>
           <a:xfrm>
             <a:off x="1576800" y="2971800"/>
-            <a:ext cx="5966640" cy="455040"/>
+            <a:ext cx="5966280" cy="454680"/>
           </a:xfrm>
           <a:prstGeom prst="rect">
             <a:avLst/>
@@ -15877,7 +15877,7 @@
         <p:spPr>
           <a:xfrm>
             <a:off x="1576800" y="3657600"/>
-            <a:ext cx="8177400" cy="455040"/>
+            <a:ext cx="8177040" cy="454680"/>
           </a:xfrm>
           <a:prstGeom prst="rect">
             <a:avLst/>
@@ -15907,7 +15907,7 @@
         <p:spPr>
           <a:xfrm>
             <a:off x="9516600" y="3692160"/>
-            <a:ext cx="471600" cy="384480"/>
+            <a:ext cx="471240" cy="384120"/>
           </a:xfrm>
           <a:prstGeom prst="rect">
             <a:avLst/>
@@ -15984,7 +15984,7 @@
         <p:spPr>
           <a:xfrm>
             <a:off x="7288200" y="3007800"/>
-            <a:ext cx="471600" cy="384480"/>
+            <a:ext cx="471240" cy="384120"/>
           </a:xfrm>
           <a:prstGeom prst="rect">
             <a:avLst/>
@@ -16061,7 +16061,7 @@
         <p:spPr>
           <a:xfrm>
             <a:off x="7288200" y="2322360"/>
-            <a:ext cx="471600" cy="384480"/>
+            <a:ext cx="471240" cy="384120"/>
           </a:xfrm>
           <a:prstGeom prst="rect">
             <a:avLst/>
@@ -16138,7 +16138,7 @@
         <p:spPr>
           <a:xfrm>
             <a:off x="4991400" y="1635120"/>
-            <a:ext cx="471600" cy="384480"/>
+            <a:ext cx="471240" cy="384120"/>
           </a:xfrm>
           <a:prstGeom prst="rect">
             <a:avLst/>
@@ -16215,7 +16215,7 @@
         <p:spPr>
           <a:xfrm>
             <a:off x="4991400" y="949320"/>
-            <a:ext cx="471600" cy="384480"/>
+            <a:ext cx="471240" cy="384120"/>
           </a:xfrm>
           <a:prstGeom prst="rect">
             <a:avLst/>
@@ -16292,7 +16292,7 @@
         <p:spPr>
           <a:xfrm>
             <a:off x="7819200" y="3692160"/>
-            <a:ext cx="462240" cy="384480"/>
+            <a:ext cx="461880" cy="384120"/>
           </a:xfrm>
           <a:prstGeom prst="rect">
             <a:avLst/>
@@ -16369,7 +16369,7 @@
         <p:spPr>
           <a:xfrm>
             <a:off x="3283200" y="3685320"/>
-            <a:ext cx="471600" cy="384480"/>
+            <a:ext cx="471240" cy="384120"/>
           </a:xfrm>
           <a:prstGeom prst="rect">
             <a:avLst/>
@@ -16446,7 +16446,7 @@
         <p:spPr>
           <a:xfrm>
             <a:off x="5763600" y="3007800"/>
-            <a:ext cx="462240" cy="384480"/>
+            <a:ext cx="461880" cy="384120"/>
           </a:xfrm>
           <a:prstGeom prst="rect">
             <a:avLst/>
@@ -16523,7 +16523,7 @@
         <p:spPr>
           <a:xfrm>
             <a:off x="5769360" y="2320920"/>
-            <a:ext cx="462240" cy="384480"/>
+            <a:ext cx="461880" cy="384120"/>
           </a:xfrm>
           <a:prstGeom prst="rect">
             <a:avLst/>
@@ -16600,7 +16600,7 @@
         <p:spPr>
           <a:xfrm>
             <a:off x="3286800" y="949320"/>
-            <a:ext cx="462240" cy="384480"/>
+            <a:ext cx="461880" cy="384120"/>
           </a:xfrm>
           <a:prstGeom prst="rect">
             <a:avLst/>
@@ -16677,7 +16677,7 @@
         <p:spPr>
           <a:xfrm>
             <a:off x="3279960" y="1636200"/>
-            <a:ext cx="462240" cy="384480"/>
+            <a:ext cx="461880" cy="384120"/>
           </a:xfrm>
           <a:prstGeom prst="rect">
             <a:avLst/>
@@ -16754,84 +16754,7 @@
         <p:spPr>
           <a:xfrm>
             <a:off x="2876400" y="2320920"/>
-            <a:ext cx="471600" cy="384480"/>
-          </a:xfrm>
-          <a:prstGeom prst="rect">
-            <a:avLst/>
-          </a:prstGeom>
-          <a:solidFill>
-            <a:srgbClr val="ffffa6">
-              <a:alpha val="53000"/>
-            </a:srgbClr>
-          </a:solidFill>
-          <a:ln w="0">
-            <a:solidFill>
-              <a:srgbClr val="000000"/>
-            </a:solidFill>
-          </a:ln>
-        </p:spPr>
-        <p:style>
-          <a:lnRef idx="0"/>
-          <a:fillRef idx="0"/>
-          <a:effectRef idx="0"/>
-          <a:fontRef idx="minor"/>
-        </p:style>
-        <p:txBody>
-          <a:bodyPr lIns="90000" rIns="90000" tIns="45000" bIns="45000">
-            <a:noAutofit/>
-          </a:bodyPr>
-          <a:p>
-            <a:pPr algn="ctr">
-              <a:lnSpc>
-                <a:spcPct val="100000"/>
-              </a:lnSpc>
-            </a:pPr>
-            <a:r>
-              <a:rPr b="0" lang="en-US" sz="1000" spc="-1" strike="noStrike">
-                <a:solidFill>
-                  <a:srgbClr val="000000"/>
-                </a:solidFill>
-                <a:latin typeface="Arial"/>
-                <a:ea typeface="DejaVu Sans"/>
-              </a:rPr>
-              <a:t>8</a:t>
-            </a:r>
-            <a:endParaRPr b="0" lang="en-US" sz="1000" spc="-1" strike="noStrike">
-              <a:latin typeface="Arial"/>
-            </a:endParaRPr>
-          </a:p>
-          <a:p>
-            <a:pPr algn="ctr">
-              <a:lnSpc>
-                <a:spcPct val="100000"/>
-              </a:lnSpc>
-            </a:pPr>
-            <a:r>
-              <a:rPr b="0" lang="en-US" sz="1000" spc="-1" strike="noStrike">
-                <a:solidFill>
-                  <a:srgbClr val="000000"/>
-                </a:solidFill>
-                <a:latin typeface="Arial"/>
-                <a:ea typeface="DejaVu Sans"/>
-              </a:rPr>
-              <a:t>1995</a:t>
-            </a:r>
-            <a:endParaRPr b="0" lang="en-US" sz="1000" spc="-1" strike="noStrike">
-              <a:latin typeface="Arial"/>
-            </a:endParaRPr>
-          </a:p>
-        </p:txBody>
-      </p:sp>
-      <p:sp>
-        <p:nvSpPr>
-          <p:cNvPr id="353" name="Rectangle 142_1"/>
-          <p:cNvSpPr/>
-          <p:nvPr/>
-        </p:nvSpPr>
-        <p:spPr>
-          <a:xfrm>
-            <a:off x="2860200" y="3007800"/>
-            <a:ext cx="471600" cy="384480"/>
+            <a:ext cx="471240" cy="384120"/>
           </a:xfrm>
           <a:prstGeom prst="rect">
             <a:avLst/>
@@ -16901,6 +16824,83 @@
       </p:sp>
       <p:sp>
         <p:nvSpPr>
+          <p:cNvPr id="353" name="Rectangle 142_1"/>
+          <p:cNvSpPr/>
+          <p:nvPr/>
+        </p:nvSpPr>
+        <p:spPr>
+          <a:xfrm>
+            <a:off x="2860200" y="3007800"/>
+            <a:ext cx="471240" cy="384120"/>
+          </a:xfrm>
+          <a:prstGeom prst="rect">
+            <a:avLst/>
+          </a:prstGeom>
+          <a:solidFill>
+            <a:srgbClr val="ffffff">
+              <a:alpha val="53000"/>
+            </a:srgbClr>
+          </a:solidFill>
+          <a:ln w="0">
+            <a:solidFill>
+              <a:srgbClr val="000000"/>
+            </a:solidFill>
+          </a:ln>
+        </p:spPr>
+        <p:style>
+          <a:lnRef idx="0"/>
+          <a:fillRef idx="0"/>
+          <a:effectRef idx="0"/>
+          <a:fontRef idx="minor"/>
+        </p:style>
+        <p:txBody>
+          <a:bodyPr lIns="90000" rIns="90000" tIns="45000" bIns="45000">
+            <a:noAutofit/>
+          </a:bodyPr>
+          <a:p>
+            <a:pPr algn="ctr">
+              <a:lnSpc>
+                <a:spcPct val="100000"/>
+              </a:lnSpc>
+            </a:pPr>
+            <a:r>
+              <a:rPr b="0" lang="en-US" sz="1000" spc="-1" strike="noStrike">
+                <a:solidFill>
+                  <a:srgbClr val="000000"/>
+                </a:solidFill>
+                <a:latin typeface="Arial"/>
+                <a:ea typeface="DejaVu Sans"/>
+              </a:rPr>
+              <a:t>8</a:t>
+            </a:r>
+            <a:endParaRPr b="0" lang="en-US" sz="1000" spc="-1" strike="noStrike">
+              <a:latin typeface="Arial"/>
+            </a:endParaRPr>
+          </a:p>
+          <a:p>
+            <a:pPr algn="ctr">
+              <a:lnSpc>
+                <a:spcPct val="100000"/>
+              </a:lnSpc>
+            </a:pPr>
+            <a:r>
+              <a:rPr b="0" lang="en-US" sz="1000" spc="-1" strike="noStrike">
+                <a:solidFill>
+                  <a:srgbClr val="000000"/>
+                </a:solidFill>
+                <a:latin typeface="Arial"/>
+                <a:ea typeface="DejaVu Sans"/>
+              </a:rPr>
+              <a:t>1995</a:t>
+            </a:r>
+            <a:endParaRPr b="0" lang="en-US" sz="1000" spc="-1" strike="noStrike">
+              <a:latin typeface="Arial"/>
+            </a:endParaRPr>
+          </a:p>
+        </p:txBody>
+      </p:sp>
+      <p:sp>
+        <p:nvSpPr>
           <p:cNvPr id="354" name="Rectangle 143_1"/>
           <p:cNvSpPr/>
           <p:nvPr/>
@@ -16908,7 +16908,7 @@
         <p:spPr>
           <a:xfrm rot="16180800">
             <a:off x="-392040" y="2382840"/>
-            <a:ext cx="1404000" cy="371880"/>
+            <a:ext cx="1403640" cy="371520"/>
           </a:xfrm>
           <a:prstGeom prst="rect">
             <a:avLst/>
@@ -16959,9 +16959,9 @@
         <p:grpSpPr>
           <a:xfrm>
             <a:off x="7664400" y="299520"/>
-            <a:ext cx="2022120" cy="384480"/>
+            <a:ext cx="2021760" cy="384120"/>
             <a:chOff x="7664400" y="299520"/>
-            <a:chExt cx="2022120" cy="384480"/>
+            <a:chExt cx="2021760" cy="384120"/>
           </a:xfrm>
         </p:grpSpPr>
         <p:sp>
@@ -16973,7 +16973,7 @@
           <p:spPr>
             <a:xfrm>
               <a:off x="7772400" y="339480"/>
-              <a:ext cx="1827000" cy="344520"/>
+              <a:ext cx="1826640" cy="344160"/>
             </a:xfrm>
             <a:prstGeom prst="rect">
               <a:avLst/>
@@ -17001,9 +17001,9 @@
           <p:grpSpPr>
             <a:xfrm>
               <a:off x="7664400" y="299520"/>
-              <a:ext cx="2022120" cy="384480"/>
+              <a:ext cx="2021760" cy="384120"/>
               <a:chOff x="7664400" y="299520"/>
-              <a:chExt cx="2022120" cy="384480"/>
+              <a:chExt cx="2021760" cy="384120"/>
             </a:xfrm>
           </p:grpSpPr>
           <p:sp>
@@ -17015,7 +17015,7 @@
             <p:spPr>
               <a:xfrm>
                 <a:off x="7664400" y="299520"/>
-                <a:ext cx="648360" cy="384480"/>
+                <a:ext cx="648000" cy="384120"/>
               </a:xfrm>
               <a:prstGeom prst="rect">
                 <a:avLst/>
@@ -17102,7 +17102,7 @@
             <p:spPr>
               <a:xfrm>
                 <a:off x="8282520" y="339480"/>
-                <a:ext cx="1404000" cy="344520"/>
+                <a:ext cx="1403640" cy="344160"/>
               </a:xfrm>
               <a:prstGeom prst="rect">
                 <a:avLst/>
@@ -17155,9 +17155,9 @@
         <p:grpSpPr>
           <a:xfrm>
             <a:off x="2057400" y="268560"/>
-            <a:ext cx="4343040" cy="344520"/>
+            <a:ext cx="4342680" cy="344160"/>
             <a:chOff x="2057400" y="268560"/>
-            <a:chExt cx="4343040" cy="344520"/>
+            <a:chExt cx="4342680" cy="344160"/>
           </a:xfrm>
         </p:grpSpPr>
         <p:sp>
@@ -17169,7 +17169,7 @@
           <p:spPr>
             <a:xfrm>
               <a:off x="2057400" y="268560"/>
-              <a:ext cx="4343040" cy="344520"/>
+              <a:ext cx="4342680" cy="344160"/>
             </a:xfrm>
             <a:prstGeom prst="rect">
               <a:avLst/>
